--- a/en/files/slides/Session_8_EN.pptx
+++ b/en/files/slides/Session_8_EN.pptx
@@ -1354,7 +1354,7 @@
           <a:p>
             <a:r>
               <a:rPr lang="en-US" sz="1400" b="0" dirty="0"/>
-              <a:t>MANUSCRIPT WORKSHOP 2 (0:30-1:00). Level 2. Groups add the Introduction, Discussion, Abstract and Title to yesterday's Methods + Results.</a:t>
+              <a:t>MANUSCRIPT WORKSHOP 2 (0:30-1:00). Course dataset. Groups add the Introduction, Discussion, Abstract and Title to yesterday's Methods + Results.</a:t>
             </a:r>
           </a:p>
           <a:p>
@@ -5353,7 +5353,13 @@
           <a:p>
             <a:r>
               <a:rPr lang="en-US" sz="1400" b="0" dirty="0"/>
-              <a:t>Advanced modules (optional, see Advanced_Modules/): hands-on analysis of your own data in R, meta-analysis, prediction models and machine learning, diagnostic-accuracy studies.</a:t>
+              <a:t>Level 2 (hands-on, for those who want to run analyses themselves): reproducible R projects, data management, linear and logistic regression in depth, missing data, publication-ready tables and figures. Prerequisite: this course plus the free Neudata course Clinical Data Analysis in R.</a:t>
+            </a:r>
+          </a:p>
+          <a:p>
+            <a:r>
+              <a:rPr lang="en-US" sz="1400" b="0" dirty="0"/>
+              <a:t>Level 3 (on request): advanced, specialised methods for complex data - meta-analysis, prediction and machine learning, diagnostic accuracy, advanced survival, longitudinal and multilevel models. See Course_Levels/.</a:t>
             </a:r>
           </a:p>
           <a:p>
@@ -30117,7 +30123,7 @@
                 <a:latin typeface="Century Gothic"/>
                 <a:cs typeface="Century Gothic"/>
               </a:rPr>
-              <a:t>Which advanced topics would you want next?</a:t>
+              <a:t>Interested in Level 2 (hands-on R)?</a:t>
             </a:r>
           </a:p>
         </p:txBody>
@@ -31462,7 +31468,7 @@
                 <a:latin typeface="Century Gothic"/>
                 <a:cs typeface="Century Gothic"/>
               </a:rPr>
-              <a:t>Free R course: run analyses yourself</a:t>
+              <a:t>Level 2: hands-on analysis in R</a:t>
             </a:r>
           </a:p>
           <a:p>
@@ -31483,7 +31489,7 @@
                 <a:latin typeface="Century Gothic"/>
                 <a:cs typeface="Century Gothic"/>
               </a:rPr>
-              <a:t>Optional advanced modules</a:t>
+              <a:t>Level 3: advanced methods</a:t>
             </a:r>
           </a:p>
         </p:txBody>

--- a/en/files/slides/Session_8_EN.pptx
+++ b/en/files/slides/Session_8_EN.pptx
@@ -742,7 +742,7 @@
           <a:p>
             <a:r>
               <a:rPr lang="en-US" sz="1400" b="0" dirty="0"/>
-              <a:t>SESSION 8 (0:00). Weekend 4, Sunday - the last session. Today the FLUID-ICU manuscripts become complete drafts, we follow a paper from submission to publication, practise reviewing, and every group presents its own proposal.</a:t>
+              <a:t>SESSION 8 (0:00). Week 8, Saturday - the last session. Today the FLUID-ICU manuscripts become complete drafts, we follow a paper from submission to publication, practise reviewing, and every group presents its own proposal.</a:t>
             </a:r>
           </a:p>
           <a:p>
@@ -1354,7 +1354,7 @@
           <a:p>
             <a:r>
               <a:rPr lang="en-US" sz="1400" b="0" dirty="0"/>
-              <a:t>MANUSCRIPT WORKSHOP 2 (0:30-1:00). Course dataset. Groups add the Introduction, Discussion, Abstract and Title to yesterday's Methods + Results.</a:t>
+              <a:t>MANUSCRIPT WORKSHOP 2 (0:30-1:00). Course dataset. Groups add the Introduction, Discussion, Abstract and Title to last Saturday's Methods + Results.</a:t>
             </a:r>
           </a:p>
           <a:p>
@@ -2944,7 +2944,7 @@
           <a:p>
             <a:r>
               <a:rPr lang="en-US" sz="1400" b="0" dirty="0"/>
-              <a:t>Order follows the writing order from yesterday: Introduction, Discussion, then the Abstract and the Title last.</a:t>
+              <a:t>Order follows the writing order from last Saturday: Introduction, Discussion, then the Abstract and the Title last.</a:t>
             </a:r>
           </a:p>
           <a:p>
@@ -9066,7 +9066,7 @@
                 <a:latin typeface="Century Gothic"/>
                 <a:cs typeface="Century Gothic"/>
               </a:rPr>
-              <a:t>Weekend 4 · Sunday</a:t>
+              <a:t>Week 8 · Saturday</a:t>
             </a:r>
           </a:p>
           <a:p>
@@ -30061,7 +30061,7 @@
                 <a:latin typeface="Century Gothic"/>
                 <a:cs typeface="Century Gothic"/>
               </a:rPr>
-              <a:t>Rate each weekend: content, pace, usefulness</a:t>
+              <a:t>Rate each session: content, pace, usefulness</a:t>
             </a:r>
           </a:p>
           <a:p>

--- a/en/files/slides/Session_8_EN.pptx
+++ b/en/files/slides/Session_8_EN.pptx
@@ -742,7 +742,7 @@
           <a:p>
             <a:r>
               <a:rPr lang="en-US" sz="1400" b="0" dirty="0"/>
-              <a:t>SESSION 8 (0:00). Week 8, Saturday - the last session. Today the FLUID-ICU manuscripts become complete drafts, we follow a paper from submission to publication, practise reviewing, and every group presents its own proposal.</a:t>
+              <a:t>SESSION 8 (0:00). Week 8, Saturday: the last session. Today the FLUID-ICU manuscripts become complete drafts, we follow a paper from submission to publication, practise reviewing, and every group presents its own proposal.</a:t>
             </a:r>
           </a:p>
           <a:p>
@@ -847,7 +847,7 @@
           <a:p>
             <a:r>
               <a:rPr lang="en-US" sz="1400" b="0" dirty="0"/>
-              <a:t>Sentence 3: no 'trend' - give the estimate and say the CI reaches 1.</a:t>
+              <a:t>Sentence 3: no 'trend'. Give the estimate and say the CI reaches 1.</a:t>
             </a:r>
           </a:p>
           <a:p>
@@ -934,7 +934,7 @@
           <a:p>
             <a:r>
               <a:rPr lang="en-US" sz="1400" b="0" dirty="0"/>
-              <a:t>Teaching point: most clinical journals want a structured abstract - Background, Methods, Results, Conclusions - of about 250-300 words; trials add the registration number. Many readers never go further, so it must stand alone.</a:t>
+              <a:t>Teaching point: most clinical journals want a structured abstract (Background, Methods, Results, Conclusions) of about 250-300 words; trials add the registration number. Many readers never go further, so it must stand alone.</a:t>
             </a:r>
           </a:p>
           <a:p>
@@ -1039,7 +1039,7 @@
           <a:p>
             <a:r>
               <a:rPr lang="en-US" sz="1400" b="0" dirty="0"/>
-              <a:t>WORKED EXAMPLE (SIMULATED data; about 120 words shown - a full abstract is up to 250).</a:t>
+              <a:t>WORKED EXAMPLE (SIMULATED data; about 120 words shown, and a full abstract is up to 250).</a:t>
             </a:r>
           </a:p>
           <a:p>
@@ -1063,13 +1063,13 @@
           <a:p>
             <a:r>
               <a:rPr lang="en-US" sz="1400" b="0" dirty="0"/>
-              <a:t>Conclusions: 'modestly associated' - matches an adjusted CI of 1.02 to 2.59.</a:t>
+              <a:t>Conclusions: 'modestly associated', which matches an adjusted CI of 1.02 to 2.59.</a:t>
             </a:r>
           </a:p>
           <a:p>
             <a:r>
               <a:rPr lang="en-US" sz="1400" b="0" dirty="0"/>
-              <a:t>Ask: which abstract sentence would change if the adjusted CI had been 0.95 to 2.40? Expected: Results and Conclusions - 'no clear evidence of an association after adjustment'.</a:t>
+              <a:t>Ask: which abstract sentence would change if the adjusted CI had been 0.95 to 2.40? Expected: Results and Conclusions, which would read 'no clear evidence of an association after adjustment'.</a:t>
             </a:r>
           </a:p>
         </p:txBody>
@@ -1156,7 +1156,7 @@
           <a:p>
             <a:r>
               <a:rPr lang="en-US" sz="1400" b="0" dirty="0"/>
-              <a:t>Paper 1 (annotation #1): the design is in the title - good - but it is over 25 words and uses value words. A shorter descriptive version is on the slide.</a:t>
+              <a:t>Paper 1 (annotation #1): the design is in the title (good), but it is over 25 words and uses value words. A shorter descriptive version is on the slide.</a:t>
             </a:r>
           </a:p>
           <a:p>
@@ -1174,7 +1174,7 @@
           <a:p>
             <a:r>
               <a:rPr lang="en-US" sz="1400" b="0" dirty="0"/>
-              <a:t>Ask: say your group's study in one line, starting with the design. That is the first draft of your working title - you will write it in the activity at the end of this section.</a:t>
+              <a:t>Ask: say your group's study in one line, starting with the design. That is the first draft of your working title. You will write it in the activity at the end of this section.</a:t>
             </a:r>
           </a:p>
         </p:txBody>
@@ -1255,13 +1255,13 @@
           <a:p>
             <a:r>
               <a:rPr lang="en-US" sz="1400" b="0" dirty="0"/>
-              <a:t>References: use a reference manager (Zotero, Mendeley, EndNote) and check every citation. In Paper 2 the covariate list cites reference 26 - the Sepsis-3 definitions paper - almost certainly the wrong number (annotation #22). Never cite a reference an AI tool suggested without reading it.</a:t>
+              <a:t>References: use a reference manager (Zotero, Mendeley, EndNote) and check every citation. In Paper 2 the covariate list cites reference 26 (the Sepsis-3 definitions paper), almost certainly the wrong number (annotation #22). Never cite a reference an AI tool suggested without reading it.</a:t>
             </a:r>
           </a:p>
           <a:p>
             <a:r>
               <a:rPr lang="en-US" sz="1400" b="0" dirty="0"/>
-              <a:t>Reporting checklist: fill in CONSORT or STROBE while you write, with page numbers - many journals require it at submission. Neither paper names its guideline (both annotated summaries flag this).</a:t>
+              <a:t>Reporting checklist: fill in CONSORT or STROBE while you write, with page numbers. Many journals require it at submission. Neither paper names its guideline (both annotated summaries flag this).</a:t>
             </a:r>
           </a:p>
           <a:p>
@@ -1453,7 +1453,7 @@
           <a:p>
             <a:r>
               <a:rPr lang="en-US" sz="1400" b="0" dirty="0"/>
-              <a:t>Q4 group: discuss why complete-case and imputed results differ (or not). Q5 group: survivors only - say who is missing.</a:t>
+              <a:t>Q4 group: discuss why complete-case and imputed results differ (or not). Q5 group: survivors only, so say who is missing.</a:t>
             </a:r>
           </a:p>
           <a:p>
@@ -1546,7 +1546,7 @@
           <a:p>
             <a:r>
               <a:rPr lang="en-US" sz="1400" b="0" dirty="0"/>
-              <a:t>During the break: put the papers and the student appraisal pack (Practicals/s8_exercises.md, Part D) on the tables - Paper 1 on tables 1-3, Paper 2 on tables 4-5. Use the ORIGINAL (unannotated) papers.</a:t>
+              <a:t>During the break: put the papers and the student appraisal pack (Practicals/s8_exercises.md, Part D) on the tables: Paper 1 on tables 1-3, Paper 2 on tables 4-5. Use the ORIGINAL (unannotated) papers.</a:t>
             </a:r>
           </a:p>
           <a:p>
@@ -1558,7 +1558,7 @@
           <a:p>
             <a:r>
               <a:rPr lang="en-US" sz="1400" b="0" dirty="0"/>
-              <a:t>Collect the five manuscript drafts (shared folder) - they are needed for the peer-review swap.</a:t>
+              <a:t>Collect the five manuscript drafts (shared folder). They are needed for the peer-review swap.</a:t>
             </a:r>
           </a:p>
         </p:txBody>
@@ -1645,13 +1645,13 @@
           <a:p>
             <a:r>
               <a:rPr lang="en-US" sz="1400" b="0" dirty="0"/>
-              <a:t>Pace: about 2 minutes per slide - point to the picture, give one example, move on. The appraisal needs its full 20 minutes at 1:40.</a:t>
+              <a:t>Pace: about 2 minutes per slide. Point to the picture, give one example, move on. The appraisal needs its full 20 minutes at 1:40.</a:t>
             </a:r>
           </a:p>
           <a:p>
             <a:r>
               <a:rPr lang="en-US" sz="1400" b="0" dirty="0"/>
-              <a:t>Link to the manuscripts: the FLUID-ICU drafts would go through exactly this route - STROBE checklist, journal choice, submission package, peer review.</a:t>
+              <a:t>Link to the manuscripts: the FLUID-ICU drafts would go through exactly this route: STROBE checklist, journal choice, submission package, peer review.</a:t>
             </a:r>
           </a:p>
         </p:txBody>
@@ -1744,7 +1744,7 @@
           <a:p>
             <a:r>
               <a:rPr lang="en-US" sz="1400" b="0" dirty="0"/>
-              <a:t>Running example: Paper 1 is an RCT - CONSORT; Paper 2 is a cohort - STROBE. Interesting finding from the annotated papers: neither paper names its guideline. Paper 1 does include the CONSORT flow diagram in the main text; Paper 2 keeps its flow chart in the supplement.</a:t>
+              <a:t>Running example: Paper 1 is an RCT (CONSORT); Paper 2 is a cohort (STROBE). Interesting finding from the annotated papers: neither paper names its guideline. Paper 1 does include the CONSORT flow diagram in the main text; Paper 2 keeps its flow chart in the supplement.</a:t>
             </a:r>
           </a:p>
           <a:p>
@@ -1756,7 +1756,7 @@
           <a:p>
             <a:r>
               <a:rPr lang="en-US" sz="1400" b="0" dirty="0"/>
-              <a:t>Misconception: 'reporting guidelines tell you how to do the study'. They tell you what to report - but reading them BEFORE you start is the best design checklist you will find.</a:t>
+              <a:t>Misconception: 'reporting guidelines tell you how to do the study'. They tell you what to report, but reading them BEFORE you start is the best design checklist you will find.</a:t>
             </a:r>
           </a:p>
           <a:p>
@@ -1948,7 +1948,7 @@
           <a:p>
             <a:r>
               <a:rPr lang="en-US" sz="1400" b="0" dirty="0"/>
-              <a:t>Speed: Paper 1 went from submission to acceptance in about 7 weeks (10 Sept - 31 Oct 2024); Paper 2 took about 7 months (15 Jan - 24 Aug 2023). Speed varies; it is not a sign of quality by itself.</a:t>
+              <a:t>Speed: Paper 1 went from submission to acceptance in about 7 weeks (10 Sept to 31 Oct 2024); Paper 2 took about 7 months (15 Jan to 24 Aug 2023). Speed varies; it is not a sign of quality by itself.</a:t>
             </a:r>
           </a:p>
           <a:p>
@@ -2035,25 +2035,25 @@
           <a:p>
             <a:r>
               <a:rPr lang="en-US" sz="1400" b="0" dirty="0"/>
-              <a:t>Preprints: a manuscript posted on a public server (for health research, medRxiv is the best known) before or during peer review. Benefits: speed, a public timestamp, early feedback. Risks: it has not been peer-reviewed, and the media or colleagues may treat it as established. Most journals accept submissions that were preprinted - check the journal's policy first, and update the preprint with the published reference.</a:t>
+              <a:t>Preprints: a manuscript posted on a public server (for health research, medRxiv is the best known) before or during peer review. Benefits: speed, a public timestamp, early feedback. Risks: it has not been peer-reviewed, and the media or colleagues may treat it as established. Most journals accept submissions that were preprinted. Check the journal's policy first, and update the preprint with the published reference.</a:t>
             </a:r>
           </a:p>
           <a:p>
             <a:r>
               <a:rPr lang="en-US" sz="1400" b="0" dirty="0"/>
-              <a:t>Open access: gold OA means the journal makes the article free and usually charges an article-processing charge (APC) - both our papers are gold OA (annotations #2). Green OA means you deposit the accepted manuscript in a repository, often after an embargo. Ask about waivers and institutional agreements.</a:t>
+              <a:t>Open access: gold OA means the journal makes the article free and usually charges an article-processing charge (APC). Both our papers are gold OA (annotations #2). Green OA means you deposit the accepted manuscript in a repository, often after an embargo. Ask about waivers and institutional agreements.</a:t>
             </a:r>
           </a:p>
           <a:p>
             <a:r>
               <a:rPr lang="en-US" sz="1400" b="0" dirty="0"/>
-              <a:t>Licences: Paper 2 is CC BY (anyone may re-use and adapt with credit); Paper 1 is CC BY-NC-ND (share, but no adaptation or commercial use) - which also matters when you want to re-use a figure in teaching.</a:t>
+              <a:t>Licences: Paper 2 is CC BY (anyone may re-use and adapt with credit); Paper 1 is CC BY-NC-ND (share, but no adaptation or commercial use). This also matters when you want to re-use a figure in teaching.</a:t>
             </a:r>
           </a:p>
           <a:p>
             <a:r>
               <a:rPr lang="en-US" sz="1400" b="0" dirty="0"/>
-              <a:t>Ask: you want to put Paper 1's flow chart, redrawn, in your teaching slides. Allowed? Expected: adaptation is not covered by CC BY-NC-ND - ask permission or cite and link instead.</a:t>
+              <a:t>Ask: you want to put Paper 1's flow chart, redrawn, in your teaching slides. Allowed? Expected: adaptation is not covered by CC BY-NC-ND, so ask permission or cite and link instead.</a:t>
             </a:r>
           </a:p>
         </p:txBody>
@@ -2146,13 +2146,13 @@
           <a:p>
             <a:r>
               <a:rPr lang="en-US" sz="1400" b="0" dirty="0"/>
-              <a:t>Checks: Think.Check.Submit (a free checklist), DOAJ for open-access journals, the NLM Catalog to see if a journal is really indexed in MEDLINE - and ask the hospital librarian.</a:t>
+              <a:t>Checks: Think.Check.Submit (a free checklist), DOAJ for open-access journals, the NLM Catalog to see if a journal is really indexed in MEDLINE. Also ask the hospital librarian.</a:t>
             </a:r>
           </a:p>
           <a:p>
             <a:r>
               <a:rPr lang="en-US" sz="1400" b="0" dirty="0"/>
-              <a:t>Ask: how many of you received an e-mail like this in the last month? Usually many hands - every clinician who has published once receives them.</a:t>
+              <a:t>Ask: how many of you received an e-mail like this in the last month? Usually many hands: every clinician who has published once receives them.</a:t>
             </a:r>
           </a:p>
           <a:p>
@@ -2245,7 +2245,7 @@
           <a:p>
             <a:r>
               <a:rPr lang="en-US" sz="1400" b="0" dirty="0"/>
-              <a:t>Keep it to 3 minutes: EQUATOR home page - search box - CONSORT 2025 page - checklist and flow diagram; then STROBE. Then DOAJ search for a journal title, and the NLM Catalog with the filter 'currently indexed in MEDLINE'. End on the Think.Check.Submit checklist.</a:t>
+              <a:t>Keep it to 3 minutes: EQUATOR home page, search box, CONSORT 2025 page, checklist and flow diagram; then STROBE. Then DOAJ search for a journal title, and the NLM Catalog with the filter 'currently indexed in MEDLINE'. End on the Think.Check.Submit checklist.</a:t>
             </a:r>
           </a:p>
           <a:p>
@@ -2257,7 +2257,7 @@
           <a:p>
             <a:r>
               <a:rPr lang="en-US" sz="1400" b="0" dirty="0"/>
-              <a:t>Close: ask each group to check the target journal and guideline in its publication plan (Proposal builder 7) and on its FLUID-ICU draft (STROBE) - 30 seconds, then continue with the submission package.</a:t>
+              <a:t>Close: ask each group to check the target journal and guideline in its publication plan (Proposal builder 7) and on its FLUID-ICU draft (STROBE). Allow 30 seconds, then continue with the submission package.</a:t>
             </a:r>
           </a:p>
         </p:txBody>
@@ -2344,13 +2344,13 @@
           <a:p>
             <a:r>
               <a:rPr lang="en-US" sz="1400" b="0" dirty="0"/>
-              <a:t>Cover letter: one page - why this journal, what is new, that the work is not under consideration elsewhere, and any preprint. Title page: all authors, affiliations, ORCID iDs (a free, permanent researcher identifier - every participant can register at orcid.org), corresponding author, word count. Manuscript in the journal's format (blinded if the journal uses double-blind review). Tables and figures in the required files and resolution. The reporting checklist with page numbers. Declarations: ethics approval number, consent, competing interests, funding, data availability, author contributions (CRediT) and AI use. The registration number for trials and systematic reviews. Suggested reviewers: experts without conflicts, not recent co-authors - the editor decides whether to use them. Supplementary files.</a:t>
+              <a:t>Cover letter: one page covering why this journal, what is new, that the work is not under consideration elsewhere, and any preprint. Title page: all authors, affiliations, ORCID iDs (a free, permanent researcher identifier that every participant can register at orcid.org), corresponding author, word count. Manuscript in the journal's format (blinded if the journal uses double-blind review). Tables and figures in the required files and resolution. The reporting checklist with page numbers. Declarations: ethics approval number, consent, competing interests, funding, data availability, author contributions (CRediT) and AI use. The registration number for trials and systematic reviews. Suggested reviewers: experts without conflicts, not recent co-authors. The editor decides whether to use them. Supplementary files.</a:t>
             </a:r>
           </a:p>
           <a:p>
             <a:r>
               <a:rPr lang="en-US" sz="1400" b="0" dirty="0"/>
-              <a:t>Running example: Paper 1 has a complete declarations block - exactly what the submission system asks for, item by item (annotation #48). Graphical abstracts are a journal-specific requirement you only find in the Guide for Authors (#8).</a:t>
+              <a:t>Running example: Paper 1 has a complete declarations block, exactly what the submission system asks for, item by item (annotation #48). Graphical abstracts are a journal-specific requirement you only find in the Guide for Authors (#8).</a:t>
             </a:r>
           </a:p>
           <a:p>
@@ -2437,13 +2437,13 @@
           <a:p>
             <a:r>
               <a:rPr lang="en-US" sz="1400" b="0" dirty="0"/>
-              <a:t>Walk the six stations. Submit (with cover letter, reporting checklist and declarations) - the editor screens, and many papers are rejected here without review ('desk rejection') because they do not fit or are poorly reported - two or three peer reviewers comment - the editor decides: accept, minor revision, major revision or reject - you revise and answer every comment point by point - accepted, then proofs (read them carefully!) and publication.</a:t>
+              <a:t>Walk the six stations. Submit (with cover letter, reporting checklist and declarations). The editor screens, and many papers are rejected here without review ('desk rejection') because they do not fit or are poorly reported. Two or three peer reviewers comment. The editor decides: accept, minor revision, major revision or reject. You revise and answer every comment point by point. Accepted, then proofs (read them carefully!) and publication.</a:t>
             </a:r>
           </a:p>
           <a:p>
             <a:r>
               <a:rPr lang="en-US" sz="1400" b="0" dirty="0"/>
-              <a:t>Running example: our annotators judged Paper 1 'minor revision' and Paper 2 'major revision' - both were published, and both still contain errors a careful reviewer would have caught (Paper 1 even prints the same 'Study protocol' paragraph twice - a proof-reading miss).</a:t>
+              <a:t>Running example: our annotators judged Paper 1 'minor revision' and Paper 2 'major revision'. Both were published, and both still contain errors a careful reviewer would have caught (Paper 1 even prints the same 'Study protocol' paragraph twice, a proof-reading miss).</a:t>
             </a:r>
           </a:p>
           <a:p>
@@ -2536,7 +2536,7 @@
           <a:p>
             <a:r>
               <a:rPr lang="en-US" sz="1400" b="0" dirty="0"/>
-              <a:t>Teaching point: the response letter is a table - every reviewer comment, your response, and exactly where the manuscript changed (page and line). Number the comments (R1.1, R1.2, R2.1 ...).</a:t>
+              <a:t>Teaching point: the response letter is a table: every reviewer comment, your response, and exactly where the manuscript changed (page and line). Number the comments (R1.1, R1.2, R2.1 ...).</a:t>
             </a:r>
           </a:p>
           <a:p>
@@ -2548,7 +2548,7 @@
           <a:p>
             <a:r>
               <a:rPr lang="en-US" sz="1400" b="0" dirty="0"/>
-              <a:t>The three rows are illustrative, built on what the annotators say a reviewer would have asked Paper 1: remove the 'non-significant trend' (accept); justify blocks of 2 (clarify and add a limitation); a request for an outcome that was never collected (polite rebuttal - you cannot add data that do not exist, but you can name it as a limitation).</a:t>
+              <a:t>The three rows are illustrative, built on what the annotators say a reviewer would have asked Paper 1: remove the 'non-significant trend' (accept); justify blocks of 2 (clarify and add a limitation); a request for an outcome that was never collected (polite rebuttal: you cannot add data that do not exist, but you can name it as a limitation).</a:t>
             </a:r>
           </a:p>
           <a:p>
@@ -2653,19 +2653,19 @@
           <a:p>
             <a:r>
               <a:rPr lang="en-US" sz="1400" b="0" dirty="0"/>
-              <a:t>Running example: Paper 1 prints the whole 'Study protocol' paragraph twice - in the Methods (page 4) and again after the Conclusions (page 11) - a duplication that should have been caught at proof stage (annotation #45). Paper 2's affiliations have inconsistent capitalisation (#42).</a:t>
+              <a:t>Running example: Paper 1 prints the whole 'Study protocol' paragraph twice: in the Methods (page 4) and again after the Conclusions (page 11). It is a duplication that should have been caught at proof stage (annotation #45). Paper 2's affiliations have inconsistent capitalisation (#42).</a:t>
             </a:r>
           </a:p>
           <a:p>
             <a:r>
               <a:rPr lang="en-US" sz="1400" b="0" dirty="0"/>
-              <a:t>Sharing: post the article as its licence and the journal's policy allow - institutional repository, a plain-language summary for patients and colleagues, a short talk in your department, social media. If the media call, keep to what the design allows (calibrated language again).</a:t>
+              <a:t>Sharing: post the article as its licence and the journal's policy allow: institutional repository, a plain-language summary for patients and colleagues, a short talk in your department, social media. If the media call, keep to what the design allows (calibrated language again).</a:t>
             </a:r>
           </a:p>
           <a:p>
             <a:r>
               <a:rPr lang="en-US" sz="1400" b="0" dirty="0"/>
-              <a:t>Corrections: if you find an error after publication, contact the journal - a correction is honest; a retraction is for serious errors or misconduct.</a:t>
+              <a:t>Corrections: if you find an error after publication, contact the journal. A correction is honest; a retraction is for serious errors or misconduct.</a:t>
             </a:r>
           </a:p>
           <a:p>
@@ -2758,7 +2758,7 @@
           <a:p>
             <a:r>
               <a:rPr lang="en-US" sz="1400" b="0" dirty="0"/>
-              <a:t>Statement 1 is 'often true' rather than always - real journals also invite papers, but a flattering mass e-mail from an unknown journal deserves the five-flag check.</a:t>
+              <a:t>Statement 1 is 'often true' rather than always. Real journals also invite papers, but a flattering mass e-mail from an unknown journal deserves the five-flag check.</a:t>
             </a:r>
           </a:p>
         </p:txBody>
@@ -2851,7 +2851,7 @@
           <a:p>
             <a:r>
               <a:rPr lang="en-US" sz="1400" b="0" dirty="0"/>
-              <a:t>Why now: after the course each group reviews another group's FLUID-ICU draft with the SAME 10 questions - this is the rehearsal.</a:t>
+              <a:t>Why now: after the course each group reviews another group's FLUID-ICU draft with the SAME 10 questions. This is the rehearsal.</a:t>
             </a:r>
           </a:p>
           <a:p>
@@ -3031,7 +3031,7 @@
           <a:p>
             <a:r>
               <a:rPr lang="en-US" sz="1400" b="0" dirty="0"/>
-              <a:t>Explain the set-up in one minute. Both papers address our running question - fluids in septic shock - with different designs. Groups 1-3 appraise Paper 1, the randomised trial (Boulet 2024, Critical Care). Groups 4-5 appraise Paper 2, the propensity-matched cohort (Hyun 2023, Annals of Intensive Care).</a:t>
+              <a:t>Explain the set-up in one minute. Both papers address our running question (fluids in septic shock) with different designs. Groups 1-3 appraise Paper 1, the randomised trial (Boulet 2024, Critical Care). Groups 4-5 appraise Paper 2, the propensity-matched cohort (Hyun 2023, Annals of Intensive Care).</a:t>
             </a:r>
           </a:p>
           <a:p>
@@ -3049,13 +3049,13 @@
           <a:p>
             <a:r>
               <a:rPr lang="en-US" sz="1400" b="0" dirty="0"/>
-              <a:t>Tip: split the work inside the group - pairs take 3-4 questions each, then the group agrees.</a:t>
+              <a:t>Tip: split the work inside the group: pairs take 3-4 questions each, then the group agrees.</a:t>
             </a:r>
           </a:p>
           <a:p>
             <a:r>
               <a:rPr lang="en-US" sz="1400" b="0" dirty="0"/>
-              <a:t>Link to Session 4: the 10 questions are a simplified version of the formal risk-of-bias tools - RoB 2 for Paper 1, Newcastle-Ottawa (or the newer ROBINS-E) for Paper 2. We do not run the formal tools today.</a:t>
+              <a:t>Link to Session 4: the 10 questions are a simplified version of the formal risk-of-bias tools: RoB 2 for Paper 1, Newcastle-Ottawa (or the newer ROBINS-E) for Paper 2. We do not run the formal tools today.</a:t>
             </a:r>
           </a:p>
         </p:txBody>
@@ -3136,19 +3136,19 @@
           <a:p>
             <a:r>
               <a:rPr lang="en-US" sz="1400" b="0" dirty="0"/>
-              <a:t>The checklist, part 1. Read each question aloud once - do not explain the answers.</a:t>
+              <a:t>The checklist, part 1. Read each question aloud once. Do not explain the answers.</a:t>
             </a:r>
           </a:p>
           <a:p>
             <a:r>
               <a:rPr lang="en-US" sz="1400" b="0" dirty="0"/>
-              <a:t>Q1-Q2 are about the question and the design (Sessions 1-4). Q3 is about who was studied - external validity: would your patients be in this study? Q4 is about whether the groups were comparable at baseline - look at Table 1. Q5 is about blinding.</a:t>
+              <a:t>Q1-Q2 are about the question and the design (Sessions 1-4). Q3 is about who was studied, external validity: would your patients be in this study? Q4 is about whether the groups were comparable at baseline (look at Table 1). Q5 is about blinding.</a:t>
             </a:r>
           </a:p>
           <a:p>
             <a:r>
               <a:rPr lang="en-US" sz="1400" b="0" dirty="0"/>
-              <a:t>Hint to give: for Q4 the two papers use different tools - randomisation versus propensity-score matching. Ask them to find the sentence that says which.</a:t>
+              <a:t>Hint to give: for Q4 the two papers use different tools: randomisation versus propensity-score matching. Ask them to find the sentence that says which.</a:t>
             </a:r>
           </a:p>
           <a:p>
@@ -3247,13 +3247,13 @@
           <a:p>
             <a:r>
               <a:rPr lang="en-US" sz="1400" b="0" dirty="0"/>
-              <a:t>Q9: the authors' own limitations section, plus one they missed - each paper has a clear one (see the instructor guide).</a:t>
+              <a:t>Q9: the authors' own limitations section, plus one they missed. Each paper has a clear one (see the instructor guide).</a:t>
             </a:r>
           </a:p>
           <a:p>
             <a:r>
               <a:rPr lang="en-US" sz="1400" b="0" dirty="0"/>
-              <a:t>Q10: their clinical judgement - there is no single right answer, but they must give a reason.</a:t>
+              <a:t>Q10: their clinical judgement. There is no single right answer, but they must give a reason.</a:t>
             </a:r>
           </a:p>
         </p:txBody>
@@ -3340,7 +3340,7 @@
           <a:p>
             <a:r>
               <a:rPr lang="en-US" sz="1400" b="0" dirty="0"/>
-              <a:t>Circulate between tables. The most useful prompts (more in the instructor guide): Paper 1 groups - 'Who was NOT blinded, and who decided how much fluid the patients got?' (clinicians were unblinded and they prescribe the fluids that make up the outcome); 'Find p = 0.42 in the Discussion - what word did the authors use?' (page 10, 'non-significant trend'). Paper 2 groups - 'Who decided which patients got more fluid?' (the doctors - sicker patients receive more fluid: confounding by indication); 'Patients had to stay at least 3 days in the ICU - who is missing?' (early deaths and early discharges: survivor bias).</a:t>
+              <a:t>Circulate between tables. The most useful prompts (more in the instructor guide): Paper 1 groups: 'Who was NOT blinded, and who decided how much fluid the patients got?' (clinicians were unblinded and they prescribe the fluids that make up the outcome); 'Find p = 0.42 in the Discussion. What word did the authors use?' (page 10, 'non-significant trend'). Paper 2 groups: 'Who decided which patients got more fluid?' (the doctors, and sicker patients receive more fluid: confounding by indication); 'Patients had to stay at least 3 days in the ICU. Who is missing?' (early deaths and early discharges: survivor bias).</a:t>
             </a:r>
           </a:p>
           <a:p>
@@ -3439,13 +3439,13 @@
           <a:p>
             <a:r>
               <a:rPr lang="en-US" sz="1400" b="0" dirty="0"/>
-              <a:t>Paper 1: chance decided who got the restrictive strategy, so known AND unknown factors are balanced on average - a randomised trial may make a causal claim. Its claim is negative: the strategy did not reduce day-5 fluid balance (difference 13.2 ml/kg, 95% CI -15.2 to 41.6, p = 0.42). But with 48 patients the CI is wide: this is 'no evidence of an effect', not 'evidence of no effect' - and certainly not a 'trend'.</a:t>
+              <a:t>Paper 1: chance decided who got the restrictive strategy, so known AND unknown factors are balanced on average, so a randomised trial may make a causal claim. Its claim is negative: the strategy did not reduce day-5 fluid balance (difference 13.2 ml/kg, 95% CI -15.2 to 41.6, p = 0.42). But with 48 patients the CI is wide: this is 'no evidence of an effect', not 'evidence of no effect', and certainly not a 'trend'.</a:t>
             </a:r>
           </a:p>
           <a:p>
             <a:r>
               <a:rPr lang="en-US" sz="1400" b="0" dirty="0"/>
-              <a:t>Paper 2: doctors decided how much fluid each patient got. Propensity matching balances only the factors that were measured; sicker patients receive more fluid (confounding by indication, Session 4) and some severity is never fully measured. So the paper may say a positive balance on day 2 'is associated with' higher 28-day mortality (HR 2.13, 95% CI 1.48 to 3.06) - not that it 'impacts' or 'shows' anything causal, although its title says 'Impact'.</a:t>
+              <a:t>Paper 2: doctors decided how much fluid each patient got. Propensity matching balances only the factors that were measured; sicker patients receive more fluid (confounding by indication, Session 4) and some severity is never fully measured. So the paper may say a positive balance on day 2 'is associated with' higher 28-day mortality (HR 2.13, 95% CI 1.48 to 3.06), not that it 'impacts' or 'shows' anything causal, although its title says 'Impact'.</a:t>
             </a:r>
           </a:p>
           <a:p>
@@ -3532,19 +3532,19 @@
           <a:p>
             <a:r>
               <a:rPr lang="en-US" sz="1400" b="0" dirty="0"/>
-              <a:t>Reveal this table at the END of the plenary as the summary - after the groups have given their own answers, not before.</a:t>
+              <a:t>Reveal this table at the END of the plenary as the summary, after the groups have given their own answers, not before.</a:t>
             </a:r>
           </a:p>
           <a:p>
             <a:r>
               <a:rPr lang="en-US" sz="1400" b="0" dirty="0"/>
-              <a:t>Row by row: how the groups were made comparable; who knew the allocation; the main effect with its CI; the limitation the authors missed (Paper 1: permuted blocks of 2 make the next allocation predictable when clinicians are unblinded - page 3; Paper 2: requiring at least 3 ICU days excludes patients who died or left early - survivor bias - page 2); the wording problem (Paper 1 page 10; Paper 2 title and page 4); and the claim each design supports.</a:t>
+              <a:t>Row by row: how the groups were made comparable; who knew the allocation; the main effect with its CI; the limitation the authors missed (Paper 1: permuted blocks of 2 make the next allocation predictable when clinicians are unblinded, page 3; Paper 2: requiring at least 3 ICU days excludes patients who died or left early (survivor bias), page 2); the wording problem (Paper 1 page 10; Paper 2 title and page 4); and the claim each design supports.</a:t>
             </a:r>
           </a:p>
           <a:p>
             <a:r>
               <a:rPr lang="en-US" sz="1400" b="0" dirty="0"/>
-              <a:t>Both papers are good, published papers in Q1 journals - and both have fixable flaws. That is the normal state of the literature, which is why appraisal is a clinical skill.</a:t>
+              <a:t>Both papers are good, published papers in Q1 journals, and both have fixable flaws. That is the normal state of the literature, which is why appraisal is a clinical skill.</a:t>
             </a:r>
           </a:p>
         </p:txBody>
@@ -3637,7 +3637,7 @@
           <a:p>
             <a:r>
               <a:rPr lang="en-US" sz="1400" b="0" dirty="0"/>
-              <a:t>The four key messages are on the side panel - say each of them out loud before you close.</a:t>
+              <a:t>The four key messages are on the side panel. Say each of them out loud before you close.</a:t>
             </a:r>
           </a:p>
           <a:p>
@@ -3649,7 +3649,7 @@
           <a:p>
             <a:r>
               <a:rPr lang="en-US" sz="1400" b="0" dirty="0"/>
-              <a:t>Transition: 'Now it is your turn to be reviewed' - announce the presentation order.</a:t>
+              <a:t>Transition: 'Now it is your turn to be reviewed.' Then announce the presentation order.</a:t>
             </a:r>
           </a:p>
         </p:txBody>
@@ -3730,7 +3730,7 @@
           <a:p>
             <a:r>
               <a:rPr lang="en-US" sz="1400" b="0" dirty="0"/>
-              <a:t>Read the six terms with the room before the presentations - ask someone to explain each in their own words first.</a:t>
+              <a:t>Read the six terms with the room before the presentations. Ask someone to explain each in their own words first.</a:t>
             </a:r>
           </a:p>
         </p:txBody>
@@ -3817,7 +3817,7 @@
           <a:p>
             <a:r>
               <a:rPr lang="en-US" sz="1400" b="0" dirty="0"/>
-              <a:t>Transition: 'Now it is your turn to be reviewed' - announce the running order.</a:t>
+              <a:t>Transition: 'Now it is your turn to be reviewed.' Then announce the running order.</a:t>
             </a:r>
           </a:p>
         </p:txBody>
@@ -3910,7 +3910,7 @@
           <a:p>
             <a:r>
               <a:rPr lang="en-US" sz="1400" b="0" dirty="0"/>
-              <a:t>Remind the room: the reviewing skills we just used now apply to our own proposals - but feedback is given the way you would like to receive it.</a:t>
+              <a:t>Remind the room: the reviewing skills we just used now apply to our own proposals, but feedback is given the way you would like to receive it.</a:t>
             </a:r>
           </a:p>
         </p:txBody>
@@ -3991,25 +3991,25 @@
           <a:p>
             <a:r>
               <a:rPr lang="en-US" sz="1400" b="0" dirty="0"/>
-              <a:t>Teaching point: the introduction is a funnel, not a literature review. Paragraph 1: what is known (burden, mechanism, current practice). Paragraph 2: what is not known - the gap, ideally with conflicting evidence cited on both sides. Paragraph 3: 'We therefore aimed to ...' - one aim sentence that matches the primary outcome in the Methods.</a:t>
+              <a:t>Teaching point: the introduction is a funnel, not a literature review. Paragraph 1: what is known (burden, mechanism, current practice). Paragraph 2: what is not known: the gap, ideally with conflicting evidence cited on both sides. Paragraph 3: 'We therefore aimed to ...', one aim sentence that matches the primary outcome in the Methods.</a:t>
             </a:r>
           </a:p>
           <a:p>
             <a:r>
               <a:rPr lang="en-US" sz="1400" b="0" dirty="0"/>
-              <a:t>Paper 1 is the model (annotations #10-#12): known (positive fluid balance is linked to death; hidden fluids are a large share of intake), unknown (earlier trials targeted resuscitation fluids only), aim (primary objective = fluid balance after 5 days) - under 500 words (pages 2-3).</a:t>
+              <a:t>Paper 1 is the model (annotations #10-#12): known (positive fluid balance is linked to death; hidden fluids are a large share of intake), unknown (earlier trials targeted resuscitation fluids only), aim (primary objective = fluid balance after 5 days), all in under 500 words (pages 2-3).</a:t>
             </a:r>
           </a:p>
           <a:p>
             <a:r>
               <a:rPr lang="en-US" sz="1400" b="0" dirty="0"/>
-              <a:t>Paper 2's paragraph 2 defines the gap by citing both sides of a conflict (annotation #9) - copy that; but its introduction runs to about 550 words and the aim repeats the causal word 'impact' (#3, #10).</a:t>
+              <a:t>Paper 2's paragraph 2 defines the gap by citing both sides of a conflict (annotation #9). Copy that. But its introduction runs to about 550 words and the aim repeats the causal word 'impact' (#3, #10).</a:t>
             </a:r>
           </a:p>
           <a:p>
             <a:r>
               <a:rPr lang="en-US" sz="1400" b="0" dirty="0"/>
-              <a:t>Link to Sessions 1-2: your problem statement and PICO already give you this funnel - and for the FLUID-ICU paper the next slide shows a worked example.</a:t>
+              <a:t>Link to Sessions 1-2: your problem statement and PICO already give you this funnel. The next slide shows a worked example for the FLUID-ICU paper.</a:t>
             </a:r>
           </a:p>
           <a:p>
@@ -4108,13 +4108,13 @@
           <a:p>
             <a:r>
               <a:rPr lang="en-US" sz="1400" b="0" dirty="0"/>
-              <a:t>Feedback in 2 minutes (Assignment/presentation_guide.md): peer group 45 s - two stars and a wish; instructor 60 s - one strength, the most important improvement, one question; presenting group 15 s - 'thank you', no defending.</a:t>
+              <a:t>Feedback in 2 minutes (Assignment/presentation_guide.md): peer group 45 s (two stars and a wish); instructor 60 s (one strength, the most important improvement, one question); presenting group 15 s ('thank you', no defending).</a:t>
             </a:r>
           </a:p>
           <a:p>
             <a:r>
               <a:rPr lang="en-US" sz="1400" b="0" dirty="0"/>
-              <a:t>It is feedback to help the group polish the proposal for the ethics committee.</a:t>
+              <a:t>Presenting does. It is feedback to help the group polish the proposal for the ethics committee.</a:t>
             </a:r>
           </a:p>
         </p:txBody>
@@ -4195,7 +4195,7 @@
           <a:p>
             <a:r>
               <a:rPr lang="en-US" sz="1400" b="0" dirty="0"/>
-              <a:t>Show the running order. Clock times are relative to the start of the session (2:00 = two hours in; with an 08:00 start this is 10:00-10:45). 2:40-2:45: each group gives its FLUID-ICU question and main result in one sentence - or the 5 minutes absorb any overrun.</a:t>
+              <a:t>Show the running order. Clock times are relative to the start of the session (2:00 = two hours in; with an 08:00 start this is 10:00-10:45). 2:40-2:45: each group gives its FLUID-ICU question and main result in one sentence, or the 5 minutes absorb any overrun.</a:t>
             </a:r>
           </a:p>
           <a:p>
@@ -4207,13 +4207,13 @@
           <a:p>
             <a:r>
               <a:rPr lang="en-US" sz="1400" b="0" dirty="0"/>
-              <a:t>The next group walks to the front during the previous group's feedback. All slides are already on one laptop - no USB changes.</a:t>
+              <a:t>The next group walks to the front during the previous group's feedback. All slides are already on one laptop, so no USB changes.</a:t>
             </a:r>
           </a:p>
           <a:p>
             <a:r>
               <a:rPr lang="en-US" sz="1400" b="0" dirty="0"/>
-              <a:t>If the session runs late, shorten the feedback, never the presentations of the last groups - it is unfair to the group that presents last.</a:t>
+              <a:t>If the session runs late, shorten the feedback, never the presentations of the last groups. It is unfair to the group that presents last.</a:t>
             </a:r>
           </a:p>
         </p:txBody>
@@ -4399,7 +4399,7 @@
           <a:p>
             <a:r>
               <a:rPr lang="en-US" sz="1400" b="0" dirty="0"/>
-              <a:t>EXTRA: the slides after this divider are optional - use them if time allows or point participants to them for self-study.</a:t>
+              <a:t>EXTRA: the slides after this divider are optional. Use them if time allows or point participants to them for self-study.</a:t>
             </a:r>
           </a:p>
         </p:txBody>
@@ -4492,13 +4492,13 @@
           <a:p>
             <a:r>
               <a:rPr lang="en-US" sz="1400" b="0" dirty="0"/>
-              <a:t>Title (Paper 2): 'Positive cumulative fluid balance during the first three ICU days and 28-day mortality in sepsis: a propensity score-matched cohort study' - 'association', not 'impact'.</a:t>
+              <a:t>Title (Paper 2): 'Positive cumulative fluid balance during the first three ICU days and 28-day mortality in sepsis: a propensity score-matched cohort study'. Use 'association', not 'impact'.</a:t>
             </a:r>
           </a:p>
           <a:p>
             <a:r>
               <a:rPr lang="en-US" sz="1400" b="0" dirty="0"/>
-              <a:t>Group title: check 10-16 words, design stated, no value words. Abstract skeleton: Results are EXPECTED results - write the format, e.g. '28-day mortality, RR (95% CI)'.</a:t>
+              <a:t>Group title: check 10-16 words, design stated, no value words. Abstract skeleton: Results are EXPECTED results, so write the format, e.g. '28-day mortality, RR (95% CI)'.</a:t>
             </a:r>
           </a:p>
           <a:p>
@@ -4591,7 +4591,7 @@
           <a:p>
             <a:r>
               <a:rPr lang="en-US" sz="1400" b="0" dirty="0"/>
-              <a:t>Desk rejection: the editor declines without review - usually because the topic does not fit the journal or the reporting is poor. Re-target: choose a journal whose readers need your result.</a:t>
+              <a:t>Desk rejection: the editor declines without review, usually because the topic does not fit the journal or the reporting is poor. Re-target: choose a journal whose readers need your result.</a:t>
             </a:r>
           </a:p>
           <a:p>
@@ -4603,7 +4603,7 @@
           <a:p>
             <a:r>
               <a:rPr lang="en-US" sz="1400" b="0" dirty="0"/>
-              <a:t>Next journal: reformat to the new Guide for Authors; some publishers offer to transfer the manuscript and reviews to a sister journal - this can save months. Appeal only if there is a clear factual error in the decision.</a:t>
+              <a:t>Next journal: reformat to the new Guide for Authors; some publishers offer to transfer the manuscript and reviews to a sister journal, which can save months. Appeal only if there is a clear factual error in the decision.</a:t>
             </a:r>
           </a:p>
           <a:p>
@@ -4696,7 +4696,7 @@
           <a:p>
             <a:r>
               <a:rPr lang="en-US" sz="1400" b="0" dirty="0"/>
-              <a:t>EXTRA: Teaching point: a conference abstract is often the first output of a study. It follows the same IMRaD logic as the paper's abstract, usually 250-300 words, with real numbers and confidence intervals - 'results will be presented' is usually rejected. Follow the conference template and deadline.</a:t>
+              <a:t>EXTRA: Teaching point: a conference abstract is often the first output of a study. It follows the same IMRaD logic as the paper's abstract, usually 250-300 words, with real numbers and confidence intervals. An abstract that says 'results will be presented' is usually rejected. Follow the conference template and deadline.</a:t>
             </a:r>
           </a:p>
           <a:p>
@@ -4708,7 +4708,7 @@
           <a:p>
             <a:r>
               <a:rPr lang="en-US" sz="1400" b="0" dirty="0"/>
-              <a:t>Presenting an abstract does not normally prevent publication of the full paper, but check the journal's policy - and do write the full paper: many abstracts never become publications.</a:t>
+              <a:t>Presenting an abstract does not normally prevent publication of the full paper, but check the journal's policy. Do write the full paper: many abstracts never become publications.</a:t>
             </a:r>
           </a:p>
           <a:p>
@@ -4894,7 +4894,7 @@
           <a:p>
             <a:r>
               <a:rPr lang="en-US" sz="1400" b="0" dirty="0"/>
-              <a:t>Later: compute the mean pre/post change with the table in pre_post_quiz_answer_key - report it to the department head in the course report.</a:t>
+              <a:t>Later: compute the mean pre/post change with the table in pre_post_quiz_answer_key and report it to the department head in the course report.</a:t>
             </a:r>
           </a:p>
         </p:txBody>
@@ -5092,7 +5092,7 @@
           <a:p>
             <a:r>
               <a:rPr lang="en-US" sz="1400" b="0" dirty="0"/>
-              <a:t>Point out: the confounding by indication from Session 4 IS the gap - that is why the study is worth doing.</a:t>
+              <a:t>Point out: the confounding by indication from Session 4 IS the gap. That is why the study is worth doing.</a:t>
             </a:r>
           </a:p>
         </p:txBody>
@@ -5173,7 +5173,7 @@
           <a:p>
             <a:r>
               <a:rPr lang="en-US" sz="1400" b="0" dirty="0"/>
-              <a:t>Short anonymous form (paper or online). The pace question matters - we planned the course to be slow; tell us if it was right.</a:t>
+              <a:t>Short anonymous form (paper or online). The pace question matters. We planned the course to be slow, so tell us if it was right.</a:t>
             </a:r>
           </a:p>
         </p:txBody>
@@ -5260,13 +5260,13 @@
           <a:p>
             <a:r>
               <a:rPr lang="en-US" sz="1400" b="0" dirty="0"/>
-              <a:t>Reviews follow Assignment/peer_review_instructions.md and the 10-question checklist; authors reply with Templates/Response_to_Reviewers_Template.docx.</a:t>
+              <a:t>Reviews follow Assignment/peer_review_instructions.md and the 10-question checklist. Authors reply with Templates/Response_to_Reviewers_Template.docx.</a:t>
             </a:r>
           </a:p>
           <a:p>
             <a:r>
               <a:rPr lang="en-US" sz="1400" b="0" dirty="0"/>
-              <a:t>This is the last step of the whole research process - exactly what happens after a real submission.</a:t>
+              <a:t>This is the last step of the whole research process, exactly what happens after a real submission.</a:t>
             </a:r>
           </a:p>
         </p:txBody>
@@ -5359,7 +5359,7 @@
           <a:p>
             <a:r>
               <a:rPr lang="en-US" sz="1400" b="0" dirty="0"/>
-              <a:t>Level 3 (on request): advanced, specialised methods for complex data - meta-analysis, prediction and machine learning, diagnostic accuracy, advanced survival, longitudinal and multilevel models. See Course_Levels/.</a:t>
+              <a:t>Level 3 (on request): advanced, specialised methods for complex data: meta-analysis, prediction and machine learning, diagnostic accuracy, advanced survival, longitudinal and multilevel models. See Course_Levels/.</a:t>
             </a:r>
           </a:p>
           <a:p>
@@ -5527,7 +5527,7 @@
           <a:p>
             <a:r>
               <a:rPr lang="en-US" sz="1400" b="0" dirty="0"/>
-              <a:t>Copyright slide - leave on screen while participants leave.</a:t>
+              <a:t>Copyright slide. Leave on screen while participants leave.</a:t>
             </a:r>
           </a:p>
         </p:txBody>
@@ -5626,7 +5626,7 @@
           <a:p>
             <a:r>
               <a:rPr lang="en-US" sz="1400" b="0" dirty="0"/>
-              <a:t>Ask: which move do first-time writers usually skip? Expected: the limitations' direction - saying whether a bias makes the effect look bigger or smaller.</a:t>
+              <a:t>Ask: which move do first-time writers usually skip? Expected: the limitations' direction, saying whether a bias makes the effect look bigger or smaller.</a:t>
             </a:r>
           </a:p>
         </p:txBody>
@@ -5713,13 +5713,13 @@
           <a:p>
             <a:r>
               <a:rPr lang="en-US" sz="1400" b="0" dirty="0"/>
-              <a:t>1 Answer: adjusted OR 1.62 (95% CI 1.02 to 2.59). 2 Compare: Paper 2 found day-2 HR 2.13 (1.48 to 3.06). 3 Explain: the crude OR 2.49 fell to 1.62 after adjustment - confounding by indication. 4 Limitations: residual confounding, reverse causation (patients who are dying accumulate fluid), patients dying before day 3; the adjusted Cox HR 1.46 had a CI reaching 1.00. 5 Implications: no basis to restrict fluid - a trial like Paper 1 is needed. 6 Conclusion: 'associated with'.</a:t>
+              <a:t>1 Answer: adjusted OR 1.62 (95% CI 1.02 to 2.59). 2 Compare: Paper 2 found day-2 HR 2.13 (1.48 to 3.06). 3 Explain: the crude OR 2.49 fell to 1.62 after adjustment (confounding by indication). 4 Limitations: residual confounding, reverse causation (patients who are dying accumulate fluid), patients dying before day 3; the adjusted Cox HR 1.46 had a CI reaching 1.00. 5 Implications: no basis to restrict fluid. A trial like Paper 1 is needed. 6 Conclusion: 'associated with'.</a:t>
             </a:r>
           </a:p>
           <a:p>
             <a:r>
               <a:rPr lang="en-US" sz="1400" b="0" dirty="0"/>
-              <a:t>Optional point for Q1 groups: the association looked stronger in heart failure (adjusted OR 4.39 vs 1.29, p for interaction 0.031, only 90 patients) - a hypothesis, not a finding.</a:t>
+              <a:t>Optional point for Q1 groups: the association looked stronger in heart failure (adjusted OR 4.39 vs 1.29, p for interaction 0.031, only 90 patients). This is a hypothesis, not a finding.</a:t>
             </a:r>
           </a:p>
         </p:txBody>
@@ -5806,19 +5806,19 @@
           <a:p>
             <a:r>
               <a:rPr lang="en-US" sz="1400" b="0" dirty="0"/>
-              <a:t>Teaching point: the drop from 2.49 to 1.62 is the Session 4 lesson made visible - sicker patients received more fluid AND died more. The imputed estimate is close to the complete-case one, so missing lactate did not change the conclusion.</a:t>
+              <a:t>Teaching point: the drop from 2.49 to 1.62 is the Session 4 lesson made visible: sicker patients received more fluid AND died more. The imputed estimate is close to the complete-case one, so missing lactate did not change the conclusion.</a:t>
             </a:r>
           </a:p>
           <a:p>
             <a:r>
               <a:rPr lang="en-US" sz="1400" b="0" dirty="0"/>
-              <a:t>The adjusted CI starts at 1.02 - just above 1. Calibrated sentence: 'a modest association remained'.</a:t>
+              <a:t>The adjusted CI starts at 1.02, just above 1. Calibrated sentence: 'a modest association remained'.</a:t>
             </a:r>
           </a:p>
           <a:p>
             <a:r>
               <a:rPr lang="en-US" sz="1400" b="0" dirty="0"/>
-              <a:t>Ask: what would you write if the adjusted CI had crossed 1? Expected: 'no clear evidence of an association after adjustment' - not 'no effect'.</a:t>
+              <a:t>Ask: what would you write if the adjusted CI had crossed 1? Expected: 'no clear evidence of an association after adjustment', not 'no effect'.</a:t>
             </a:r>
           </a:p>
         </p:txBody>
@@ -5899,7 +5899,7 @@
           <a:p>
             <a:r>
               <a:rPr lang="en-US" sz="1400" b="0" dirty="0"/>
-              <a:t>Teaching point: the strength of a verb is a claim. Over-interpretation - conclusions that go beyond the data - is one of the commonest reasons for rejection.</a:t>
+              <a:t>Teaching point: the strength of a verb is a claim. Over-interpretation (conclusions that go beyond the data) is one of the commonest reasons for rejection.</a:t>
             </a:r>
           </a:p>
           <a:p>
@@ -5911,7 +5911,7 @@
           <a:p>
             <a:r>
               <a:rPr lang="en-US" sz="1400" b="0" dirty="0"/>
-              <a:t>NEVER: 'non-significant trend' for p = 0.42 (Paper 1, page 10, annotation #41); 'no difference' when the study was too small - say 'no evidence of a difference' (#29); 'first', 'ever', 'novel' without checking ('lowest fluid balance ever published', #40); 'impact', 'did not impact', 'show' in an observational study (Paper 2, #1, #27, #28); 'the most reliable comparison' (#32); ranking HRs from different cohorts as 'the highest risk' without a test (#37).</a:t>
+              <a:t>NEVER: 'non-significant trend' for p = 0.42 (Paper 1, page 10, annotation #41); 'no difference' when the study was too small (say 'no evidence of a difference', #29); 'first', 'ever', 'novel' without checking ('lowest fluid balance ever published', #40); 'impact', 'did not impact', 'show' in an observational study (Paper 2, #1, #27, #28); 'the most reliable comparison' (#32); ranking HRs from different cohorts as 'the highest risk' without a test (#37).</a:t>
             </a:r>
           </a:p>
           <a:p>
@@ -10256,7 +10256,7 @@
                 <a:latin typeface="Century Gothic"/>
                 <a:cs typeface="Century Gothic"/>
               </a:rPr>
-              <a:t>Copy the numbers from your Results - the abstract must not contain new ones.</a:t>
+              <a:t>Copy the numbers from your Results. The abstract must not contain new ones.</a:t>
             </a:r>
           </a:p>
         </p:txBody>
@@ -10531,7 +10531,7 @@
                 <a:latin typeface="Century Gothic"/>
                 <a:cs typeface="Century Gothic"/>
               </a:rPr>
-              <a:t>A good title states the question and the design - no sales words.</a:t>
+              <a:t>A good title states the question and the design, with no sales words.</a:t>
             </a:r>
           </a:p>
         </p:txBody>
@@ -11184,7 +11184,7 @@
                 <a:latin typeface="Century Gothic"/>
                 <a:cs typeface="Century Gothic"/>
               </a:rPr>
-              <a:t>Most errors in these two papers needed no new data - only a careful co-author.</a:t>
+              <a:t>Most errors in these two papers needed no new data, only a careful co-author.</a:t>
             </a:r>
           </a:p>
         </p:txBody>
@@ -11734,7 +11734,7 @@
                 <a:latin typeface="Century Gothic"/>
                 <a:cs typeface="Century Gothic"/>
               </a:rPr>
-              <a:t>0-8: Introduction - three paragraphs (two people)</a:t>
+              <a:t>0-8: Introduction, three paragraphs (two people)</a:t>
             </a:r>
           </a:p>
           <a:p>
@@ -11765,7 +11765,7 @@
                 <a:latin typeface="Century Gothic"/>
                 <a:cs typeface="Century Gothic"/>
               </a:rPr>
-              <a:t>0-15: Discussion - six moves (three people)</a:t>
+              <a:t>0-15: Discussion, six moves (three people)</a:t>
             </a:r>
           </a:p>
           <a:p>
@@ -11796,7 +11796,7 @@
                 <a:latin typeface="Century Gothic"/>
                 <a:cs typeface="Century Gothic"/>
               </a:rPr>
-              <a:t>15-23: Abstract - 250 words, numbers from your Results</a:t>
+              <a:t>15-23: Abstract of 250 words, numbers from your Results</a:t>
             </a:r>
           </a:p>
           <a:p>
@@ -11858,7 +11858,7 @@
                 <a:latin typeface="Century Gothic"/>
                 <a:cs typeface="Century Gothic"/>
               </a:rPr>
-              <a:t>27-30: verb check: every 'cause' or 'impact' -&gt; 'associated'</a:t>
+              <a:t>27-30: verb check: every 'cause' or 'impact' → 'associated'</a:t>
             </a:r>
           </a:p>
         </p:txBody>
@@ -12048,7 +12048,7 @@
                 <a:latin typeface="Century Gothic"/>
                 <a:cs typeface="Century Gothic"/>
               </a:rPr>
-              <a:t>Complete draft (~2,000 words) saved - peer-review swap after the course</a:t>
+              <a:t>Complete draft (~2,000 words) saved for the peer-review swap after the course</a:t>
             </a:r>
           </a:p>
         </p:txBody>
@@ -12833,7 +12833,7 @@
                 <a:latin typeface="Century Gothic"/>
                 <a:cs typeface="Century Gothic"/>
               </a:rPr>
-              <a:t>From checklist to proofs - and the traps on the way</a:t>
+              <a:t>From checklist to proofs, and the traps on the way</a:t>
             </a:r>
           </a:p>
         </p:txBody>
@@ -13108,7 +13108,7 @@
                 <a:latin typeface="Century Gothic"/>
                 <a:cs typeface="Century Gothic"/>
               </a:rPr>
-              <a:t>Name your guideline in Part 4 - and use it as a writing checklist.</a:t>
+              <a:t>Name your guideline in Part 4 and use it as a writing checklist.</a:t>
             </a:r>
           </a:p>
         </p:txBody>
@@ -13575,7 +13575,7 @@
                 <a:latin typeface="Century Gothic"/>
                 <a:cs typeface="Century Gothic"/>
               </a:rPr>
-              <a:t>Discussion - not Results</a:t>
+              <a:t>Discussion, not Results</a:t>
             </a:r>
           </a:p>
         </p:txBody>
@@ -13867,7 +13867,7 @@
                 <a:latin typeface="Century Gothic"/>
                 <a:cs typeface="Century Gothic"/>
               </a:rPr>
-              <a:t>Decide the target journal before you write - it sets the rules.</a:t>
+              <a:t>Decide the target journal before you write: it sets the rules.</a:t>
             </a:r>
           </a:p>
         </p:txBody>
@@ -14437,7 +14437,7 @@
                 <a:latin typeface="Century Gothic"/>
                 <a:cs typeface="Century Gothic"/>
               </a:rPr>
-              <a:t>A good journal is one your readers read - and one that is honestly run.</a:t>
+              <a:t>A good journal is one your readers read, and one that is honestly run.</a:t>
             </a:r>
           </a:p>
         </p:txBody>
@@ -15132,7 +15132,7 @@
                 <a:latin typeface="Century Gothic"/>
                 <a:cs typeface="Century Gothic"/>
               </a:rPr>
-              <a:t>Know who can read, re-use and pay - before you submit.</a:t>
+              <a:t>Know who can read, re-use and pay before you submit.</a:t>
             </a:r>
           </a:p>
         </p:txBody>
@@ -16268,7 +16268,7 @@
                 <a:latin typeface="Century Gothic"/>
                 <a:cs typeface="Century Gothic"/>
               </a:rPr>
-              <a:t>Submit the whole package at once - missing items mean delay.</a:t>
+              <a:t>Submit the whole package at once. Missing items mean delay.</a:t>
             </a:r>
           </a:p>
         </p:txBody>
@@ -16543,7 +16543,7 @@
                 <a:latin typeface="Century Gothic"/>
                 <a:cs typeface="Century Gothic"/>
               </a:rPr>
-              <a:t>Most papers are revised before acceptance - reply to every point politely.</a:t>
+              <a:t>Most papers are revised before acceptance. Reply to every point politely.</a:t>
             </a:r>
           </a:p>
         </p:txBody>
@@ -16818,7 +16818,7 @@
                 <a:latin typeface="Century Gothic"/>
                 <a:cs typeface="Century Gothic"/>
               </a:rPr>
-              <a:t>Thank, answer every point, show exactly what changed - disagree politely with evidence.</a:t>
+              <a:t>Thank, answer every point, show what changed, and disagree politely with evidence.</a:t>
             </a:r>
           </a:p>
         </p:txBody>
@@ -17093,7 +17093,7 @@
                 <a:latin typeface="Century Gothic"/>
                 <a:cs typeface="Century Gothic"/>
               </a:rPr>
-              <a:t>Read the proofs as carefully as the data - errors become permanent.</a:t>
+              <a:t>Read the proofs as carefully as the data. Errors become permanent.</a:t>
             </a:r>
           </a:p>
         </p:txBody>
@@ -17578,7 +17578,7 @@
                 <a:latin typeface="Century Gothic"/>
                 <a:cs typeface="Century Gothic"/>
               </a:rPr>
-              <a:t>1 Often - check it twice</a:t>
+              <a:t>1 Often: check it twice</a:t>
             </a:r>
           </a:p>
           <a:p>
@@ -17600,7 +17600,7 @@
                 <a:latin typeface="Century Gothic"/>
                 <a:cs typeface="Century Gothic"/>
               </a:rPr>
-              <a:t>2 False - duplicate submission</a:t>
+              <a:t>2 False: duplicate submission</a:t>
             </a:r>
           </a:p>
           <a:p>
@@ -17644,7 +17644,7 @@
                 <a:latin typeface="Century Gothic"/>
                 <a:cs typeface="Century Gothic"/>
               </a:rPr>
-              <a:t>4 True - politely, with evidence</a:t>
+              <a:t>4 True: politely, with evidence</a:t>
             </a:r>
           </a:p>
           <a:p>
@@ -17666,7 +17666,7 @@
                 <a:latin typeface="Century Gothic"/>
                 <a:cs typeface="Century Gothic"/>
               </a:rPr>
-              <a:t>5 False - STROBE (cohort)</a:t>
+              <a:t>5 False: STROBE (cohort)</a:t>
             </a:r>
           </a:p>
         </p:txBody>
@@ -18178,7 +18178,7 @@
                 <a:latin typeface="Century Gothic"/>
                 <a:cs typeface="Century Gothic"/>
               </a:rPr>
-              <a:t>Introduction, Discussion, Abstract and Title - in that order</a:t>
+              <a:t>Introduction, Discussion, Abstract and Title, in that order</a:t>
             </a:r>
           </a:p>
         </p:txBody>
@@ -18453,7 +18453,7 @@
                 <a:latin typeface="Century Gothic"/>
                 <a:cs typeface="Century Gothic"/>
               </a:rPr>
-              <a:t>Same clinical question, two designs - compare what each may claim.</a:t>
+              <a:t>Same clinical question, two designs. Compare what each may claim.</a:t>
             </a:r>
           </a:p>
         </p:txBody>
@@ -21075,7 +21075,7 @@
                           </a:solidFill>
                           <a:latin typeface="Century Gothic"/>
                         </a:rPr>
-                        <a:t>Paper 1 - RCT (Boulet 2024)</a:t>
+                        <a:t>Paper 1: RCT (Boulet 2024)</a:t>
                       </a:r>
                     </a:p>
                   </a:txBody>
@@ -21098,7 +21098,7 @@
                           </a:solidFill>
                           <a:latin typeface="Century Gothic"/>
                         </a:rPr>
-                        <a:t>Paper 2 - cohort (Hyun 2023)</a:t>
+                        <a:t>Paper 2: cohort (Hyun 2023)</a:t>
                       </a:r>
                     </a:p>
                   </a:txBody>
@@ -22487,7 +22487,7 @@
                           </a:solidFill>
                           <a:latin typeface="Century Gothic"/>
                         </a:rPr>
-                        <a:t>Known -&gt; not known -&gt; aim, in three paragraphs</a:t>
+                        <a:t>Known → not known → aim, in three paragraphs</a:t>
                       </a:r>
                     </a:p>
                   </a:txBody>
@@ -23521,7 +23521,7 @@
                 <a:latin typeface="Century Gothic"/>
                 <a:cs typeface="Century Gothic"/>
               </a:rPr>
-              <a:t>Next: present your proposal - and swap manuscripts for peer review.</a:t>
+              <a:t>Next: present your proposal and swap manuscripts for peer review.</a:t>
             </a:r>
           </a:p>
         </p:txBody>
@@ -23777,7 +23777,7 @@
                 <a:latin typeface="Century Gothic"/>
                 <a:cs typeface="Century Gothic"/>
               </a:rPr>
-              <a:t>6 minutes to present, 2 minutes of feedback - be kind, be specific</a:t>
+              <a:t>6 minutes to present, 2 minutes of feedback: be kind, be specific</a:t>
             </a:r>
           </a:p>
         </p:txBody>
@@ -24052,7 +24052,7 @@
                 <a:latin typeface="Century Gothic"/>
                 <a:cs typeface="Century Gothic"/>
               </a:rPr>
-              <a:t>Known, unknown, aim - and the aim matches the primary outcome.</a:t>
+              <a:t>Known, unknown, aim. The aim matches the primary outcome.</a:t>
             </a:r>
           </a:p>
         </p:txBody>
@@ -25903,7 +25903,7 @@
                 <a:latin typeface="Century Gothic"/>
                 <a:cs typeface="Century Gothic"/>
               </a:rPr>
-              <a:t>Extra slides - Session 8</a:t>
+              <a:t>Extra slides: Session 8</a:t>
             </a:r>
           </a:p>
           <a:p>
@@ -26498,7 +26498,7 @@
                 <a:latin typeface="Century Gothic"/>
                 <a:cs typeface="Century Gothic"/>
               </a:rPr>
-              <a:t>Working title + abstract skeleton - show them in your presentation</a:t>
+              <a:t>Working title + abstract skeleton to show in your presentation</a:t>
             </a:r>
           </a:p>
         </p:txBody>
@@ -26666,7 +26666,7 @@
                 <a:latin typeface="Century Gothic"/>
                 <a:cs typeface="Century Gothic"/>
               </a:rPr>
-              <a:t>Rejected? Resubmit - smarter</a:t>
+              <a:t>Rejected? Resubmit smarter</a:t>
             </a:r>
           </a:p>
         </p:txBody>
@@ -27190,7 +27190,7 @@
                 <a:latin typeface="Century Gothic"/>
                 <a:cs typeface="Century Gothic"/>
               </a:rPr>
-              <a:t>The next reviewer may be the same person - fix the problems first.</a:t>
+              <a:t>The next reviewer may be the same person. Fix the problems first.</a:t>
             </a:r>
           </a:p>
         </p:txBody>
@@ -29767,7 +29767,7 @@
                 <a:latin typeface="Century Gothic"/>
                 <a:cs typeface="Century Gothic"/>
               </a:rPr>
-              <a:t>Three paragraphs, about 350 words - and the aim uses 'associated'.</a:t>
+              <a:t>Three paragraphs, about 350 words. The aim uses 'associated'.</a:t>
             </a:r>
           </a:p>
         </p:txBody>
@@ -30891,7 +30891,7 @@
                 <a:latin typeface="Century Gothic"/>
                 <a:cs typeface="Century Gothic"/>
               </a:rPr>
-              <a:t>Due two weeks after Session 8 - see Assignment/peer_review_instructions.</a:t>
+              <a:t>Due two weeks after Session 8 (see Assignment/peer_review_instructions).</a:t>
             </a:r>
           </a:p>
         </p:txBody>

--- a/en/files/slides/Session_8_EN.pptx
+++ b/en/files/slides/Session_8_EN.pptx
@@ -8995,8 +8995,8 @@
                 <a:solidFill>
                   <a:srgbClr val="0D7377"/>
                 </a:solidFill>
-                <a:latin typeface="Century Gothic"/>
-                <a:cs typeface="Century Gothic"/>
+                <a:latin typeface="Arial"/>
+                <a:cs typeface="Arial"/>
               </a:rPr>
               <a:t>Session 8 · Publish: finish the paper, get it out, present</a:t>
             </a:r>
@@ -9063,8 +9063,8 @@
                 <a:solidFill>
                   <a:srgbClr val="0070C0"/>
                 </a:solidFill>
-                <a:latin typeface="Century Gothic"/>
-                <a:cs typeface="Century Gothic"/>
+                <a:latin typeface="Arial"/>
+                <a:cs typeface="Arial"/>
               </a:rPr>
               <a:t>Week 8 · Saturday</a:t>
             </a:r>
@@ -9088,8 +9088,8 @@
                 <a:solidFill>
                   <a:srgbClr val="000000"/>
                 </a:solidFill>
-                <a:latin typeface="Century Gothic"/>
-                <a:cs typeface="Century Gothic"/>
+                <a:latin typeface="Arial"/>
+                <a:cs typeface="Arial"/>
               </a:rPr>
               <a:t>Recap (5 min)</a:t>
             </a:r>
@@ -9107,8 +9107,8 @@
                 <a:solidFill>
                   <a:srgbClr val="000000"/>
                 </a:solidFill>
-                <a:latin typeface="Century Gothic"/>
-                <a:cs typeface="Century Gothic"/>
+                <a:latin typeface="Arial"/>
+                <a:cs typeface="Arial"/>
               </a:rPr>
               <a:t>8.1  Writing the paper (II): Introduction, Discussion, Abstract, Title</a:t>
             </a:r>
@@ -9126,8 +9126,8 @@
                 <a:solidFill>
                   <a:srgbClr val="000000"/>
                 </a:solidFill>
-                <a:latin typeface="Century Gothic"/>
-                <a:cs typeface="Century Gothic"/>
+                <a:latin typeface="Arial"/>
+                <a:cs typeface="Arial"/>
               </a:rPr>
               <a:t>Manuscript workshop 2: complete the draft</a:t>
             </a:r>
@@ -9145,8 +9145,8 @@
                 <a:solidFill>
                   <a:srgbClr val="000000"/>
                 </a:solidFill>
-                <a:latin typeface="Century Gothic"/>
-                <a:cs typeface="Century Gothic"/>
+                <a:latin typeface="Arial"/>
+                <a:cs typeface="Arial"/>
               </a:rPr>
               <a:t>8.2  Getting published: from checklist to proofs</a:t>
             </a:r>
@@ -9164,8 +9164,8 @@
                 <a:solidFill>
                   <a:srgbClr val="000000"/>
                 </a:solidFill>
-                <a:latin typeface="Century Gothic"/>
-                <a:cs typeface="Century Gothic"/>
+                <a:latin typeface="Arial"/>
+                <a:cs typeface="Arial"/>
               </a:rPr>
               <a:t>8.3  Be the reviewer: appraise Papers 1 and 2</a:t>
             </a:r>
@@ -9183,8 +9183,8 @@
                 <a:solidFill>
                   <a:srgbClr val="000000"/>
                 </a:solidFill>
-                <a:latin typeface="Century Gothic"/>
-                <a:cs typeface="Century Gothic"/>
+                <a:latin typeface="Arial"/>
+                <a:cs typeface="Arial"/>
               </a:rPr>
               <a:t>Group presentations: proposal + publication plan</a:t>
             </a:r>
@@ -9221,7 +9221,7 @@
                     <a:lumMod val="50000"/>
                   </a:schemeClr>
                 </a:solidFill>
-                <a:latin typeface="Verdana"/>
+                <a:latin typeface="Arial"/>
               </a:rPr>
               <a:t>Neudata | #ClearDataClearImpact</a:t>
             </a:r>
@@ -9351,8 +9351,8 @@
                 <a:solidFill>
                   <a:srgbClr val="0D7377"/>
                 </a:solidFill>
-                <a:latin typeface="Century Gothic"/>
-                <a:cs typeface="Century Gothic"/>
+                <a:latin typeface="Arial"/>
+                <a:cs typeface="Arial"/>
               </a:rPr>
               <a:t>Check: fix the verb (FLUID-ICU, simulated)</a:t>
             </a:r>
@@ -9422,8 +9422,8 @@
                 <a:solidFill>
                   <a:srgbClr val="FFFFFF"/>
                 </a:solidFill>
-                <a:latin typeface="Century Gothic"/>
-                <a:cs typeface="Century Gothic"/>
+                <a:latin typeface="Arial"/>
+                <a:cs typeface="Arial"/>
               </a:rPr>
               <a:t>QUICK QUIZ   |   2 min</a:t>
             </a:r>
@@ -9460,25 +9460,19 @@
               <a:spcBef>
                 <a:spcPts val="450"/>
               </a:spcBef>
-              <a:buNone/>
-            </a:pPr>
-            <a:r>
-              <a:rPr lang="en-US" sz="1650" b="1" dirty="0">
-                <a:solidFill>
-                  <a:srgbClr val="6C3483"/>
-                </a:solidFill>
-                <a:latin typeface="Century Gothic"/>
-                <a:cs typeface="Century Gothic"/>
-              </a:rPr>
-              <a:t>1.  </a:t>
-            </a:r>
+              <a:buClr>
+                <a:srgbClr val="6C3483"/>
+              </a:buClr>
+              <a:buFont typeface="Arial"/>
+              <a:buChar char="•"/>
+            </a:pPr>
             <a:r>
               <a:rPr lang="en-US" sz="1650" dirty="0">
                 <a:solidFill>
                   <a:srgbClr val="000000"/>
                 </a:solidFill>
-                <a:latin typeface="Century Gothic"/>
-                <a:cs typeface="Century Gothic"/>
+                <a:latin typeface="Arial"/>
+                <a:cs typeface="Arial"/>
               </a:rPr>
               <a:t>'A positive balance caused higher mortality (OR 1.62).'</a:t>
             </a:r>
@@ -9491,25 +9485,19 @@
               <a:spcBef>
                 <a:spcPts val="450"/>
               </a:spcBef>
-              <a:buNone/>
-            </a:pPr>
-            <a:r>
-              <a:rPr lang="en-US" sz="1650" b="1" dirty="0">
-                <a:solidFill>
-                  <a:srgbClr val="6C3483"/>
-                </a:solidFill>
-                <a:latin typeface="Century Gothic"/>
-                <a:cs typeface="Century Gothic"/>
-              </a:rPr>
-              <a:t>2.  </a:t>
-            </a:r>
+              <a:buClr>
+                <a:srgbClr val="6C3483"/>
+              </a:buClr>
+              <a:buFont typeface="Arial"/>
+              <a:buChar char="•"/>
+            </a:pPr>
             <a:r>
               <a:rPr lang="en-US" sz="1650" dirty="0">
                 <a:solidFill>
                   <a:srgbClr val="000000"/>
                 </a:solidFill>
-                <a:latin typeface="Century Gothic"/>
-                <a:cs typeface="Century Gothic"/>
+                <a:latin typeface="Arial"/>
+                <a:cs typeface="Arial"/>
               </a:rPr>
               <a:t>'Fluid overload increases AKI (OR 1.27 per 10 ml/kg).'</a:t>
             </a:r>
@@ -9522,25 +9510,19 @@
               <a:spcBef>
                 <a:spcPts val="450"/>
               </a:spcBef>
-              <a:buNone/>
-            </a:pPr>
-            <a:r>
-              <a:rPr lang="en-US" sz="1650" b="1" dirty="0">
-                <a:solidFill>
-                  <a:srgbClr val="6C3483"/>
-                </a:solidFill>
-                <a:latin typeface="Century Gothic"/>
-                <a:cs typeface="Century Gothic"/>
-              </a:rPr>
-              <a:t>3.  </a:t>
-            </a:r>
+              <a:buClr>
+                <a:srgbClr val="6C3483"/>
+              </a:buClr>
+              <a:buFont typeface="Arial"/>
+              <a:buChar char="•"/>
+            </a:pPr>
             <a:r>
               <a:rPr lang="en-US" sz="1650" dirty="0">
                 <a:solidFill>
                   <a:srgbClr val="000000"/>
                 </a:solidFill>
-                <a:latin typeface="Century Gothic"/>
-                <a:cs typeface="Century Gothic"/>
+                <a:latin typeface="Arial"/>
+                <a:cs typeface="Arial"/>
               </a:rPr>
               <a:t>'There was a trend towards death (Cox HR 1.46, 95% CI 1.00 to 2.13).'</a:t>
             </a:r>
@@ -9553,25 +9535,19 @@
               <a:spcBef>
                 <a:spcPts val="450"/>
               </a:spcBef>
-              <a:buNone/>
-            </a:pPr>
-            <a:r>
-              <a:rPr lang="en-US" sz="1650" b="1" dirty="0">
-                <a:solidFill>
-                  <a:srgbClr val="6C3483"/>
-                </a:solidFill>
-                <a:latin typeface="Century Gothic"/>
-                <a:cs typeface="Century Gothic"/>
-              </a:rPr>
-              <a:t>4.  </a:t>
-            </a:r>
+              <a:buClr>
+                <a:srgbClr val="6C3483"/>
+              </a:buClr>
+              <a:buFont typeface="Arial"/>
+              <a:buChar char="•"/>
+            </a:pPr>
             <a:r>
               <a:rPr lang="en-US" sz="1650" dirty="0">
                 <a:solidFill>
                   <a:srgbClr val="000000"/>
                 </a:solidFill>
-                <a:latin typeface="Century Gothic"/>
-                <a:cs typeface="Century Gothic"/>
+                <a:latin typeface="Arial"/>
+                <a:cs typeface="Arial"/>
               </a:rPr>
               <a:t>'Lactate predicts death (OR 1.39 per mmol/L).'</a:t>
             </a:r>
@@ -9615,8 +9591,8 @@
                 <a:solidFill>
                   <a:srgbClr val="6C3483"/>
                 </a:solidFill>
-                <a:latin typeface="Century Gothic"/>
-                <a:cs typeface="Century Gothic"/>
+                <a:latin typeface="Arial"/>
+                <a:cs typeface="Arial"/>
               </a:rPr>
               <a:t>Better</a:t>
             </a:r>
@@ -9637,8 +9613,8 @@
                 <a:solidFill>
                   <a:srgbClr val="000000"/>
                 </a:solidFill>
-                <a:latin typeface="Century Gothic"/>
-                <a:cs typeface="Century Gothic"/>
+                <a:latin typeface="Arial"/>
+                <a:cs typeface="Arial"/>
               </a:rPr>
               <a:t>1 '... was associated with ...'</a:t>
             </a:r>
@@ -9659,8 +9635,8 @@
                 <a:solidFill>
                   <a:srgbClr val="000000"/>
                 </a:solidFill>
-                <a:latin typeface="Century Gothic"/>
-                <a:cs typeface="Century Gothic"/>
+                <a:latin typeface="Arial"/>
+                <a:cs typeface="Arial"/>
               </a:rPr>
               <a:t>2 '... was associated with higher odds of AKI'</a:t>
             </a:r>
@@ -9681,8 +9657,8 @@
                 <a:solidFill>
                   <a:srgbClr val="000000"/>
                 </a:solidFill>
-                <a:latin typeface="Century Gothic"/>
-                <a:cs typeface="Century Gothic"/>
+                <a:latin typeface="Arial"/>
+                <a:cs typeface="Arial"/>
               </a:rPr>
               <a:t>3 'HR 1.46 (1.00 to 2.13): CI reaches 1'</a:t>
             </a:r>
@@ -9703,8 +9679,8 @@
                 <a:solidFill>
                   <a:srgbClr val="000000"/>
                 </a:solidFill>
-                <a:latin typeface="Century Gothic"/>
-                <a:cs typeface="Century Gothic"/>
+                <a:latin typeface="Arial"/>
+                <a:cs typeface="Arial"/>
               </a:rPr>
               <a:t>4 OK for prediction; for cause: 'associated'</a:t>
             </a:r>
@@ -9741,7 +9717,7 @@
                     <a:lumMod val="50000"/>
                   </a:schemeClr>
                 </a:solidFill>
-                <a:latin typeface="Verdana"/>
+                <a:latin typeface="Arial"/>
               </a:rPr>
               <a:t>Neudata | #ClearDataClearImpact</a:t>
             </a:r>
@@ -9871,8 +9847,8 @@
                 <a:solidFill>
                   <a:srgbClr val="0D7377"/>
                 </a:solidFill>
-                <a:latin typeface="Century Gothic"/>
-                <a:cs typeface="Century Gothic"/>
+                <a:latin typeface="Arial"/>
+                <a:cs typeface="Arial"/>
               </a:rPr>
               <a:t>The structured abstract: the shop window</a:t>
             </a:r>
@@ -9968,8 +9944,8 @@
                 <a:solidFill>
                   <a:srgbClr val="FFFFFF"/>
                 </a:solidFill>
-                <a:latin typeface="Century Gothic"/>
-                <a:cs typeface="Century Gothic"/>
+                <a:latin typeface="Arial"/>
+                <a:cs typeface="Arial"/>
               </a:rPr>
               <a:t>KEY MESSAGE   </a:t>
             </a:r>
@@ -9978,8 +9954,8 @@
                 <a:solidFill>
                   <a:srgbClr val="FFFFFF"/>
                 </a:solidFill>
-                <a:latin typeface="Century Gothic"/>
-                <a:cs typeface="Century Gothic"/>
+                <a:latin typeface="Arial"/>
+                <a:cs typeface="Arial"/>
               </a:rPr>
               <a:t>Every result in the abstract has a number and a confidence interval.</a:t>
             </a:r>
@@ -10016,7 +9992,7 @@
                     <a:lumMod val="50000"/>
                   </a:schemeClr>
                 </a:solidFill>
-                <a:latin typeface="Verdana"/>
+                <a:latin typeface="Arial"/>
               </a:rPr>
               <a:t>Neudata | #ClearDataClearImpact</a:t>
             </a:r>
@@ -10146,8 +10122,8 @@
                 <a:solidFill>
                   <a:srgbClr val="0D7377"/>
                 </a:solidFill>
-                <a:latin typeface="Century Gothic"/>
-                <a:cs typeface="Century Gothic"/>
+                <a:latin typeface="Arial"/>
+                <a:cs typeface="Arial"/>
               </a:rPr>
               <a:t>Worked example: the abstract and title for FLUID-ICU question 1</a:t>
             </a:r>
@@ -10243,8 +10219,8 @@
                 <a:solidFill>
                   <a:srgbClr val="FFFFFF"/>
                 </a:solidFill>
-                <a:latin typeface="Century Gothic"/>
-                <a:cs typeface="Century Gothic"/>
+                <a:latin typeface="Arial"/>
+                <a:cs typeface="Arial"/>
               </a:rPr>
               <a:t>KEY MESSAGE   </a:t>
             </a:r>
@@ -10253,8 +10229,8 @@
                 <a:solidFill>
                   <a:srgbClr val="FFFFFF"/>
                 </a:solidFill>
-                <a:latin typeface="Century Gothic"/>
-                <a:cs typeface="Century Gothic"/>
+                <a:latin typeface="Arial"/>
+                <a:cs typeface="Arial"/>
               </a:rPr>
               <a:t>Copy the numbers from your Results. The abstract must not contain new ones.</a:t>
             </a:r>
@@ -10291,7 +10267,7 @@
                     <a:lumMod val="50000"/>
                   </a:schemeClr>
                 </a:solidFill>
-                <a:latin typeface="Verdana"/>
+                <a:latin typeface="Arial"/>
               </a:rPr>
               <a:t>Neudata | #ClearDataClearImpact</a:t>
             </a:r>
@@ -10421,8 +10397,8 @@
                 <a:solidFill>
                   <a:srgbClr val="0D7377"/>
                 </a:solidFill>
-                <a:latin typeface="Century Gothic"/>
-                <a:cs typeface="Century Gothic"/>
+                <a:latin typeface="Arial"/>
+                <a:cs typeface="Arial"/>
               </a:rPr>
               <a:t>Title and keywords: your PICO in one line</a:t>
             </a:r>
@@ -10518,8 +10494,8 @@
                 <a:solidFill>
                   <a:srgbClr val="FFFFFF"/>
                 </a:solidFill>
-                <a:latin typeface="Century Gothic"/>
-                <a:cs typeface="Century Gothic"/>
+                <a:latin typeface="Arial"/>
+                <a:cs typeface="Arial"/>
               </a:rPr>
               <a:t>KEY MESSAGE   </a:t>
             </a:r>
@@ -10528,8 +10504,8 @@
                 <a:solidFill>
                   <a:srgbClr val="FFFFFF"/>
                 </a:solidFill>
-                <a:latin typeface="Century Gothic"/>
-                <a:cs typeface="Century Gothic"/>
+                <a:latin typeface="Arial"/>
+                <a:cs typeface="Arial"/>
               </a:rPr>
               <a:t>A good title states the question and the design, with no sales words.</a:t>
             </a:r>
@@ -10566,7 +10542,7 @@
                     <a:lumMod val="50000"/>
                   </a:schemeClr>
                 </a:solidFill>
-                <a:latin typeface="Verdana"/>
+                <a:latin typeface="Arial"/>
               </a:rPr>
               <a:t>Neudata | #ClearDataClearImpact</a:t>
             </a:r>
@@ -10696,8 +10672,8 @@
                 <a:solidFill>
                   <a:srgbClr val="0D7377"/>
                 </a:solidFill>
-                <a:latin typeface="Century Gothic"/>
-                <a:cs typeface="Century Gothic"/>
+                <a:latin typeface="Arial"/>
+                <a:cs typeface="Arial"/>
               </a:rPr>
               <a:t>Before you submit: references, checklist, final read</a:t>
             </a:r>
@@ -10767,8 +10743,8 @@
                 <a:solidFill>
                   <a:srgbClr val="FFFFFF"/>
                 </a:solidFill>
-                <a:latin typeface="Century Gothic"/>
-                <a:cs typeface="Century Gothic"/>
+                <a:latin typeface="Arial"/>
+                <a:cs typeface="Arial"/>
               </a:rPr>
               <a:t>References</a:t>
             </a:r>
@@ -10816,8 +10792,8 @@
                 <a:solidFill>
                   <a:srgbClr val="000000"/>
                 </a:solidFill>
-                <a:latin typeface="Century Gothic"/>
-                <a:cs typeface="Century Gothic"/>
+                <a:latin typeface="Arial"/>
+                <a:cs typeface="Arial"/>
               </a:rPr>
               <a:t>Use a reference manager</a:t>
             </a:r>
@@ -10837,8 +10813,8 @@
                 <a:solidFill>
                   <a:srgbClr val="000000"/>
                 </a:solidFill>
-                <a:latin typeface="Century Gothic"/>
-                <a:cs typeface="Century Gothic"/>
+                <a:latin typeface="Arial"/>
+                <a:cs typeface="Arial"/>
               </a:rPr>
               <a:t>Check every citation</a:t>
             </a:r>
@@ -10858,8 +10834,8 @@
                 <a:solidFill>
                   <a:srgbClr val="000000"/>
                 </a:solidFill>
-                <a:latin typeface="Century Gothic"/>
-                <a:cs typeface="Century Gothic"/>
+                <a:latin typeface="Arial"/>
+                <a:cs typeface="Arial"/>
               </a:rPr>
               <a:t>P2 cites the Sepsis-3 paper for its covariates</a:t>
             </a:r>
@@ -10901,8 +10877,8 @@
                 <a:solidFill>
                   <a:srgbClr val="FFFFFF"/>
                 </a:solidFill>
-                <a:latin typeface="Century Gothic"/>
-                <a:cs typeface="Century Gothic"/>
+                <a:latin typeface="Arial"/>
+                <a:cs typeface="Arial"/>
               </a:rPr>
               <a:t>Reporting checklist</a:t>
             </a:r>
@@ -10950,8 +10926,8 @@
                 <a:solidFill>
                   <a:srgbClr val="000000"/>
                 </a:solidFill>
-                <a:latin typeface="Century Gothic"/>
-                <a:cs typeface="Century Gothic"/>
+                <a:latin typeface="Arial"/>
+                <a:cs typeface="Arial"/>
               </a:rPr>
               <a:t>Fill it in while writing</a:t>
             </a:r>
@@ -10971,8 +10947,8 @@
                 <a:solidFill>
                   <a:srgbClr val="000000"/>
                 </a:solidFill>
-                <a:latin typeface="Century Gothic"/>
-                <a:cs typeface="Century Gothic"/>
+                <a:latin typeface="Arial"/>
+                <a:cs typeface="Arial"/>
               </a:rPr>
               <a:t>Add page numbers</a:t>
             </a:r>
@@ -10992,8 +10968,8 @@
                 <a:solidFill>
                   <a:srgbClr val="000000"/>
                 </a:solidFill>
-                <a:latin typeface="Century Gothic"/>
-                <a:cs typeface="Century Gothic"/>
+                <a:latin typeface="Arial"/>
+                <a:cs typeface="Arial"/>
               </a:rPr>
               <a:t>Neither paper names CONSORT or STROBE</a:t>
             </a:r>
@@ -11035,8 +11011,8 @@
                 <a:solidFill>
                   <a:srgbClr val="FFFFFF"/>
                 </a:solidFill>
-                <a:latin typeface="Century Gothic"/>
-                <a:cs typeface="Century Gothic"/>
+                <a:latin typeface="Arial"/>
+                <a:cs typeface="Arial"/>
               </a:rPr>
               <a:t>Final read</a:t>
             </a:r>
@@ -11084,8 +11060,8 @@
                 <a:solidFill>
                   <a:srgbClr val="000000"/>
                 </a:solidFill>
-                <a:latin typeface="Century Gothic"/>
-                <a:cs typeface="Century Gothic"/>
+                <a:latin typeface="Arial"/>
+                <a:cs typeface="Arial"/>
               </a:rPr>
               <a:t>Text = table, every number</a:t>
             </a:r>
@@ -11105,8 +11081,8 @@
                 <a:solidFill>
                   <a:srgbClr val="000000"/>
                 </a:solidFill>
-                <a:latin typeface="Century Gothic"/>
-                <a:cs typeface="Century Gothic"/>
+                <a:latin typeface="Arial"/>
+                <a:cs typeface="Arial"/>
               </a:rPr>
               <a:t>Call-outs point to the right figure</a:t>
             </a:r>
@@ -11126,8 +11102,8 @@
                 <a:solidFill>
                   <a:srgbClr val="000000"/>
                 </a:solidFill>
-                <a:latin typeface="Century Gothic"/>
-                <a:cs typeface="Century Gothic"/>
+                <a:latin typeface="Arial"/>
+                <a:cs typeface="Arial"/>
               </a:rPr>
               <a:t>A co-author reads the tables</a:t>
             </a:r>
@@ -11171,8 +11147,8 @@
                 <a:solidFill>
                   <a:srgbClr val="FFFFFF"/>
                 </a:solidFill>
-                <a:latin typeface="Century Gothic"/>
-                <a:cs typeface="Century Gothic"/>
+                <a:latin typeface="Arial"/>
+                <a:cs typeface="Arial"/>
               </a:rPr>
               <a:t>KEY MESSAGE   </a:t>
             </a:r>
@@ -11181,8 +11157,8 @@
                 <a:solidFill>
                   <a:srgbClr val="FFFFFF"/>
                 </a:solidFill>
-                <a:latin typeface="Century Gothic"/>
-                <a:cs typeface="Century Gothic"/>
+                <a:latin typeface="Arial"/>
+                <a:cs typeface="Arial"/>
               </a:rPr>
               <a:t>Most errors in these two papers needed no new data, only a careful co-author.</a:t>
             </a:r>
@@ -11219,7 +11195,7 @@
                     <a:lumMod val="50000"/>
                   </a:schemeClr>
                 </a:solidFill>
-                <a:latin typeface="Verdana"/>
+                <a:latin typeface="Arial"/>
               </a:rPr>
               <a:t>Neudata | #ClearDataClearImpact</a:t>
             </a:r>
@@ -11349,8 +11325,8 @@
                 <a:solidFill>
                   <a:srgbClr val="0D7377"/>
                 </a:solidFill>
-                <a:latin typeface="Century Gothic"/>
-                <a:cs typeface="Century Gothic"/>
+                <a:latin typeface="Arial"/>
+                <a:cs typeface="Arial"/>
               </a:rPr>
               <a:t>Manuscript workshop 2  |  30 minutes</a:t>
             </a:r>
@@ -11419,8 +11395,8 @@
                 <a:solidFill>
                   <a:srgbClr val="0D7377"/>
                 </a:solidFill>
-                <a:latin typeface="Century Gothic"/>
-                <a:cs typeface="Century Gothic"/>
+                <a:latin typeface="Arial"/>
+                <a:cs typeface="Arial"/>
               </a:rPr>
               <a:t>Complete your draft</a:t>
             </a:r>
@@ -11437,8 +11413,8 @@
                 <a:solidFill>
                   <a:srgbClr val="595959"/>
                 </a:solidFill>
-                <a:latin typeface="Century Gothic"/>
-                <a:cs typeface="Century Gothic"/>
+                <a:latin typeface="Arial"/>
+                <a:cs typeface="Arial"/>
               </a:rPr>
               <a:t>Introduction, Discussion, Abstract and Title</a:t>
             </a:r>
@@ -11475,7 +11451,7 @@
                     <a:lumMod val="50000"/>
                   </a:schemeClr>
                 </a:solidFill>
-                <a:latin typeface="Verdana"/>
+                <a:latin typeface="Arial"/>
               </a:rPr>
               <a:t>Neudata | #ClearDataClearImpact</a:t>
             </a:r>
@@ -11605,8 +11581,8 @@
                 <a:solidFill>
                   <a:srgbClr val="0D7377"/>
                 </a:solidFill>
-                <a:latin typeface="Century Gothic"/>
-                <a:cs typeface="Century Gothic"/>
+                <a:latin typeface="Arial"/>
+                <a:cs typeface="Arial"/>
               </a:rPr>
               <a:t>Manuscript workshop 2: Introduction, Discussion, Abstract, Title</a:t>
             </a:r>
@@ -11676,8 +11652,8 @@
                 <a:solidFill>
                   <a:srgbClr val="FFFFFF"/>
                 </a:solidFill>
-                <a:latin typeface="Century Gothic"/>
-                <a:cs typeface="Century Gothic"/>
+                <a:latin typeface="Arial"/>
+                <a:cs typeface="Arial"/>
               </a:rPr>
               <a:t>GROUP WORK   |   30 min</a:t>
             </a:r>
@@ -11714,25 +11690,19 @@
               <a:spcBef>
                 <a:spcPts val="450"/>
               </a:spcBef>
-              <a:buNone/>
-            </a:pPr>
-            <a:r>
-              <a:rPr lang="en-US" sz="1650" b="1" dirty="0">
-                <a:solidFill>
-                  <a:srgbClr val="0D7377"/>
-                </a:solidFill>
-                <a:latin typeface="Century Gothic"/>
-                <a:cs typeface="Century Gothic"/>
-              </a:rPr>
-              <a:t>1.  </a:t>
-            </a:r>
+              <a:buClr>
+                <a:srgbClr val="0D7377"/>
+              </a:buClr>
+              <a:buFont typeface="Arial"/>
+              <a:buChar char="•"/>
+            </a:pPr>
             <a:r>
               <a:rPr lang="en-US" sz="1650" dirty="0">
                 <a:solidFill>
                   <a:srgbClr val="000000"/>
                 </a:solidFill>
-                <a:latin typeface="Century Gothic"/>
-                <a:cs typeface="Century Gothic"/>
+                <a:latin typeface="Arial"/>
+                <a:cs typeface="Arial"/>
               </a:rPr>
               <a:t>0-8: Introduction, three paragraphs (two people)</a:t>
             </a:r>
@@ -11745,25 +11715,19 @@
               <a:spcBef>
                 <a:spcPts val="450"/>
               </a:spcBef>
-              <a:buNone/>
-            </a:pPr>
-            <a:r>
-              <a:rPr lang="en-US" sz="1650" b="1" dirty="0">
-                <a:solidFill>
-                  <a:srgbClr val="0D7377"/>
-                </a:solidFill>
-                <a:latin typeface="Century Gothic"/>
-                <a:cs typeface="Century Gothic"/>
-              </a:rPr>
-              <a:t>2.  </a:t>
-            </a:r>
+              <a:buClr>
+                <a:srgbClr val="0D7377"/>
+              </a:buClr>
+              <a:buFont typeface="Arial"/>
+              <a:buChar char="•"/>
+            </a:pPr>
             <a:r>
               <a:rPr lang="en-US" sz="1650" dirty="0">
                 <a:solidFill>
                   <a:srgbClr val="000000"/>
                 </a:solidFill>
-                <a:latin typeface="Century Gothic"/>
-                <a:cs typeface="Century Gothic"/>
+                <a:latin typeface="Arial"/>
+                <a:cs typeface="Arial"/>
               </a:rPr>
               <a:t>0-15: Discussion, six moves (three people)</a:t>
             </a:r>
@@ -11776,25 +11740,19 @@
               <a:spcBef>
                 <a:spcPts val="450"/>
               </a:spcBef>
-              <a:buNone/>
-            </a:pPr>
-            <a:r>
-              <a:rPr lang="en-US" sz="1650" b="1" dirty="0">
-                <a:solidFill>
-                  <a:srgbClr val="0D7377"/>
-                </a:solidFill>
-                <a:latin typeface="Century Gothic"/>
-                <a:cs typeface="Century Gothic"/>
-              </a:rPr>
-              <a:t>3.  </a:t>
-            </a:r>
+              <a:buClr>
+                <a:srgbClr val="0D7377"/>
+              </a:buClr>
+              <a:buFont typeface="Arial"/>
+              <a:buChar char="•"/>
+            </a:pPr>
             <a:r>
               <a:rPr lang="en-US" sz="1650" dirty="0">
                 <a:solidFill>
                   <a:srgbClr val="000000"/>
                 </a:solidFill>
-                <a:latin typeface="Century Gothic"/>
-                <a:cs typeface="Century Gothic"/>
+                <a:latin typeface="Arial"/>
+                <a:cs typeface="Arial"/>
               </a:rPr>
               <a:t>15-23: Abstract of 250 words, numbers from your Results</a:t>
             </a:r>
@@ -11807,25 +11765,19 @@
               <a:spcBef>
                 <a:spcPts val="450"/>
               </a:spcBef>
-              <a:buNone/>
-            </a:pPr>
-            <a:r>
-              <a:rPr lang="en-US" sz="1650" b="1" dirty="0">
-                <a:solidFill>
-                  <a:srgbClr val="0D7377"/>
-                </a:solidFill>
-                <a:latin typeface="Century Gothic"/>
-                <a:cs typeface="Century Gothic"/>
-              </a:rPr>
-              <a:t>4.  </a:t>
-            </a:r>
+              <a:buClr>
+                <a:srgbClr val="0D7377"/>
+              </a:buClr>
+              <a:buFont typeface="Arial"/>
+              <a:buChar char="•"/>
+            </a:pPr>
             <a:r>
               <a:rPr lang="en-US" sz="1650" dirty="0">
                 <a:solidFill>
                   <a:srgbClr val="000000"/>
                 </a:solidFill>
-                <a:latin typeface="Century Gothic"/>
-                <a:cs typeface="Century Gothic"/>
+                <a:latin typeface="Arial"/>
+                <a:cs typeface="Arial"/>
               </a:rPr>
               <a:t>23-27: Title (10-16 words, design stated) + keywords</a:t>
             </a:r>
@@ -11838,25 +11790,19 @@
               <a:spcBef>
                 <a:spcPts val="450"/>
               </a:spcBef>
-              <a:buNone/>
-            </a:pPr>
-            <a:r>
-              <a:rPr lang="en-US" sz="1650" b="1" dirty="0">
-                <a:solidFill>
-                  <a:srgbClr val="0D7377"/>
-                </a:solidFill>
-                <a:latin typeface="Century Gothic"/>
-                <a:cs typeface="Century Gothic"/>
-              </a:rPr>
-              <a:t>5.  </a:t>
-            </a:r>
+              <a:buClr>
+                <a:srgbClr val="0D7377"/>
+              </a:buClr>
+              <a:buFont typeface="Arial"/>
+              <a:buChar char="•"/>
+            </a:pPr>
             <a:r>
               <a:rPr lang="en-US" sz="1650" dirty="0">
                 <a:solidFill>
                   <a:srgbClr val="000000"/>
                 </a:solidFill>
-                <a:latin typeface="Century Gothic"/>
-                <a:cs typeface="Century Gothic"/>
+                <a:latin typeface="Arial"/>
+                <a:cs typeface="Arial"/>
               </a:rPr>
               <a:t>27-30: verb check: every 'cause' or 'impact' → 'associated'</a:t>
             </a:r>
@@ -11900,8 +11846,8 @@
                 <a:solidFill>
                   <a:srgbClr val="0D7377"/>
                 </a:solidFill>
-                <a:latin typeface="Century Gothic"/>
-                <a:cs typeface="Century Gothic"/>
+                <a:latin typeface="Arial"/>
+                <a:cs typeface="Arial"/>
               </a:rPr>
               <a:t>Roles</a:t>
             </a:r>
@@ -11922,8 +11868,8 @@
                 <a:solidFill>
                   <a:srgbClr val="000000"/>
                 </a:solidFill>
-                <a:latin typeface="Century Gothic"/>
-                <a:cs typeface="Century Gothic"/>
+                <a:latin typeface="Arial"/>
+                <a:cs typeface="Arial"/>
               </a:rPr>
               <a:t>2 Introduction</a:t>
             </a:r>
@@ -11944,8 +11890,8 @@
                 <a:solidFill>
                   <a:srgbClr val="000000"/>
                 </a:solidFill>
-                <a:latin typeface="Century Gothic"/>
-                <a:cs typeface="Century Gothic"/>
+                <a:latin typeface="Arial"/>
+                <a:cs typeface="Arial"/>
               </a:rPr>
               <a:t>3 Discussion</a:t>
             </a:r>
@@ -11966,8 +11912,8 @@
                 <a:solidFill>
                   <a:srgbClr val="000000"/>
                 </a:solidFill>
-                <a:latin typeface="Century Gothic"/>
-                <a:cs typeface="Century Gothic"/>
+                <a:latin typeface="Arial"/>
+                <a:cs typeface="Arial"/>
               </a:rPr>
               <a:t>1 number + verb checker</a:t>
             </a:r>
@@ -11988,8 +11934,8 @@
                 <a:solidFill>
                   <a:srgbClr val="000000"/>
                 </a:solidFill>
-                <a:latin typeface="Century Gothic"/>
-                <a:cs typeface="Century Gothic"/>
+                <a:latin typeface="Arial"/>
+                <a:cs typeface="Arial"/>
               </a:rPr>
               <a:t>All: Abstract and Title together</a:t>
             </a:r>
@@ -12035,8 +11981,8 @@
                 <a:solidFill>
                   <a:srgbClr val="0D7377"/>
                 </a:solidFill>
-                <a:latin typeface="Century Gothic"/>
-                <a:cs typeface="Century Gothic"/>
+                <a:latin typeface="Arial"/>
+                <a:cs typeface="Arial"/>
               </a:rPr>
               <a:t>OUTPUT   </a:t>
             </a:r>
@@ -12045,8 +11991,8 @@
                 <a:solidFill>
                   <a:srgbClr val="000000"/>
                 </a:solidFill>
-                <a:latin typeface="Century Gothic"/>
-                <a:cs typeface="Century Gothic"/>
+                <a:latin typeface="Arial"/>
+                <a:cs typeface="Arial"/>
               </a:rPr>
               <a:t>Complete draft (~2,000 words) saved for the peer-review swap after the course</a:t>
             </a:r>
@@ -12083,7 +12029,7 @@
                     <a:lumMod val="50000"/>
                   </a:schemeClr>
                 </a:solidFill>
-                <a:latin typeface="Verdana"/>
+                <a:latin typeface="Arial"/>
               </a:rPr>
               <a:t>Neudata | #ClearDataClearImpact</a:t>
             </a:r>
@@ -12213,8 +12159,8 @@
                 <a:solidFill>
                   <a:srgbClr val="0D7377"/>
                 </a:solidFill>
-                <a:latin typeface="Century Gothic"/>
-                <a:cs typeface="Century Gothic"/>
+                <a:latin typeface="Arial"/>
+                <a:cs typeface="Arial"/>
               </a:rPr>
               <a:t>Break</a:t>
             </a:r>
@@ -12284,8 +12230,8 @@
                 <a:solidFill>
                   <a:srgbClr val="FFFFFF"/>
                 </a:solidFill>
-                <a:latin typeface="Century Gothic"/>
-                <a:cs typeface="Century Gothic"/>
+                <a:latin typeface="Arial"/>
+                <a:cs typeface="Arial"/>
               </a:rPr>
               <a:t>BREAK   |   15 min</a:t>
             </a:r>
@@ -12322,25 +12268,19 @@
               <a:spcBef>
                 <a:spcPts val="450"/>
               </a:spcBef>
-              <a:buNone/>
-            </a:pPr>
-            <a:r>
-              <a:rPr lang="en-US" sz="1650" b="1" dirty="0">
-                <a:solidFill>
-                  <a:srgbClr val="8A99A3"/>
-                </a:solidFill>
-                <a:latin typeface="Century Gothic"/>
-                <a:cs typeface="Century Gothic"/>
-              </a:rPr>
-              <a:t>1.  </a:t>
-            </a:r>
+              <a:buClr>
+                <a:srgbClr val="8A99A3"/>
+              </a:buClr>
+              <a:buFont typeface="Arial"/>
+              <a:buChar char="•"/>
+            </a:pPr>
             <a:r>
               <a:rPr lang="en-US" sz="1650" dirty="0">
                 <a:solidFill>
                   <a:srgbClr val="000000"/>
                 </a:solidFill>
-                <a:latin typeface="Century Gothic"/>
-                <a:cs typeface="Century Gothic"/>
+                <a:latin typeface="Arial"/>
+                <a:cs typeface="Arial"/>
               </a:rPr>
               <a:t>Save and send your manuscript draft</a:t>
             </a:r>
@@ -12353,25 +12293,19 @@
               <a:spcBef>
                 <a:spcPts val="450"/>
               </a:spcBef>
-              <a:buNone/>
-            </a:pPr>
-            <a:r>
-              <a:rPr lang="en-US" sz="1650" b="1" dirty="0">
-                <a:solidFill>
-                  <a:srgbClr val="8A99A3"/>
-                </a:solidFill>
-                <a:latin typeface="Century Gothic"/>
-                <a:cs typeface="Century Gothic"/>
-              </a:rPr>
-              <a:t>2.  </a:t>
-            </a:r>
+              <a:buClr>
+                <a:srgbClr val="8A99A3"/>
+              </a:buClr>
+              <a:buFont typeface="Arial"/>
+              <a:buChar char="•"/>
+            </a:pPr>
             <a:r>
               <a:rPr lang="en-US" sz="1650" dirty="0">
                 <a:solidFill>
                   <a:srgbClr val="000000"/>
                 </a:solidFill>
-                <a:latin typeface="Century Gothic"/>
-                <a:cs typeface="Century Gothic"/>
+                <a:latin typeface="Arial"/>
+                <a:cs typeface="Arial"/>
               </a:rPr>
               <a:t>Groups 1-3: collect Paper 1 (RCT) and the answer grid</a:t>
             </a:r>
@@ -12384,25 +12318,19 @@
               <a:spcBef>
                 <a:spcPts val="450"/>
               </a:spcBef>
-              <a:buNone/>
-            </a:pPr>
-            <a:r>
-              <a:rPr lang="en-US" sz="1650" b="1" dirty="0">
-                <a:solidFill>
-                  <a:srgbClr val="8A99A3"/>
-                </a:solidFill>
-                <a:latin typeface="Century Gothic"/>
-                <a:cs typeface="Century Gothic"/>
-              </a:rPr>
-              <a:t>3.  </a:t>
-            </a:r>
+              <a:buClr>
+                <a:srgbClr val="8A99A3"/>
+              </a:buClr>
+              <a:buFont typeface="Arial"/>
+              <a:buChar char="•"/>
+            </a:pPr>
             <a:r>
               <a:rPr lang="en-US" sz="1650" dirty="0">
                 <a:solidFill>
                   <a:srgbClr val="000000"/>
                 </a:solidFill>
-                <a:latin typeface="Century Gothic"/>
-                <a:cs typeface="Century Gothic"/>
+                <a:latin typeface="Arial"/>
+                <a:cs typeface="Arial"/>
               </a:rPr>
               <a:t>Groups 4-5: collect Paper 2 (cohort) and the answer grid</a:t>
             </a:r>
@@ -12415,25 +12343,19 @@
               <a:spcBef>
                 <a:spcPts val="450"/>
               </a:spcBef>
-              <a:buNone/>
-            </a:pPr>
-            <a:r>
-              <a:rPr lang="en-US" sz="1650" b="1" dirty="0">
-                <a:solidFill>
-                  <a:srgbClr val="8A99A3"/>
-                </a:solidFill>
-                <a:latin typeface="Century Gothic"/>
-                <a:cs typeface="Century Gothic"/>
-              </a:rPr>
-              <a:t>4.  </a:t>
-            </a:r>
+              <a:buClr>
+                <a:srgbClr val="8A99A3"/>
+              </a:buClr>
+              <a:buFont typeface="Arial"/>
+              <a:buChar char="•"/>
+            </a:pPr>
             <a:r>
               <a:rPr lang="en-US" sz="1650" dirty="0">
                 <a:solidFill>
                   <a:srgbClr val="000000"/>
                 </a:solidFill>
-                <a:latin typeface="Century Gothic"/>
-                <a:cs typeface="Century Gothic"/>
+                <a:latin typeface="Arial"/>
+                <a:cs typeface="Arial"/>
               </a:rPr>
               <a:t>Presenters: check your slides open on the presentation laptop</a:t>
             </a:r>
@@ -12446,25 +12368,19 @@
               <a:spcBef>
                 <a:spcPts val="450"/>
               </a:spcBef>
-              <a:buNone/>
-            </a:pPr>
-            <a:r>
-              <a:rPr lang="en-US" sz="1650" b="1" dirty="0">
-                <a:solidFill>
-                  <a:srgbClr val="8A99A3"/>
-                </a:solidFill>
-                <a:latin typeface="Century Gothic"/>
-                <a:cs typeface="Century Gothic"/>
-              </a:rPr>
-              <a:t>5.  </a:t>
-            </a:r>
+              <a:buClr>
+                <a:srgbClr val="8A99A3"/>
+              </a:buClr>
+              <a:buFont typeface="Arial"/>
+              <a:buChar char="•"/>
+            </a:pPr>
             <a:r>
               <a:rPr lang="en-US" sz="1650" dirty="0">
                 <a:solidFill>
                   <a:srgbClr val="000000"/>
                 </a:solidFill>
-                <a:latin typeface="Century Gothic"/>
-                <a:cs typeface="Century Gothic"/>
+                <a:latin typeface="Arial"/>
+                <a:cs typeface="Arial"/>
               </a:rPr>
               <a:t>Back at 1:15 sharp</a:t>
             </a:r>
@@ -12508,8 +12424,8 @@
                 <a:solidFill>
                   <a:srgbClr val="8A99A3"/>
                 </a:solidFill>
-                <a:latin typeface="Century Gothic"/>
-                <a:cs typeface="Century Gothic"/>
+                <a:latin typeface="Arial"/>
+                <a:cs typeface="Arial"/>
               </a:rPr>
               <a:t>After the break</a:t>
             </a:r>
@@ -12530,8 +12446,8 @@
                 <a:solidFill>
                   <a:srgbClr val="000000"/>
                 </a:solidFill>
-                <a:latin typeface="Century Gothic"/>
-                <a:cs typeface="Century Gothic"/>
+                <a:latin typeface="Arial"/>
+                <a:cs typeface="Arial"/>
               </a:rPr>
               <a:t>Getting published (25 min)</a:t>
             </a:r>
@@ -12552,8 +12468,8 @@
                 <a:solidFill>
                   <a:srgbClr val="000000"/>
                 </a:solidFill>
-                <a:latin typeface="Century Gothic"/>
-                <a:cs typeface="Century Gothic"/>
+                <a:latin typeface="Arial"/>
+                <a:cs typeface="Arial"/>
               </a:rPr>
               <a:t>Be the reviewer (20 min)</a:t>
             </a:r>
@@ -12574,8 +12490,8 @@
                 <a:solidFill>
                   <a:srgbClr val="000000"/>
                 </a:solidFill>
-                <a:latin typeface="Century Gothic"/>
-                <a:cs typeface="Century Gothic"/>
+                <a:latin typeface="Arial"/>
+                <a:cs typeface="Arial"/>
               </a:rPr>
               <a:t>Group presentations (45 min)</a:t>
             </a:r>
@@ -12612,7 +12528,7 @@
                     <a:lumMod val="50000"/>
                   </a:schemeClr>
                 </a:solidFill>
-                <a:latin typeface="Verdana"/>
+                <a:latin typeface="Arial"/>
               </a:rPr>
               <a:t>Neudata | #ClearDataClearImpact</a:t>
             </a:r>
@@ -12742,8 +12658,8 @@
                 <a:solidFill>
                   <a:srgbClr val="0D7377"/>
                 </a:solidFill>
-                <a:latin typeface="Century Gothic"/>
-                <a:cs typeface="Century Gothic"/>
+                <a:latin typeface="Arial"/>
+                <a:cs typeface="Arial"/>
               </a:rPr>
               <a:t>8.2  |  25 minutes</a:t>
             </a:r>
@@ -12812,8 +12728,8 @@
                 <a:solidFill>
                   <a:srgbClr val="0D7377"/>
                 </a:solidFill>
-                <a:latin typeface="Century Gothic"/>
-                <a:cs typeface="Century Gothic"/>
+                <a:latin typeface="Arial"/>
+                <a:cs typeface="Arial"/>
               </a:rPr>
               <a:t>Getting published</a:t>
             </a:r>
@@ -12830,8 +12746,8 @@
                 <a:solidFill>
                   <a:srgbClr val="595959"/>
                 </a:solidFill>
-                <a:latin typeface="Century Gothic"/>
-                <a:cs typeface="Century Gothic"/>
+                <a:latin typeface="Arial"/>
+                <a:cs typeface="Arial"/>
               </a:rPr>
               <a:t>From checklist to proofs, and the traps on the way</a:t>
             </a:r>
@@ -12868,7 +12784,7 @@
                     <a:lumMod val="50000"/>
                   </a:schemeClr>
                 </a:solidFill>
-                <a:latin typeface="Verdana"/>
+                <a:latin typeface="Arial"/>
               </a:rPr>
               <a:t>Neudata | #ClearDataClearImpact</a:t>
             </a:r>
@@ -12998,8 +12914,8 @@
                 <a:solidFill>
                   <a:srgbClr val="0D7377"/>
                 </a:solidFill>
-                <a:latin typeface="Century Gothic"/>
-                <a:cs typeface="Century Gothic"/>
+                <a:latin typeface="Arial"/>
+                <a:cs typeface="Arial"/>
               </a:rPr>
               <a:t>Reporting guidelines: choose by design</a:t>
             </a:r>
@@ -13095,8 +13011,8 @@
                 <a:solidFill>
                   <a:srgbClr val="FFFFFF"/>
                 </a:solidFill>
-                <a:latin typeface="Century Gothic"/>
-                <a:cs typeface="Century Gothic"/>
+                <a:latin typeface="Arial"/>
+                <a:cs typeface="Arial"/>
               </a:rPr>
               <a:t>KEY MESSAGE   </a:t>
             </a:r>
@@ -13105,8 +13021,8 @@
                 <a:solidFill>
                   <a:srgbClr val="FFFFFF"/>
                 </a:solidFill>
-                <a:latin typeface="Century Gothic"/>
-                <a:cs typeface="Century Gothic"/>
+                <a:latin typeface="Arial"/>
+                <a:cs typeface="Arial"/>
               </a:rPr>
               <a:t>Name your guideline in Part 4 and use it as a writing checklist.</a:t>
             </a:r>
@@ -13143,7 +13059,7 @@
                     <a:lumMod val="50000"/>
                   </a:schemeClr>
                 </a:solidFill>
-                <a:latin typeface="Verdana"/>
+                <a:latin typeface="Arial"/>
               </a:rPr>
               <a:t>Neudata | #ClearDataClearImpact</a:t>
             </a:r>
@@ -13273,8 +13189,8 @@
                 <a:solidFill>
                   <a:srgbClr val="0D7377"/>
                 </a:solidFill>
-                <a:latin typeface="Century Gothic"/>
-                <a:cs typeface="Century Gothic"/>
+                <a:latin typeface="Arial"/>
+                <a:cs typeface="Arial"/>
               </a:rPr>
               <a:t>Recap: three questions from Session 7</a:t>
             </a:r>
@@ -13344,8 +13260,8 @@
                 <a:solidFill>
                   <a:srgbClr val="FFFFFF"/>
                 </a:solidFill>
-                <a:latin typeface="Century Gothic"/>
-                <a:cs typeface="Century Gothic"/>
+                <a:latin typeface="Arial"/>
+                <a:cs typeface="Arial"/>
               </a:rPr>
               <a:t>QUICK QUIZ   |   5 min</a:t>
             </a:r>
@@ -13382,25 +13298,19 @@
               <a:spcBef>
                 <a:spcPts val="450"/>
               </a:spcBef>
-              <a:buNone/>
-            </a:pPr>
-            <a:r>
-              <a:rPr lang="en-US" sz="1650" b="1" dirty="0">
-                <a:solidFill>
-                  <a:srgbClr val="6C3483"/>
-                </a:solidFill>
-                <a:latin typeface="Century Gothic"/>
-                <a:cs typeface="Century Gothic"/>
-              </a:rPr>
-              <a:t>1.  </a:t>
-            </a:r>
+              <a:buClr>
+                <a:srgbClr val="6C3483"/>
+              </a:buClr>
+              <a:buFont typeface="Arial"/>
+              <a:buChar char="•"/>
+            </a:pPr>
             <a:r>
               <a:rPr lang="en-US" sz="1650" dirty="0">
                 <a:solidFill>
                   <a:srgbClr val="000000"/>
                 </a:solidFill>
-                <a:latin typeface="Century Gothic"/>
-                <a:cs typeface="Century Gothic"/>
+                <a:latin typeface="Arial"/>
+                <a:cs typeface="Arial"/>
               </a:rPr>
               <a:t>Who consents for a sedated patient in septic shock?</a:t>
             </a:r>
@@ -13413,25 +13323,19 @@
               <a:spcBef>
                 <a:spcPts val="450"/>
               </a:spcBef>
-              <a:buNone/>
-            </a:pPr>
-            <a:r>
-              <a:rPr lang="en-US" sz="1650" b="1" dirty="0">
-                <a:solidFill>
-                  <a:srgbClr val="6C3483"/>
-                </a:solidFill>
-                <a:latin typeface="Century Gothic"/>
-                <a:cs typeface="Century Gothic"/>
-              </a:rPr>
-              <a:t>2.  </a:t>
-            </a:r>
+              <a:buClr>
+                <a:srgbClr val="6C3483"/>
+              </a:buClr>
+              <a:buFont typeface="Arial"/>
+              <a:buChar char="•"/>
+            </a:pPr>
             <a:r>
               <a:rPr lang="en-US" sz="1650" dirty="0">
                 <a:solidFill>
                   <a:srgbClr val="000000"/>
                 </a:solidFill>
-                <a:latin typeface="Century Gothic"/>
-                <a:cs typeface="Century Gothic"/>
+                <a:latin typeface="Arial"/>
+                <a:cs typeface="Arial"/>
               </a:rPr>
               <a:t>Which STROBE item asks for crude AND adjusted estimates?</a:t>
             </a:r>
@@ -13444,25 +13348,19 @@
               <a:spcBef>
                 <a:spcPts val="450"/>
               </a:spcBef>
-              <a:buNone/>
-            </a:pPr>
-            <a:r>
-              <a:rPr lang="en-US" sz="1650" b="1" dirty="0">
-                <a:solidFill>
-                  <a:srgbClr val="6C3483"/>
-                </a:solidFill>
-                <a:latin typeface="Century Gothic"/>
-                <a:cs typeface="Century Gothic"/>
-              </a:rPr>
-              <a:t>3.  </a:t>
-            </a:r>
+              <a:buClr>
+                <a:srgbClr val="6C3483"/>
+              </a:buClr>
+              <a:buFont typeface="Arial"/>
+              <a:buChar char="•"/>
+            </a:pPr>
             <a:r>
               <a:rPr lang="en-US" sz="1650" dirty="0">
                 <a:solidFill>
                   <a:srgbClr val="000000"/>
                 </a:solidFill>
-                <a:latin typeface="Century Gothic"/>
-                <a:cs typeface="Century Gothic"/>
+                <a:latin typeface="Arial"/>
+                <a:cs typeface="Arial"/>
               </a:rPr>
               <a:t>Where does 'this may be because sicker patients got more fluid' belong?</a:t>
             </a:r>
@@ -13506,8 +13404,8 @@
                 <a:solidFill>
                   <a:srgbClr val="6C3483"/>
                 </a:solidFill>
-                <a:latin typeface="Century Gothic"/>
-                <a:cs typeface="Century Gothic"/>
+                <a:latin typeface="Arial"/>
+                <a:cs typeface="Arial"/>
               </a:rPr>
               <a:t>Answers</a:t>
             </a:r>
@@ -13528,8 +13426,8 @@
                 <a:solidFill>
                   <a:srgbClr val="000000"/>
                 </a:solidFill>
-                <a:latin typeface="Century Gothic"/>
-                <a:cs typeface="Century Gothic"/>
+                <a:latin typeface="Arial"/>
+                <a:cs typeface="Arial"/>
               </a:rPr>
               <a:t>The legal representative (or deferred consent if approved)</a:t>
             </a:r>
@@ -13550,8 +13448,8 @@
                 <a:solidFill>
                   <a:srgbClr val="000000"/>
                 </a:solidFill>
-                <a:latin typeface="Century Gothic"/>
-                <a:cs typeface="Century Gothic"/>
+                <a:latin typeface="Arial"/>
+                <a:cs typeface="Arial"/>
               </a:rPr>
               <a:t>Item 16 (main results)</a:t>
             </a:r>
@@ -13572,8 +13470,8 @@
                 <a:solidFill>
                   <a:srgbClr val="000000"/>
                 </a:solidFill>
-                <a:latin typeface="Century Gothic"/>
-                <a:cs typeface="Century Gothic"/>
+                <a:latin typeface="Arial"/>
+                <a:cs typeface="Arial"/>
               </a:rPr>
               <a:t>Discussion, not Results</a:t>
             </a:r>
@@ -13619,8 +13517,8 @@
                 <a:solidFill>
                   <a:srgbClr val="6C3483"/>
                 </a:solidFill>
-                <a:latin typeface="Century Gothic"/>
-                <a:cs typeface="Century Gothic"/>
+                <a:latin typeface="Arial"/>
+                <a:cs typeface="Arial"/>
               </a:rPr>
               <a:t>OUTPUT   </a:t>
             </a:r>
@@ -13629,8 +13527,8 @@
                 <a:solidFill>
                   <a:srgbClr val="000000"/>
                 </a:solidFill>
-                <a:latin typeface="Century Gothic"/>
-                <a:cs typeface="Century Gothic"/>
+                <a:latin typeface="Arial"/>
+                <a:cs typeface="Arial"/>
               </a:rPr>
               <a:t>Everyone back in writing mode</a:t>
             </a:r>
@@ -13667,7 +13565,7 @@
                     <a:lumMod val="50000"/>
                   </a:schemeClr>
                 </a:solidFill>
-                <a:latin typeface="Verdana"/>
+                <a:latin typeface="Arial"/>
               </a:rPr>
               <a:t>Neudata | #ClearDataClearImpact</a:t>
             </a:r>
@@ -13797,8 +13695,8 @@
                 <a:solidFill>
                   <a:srgbClr val="0D7377"/>
                 </a:solidFill>
-                <a:latin typeface="Century Gothic"/>
-                <a:cs typeface="Century Gothic"/>
+                <a:latin typeface="Arial"/>
+                <a:cs typeface="Arial"/>
               </a:rPr>
               <a:t>Choosing a journal: four checks</a:t>
             </a:r>
@@ -13864,8 +13762,8 @@
                 <a:solidFill>
                   <a:srgbClr val="595959"/>
                 </a:solidFill>
-                <a:latin typeface="Century Gothic"/>
-                <a:cs typeface="Century Gothic"/>
+                <a:latin typeface="Arial"/>
+                <a:cs typeface="Arial"/>
               </a:rPr>
               <a:t>Decide the target journal before you write: it sets the rules.</a:t>
             </a:r>
@@ -13907,8 +13805,8 @@
                 <a:solidFill>
                   <a:srgbClr val="FFFFFF"/>
                 </a:solidFill>
-                <a:latin typeface="Century Gothic"/>
-                <a:cs typeface="Century Gothic"/>
+                <a:latin typeface="Arial"/>
+                <a:cs typeface="Arial"/>
               </a:rPr>
               <a:t>Fit</a:t>
             </a:r>
@@ -13956,8 +13854,8 @@
                 <a:solidFill>
                   <a:srgbClr val="000000"/>
                 </a:solidFill>
-                <a:latin typeface="Century Gothic"/>
-                <a:cs typeface="Century Gothic"/>
+                <a:latin typeface="Arial"/>
+                <a:cs typeface="Arial"/>
               </a:rPr>
               <a:t>Who needs your result?</a:t>
             </a:r>
@@ -13977,8 +13875,8 @@
                 <a:solidFill>
                   <a:srgbClr val="000000"/>
                 </a:solidFill>
-                <a:latin typeface="Century Gothic"/>
-                <a:cs typeface="Century Gothic"/>
+                <a:latin typeface="Arial"/>
+                <a:cs typeface="Arial"/>
               </a:rPr>
               <a:t>Read 3 recent issues</a:t>
             </a:r>
@@ -13998,8 +13896,8 @@
                 <a:solidFill>
                   <a:srgbClr val="000000"/>
                 </a:solidFill>
-                <a:latin typeface="Century Gothic"/>
-                <a:cs typeface="Century Gothic"/>
+                <a:latin typeface="Arial"/>
+                <a:cs typeface="Arial"/>
               </a:rPr>
               <a:t>Similar designs published?</a:t>
             </a:r>
@@ -14041,8 +13939,8 @@
                 <a:solidFill>
                   <a:srgbClr val="FFFFFF"/>
                 </a:solidFill>
-                <a:latin typeface="Century Gothic"/>
-                <a:cs typeface="Century Gothic"/>
+                <a:latin typeface="Arial"/>
+                <a:cs typeface="Arial"/>
               </a:rPr>
               <a:t>Trust</a:t>
             </a:r>
@@ -14090,8 +13988,8 @@
                 <a:solidFill>
                   <a:srgbClr val="000000"/>
                 </a:solidFill>
-                <a:latin typeface="Century Gothic"/>
-                <a:cs typeface="Century Gothic"/>
+                <a:latin typeface="Arial"/>
+                <a:cs typeface="Arial"/>
               </a:rPr>
               <a:t>Indexed: MEDLINE, DOAJ, Scopus or Web of Science</a:t>
             </a:r>
@@ -14111,8 +14009,8 @@
                 <a:solidFill>
                   <a:srgbClr val="000000"/>
                 </a:solidFill>
-                <a:latin typeface="Century Gothic"/>
-                <a:cs typeface="Century Gothic"/>
+                <a:latin typeface="Arial"/>
+                <a:cs typeface="Arial"/>
               </a:rPr>
               <a:t>Clear peer-review policy</a:t>
             </a:r>
@@ -14154,8 +14052,8 @@
                 <a:solidFill>
                   <a:srgbClr val="FFFFFF"/>
                 </a:solidFill>
-                <a:latin typeface="Century Gothic"/>
-                <a:cs typeface="Century Gothic"/>
+                <a:latin typeface="Arial"/>
+                <a:cs typeface="Arial"/>
               </a:rPr>
               <a:t>Rules</a:t>
             </a:r>
@@ -14203,8 +14101,8 @@
                 <a:solidFill>
                   <a:srgbClr val="000000"/>
                 </a:solidFill>
-                <a:latin typeface="Century Gothic"/>
-                <a:cs typeface="Century Gothic"/>
+                <a:latin typeface="Arial"/>
+                <a:cs typeface="Arial"/>
               </a:rPr>
               <a:t>Guide for Authors</a:t>
             </a:r>
@@ -14224,8 +14122,8 @@
                 <a:solidFill>
                   <a:srgbClr val="000000"/>
                 </a:solidFill>
-                <a:latin typeface="Century Gothic"/>
-                <a:cs typeface="Century Gothic"/>
+                <a:latin typeface="Arial"/>
+                <a:cs typeface="Arial"/>
               </a:rPr>
               <a:t>Word limit, checklist</a:t>
             </a:r>
@@ -14245,8 +14143,8 @@
                 <a:solidFill>
                   <a:srgbClr val="000000"/>
                 </a:solidFill>
-                <a:latin typeface="Century Gothic"/>
-                <a:cs typeface="Century Gothic"/>
+                <a:latin typeface="Arial"/>
+                <a:cs typeface="Arial"/>
               </a:rPr>
               <a:t>Registration required?</a:t>
             </a:r>
@@ -14288,8 +14186,8 @@
                 <a:solidFill>
                   <a:srgbClr val="FFFFFF"/>
                 </a:solidFill>
-                <a:latin typeface="Century Gothic"/>
-                <a:cs typeface="Century Gothic"/>
+                <a:latin typeface="Arial"/>
+                <a:cs typeface="Arial"/>
               </a:rPr>
               <a:t>Cost &amp; speed</a:t>
             </a:r>
@@ -14337,8 +14235,8 @@
                 <a:solidFill>
                   <a:srgbClr val="000000"/>
                 </a:solidFill>
-                <a:latin typeface="Century Gothic"/>
-                <a:cs typeface="Century Gothic"/>
+                <a:latin typeface="Arial"/>
+                <a:cs typeface="Arial"/>
               </a:rPr>
               <a:t>Fee (APC) and waivers</a:t>
             </a:r>
@@ -14358,8 +14256,8 @@
                 <a:solidFill>
                   <a:srgbClr val="000000"/>
                 </a:solidFill>
-                <a:latin typeface="Century Gothic"/>
-                <a:cs typeface="Century Gothic"/>
+                <a:latin typeface="Arial"/>
+                <a:cs typeface="Arial"/>
               </a:rPr>
               <a:t>Licence: CC BY or BY-NC-ND</a:t>
             </a:r>
@@ -14379,8 +14277,8 @@
                 <a:solidFill>
                   <a:srgbClr val="000000"/>
                 </a:solidFill>
-                <a:latin typeface="Century Gothic"/>
-                <a:cs typeface="Century Gothic"/>
+                <a:latin typeface="Arial"/>
+                <a:cs typeface="Arial"/>
               </a:rPr>
               <a:t>Paper 1: 7 weeks; Paper 2: 7 months</a:t>
             </a:r>
@@ -14424,8 +14322,8 @@
                 <a:solidFill>
                   <a:srgbClr val="FFFFFF"/>
                 </a:solidFill>
-                <a:latin typeface="Century Gothic"/>
-                <a:cs typeface="Century Gothic"/>
+                <a:latin typeface="Arial"/>
+                <a:cs typeface="Arial"/>
               </a:rPr>
               <a:t>KEY MESSAGE   </a:t>
             </a:r>
@@ -14434,8 +14332,8 @@
                 <a:solidFill>
                   <a:srgbClr val="FFFFFF"/>
                 </a:solidFill>
-                <a:latin typeface="Century Gothic"/>
-                <a:cs typeface="Century Gothic"/>
+                <a:latin typeface="Arial"/>
+                <a:cs typeface="Arial"/>
               </a:rPr>
               <a:t>A good journal is one your readers read, and one that is honestly run.</a:t>
             </a:r>
@@ -14472,7 +14370,7 @@
                     <a:lumMod val="50000"/>
                   </a:schemeClr>
                 </a:solidFill>
-                <a:latin typeface="Verdana"/>
+                <a:latin typeface="Arial"/>
               </a:rPr>
               <a:t>Neudata | #ClearDataClearImpact</a:t>
             </a:r>
@@ -14602,8 +14500,8 @@
                 <a:solidFill>
                   <a:srgbClr val="0D7377"/>
                 </a:solidFill>
-                <a:latin typeface="Century Gothic"/>
-                <a:cs typeface="Century Gothic"/>
+                <a:latin typeface="Arial"/>
+                <a:cs typeface="Arial"/>
               </a:rPr>
               <a:t>Preprints, open access and licences</a:t>
             </a:r>
@@ -14673,8 +14571,8 @@
                 <a:solidFill>
                   <a:srgbClr val="FFFFFF"/>
                 </a:solidFill>
-                <a:latin typeface="Century Gothic"/>
-                <a:cs typeface="Century Gothic"/>
+                <a:latin typeface="Arial"/>
+                <a:cs typeface="Arial"/>
               </a:rPr>
               <a:t>Preprint</a:t>
             </a:r>
@@ -14722,8 +14620,8 @@
                 <a:solidFill>
                   <a:srgbClr val="000000"/>
                 </a:solidFill>
-                <a:latin typeface="Century Gothic"/>
-                <a:cs typeface="Century Gothic"/>
+                <a:latin typeface="Arial"/>
+                <a:cs typeface="Arial"/>
               </a:rPr>
               <a:t>Posted before peer review (e.g. medRxiv)</a:t>
             </a:r>
@@ -14743,8 +14641,8 @@
                 <a:solidFill>
                   <a:srgbClr val="000000"/>
                 </a:solidFill>
-                <a:latin typeface="Century Gothic"/>
-                <a:cs typeface="Century Gothic"/>
+                <a:latin typeface="Arial"/>
+                <a:cs typeface="Arial"/>
               </a:rPr>
               <a:t>Fast, timestamped, open feedback</a:t>
             </a:r>
@@ -14764,8 +14662,8 @@
                 <a:solidFill>
                   <a:srgbClr val="000000"/>
                 </a:solidFill>
-                <a:latin typeface="Century Gothic"/>
-                <a:cs typeface="Century Gothic"/>
+                <a:latin typeface="Arial"/>
+                <a:cs typeface="Arial"/>
               </a:rPr>
               <a:t>NOT peer-reviewed: say so</a:t>
             </a:r>
@@ -14785,8 +14683,8 @@
                 <a:solidFill>
                   <a:srgbClr val="000000"/>
                 </a:solidFill>
-                <a:latin typeface="Century Gothic"/>
-                <a:cs typeface="Century Gothic"/>
+                <a:latin typeface="Arial"/>
+                <a:cs typeface="Arial"/>
               </a:rPr>
               <a:t>Check the journal's policy</a:t>
             </a:r>
@@ -14828,8 +14726,8 @@
                 <a:solidFill>
                   <a:srgbClr val="FFFFFF"/>
                 </a:solidFill>
-                <a:latin typeface="Century Gothic"/>
-                <a:cs typeface="Century Gothic"/>
+                <a:latin typeface="Arial"/>
+                <a:cs typeface="Arial"/>
               </a:rPr>
               <a:t>Open access</a:t>
             </a:r>
@@ -14877,8 +14775,8 @@
                 <a:solidFill>
                   <a:srgbClr val="000000"/>
                 </a:solidFill>
-                <a:latin typeface="Century Gothic"/>
-                <a:cs typeface="Century Gothic"/>
+                <a:latin typeface="Arial"/>
+                <a:cs typeface="Arial"/>
               </a:rPr>
               <a:t>Free for everyone to read</a:t>
             </a:r>
@@ -14898,8 +14796,8 @@
                 <a:solidFill>
                   <a:srgbClr val="000000"/>
                 </a:solidFill>
-                <a:latin typeface="Century Gothic"/>
-                <a:cs typeface="Century Gothic"/>
+                <a:latin typeface="Arial"/>
+                <a:cs typeface="Arial"/>
               </a:rPr>
               <a:t>Gold: journal charges a fee (APC)</a:t>
             </a:r>
@@ -14919,8 +14817,8 @@
                 <a:solidFill>
                   <a:srgbClr val="000000"/>
                 </a:solidFill>
-                <a:latin typeface="Century Gothic"/>
-                <a:cs typeface="Century Gothic"/>
+                <a:latin typeface="Arial"/>
+                <a:cs typeface="Arial"/>
               </a:rPr>
               <a:t>Green: accepted version in a repository</a:t>
             </a:r>
@@ -14940,8 +14838,8 @@
                 <a:solidFill>
                   <a:srgbClr val="000000"/>
                 </a:solidFill>
-                <a:latin typeface="Century Gothic"/>
-                <a:cs typeface="Century Gothic"/>
+                <a:latin typeface="Arial"/>
+                <a:cs typeface="Arial"/>
               </a:rPr>
               <a:t>Ask about fee waivers</a:t>
             </a:r>
@@ -14983,8 +14881,8 @@
                 <a:solidFill>
                   <a:srgbClr val="FFFFFF"/>
                 </a:solidFill>
-                <a:latin typeface="Century Gothic"/>
-                <a:cs typeface="Century Gothic"/>
+                <a:latin typeface="Arial"/>
+                <a:cs typeface="Arial"/>
               </a:rPr>
               <a:t>Licence</a:t>
             </a:r>
@@ -15032,8 +14930,8 @@
                 <a:solidFill>
                   <a:srgbClr val="000000"/>
                 </a:solidFill>
-                <a:latin typeface="Century Gothic"/>
-                <a:cs typeface="Century Gothic"/>
+                <a:latin typeface="Arial"/>
+                <a:cs typeface="Arial"/>
               </a:rPr>
               <a:t>CC BY: re-use with credit (Paper 2)</a:t>
             </a:r>
@@ -15053,8 +14951,8 @@
                 <a:solidFill>
                   <a:srgbClr val="000000"/>
                 </a:solidFill>
-                <a:latin typeface="Century Gothic"/>
-                <a:cs typeface="Century Gothic"/>
+                <a:latin typeface="Arial"/>
+                <a:cs typeface="Arial"/>
               </a:rPr>
               <a:t>CC BY-NC-ND: share, no changes (Paper 1)</a:t>
             </a:r>
@@ -15074,8 +14972,8 @@
                 <a:solidFill>
                   <a:srgbClr val="000000"/>
                 </a:solidFill>
-                <a:latin typeface="Century Gothic"/>
-                <a:cs typeface="Century Gothic"/>
+                <a:latin typeface="Arial"/>
+                <a:cs typeface="Arial"/>
               </a:rPr>
               <a:t>Read it before you sign</a:t>
             </a:r>
@@ -15119,8 +15017,8 @@
                 <a:solidFill>
                   <a:srgbClr val="FFFFFF"/>
                 </a:solidFill>
-                <a:latin typeface="Century Gothic"/>
-                <a:cs typeface="Century Gothic"/>
+                <a:latin typeface="Arial"/>
+                <a:cs typeface="Arial"/>
               </a:rPr>
               <a:t>KEY MESSAGE   </a:t>
             </a:r>
@@ -15129,8 +15027,8 @@
                 <a:solidFill>
                   <a:srgbClr val="FFFFFF"/>
                 </a:solidFill>
-                <a:latin typeface="Century Gothic"/>
-                <a:cs typeface="Century Gothic"/>
+                <a:latin typeface="Arial"/>
+                <a:cs typeface="Arial"/>
               </a:rPr>
               <a:t>Know who can read, re-use and pay before you submit.</a:t>
             </a:r>
@@ -15167,7 +15065,7 @@
                     <a:lumMod val="50000"/>
                   </a:schemeClr>
                 </a:solidFill>
-                <a:latin typeface="Verdana"/>
+                <a:latin typeface="Arial"/>
               </a:rPr>
               <a:t>Neudata | #ClearDataClearImpact</a:t>
             </a:r>
@@ -15297,8 +15195,8 @@
                 <a:solidFill>
                   <a:srgbClr val="0D7377"/>
                 </a:solidFill>
-                <a:latin typeface="Century Gothic"/>
-                <a:cs typeface="Century Gothic"/>
+                <a:latin typeface="Arial"/>
+                <a:cs typeface="Arial"/>
               </a:rPr>
               <a:t>Spot the predatory journal</a:t>
             </a:r>
@@ -15394,8 +15292,8 @@
                 <a:solidFill>
                   <a:srgbClr val="FFFFFF"/>
                 </a:solidFill>
-                <a:latin typeface="Century Gothic"/>
-                <a:cs typeface="Century Gothic"/>
+                <a:latin typeface="Arial"/>
+                <a:cs typeface="Arial"/>
               </a:rPr>
               <a:t>KEY MESSAGE   </a:t>
             </a:r>
@@ -15404,8 +15302,8 @@
                 <a:solidFill>
                   <a:srgbClr val="FFFFFF"/>
                 </a:solidFill>
-                <a:latin typeface="Century Gothic"/>
-                <a:cs typeface="Century Gothic"/>
+                <a:latin typeface="Arial"/>
+                <a:cs typeface="Arial"/>
               </a:rPr>
               <a:t>If a journal finds you by flattering e-mail, check it twice.</a:t>
             </a:r>
@@ -15442,7 +15340,7 @@
                     <a:lumMod val="50000"/>
                   </a:schemeClr>
                 </a:solidFill>
-                <a:latin typeface="Verdana"/>
+                <a:latin typeface="Arial"/>
               </a:rPr>
               <a:t>Neudata | #ClearDataClearImpact</a:t>
             </a:r>
@@ -15572,8 +15470,8 @@
                 <a:solidFill>
                   <a:srgbClr val="0D7377"/>
                 </a:solidFill>
-                <a:latin typeface="Century Gothic"/>
-                <a:cs typeface="Century Gothic"/>
+                <a:latin typeface="Arial"/>
+                <a:cs typeface="Arial"/>
               </a:rPr>
               <a:t>Live demo: find a checklist and check a journal</a:t>
             </a:r>
@@ -15643,8 +15541,8 @@
                 <a:solidFill>
                   <a:srgbClr val="FFFFFF"/>
                 </a:solidFill>
-                <a:latin typeface="Century Gothic"/>
-                <a:cs typeface="Century Gothic"/>
+                <a:latin typeface="Arial"/>
+                <a:cs typeface="Arial"/>
               </a:rPr>
               <a:t>LIVE DEMO   |   3 min</a:t>
             </a:r>
@@ -15681,25 +15579,19 @@
               <a:spcBef>
                 <a:spcPts val="450"/>
               </a:spcBef>
-              <a:buNone/>
-            </a:pPr>
-            <a:r>
-              <a:rPr lang="en-US" sz="1650" b="1" dirty="0">
-                <a:solidFill>
-                  <a:srgbClr val="B5651D"/>
-                </a:solidFill>
-                <a:latin typeface="Century Gothic"/>
-                <a:cs typeface="Century Gothic"/>
-              </a:rPr>
-              <a:t>1.  </a:t>
-            </a:r>
+              <a:buClr>
+                <a:srgbClr val="B5651D"/>
+              </a:buClr>
+              <a:buFont typeface="Arial"/>
+              <a:buChar char="•"/>
+            </a:pPr>
             <a:r>
               <a:rPr lang="en-US" sz="1650" dirty="0">
                 <a:solidFill>
                   <a:srgbClr val="000000"/>
                 </a:solidFill>
-                <a:latin typeface="Century Gothic"/>
-                <a:cs typeface="Century Gothic"/>
+                <a:latin typeface="Arial"/>
+                <a:cs typeface="Arial"/>
               </a:rPr>
               <a:t>Open the EQUATOR Network website and search 'CONSORT'</a:t>
             </a:r>
@@ -15712,25 +15604,19 @@
               <a:spcBef>
                 <a:spcPts val="450"/>
               </a:spcBef>
-              <a:buNone/>
-            </a:pPr>
-            <a:r>
-              <a:rPr lang="en-US" sz="1650" b="1" dirty="0">
-                <a:solidFill>
-                  <a:srgbClr val="B5651D"/>
-                </a:solidFill>
-                <a:latin typeface="Century Gothic"/>
-                <a:cs typeface="Century Gothic"/>
-              </a:rPr>
-              <a:t>2.  </a:t>
-            </a:r>
+              <a:buClr>
+                <a:srgbClr val="B5651D"/>
+              </a:buClr>
+              <a:buFont typeface="Arial"/>
+              <a:buChar char="•"/>
+            </a:pPr>
             <a:r>
               <a:rPr lang="en-US" sz="1650" dirty="0">
                 <a:solidFill>
                   <a:srgbClr val="000000"/>
                 </a:solidFill>
-                <a:latin typeface="Century Gothic"/>
-                <a:cs typeface="Century Gothic"/>
+                <a:latin typeface="Arial"/>
+                <a:cs typeface="Arial"/>
               </a:rPr>
               <a:t>Show the checklist and the flow diagram (Paper 1 has one)</a:t>
             </a:r>
@@ -15743,25 +15629,19 @@
               <a:spcBef>
                 <a:spcPts val="450"/>
               </a:spcBef>
-              <a:buNone/>
-            </a:pPr>
-            <a:r>
-              <a:rPr lang="en-US" sz="1650" b="1" dirty="0">
-                <a:solidFill>
-                  <a:srgbClr val="B5651D"/>
-                </a:solidFill>
-                <a:latin typeface="Century Gothic"/>
-                <a:cs typeface="Century Gothic"/>
-              </a:rPr>
-              <a:t>3.  </a:t>
-            </a:r>
+              <a:buClr>
+                <a:srgbClr val="B5651D"/>
+              </a:buClr>
+              <a:buFont typeface="Arial"/>
+              <a:buChar char="•"/>
+            </a:pPr>
             <a:r>
               <a:rPr lang="en-US" sz="1650" dirty="0">
                 <a:solidFill>
                   <a:srgbClr val="000000"/>
                 </a:solidFill>
-                <a:latin typeface="Century Gothic"/>
-                <a:cs typeface="Century Gothic"/>
+                <a:latin typeface="Arial"/>
+                <a:cs typeface="Arial"/>
               </a:rPr>
               <a:t>Find STROBE the same way (Paper 2)</a:t>
             </a:r>
@@ -15774,25 +15654,19 @@
               <a:spcBef>
                 <a:spcPts val="450"/>
               </a:spcBef>
-              <a:buNone/>
-            </a:pPr>
-            <a:r>
-              <a:rPr lang="en-US" sz="1650" b="1" dirty="0">
-                <a:solidFill>
-                  <a:srgbClr val="B5651D"/>
-                </a:solidFill>
-                <a:latin typeface="Century Gothic"/>
-                <a:cs typeface="Century Gothic"/>
-              </a:rPr>
-              <a:t>4.  </a:t>
-            </a:r>
+              <a:buClr>
+                <a:srgbClr val="B5651D"/>
+              </a:buClr>
+              <a:buFont typeface="Arial"/>
+              <a:buChar char="•"/>
+            </a:pPr>
             <a:r>
               <a:rPr lang="en-US" sz="1650" dirty="0">
                 <a:solidFill>
                   <a:srgbClr val="000000"/>
                 </a:solidFill>
-                <a:latin typeface="Century Gothic"/>
-                <a:cs typeface="Century Gothic"/>
+                <a:latin typeface="Arial"/>
+                <a:cs typeface="Arial"/>
               </a:rPr>
               <a:t>Check a journal: DOAJ and NLM Catalog search</a:t>
             </a:r>
@@ -15805,25 +15679,19 @@
               <a:spcBef>
                 <a:spcPts val="450"/>
               </a:spcBef>
-              <a:buNone/>
-            </a:pPr>
-            <a:r>
-              <a:rPr lang="en-US" sz="1650" b="1" dirty="0">
-                <a:solidFill>
-                  <a:srgbClr val="B5651D"/>
-                </a:solidFill>
-                <a:latin typeface="Century Gothic"/>
-                <a:cs typeface="Century Gothic"/>
-              </a:rPr>
-              <a:t>5.  </a:t>
-            </a:r>
+              <a:buClr>
+                <a:srgbClr val="B5651D"/>
+              </a:buClr>
+              <a:buFont typeface="Arial"/>
+              <a:buChar char="•"/>
+            </a:pPr>
             <a:r>
               <a:rPr lang="en-US" sz="1650" dirty="0">
                 <a:solidFill>
                   <a:srgbClr val="000000"/>
                 </a:solidFill>
-                <a:latin typeface="Century Gothic"/>
-                <a:cs typeface="Century Gothic"/>
+                <a:latin typeface="Arial"/>
+                <a:cs typeface="Arial"/>
               </a:rPr>
               <a:t>Open the Think.Check.Submit checklist</a:t>
             </a:r>
@@ -15867,8 +15735,8 @@
                 <a:solidFill>
                   <a:srgbClr val="B5651D"/>
                 </a:solidFill>
-                <a:latin typeface="Century Gothic"/>
-                <a:cs typeface="Century Gothic"/>
+                <a:latin typeface="Arial"/>
+                <a:cs typeface="Arial"/>
               </a:rPr>
               <a:t>Watch for</a:t>
             </a:r>
@@ -15889,8 +15757,8 @@
                 <a:solidFill>
                   <a:srgbClr val="000000"/>
                 </a:solidFill>
-                <a:latin typeface="Century Gothic"/>
-                <a:cs typeface="Century Gothic"/>
+                <a:latin typeface="Arial"/>
+                <a:cs typeface="Arial"/>
               </a:rPr>
               <a:t>Where the checklist PDF is</a:t>
             </a:r>
@@ -15911,8 +15779,8 @@
                 <a:solidFill>
                   <a:srgbClr val="000000"/>
                 </a:solidFill>
-                <a:latin typeface="Century Gothic"/>
-                <a:cs typeface="Century Gothic"/>
+                <a:latin typeface="Arial"/>
+                <a:cs typeface="Arial"/>
               </a:rPr>
               <a:t>How to see if a journal is in MEDLINE</a:t>
             </a:r>
@@ -15933,8 +15801,8 @@
                 <a:solidFill>
                   <a:srgbClr val="000000"/>
                 </a:solidFill>
-                <a:latin typeface="Century Gothic"/>
-                <a:cs typeface="Century Gothic"/>
+                <a:latin typeface="Arial"/>
+                <a:cs typeface="Arial"/>
               </a:rPr>
               <a:t>Three questions to ask any journal</a:t>
             </a:r>
@@ -15980,8 +15848,8 @@
                 <a:solidFill>
                   <a:srgbClr val="B5651D"/>
                 </a:solidFill>
-                <a:latin typeface="Century Gothic"/>
-                <a:cs typeface="Century Gothic"/>
+                <a:latin typeface="Arial"/>
+                <a:cs typeface="Arial"/>
               </a:rPr>
               <a:t>OUTPUT   </a:t>
             </a:r>
@@ -15990,8 +15858,8 @@
                 <a:solidFill>
                   <a:srgbClr val="000000"/>
                 </a:solidFill>
-                <a:latin typeface="Century Gothic"/>
-                <a:cs typeface="Century Gothic"/>
+                <a:latin typeface="Arial"/>
+                <a:cs typeface="Arial"/>
               </a:rPr>
               <a:t>Each group checks the journal + guideline in its publication plan</a:t>
             </a:r>
@@ -16028,7 +15896,7 @@
                     <a:lumMod val="50000"/>
                   </a:schemeClr>
                 </a:solidFill>
-                <a:latin typeface="Verdana"/>
+                <a:latin typeface="Arial"/>
               </a:rPr>
               <a:t>Neudata | #ClearDataClearImpact</a:t>
             </a:r>
@@ -16158,8 +16026,8 @@
                 <a:solidFill>
                   <a:srgbClr val="0D7377"/>
                 </a:solidFill>
-                <a:latin typeface="Century Gothic"/>
-                <a:cs typeface="Century Gothic"/>
+                <a:latin typeface="Arial"/>
+                <a:cs typeface="Arial"/>
               </a:rPr>
               <a:t>The submission package</a:t>
             </a:r>
@@ -16255,8 +16123,8 @@
                 <a:solidFill>
                   <a:srgbClr val="FFFFFF"/>
                 </a:solidFill>
-                <a:latin typeface="Century Gothic"/>
-                <a:cs typeface="Century Gothic"/>
+                <a:latin typeface="Arial"/>
+                <a:cs typeface="Arial"/>
               </a:rPr>
               <a:t>KEY MESSAGE   </a:t>
             </a:r>
@@ -16265,8 +16133,8 @@
                 <a:solidFill>
                   <a:srgbClr val="FFFFFF"/>
                 </a:solidFill>
-                <a:latin typeface="Century Gothic"/>
-                <a:cs typeface="Century Gothic"/>
+                <a:latin typeface="Arial"/>
+                <a:cs typeface="Arial"/>
               </a:rPr>
               <a:t>Submit the whole package at once. Missing items mean delay.</a:t>
             </a:r>
@@ -16303,7 +16171,7 @@
                     <a:lumMod val="50000"/>
                   </a:schemeClr>
                 </a:solidFill>
-                <a:latin typeface="Verdana"/>
+                <a:latin typeface="Arial"/>
               </a:rPr>
               <a:t>Neudata | #ClearDataClearImpact</a:t>
             </a:r>
@@ -16433,8 +16301,8 @@
                 <a:solidFill>
                   <a:srgbClr val="0D7377"/>
                 </a:solidFill>
-                <a:latin typeface="Century Gothic"/>
-                <a:cs typeface="Century Gothic"/>
+                <a:latin typeface="Arial"/>
+                <a:cs typeface="Arial"/>
               </a:rPr>
               <a:t>The peer-review journey</a:t>
             </a:r>
@@ -16530,8 +16398,8 @@
                 <a:solidFill>
                   <a:srgbClr val="FFFFFF"/>
                 </a:solidFill>
-                <a:latin typeface="Century Gothic"/>
-                <a:cs typeface="Century Gothic"/>
+                <a:latin typeface="Arial"/>
+                <a:cs typeface="Arial"/>
               </a:rPr>
               <a:t>KEY MESSAGE   </a:t>
             </a:r>
@@ -16540,8 +16408,8 @@
                 <a:solidFill>
                   <a:srgbClr val="FFFFFF"/>
                 </a:solidFill>
-                <a:latin typeface="Century Gothic"/>
-                <a:cs typeface="Century Gothic"/>
+                <a:latin typeface="Arial"/>
+                <a:cs typeface="Arial"/>
               </a:rPr>
               <a:t>Most papers are revised before acceptance. Reply to every point politely.</a:t>
             </a:r>
@@ -16578,7 +16446,7 @@
                     <a:lumMod val="50000"/>
                   </a:schemeClr>
                 </a:solidFill>
-                <a:latin typeface="Verdana"/>
+                <a:latin typeface="Arial"/>
               </a:rPr>
               <a:t>Neudata | #ClearDataClearImpact</a:t>
             </a:r>
@@ -16708,8 +16576,8 @@
                 <a:solidFill>
                   <a:srgbClr val="0D7377"/>
                 </a:solidFill>
-                <a:latin typeface="Century Gothic"/>
-                <a:cs typeface="Century Gothic"/>
+                <a:latin typeface="Arial"/>
+                <a:cs typeface="Arial"/>
               </a:rPr>
               <a:t>Responding to reviewers: the point-by-point table</a:t>
             </a:r>
@@ -16805,8 +16673,8 @@
                 <a:solidFill>
                   <a:srgbClr val="FFFFFF"/>
                 </a:solidFill>
-                <a:latin typeface="Century Gothic"/>
-                <a:cs typeface="Century Gothic"/>
+                <a:latin typeface="Arial"/>
+                <a:cs typeface="Arial"/>
               </a:rPr>
               <a:t>KEY MESSAGE   </a:t>
             </a:r>
@@ -16815,8 +16683,8 @@
                 <a:solidFill>
                   <a:srgbClr val="FFFFFF"/>
                 </a:solidFill>
-                <a:latin typeface="Century Gothic"/>
-                <a:cs typeface="Century Gothic"/>
+                <a:latin typeface="Arial"/>
+                <a:cs typeface="Arial"/>
               </a:rPr>
               <a:t>Thank, answer every point, show what changed, and disagree politely with evidence.</a:t>
             </a:r>
@@ -16853,7 +16721,7 @@
                     <a:lumMod val="50000"/>
                   </a:schemeClr>
                 </a:solidFill>
-                <a:latin typeface="Verdana"/>
+                <a:latin typeface="Arial"/>
               </a:rPr>
               <a:t>Neudata | #ClearDataClearImpact</a:t>
             </a:r>
@@ -16983,8 +16851,8 @@
                 <a:solidFill>
                   <a:srgbClr val="0D7377"/>
                 </a:solidFill>
-                <a:latin typeface="Century Gothic"/>
-                <a:cs typeface="Century Gothic"/>
+                <a:latin typeface="Arial"/>
+                <a:cs typeface="Arial"/>
               </a:rPr>
               <a:t>After acceptance: proofs, sharing, corrections</a:t>
             </a:r>
@@ -17080,8 +16948,8 @@
                 <a:solidFill>
                   <a:srgbClr val="FFFFFF"/>
                 </a:solidFill>
-                <a:latin typeface="Century Gothic"/>
-                <a:cs typeface="Century Gothic"/>
+                <a:latin typeface="Arial"/>
+                <a:cs typeface="Arial"/>
               </a:rPr>
               <a:t>KEY MESSAGE   </a:t>
             </a:r>
@@ -17090,8 +16958,8 @@
                 <a:solidFill>
                   <a:srgbClr val="FFFFFF"/>
                 </a:solidFill>
-                <a:latin typeface="Century Gothic"/>
-                <a:cs typeface="Century Gothic"/>
+                <a:latin typeface="Arial"/>
+                <a:cs typeface="Arial"/>
               </a:rPr>
               <a:t>Read the proofs as carefully as the data. Errors become permanent.</a:t>
             </a:r>
@@ -17128,7 +16996,7 @@
                     <a:lumMod val="50000"/>
                   </a:schemeClr>
                 </a:solidFill>
-                <a:latin typeface="Verdana"/>
+                <a:latin typeface="Arial"/>
               </a:rPr>
               <a:t>Neudata | #ClearDataClearImpact</a:t>
             </a:r>
@@ -17258,8 +17126,8 @@
                 <a:solidFill>
                   <a:srgbClr val="0D7377"/>
                 </a:solidFill>
-                <a:latin typeface="Century Gothic"/>
-                <a:cs typeface="Century Gothic"/>
+                <a:latin typeface="Arial"/>
+                <a:cs typeface="Arial"/>
               </a:rPr>
               <a:t>Check: true or false?</a:t>
             </a:r>
@@ -17329,8 +17197,8 @@
                 <a:solidFill>
                   <a:srgbClr val="FFFFFF"/>
                 </a:solidFill>
-                <a:latin typeface="Century Gothic"/>
-                <a:cs typeface="Century Gothic"/>
+                <a:latin typeface="Arial"/>
+                <a:cs typeface="Arial"/>
               </a:rPr>
               <a:t>QUICK QUIZ   |   2 min</a:t>
             </a:r>
@@ -17367,25 +17235,19 @@
               <a:spcBef>
                 <a:spcPts val="450"/>
               </a:spcBef>
-              <a:buNone/>
-            </a:pPr>
-            <a:r>
-              <a:rPr lang="en-US" sz="1650" b="1" dirty="0">
-                <a:solidFill>
-                  <a:srgbClr val="6C3483"/>
-                </a:solidFill>
-                <a:latin typeface="Century Gothic"/>
-                <a:cs typeface="Century Gothic"/>
-              </a:rPr>
-              <a:t>1.  </a:t>
-            </a:r>
+              <a:buClr>
+                <a:srgbClr val="6C3483"/>
+              </a:buClr>
+              <a:buFont typeface="Arial"/>
+              <a:buChar char="•"/>
+            </a:pPr>
             <a:r>
               <a:rPr lang="en-US" sz="1650" dirty="0">
                 <a:solidFill>
                   <a:srgbClr val="000000"/>
                 </a:solidFill>
-                <a:latin typeface="Century Gothic"/>
-                <a:cs typeface="Century Gothic"/>
+                <a:latin typeface="Arial"/>
+                <a:cs typeface="Arial"/>
               </a:rPr>
               <a:t>'A journal that e-mails me first is probably predatory'</a:t>
             </a:r>
@@ -17398,25 +17260,19 @@
               <a:spcBef>
                 <a:spcPts val="450"/>
               </a:spcBef>
-              <a:buNone/>
-            </a:pPr>
-            <a:r>
-              <a:rPr lang="en-US" sz="1650" b="1" dirty="0">
-                <a:solidFill>
-                  <a:srgbClr val="6C3483"/>
-                </a:solidFill>
-                <a:latin typeface="Century Gothic"/>
-                <a:cs typeface="Century Gothic"/>
-              </a:rPr>
-              <a:t>2.  </a:t>
-            </a:r>
+              <a:buClr>
+                <a:srgbClr val="6C3483"/>
+              </a:buClr>
+              <a:buFont typeface="Arial"/>
+              <a:buChar char="•"/>
+            </a:pPr>
             <a:r>
               <a:rPr lang="en-US" sz="1650" dirty="0">
                 <a:solidFill>
                   <a:srgbClr val="000000"/>
                 </a:solidFill>
-                <a:latin typeface="Century Gothic"/>
-                <a:cs typeface="Century Gothic"/>
+                <a:latin typeface="Arial"/>
+                <a:cs typeface="Arial"/>
               </a:rPr>
               <a:t>'I can send my paper to two journals at once to save time'</a:t>
             </a:r>
@@ -17429,25 +17285,19 @@
               <a:spcBef>
                 <a:spcPts val="450"/>
               </a:spcBef>
-              <a:buNone/>
-            </a:pPr>
-            <a:r>
-              <a:rPr lang="en-US" sz="1650" b="1" dirty="0">
-                <a:solidFill>
-                  <a:srgbClr val="6C3483"/>
-                </a:solidFill>
-                <a:latin typeface="Century Gothic"/>
-                <a:cs typeface="Century Gothic"/>
-              </a:rPr>
-              <a:t>3.  </a:t>
-            </a:r>
+              <a:buClr>
+                <a:srgbClr val="6C3483"/>
+              </a:buClr>
+              <a:buFont typeface="Arial"/>
+              <a:buChar char="•"/>
+            </a:pPr>
             <a:r>
               <a:rPr lang="en-US" sz="1650" dirty="0">
                 <a:solidFill>
                   <a:srgbClr val="000000"/>
                 </a:solidFill>
-                <a:latin typeface="Century Gothic"/>
-                <a:cs typeface="Century Gothic"/>
+                <a:latin typeface="Arial"/>
+                <a:cs typeface="Arial"/>
               </a:rPr>
               <a:t>'A preprint has been peer reviewed'</a:t>
             </a:r>
@@ -17460,25 +17310,19 @@
               <a:spcBef>
                 <a:spcPts val="450"/>
               </a:spcBef>
-              <a:buNone/>
-            </a:pPr>
-            <a:r>
-              <a:rPr lang="en-US" sz="1650" b="1" dirty="0">
-                <a:solidFill>
-                  <a:srgbClr val="6C3483"/>
-                </a:solidFill>
-                <a:latin typeface="Century Gothic"/>
-                <a:cs typeface="Century Gothic"/>
-              </a:rPr>
-              <a:t>4.  </a:t>
-            </a:r>
+              <a:buClr>
+                <a:srgbClr val="6C3483"/>
+              </a:buClr>
+              <a:buFont typeface="Arial"/>
+              <a:buChar char="•"/>
+            </a:pPr>
             <a:r>
               <a:rPr lang="en-US" sz="1650" dirty="0">
                 <a:solidFill>
                   <a:srgbClr val="000000"/>
                 </a:solidFill>
-                <a:latin typeface="Century Gothic"/>
-                <a:cs typeface="Century Gothic"/>
+                <a:latin typeface="Arial"/>
+                <a:cs typeface="Arial"/>
               </a:rPr>
               <a:t>'I must answer every reviewer comment, even if I disagree'</a:t>
             </a:r>
@@ -17491,25 +17335,19 @@
               <a:spcBef>
                 <a:spcPts val="450"/>
               </a:spcBef>
-              <a:buNone/>
-            </a:pPr>
-            <a:r>
-              <a:rPr lang="en-US" sz="1650" b="1" dirty="0">
-                <a:solidFill>
-                  <a:srgbClr val="6C3483"/>
-                </a:solidFill>
-                <a:latin typeface="Century Gothic"/>
-                <a:cs typeface="Century Gothic"/>
-              </a:rPr>
-              <a:t>5.  </a:t>
-            </a:r>
+              <a:buClr>
+                <a:srgbClr val="6C3483"/>
+              </a:buClr>
+              <a:buFont typeface="Arial"/>
+              <a:buChar char="•"/>
+            </a:pPr>
             <a:r>
               <a:rPr lang="en-US" sz="1650" dirty="0">
                 <a:solidFill>
                   <a:srgbClr val="000000"/>
                 </a:solidFill>
-                <a:latin typeface="Century Gothic"/>
-                <a:cs typeface="Century Gothic"/>
+                <a:latin typeface="Arial"/>
+                <a:cs typeface="Arial"/>
               </a:rPr>
               <a:t>'The FLUID-ICU paper should follow CONSORT'</a:t>
             </a:r>
@@ -17553,8 +17391,8 @@
                 <a:solidFill>
                   <a:srgbClr val="6C3483"/>
                 </a:solidFill>
-                <a:latin typeface="Century Gothic"/>
-                <a:cs typeface="Century Gothic"/>
+                <a:latin typeface="Arial"/>
+                <a:cs typeface="Arial"/>
               </a:rPr>
               <a:t>Answers</a:t>
             </a:r>
@@ -17575,8 +17413,8 @@
                 <a:solidFill>
                   <a:srgbClr val="000000"/>
                 </a:solidFill>
-                <a:latin typeface="Century Gothic"/>
-                <a:cs typeface="Century Gothic"/>
+                <a:latin typeface="Arial"/>
+                <a:cs typeface="Arial"/>
               </a:rPr>
               <a:t>1 Often: check it twice</a:t>
             </a:r>
@@ -17597,8 +17435,8 @@
                 <a:solidFill>
                   <a:srgbClr val="000000"/>
                 </a:solidFill>
-                <a:latin typeface="Century Gothic"/>
-                <a:cs typeface="Century Gothic"/>
+                <a:latin typeface="Arial"/>
+                <a:cs typeface="Arial"/>
               </a:rPr>
               <a:t>2 False: duplicate submission</a:t>
             </a:r>
@@ -17619,8 +17457,8 @@
                 <a:solidFill>
                   <a:srgbClr val="000000"/>
                 </a:solidFill>
-                <a:latin typeface="Century Gothic"/>
-                <a:cs typeface="Century Gothic"/>
+                <a:latin typeface="Arial"/>
+                <a:cs typeface="Arial"/>
               </a:rPr>
               <a:t>3 False</a:t>
             </a:r>
@@ -17641,8 +17479,8 @@
                 <a:solidFill>
                   <a:srgbClr val="000000"/>
                 </a:solidFill>
-                <a:latin typeface="Century Gothic"/>
-                <a:cs typeface="Century Gothic"/>
+                <a:latin typeface="Arial"/>
+                <a:cs typeface="Arial"/>
               </a:rPr>
               <a:t>4 True: politely, with evidence</a:t>
             </a:r>
@@ -17663,8 +17501,8 @@
                 <a:solidFill>
                   <a:srgbClr val="000000"/>
                 </a:solidFill>
-                <a:latin typeface="Century Gothic"/>
-                <a:cs typeface="Century Gothic"/>
+                <a:latin typeface="Arial"/>
+                <a:cs typeface="Arial"/>
               </a:rPr>
               <a:t>5 False: STROBE (cohort)</a:t>
             </a:r>
@@ -17701,7 +17539,7 @@
                     <a:lumMod val="50000"/>
                   </a:schemeClr>
                 </a:solidFill>
-                <a:latin typeface="Verdana"/>
+                <a:latin typeface="Arial"/>
               </a:rPr>
               <a:t>Neudata | #ClearDataClearImpact</a:t>
             </a:r>
@@ -17831,8 +17669,8 @@
                 <a:solidFill>
                   <a:srgbClr val="0D7377"/>
                 </a:solidFill>
-                <a:latin typeface="Century Gothic"/>
-                <a:cs typeface="Century Gothic"/>
+                <a:latin typeface="Arial"/>
+                <a:cs typeface="Arial"/>
               </a:rPr>
               <a:t>8.3  |  20 minutes</a:t>
             </a:r>
@@ -17901,8 +17739,8 @@
                 <a:solidFill>
                   <a:srgbClr val="0D7377"/>
                 </a:solidFill>
-                <a:latin typeface="Century Gothic"/>
-                <a:cs typeface="Century Gothic"/>
+                <a:latin typeface="Arial"/>
+                <a:cs typeface="Arial"/>
               </a:rPr>
               <a:t>Be the reviewer</a:t>
             </a:r>
@@ -17919,8 +17757,8 @@
                 <a:solidFill>
                   <a:srgbClr val="595959"/>
                 </a:solidFill>
-                <a:latin typeface="Century Gothic"/>
-                <a:cs typeface="Century Gothic"/>
+                <a:latin typeface="Arial"/>
+                <a:cs typeface="Arial"/>
               </a:rPr>
               <a:t>Practice for the peer-review swap of your manuscripts</a:t>
             </a:r>
@@ -17957,7 +17795,7 @@
                     <a:lumMod val="50000"/>
                   </a:schemeClr>
                 </a:solidFill>
-                <a:latin typeface="Verdana"/>
+                <a:latin typeface="Arial"/>
               </a:rPr>
               <a:t>Neudata | #ClearDataClearImpact</a:t>
             </a:r>
@@ -18087,8 +17925,8 @@
                 <a:solidFill>
                   <a:srgbClr val="0D7377"/>
                 </a:solidFill>
-                <a:latin typeface="Century Gothic"/>
-                <a:cs typeface="Century Gothic"/>
+                <a:latin typeface="Arial"/>
+                <a:cs typeface="Arial"/>
               </a:rPr>
               <a:t>8.1  |  25 minutes</a:t>
             </a:r>
@@ -18157,8 +17995,8 @@
                 <a:solidFill>
                   <a:srgbClr val="0D7377"/>
                 </a:solidFill>
-                <a:latin typeface="Century Gothic"/>
-                <a:cs typeface="Century Gothic"/>
+                <a:latin typeface="Arial"/>
+                <a:cs typeface="Arial"/>
               </a:rPr>
               <a:t>Writing the paper (II)</a:t>
             </a:r>
@@ -18175,8 +18013,8 @@
                 <a:solidFill>
                   <a:srgbClr val="595959"/>
                 </a:solidFill>
-                <a:latin typeface="Century Gothic"/>
-                <a:cs typeface="Century Gothic"/>
+                <a:latin typeface="Arial"/>
+                <a:cs typeface="Arial"/>
               </a:rPr>
               <a:t>Introduction, Discussion, Abstract and Title, in that order</a:t>
             </a:r>
@@ -18213,7 +18051,7 @@
                     <a:lumMod val="50000"/>
                   </a:schemeClr>
                 </a:solidFill>
-                <a:latin typeface="Verdana"/>
+                <a:latin typeface="Arial"/>
               </a:rPr>
               <a:t>Neudata | #ClearDataClearImpact</a:t>
             </a:r>
@@ -18343,8 +18181,8 @@
                 <a:solidFill>
                   <a:srgbClr val="0D7377"/>
                 </a:solidFill>
-                <a:latin typeface="Century Gothic"/>
-                <a:cs typeface="Century Gothic"/>
+                <a:latin typeface="Arial"/>
+                <a:cs typeface="Arial"/>
               </a:rPr>
               <a:t>The jigsaw: three groups on the trial, two on the cohort</a:t>
             </a:r>
@@ -18440,8 +18278,8 @@
                 <a:solidFill>
                   <a:srgbClr val="FFFFFF"/>
                 </a:solidFill>
-                <a:latin typeface="Century Gothic"/>
-                <a:cs typeface="Century Gothic"/>
+                <a:latin typeface="Arial"/>
+                <a:cs typeface="Arial"/>
               </a:rPr>
               <a:t>KEY MESSAGE   </a:t>
             </a:r>
@@ -18450,8 +18288,8 @@
                 <a:solidFill>
                   <a:srgbClr val="FFFFFF"/>
                 </a:solidFill>
-                <a:latin typeface="Century Gothic"/>
-                <a:cs typeface="Century Gothic"/>
+                <a:latin typeface="Arial"/>
+                <a:cs typeface="Arial"/>
               </a:rPr>
               <a:t>Same clinical question, two designs. Compare what each may claim.</a:t>
             </a:r>
@@ -18488,7 +18326,7 @@
                     <a:lumMod val="50000"/>
                   </a:schemeClr>
                 </a:solidFill>
-                <a:latin typeface="Verdana"/>
+                <a:latin typeface="Arial"/>
               </a:rPr>
               <a:t>Neudata | #ClearDataClearImpact</a:t>
             </a:r>
@@ -18618,8 +18456,8 @@
                 <a:solidFill>
                   <a:srgbClr val="0D7377"/>
                 </a:solidFill>
-                <a:latin typeface="Century Gothic"/>
-                <a:cs typeface="Century Gothic"/>
+                <a:latin typeface="Arial"/>
+                <a:cs typeface="Arial"/>
               </a:rPr>
               <a:t>The 10-question checklist (1-5)</a:t>
             </a:r>
@@ -18689,8 +18527,8 @@
                 <a:solidFill>
                   <a:srgbClr val="FFFFFF"/>
                 </a:solidFill>
-                <a:latin typeface="Century Gothic"/>
-                <a:cs typeface="Century Gothic"/>
+                <a:latin typeface="Arial"/>
+                <a:cs typeface="Arial"/>
               </a:rPr>
               <a:t>1  Question</a:t>
             </a:r>
@@ -18738,8 +18576,8 @@
                 <a:solidFill>
                   <a:srgbClr val="000000"/>
                 </a:solidFill>
-                <a:latin typeface="Century Gothic"/>
-                <a:cs typeface="Century Gothic"/>
+                <a:latin typeface="Arial"/>
+                <a:cs typeface="Arial"/>
               </a:rPr>
               <a:t>Can you write the study's PICO in one line?</a:t>
             </a:r>
@@ -18781,8 +18619,8 @@
                 <a:solidFill>
                   <a:srgbClr val="FFFFFF"/>
                 </a:solidFill>
-                <a:latin typeface="Century Gothic"/>
-                <a:cs typeface="Century Gothic"/>
+                <a:latin typeface="Arial"/>
+                <a:cs typeface="Arial"/>
               </a:rPr>
               <a:t>2  Design</a:t>
             </a:r>
@@ -18830,8 +18668,8 @@
                 <a:solidFill>
                   <a:srgbClr val="000000"/>
                 </a:solidFill>
-                <a:latin typeface="Century Gothic"/>
-                <a:cs typeface="Century Gothic"/>
+                <a:latin typeface="Arial"/>
+                <a:cs typeface="Arial"/>
               </a:rPr>
               <a:t>What is the design, and is it the right one for the question?</a:t>
             </a:r>
@@ -18873,8 +18711,8 @@
                 <a:solidFill>
                   <a:srgbClr val="FFFFFF"/>
                 </a:solidFill>
-                <a:latin typeface="Century Gothic"/>
-                <a:cs typeface="Century Gothic"/>
+                <a:latin typeface="Arial"/>
+                <a:cs typeface="Arial"/>
               </a:rPr>
               <a:t>3  Participants</a:t>
             </a:r>
@@ -18922,8 +18760,8 @@
                 <a:solidFill>
                   <a:srgbClr val="000000"/>
                 </a:solidFill>
-                <a:latin typeface="Century Gothic"/>
-                <a:cs typeface="Century Gothic"/>
+                <a:latin typeface="Arial"/>
+                <a:cs typeface="Arial"/>
               </a:rPr>
               <a:t>Who was included, and who was left out?</a:t>
             </a:r>
@@ -18943,8 +18781,8 @@
                 <a:solidFill>
                   <a:srgbClr val="000000"/>
                 </a:solidFill>
-                <a:latin typeface="Century Gothic"/>
-                <a:cs typeface="Century Gothic"/>
+                <a:latin typeface="Arial"/>
+                <a:cs typeface="Arial"/>
               </a:rPr>
               <a:t>Would your patients have been included?</a:t>
             </a:r>
@@ -18986,8 +18824,8 @@
                 <a:solidFill>
                   <a:srgbClr val="FFFFFF"/>
                 </a:solidFill>
-                <a:latin typeface="Century Gothic"/>
-                <a:cs typeface="Century Gothic"/>
+                <a:latin typeface="Arial"/>
+                <a:cs typeface="Arial"/>
               </a:rPr>
               <a:t>4  Comparison groups</a:t>
             </a:r>
@@ -19035,8 +18873,8 @@
                 <a:solidFill>
                   <a:srgbClr val="000000"/>
                 </a:solidFill>
-                <a:latin typeface="Century Gothic"/>
-                <a:cs typeface="Century Gothic"/>
+                <a:latin typeface="Arial"/>
+                <a:cs typeface="Arial"/>
               </a:rPr>
               <a:t>Were the groups similar at the start (Table 1)?</a:t>
             </a:r>
@@ -19056,8 +18894,8 @@
                 <a:solidFill>
                   <a:srgbClr val="000000"/>
                 </a:solidFill>
-                <a:latin typeface="Century Gothic"/>
-                <a:cs typeface="Century Gothic"/>
+                <a:latin typeface="Arial"/>
+                <a:cs typeface="Arial"/>
               </a:rPr>
               <a:t>How was this achieved (randomisation / matching / adjustment)?</a:t>
             </a:r>
@@ -19099,8 +18937,8 @@
                 <a:solidFill>
                   <a:srgbClr val="FFFFFF"/>
                 </a:solidFill>
-                <a:latin typeface="Century Gothic"/>
-                <a:cs typeface="Century Gothic"/>
+                <a:latin typeface="Arial"/>
+                <a:cs typeface="Arial"/>
               </a:rPr>
               <a:t>5  Bias</a:t>
             </a:r>
@@ -19148,8 +18986,8 @@
                 <a:solidFill>
                   <a:srgbClr val="000000"/>
                 </a:solidFill>
-                <a:latin typeface="Century Gothic"/>
-                <a:cs typeface="Century Gothic"/>
+                <a:latin typeface="Arial"/>
+                <a:cs typeface="Arial"/>
               </a:rPr>
               <a:t>Who knew which group patients were in (blinding)?</a:t>
             </a:r>
@@ -19169,8 +19007,8 @@
                 <a:solidFill>
                   <a:srgbClr val="000000"/>
                 </a:solidFill>
-                <a:latin typeface="Century Gothic"/>
-                <a:cs typeface="Century Gothic"/>
+                <a:latin typeface="Arial"/>
+                <a:cs typeface="Arial"/>
               </a:rPr>
               <a:t>Could that change the outcome?</a:t>
             </a:r>
@@ -19207,7 +19045,7 @@
                     <a:lumMod val="50000"/>
                   </a:schemeClr>
                 </a:solidFill>
-                <a:latin typeface="Verdana"/>
+                <a:latin typeface="Arial"/>
               </a:rPr>
               <a:t>Neudata | #ClearDataClearImpact</a:t>
             </a:r>
@@ -19337,8 +19175,8 @@
                 <a:solidFill>
                   <a:srgbClr val="0D7377"/>
                 </a:solidFill>
-                <a:latin typeface="Century Gothic"/>
-                <a:cs typeface="Century Gothic"/>
+                <a:latin typeface="Arial"/>
+                <a:cs typeface="Arial"/>
               </a:rPr>
               <a:t>The 10-question checklist (6-10)</a:t>
             </a:r>
@@ -19408,8 +19246,8 @@
                 <a:solidFill>
                   <a:srgbClr val="FFFFFF"/>
                 </a:solidFill>
-                <a:latin typeface="Century Gothic"/>
-                <a:cs typeface="Century Gothic"/>
+                <a:latin typeface="Arial"/>
+                <a:cs typeface="Arial"/>
               </a:rPr>
               <a:t>6  Outcome</a:t>
             </a:r>
@@ -19457,8 +19295,8 @@
                 <a:solidFill>
                   <a:srgbClr val="000000"/>
                 </a:solidFill>
-                <a:latin typeface="Century Gothic"/>
-                <a:cs typeface="Century Gothic"/>
+                <a:latin typeface="Arial"/>
+                <a:cs typeface="Arial"/>
               </a:rPr>
               <a:t>Was there ONE pre-specified primary outcome,</a:t>
             </a:r>
@@ -19478,8 +19316,8 @@
                 <a:solidFill>
                   <a:srgbClr val="000000"/>
                 </a:solidFill>
-                <a:latin typeface="Century Gothic"/>
-                <a:cs typeface="Century Gothic"/>
+                <a:latin typeface="Arial"/>
+                <a:cs typeface="Arial"/>
               </a:rPr>
               <a:t>measured the same way in both groups?</a:t>
             </a:r>
@@ -19521,8 +19359,8 @@
                 <a:solidFill>
                   <a:srgbClr val="FFFFFF"/>
                 </a:solidFill>
-                <a:latin typeface="Century Gothic"/>
-                <a:cs typeface="Century Gothic"/>
+                <a:latin typeface="Arial"/>
+                <a:cs typeface="Arial"/>
               </a:rPr>
               <a:t>7  Numbers</a:t>
             </a:r>
@@ -19570,8 +19408,8 @@
                 <a:solidFill>
                   <a:srgbClr val="000000"/>
                 </a:solidFill>
-                <a:latin typeface="Century Gothic"/>
-                <a:cs typeface="Century Gothic"/>
+                <a:latin typeface="Arial"/>
+                <a:cs typeface="Arial"/>
               </a:rPr>
               <a:t>What is the main result as an effect size with 95% CI?</a:t>
             </a:r>
@@ -19591,8 +19429,8 @@
                 <a:solidFill>
                   <a:srgbClr val="000000"/>
                 </a:solidFill>
-                <a:latin typeface="Century Gothic"/>
-                <a:cs typeface="Century Gothic"/>
+                <a:latin typeface="Arial"/>
+                <a:cs typeface="Arial"/>
               </a:rPr>
               <a:t>Is the CI narrow or wide?</a:t>
             </a:r>
@@ -19634,8 +19472,8 @@
                 <a:solidFill>
                   <a:srgbClr val="FFFFFF"/>
                 </a:solidFill>
-                <a:latin typeface="Century Gothic"/>
-                <a:cs typeface="Century Gothic"/>
+                <a:latin typeface="Arial"/>
+                <a:cs typeface="Arial"/>
               </a:rPr>
               <a:t>8  Words vs design</a:t>
             </a:r>
@@ -19683,8 +19521,8 @@
                 <a:solidFill>
                   <a:srgbClr val="000000"/>
                 </a:solidFill>
-                <a:latin typeface="Century Gothic"/>
-                <a:cs typeface="Century Gothic"/>
+                <a:latin typeface="Arial"/>
+                <a:cs typeface="Arial"/>
               </a:rPr>
               <a:t>Do the conclusions match the design</a:t>
             </a:r>
@@ -19704,8 +19542,8 @@
                 <a:solidFill>
                   <a:srgbClr val="000000"/>
                 </a:solidFill>
-                <a:latin typeface="Century Gothic"/>
-                <a:cs typeface="Century Gothic"/>
+                <a:latin typeface="Arial"/>
+                <a:cs typeface="Arial"/>
               </a:rPr>
               <a:t>('associated' vs 'caused'; no 'trend' for p = 0.42)?</a:t>
             </a:r>
@@ -19747,8 +19585,8 @@
                 <a:solidFill>
                   <a:srgbClr val="FFFFFF"/>
                 </a:solidFill>
-                <a:latin typeface="Century Gothic"/>
-                <a:cs typeface="Century Gothic"/>
+                <a:latin typeface="Arial"/>
+                <a:cs typeface="Arial"/>
               </a:rPr>
               <a:t>9  Limitations</a:t>
             </a:r>
@@ -19796,8 +19634,8 @@
                 <a:solidFill>
                   <a:srgbClr val="000000"/>
                 </a:solidFill>
-                <a:latin typeface="Century Gothic"/>
-                <a:cs typeface="Century Gothic"/>
+                <a:latin typeface="Arial"/>
+                <a:cs typeface="Arial"/>
               </a:rPr>
               <a:t>Are the main limitations stated honestly?</a:t>
             </a:r>
@@ -19817,8 +19655,8 @@
                 <a:solidFill>
                   <a:srgbClr val="000000"/>
                 </a:solidFill>
-                <a:latin typeface="Century Gothic"/>
-                <a:cs typeface="Century Gothic"/>
+                <a:latin typeface="Arial"/>
+                <a:cs typeface="Arial"/>
               </a:rPr>
               <a:t>Name one the authors missed.</a:t>
             </a:r>
@@ -19860,8 +19698,8 @@
                 <a:solidFill>
                   <a:srgbClr val="FFFFFF"/>
                 </a:solidFill>
-                <a:latin typeface="Century Gothic"/>
-                <a:cs typeface="Century Gothic"/>
+                <a:latin typeface="Arial"/>
+                <a:cs typeface="Arial"/>
               </a:rPr>
               <a:t>10  Use</a:t>
             </a:r>
@@ -19909,8 +19747,8 @@
                 <a:solidFill>
                   <a:srgbClr val="000000"/>
                 </a:solidFill>
-                <a:latin typeface="Century Gothic"/>
-                <a:cs typeface="Century Gothic"/>
+                <a:latin typeface="Arial"/>
+                <a:cs typeface="Arial"/>
               </a:rPr>
               <a:t>Would this change practice in your unit?</a:t>
             </a:r>
@@ -19930,8 +19768,8 @@
                 <a:solidFill>
                   <a:srgbClr val="000000"/>
                 </a:solidFill>
-                <a:latin typeface="Century Gothic"/>
-                <a:cs typeface="Century Gothic"/>
+                <a:latin typeface="Arial"/>
+                <a:cs typeface="Arial"/>
               </a:rPr>
               <a:t>Why / why not?</a:t>
             </a:r>
@@ -19968,7 +19806,7 @@
                     <a:lumMod val="50000"/>
                   </a:schemeClr>
                 </a:solidFill>
-                <a:latin typeface="Verdana"/>
+                <a:latin typeface="Arial"/>
               </a:rPr>
               <a:t>Neudata | #ClearDataClearImpact</a:t>
             </a:r>
@@ -20098,8 +19936,8 @@
                 <a:solidFill>
                   <a:srgbClr val="0D7377"/>
                 </a:solidFill>
-                <a:latin typeface="Century Gothic"/>
-                <a:cs typeface="Century Gothic"/>
+                <a:latin typeface="Arial"/>
+                <a:cs typeface="Arial"/>
               </a:rPr>
               <a:t>Be the reviewer: appraise your paper</a:t>
             </a:r>
@@ -20169,8 +20007,8 @@
                 <a:solidFill>
                   <a:srgbClr val="FFFFFF"/>
                 </a:solidFill>
-                <a:latin typeface="Century Gothic"/>
-                <a:cs typeface="Century Gothic"/>
+                <a:latin typeface="Arial"/>
+                <a:cs typeface="Arial"/>
               </a:rPr>
               <a:t>GROUP WORK   |   10 min</a:t>
             </a:r>
@@ -20207,25 +20045,19 @@
               <a:spcBef>
                 <a:spcPts val="450"/>
               </a:spcBef>
-              <a:buNone/>
-            </a:pPr>
-            <a:r>
-              <a:rPr lang="en-US" sz="1650" b="1" dirty="0">
-                <a:solidFill>
-                  <a:srgbClr val="0D7377"/>
-                </a:solidFill>
-                <a:latin typeface="Century Gothic"/>
-                <a:cs typeface="Century Gothic"/>
-              </a:rPr>
-              <a:t>1.  </a:t>
-            </a:r>
+              <a:buClr>
+                <a:srgbClr val="0D7377"/>
+              </a:buClr>
+              <a:buFont typeface="Arial"/>
+              <a:buChar char="•"/>
+            </a:pPr>
             <a:r>
               <a:rPr lang="en-US" sz="1650" dirty="0">
                 <a:solidFill>
                   <a:srgbClr val="000000"/>
                 </a:solidFill>
-                <a:latin typeface="Century Gothic"/>
-                <a:cs typeface="Century Gothic"/>
+                <a:latin typeface="Arial"/>
+                <a:cs typeface="Arial"/>
               </a:rPr>
               <a:t>Pairs take questions 1-3, 4-6 and 7-10</a:t>
             </a:r>
@@ -20238,25 +20070,19 @@
               <a:spcBef>
                 <a:spcPts val="450"/>
               </a:spcBef>
-              <a:buNone/>
-            </a:pPr>
-            <a:r>
-              <a:rPr lang="en-US" sz="1650" b="1" dirty="0">
-                <a:solidFill>
-                  <a:srgbClr val="0D7377"/>
-                </a:solidFill>
-                <a:latin typeface="Century Gothic"/>
-                <a:cs typeface="Century Gothic"/>
-              </a:rPr>
-              <a:t>2.  </a:t>
-            </a:r>
+              <a:buClr>
+                <a:srgbClr val="0D7377"/>
+              </a:buClr>
+              <a:buFont typeface="Arial"/>
+              <a:buChar char="•"/>
+            </a:pPr>
             <a:r>
               <a:rPr lang="en-US" sz="1650" dirty="0">
                 <a:solidFill>
                   <a:srgbClr val="000000"/>
                 </a:solidFill>
-                <a:latin typeface="Century Gothic"/>
-                <a:cs typeface="Century Gothic"/>
+                <a:latin typeface="Arial"/>
+                <a:cs typeface="Arial"/>
               </a:rPr>
               <a:t>Read ONLY the pages listed on your answer grid</a:t>
             </a:r>
@@ -20269,25 +20095,19 @@
               <a:spcBef>
                 <a:spcPts val="450"/>
               </a:spcBef>
-              <a:buNone/>
-            </a:pPr>
-            <a:r>
-              <a:rPr lang="en-US" sz="1650" b="1" dirty="0">
-                <a:solidFill>
-                  <a:srgbClr val="0D7377"/>
-                </a:solidFill>
-                <a:latin typeface="Century Gothic"/>
-                <a:cs typeface="Century Gothic"/>
-              </a:rPr>
-              <a:t>3.  </a:t>
-            </a:r>
+              <a:buClr>
+                <a:srgbClr val="0D7377"/>
+              </a:buClr>
+              <a:buFont typeface="Arial"/>
+              <a:buChar char="•"/>
+            </a:pPr>
             <a:r>
               <a:rPr lang="en-US" sz="1650" dirty="0">
                 <a:solidFill>
                   <a:srgbClr val="000000"/>
                 </a:solidFill>
-                <a:latin typeface="Century Gothic"/>
-                <a:cs typeface="Century Gothic"/>
+                <a:latin typeface="Arial"/>
+                <a:cs typeface="Arial"/>
               </a:rPr>
               <a:t>Answer Yes / No / Can't tell + page number</a:t>
             </a:r>
@@ -20300,25 +20120,19 @@
               <a:spcBef>
                 <a:spcPts val="450"/>
               </a:spcBef>
-              <a:buNone/>
-            </a:pPr>
-            <a:r>
-              <a:rPr lang="en-US" sz="1650" b="1" dirty="0">
-                <a:solidFill>
-                  <a:srgbClr val="0D7377"/>
-                </a:solidFill>
-                <a:latin typeface="Century Gothic"/>
-                <a:cs typeface="Century Gothic"/>
-              </a:rPr>
-              <a:t>4.  </a:t>
-            </a:r>
+              <a:buClr>
+                <a:srgbClr val="0D7377"/>
+              </a:buClr>
+              <a:buFont typeface="Arial"/>
+              <a:buChar char="•"/>
+            </a:pPr>
             <a:r>
               <a:rPr lang="en-US" sz="1650" dirty="0">
                 <a:solidFill>
                   <a:srgbClr val="000000"/>
                 </a:solidFill>
-                <a:latin typeface="Century Gothic"/>
-                <a:cs typeface="Century Gothic"/>
+                <a:latin typeface="Arial"/>
+                <a:cs typeface="Arial"/>
               </a:rPr>
               <a:t>Minute 7: agree the group answers</a:t>
             </a:r>
@@ -20331,25 +20145,19 @@
               <a:spcBef>
                 <a:spcPts val="450"/>
               </a:spcBef>
-              <a:buNone/>
-            </a:pPr>
-            <a:r>
-              <a:rPr lang="en-US" sz="1650" b="1" dirty="0">
-                <a:solidFill>
-                  <a:srgbClr val="0D7377"/>
-                </a:solidFill>
-                <a:latin typeface="Century Gothic"/>
-                <a:cs typeface="Century Gothic"/>
-              </a:rPr>
-              <a:t>5.  </a:t>
-            </a:r>
+              <a:buClr>
+                <a:srgbClr val="0D7377"/>
+              </a:buClr>
+              <a:buFont typeface="Arial"/>
+              <a:buChar char="•"/>
+            </a:pPr>
             <a:r>
               <a:rPr lang="en-US" sz="1650" dirty="0">
                 <a:solidFill>
                   <a:srgbClr val="000000"/>
                 </a:solidFill>
-                <a:latin typeface="Century Gothic"/>
-                <a:cs typeface="Century Gothic"/>
+                <a:latin typeface="Arial"/>
+                <a:cs typeface="Arial"/>
               </a:rPr>
               <a:t>Minute 9: choose a speaker; write your verdict in one sentence</a:t>
             </a:r>
@@ -20393,8 +20201,8 @@
                 <a:solidFill>
                   <a:srgbClr val="0D7377"/>
                 </a:solidFill>
-                <a:latin typeface="Century Gothic"/>
-                <a:cs typeface="Century Gothic"/>
+                <a:latin typeface="Arial"/>
+                <a:cs typeface="Arial"/>
               </a:rPr>
               <a:t>Where to look</a:t>
             </a:r>
@@ -20415,8 +20223,8 @@
                 <a:solidFill>
                   <a:srgbClr val="000000"/>
                 </a:solidFill>
-                <a:latin typeface="Century Gothic"/>
-                <a:cs typeface="Century Gothic"/>
+                <a:latin typeface="Arial"/>
+                <a:cs typeface="Arial"/>
               </a:rPr>
               <a:t>Abstract: question and result</a:t>
             </a:r>
@@ -20437,8 +20245,8 @@
                 <a:solidFill>
                   <a:srgbClr val="000000"/>
                 </a:solidFill>
-                <a:latin typeface="Century Gothic"/>
-                <a:cs typeface="Century Gothic"/>
+                <a:latin typeface="Arial"/>
+                <a:cs typeface="Arial"/>
               </a:rPr>
               <a:t>Methods: design, blinding, outcome</a:t>
             </a:r>
@@ -20459,8 +20267,8 @@
                 <a:solidFill>
                   <a:srgbClr val="000000"/>
                 </a:solidFill>
-                <a:latin typeface="Century Gothic"/>
-                <a:cs typeface="Century Gothic"/>
+                <a:latin typeface="Arial"/>
+                <a:cs typeface="Arial"/>
               </a:rPr>
               <a:t>Table 1: groups similar?</a:t>
             </a:r>
@@ -20481,8 +20289,8 @@
                 <a:solidFill>
                   <a:srgbClr val="000000"/>
                 </a:solidFill>
-                <a:latin typeface="Century Gothic"/>
-                <a:cs typeface="Century Gothic"/>
+                <a:latin typeface="Arial"/>
+                <a:cs typeface="Arial"/>
               </a:rPr>
               <a:t>Discussion: words and limitations</a:t>
             </a:r>
@@ -20528,8 +20336,8 @@
                 <a:solidFill>
                   <a:srgbClr val="0D7377"/>
                 </a:solidFill>
-                <a:latin typeface="Century Gothic"/>
-                <a:cs typeface="Century Gothic"/>
+                <a:latin typeface="Arial"/>
+                <a:cs typeface="Arial"/>
               </a:rPr>
               <a:t>OUTPUT   </a:t>
             </a:r>
@@ -20538,8 +20346,8 @@
                 <a:solidFill>
                   <a:srgbClr val="000000"/>
                 </a:solidFill>
-                <a:latin typeface="Century Gothic"/>
-                <a:cs typeface="Century Gothic"/>
+                <a:latin typeface="Arial"/>
+                <a:cs typeface="Arial"/>
               </a:rPr>
               <a:t>Completed answer grid + one-sentence verdict per group</a:t>
             </a:r>
@@ -20576,7 +20384,7 @@
                     <a:lumMod val="50000"/>
                   </a:schemeClr>
                 </a:solidFill>
-                <a:latin typeface="Verdana"/>
+                <a:latin typeface="Arial"/>
               </a:rPr>
               <a:t>Neudata | #ClearDataClearImpact</a:t>
             </a:r>
@@ -20706,8 +20514,8 @@
                 <a:solidFill>
                   <a:srgbClr val="0D7377"/>
                 </a:solidFill>
-                <a:latin typeface="Century Gothic"/>
-                <a:cs typeface="Century Gothic"/>
+                <a:latin typeface="Arial"/>
+                <a:cs typeface="Arial"/>
               </a:rPr>
               <a:t>What may each design claim?</a:t>
             </a:r>
@@ -20803,8 +20611,8 @@
                 <a:solidFill>
                   <a:srgbClr val="FFFFFF"/>
                 </a:solidFill>
-                <a:latin typeface="Century Gothic"/>
-                <a:cs typeface="Century Gothic"/>
+                <a:latin typeface="Arial"/>
+                <a:cs typeface="Arial"/>
               </a:rPr>
               <a:t>KEY MESSAGE   </a:t>
             </a:r>
@@ -20813,8 +20621,8 @@
                 <a:solidFill>
                   <a:srgbClr val="FFFFFF"/>
                 </a:solidFill>
-                <a:latin typeface="Century Gothic"/>
-                <a:cs typeface="Century Gothic"/>
+                <a:latin typeface="Arial"/>
+                <a:cs typeface="Arial"/>
               </a:rPr>
               <a:t>Randomisation earns the word 'caused'; observation earns 'associated'.</a:t>
             </a:r>
@@ -20851,7 +20659,7 @@
                     <a:lumMod val="50000"/>
                   </a:schemeClr>
                 </a:solidFill>
-                <a:latin typeface="Verdana"/>
+                <a:latin typeface="Arial"/>
               </a:rPr>
               <a:t>Neudata | #ClearDataClearImpact</a:t>
             </a:r>
@@ -20981,8 +20789,8 @@
                 <a:solidFill>
                   <a:srgbClr val="0D7377"/>
                 </a:solidFill>
-                <a:latin typeface="Century Gothic"/>
-                <a:cs typeface="Century Gothic"/>
+                <a:latin typeface="Arial"/>
+                <a:cs typeface="Arial"/>
               </a:rPr>
               <a:t>The two papers side by side</a:t>
             </a:r>
@@ -21050,7 +20858,7 @@
                           <a:solidFill>
                             <a:srgbClr val="FFFFFF"/>
                           </a:solidFill>
-                          <a:latin typeface="Century Gothic"/>
+                          <a:latin typeface="Arial"/>
                         </a:rPr>
                         <a:t/>
                       </a:r>
@@ -21073,7 +20881,7 @@
                           <a:solidFill>
                             <a:srgbClr val="FFFFFF"/>
                           </a:solidFill>
-                          <a:latin typeface="Century Gothic"/>
+                          <a:latin typeface="Arial"/>
                         </a:rPr>
                         <a:t>Paper 1: RCT (Boulet 2024)</a:t>
                       </a:r>
@@ -21096,7 +20904,7 @@
                           <a:solidFill>
                             <a:srgbClr val="FFFFFF"/>
                           </a:solidFill>
-                          <a:latin typeface="Century Gothic"/>
+                          <a:latin typeface="Arial"/>
                         </a:rPr>
                         <a:t>Paper 2: cohort (Hyun 2023)</a:t>
                       </a:r>
@@ -21121,7 +20929,7 @@
                           <a:solidFill>
                             <a:srgbClr val="000000"/>
                           </a:solidFill>
-                          <a:latin typeface="Century Gothic"/>
+                          <a:latin typeface="Arial"/>
                         </a:rPr>
                         <a:t>Groups made similar by</a:t>
                       </a:r>
@@ -21144,7 +20952,7 @@
                           <a:solidFill>
                             <a:srgbClr val="000000"/>
                           </a:solidFill>
-                          <a:latin typeface="Century Gothic"/>
+                          <a:latin typeface="Arial"/>
                         </a:rPr>
                         <a:t>Randomisation 1:1 (blocks of 2)</a:t>
                       </a:r>
@@ -21167,7 +20975,7 @@
                           <a:solidFill>
                             <a:srgbClr val="000000"/>
                           </a:solidFill>
-                          <a:latin typeface="Century Gothic"/>
+                          <a:latin typeface="Arial"/>
                         </a:rPr>
                         <a:t>Propensity matching (measured factors only)</a:t>
                       </a:r>
@@ -21192,7 +21000,7 @@
                           <a:solidFill>
                             <a:srgbClr val="000000"/>
                           </a:solidFill>
-                          <a:latin typeface="Century Gothic"/>
+                          <a:latin typeface="Arial"/>
                         </a:rPr>
                         <a:t>Who knew the group</a:t>
                       </a:r>
@@ -21215,7 +21023,7 @@
                           <a:solidFill>
                             <a:srgbClr val="000000"/>
                           </a:solidFill>
-                          <a:latin typeface="Century Gothic"/>
+                          <a:latin typeface="Arial"/>
                         </a:rPr>
                         <a:t>Clinicians knew; patients, statistician blinded</a:t>
                       </a:r>
@@ -21238,7 +21046,7 @@
                           <a:solidFill>
                             <a:srgbClr val="000000"/>
                           </a:solidFill>
-                          <a:latin typeface="Century Gothic"/>
+                          <a:latin typeface="Arial"/>
                         </a:rPr>
                         <a:t>Everyone (observational)</a:t>
                       </a:r>
@@ -21263,7 +21071,7 @@
                           <a:solidFill>
                             <a:srgbClr val="000000"/>
                           </a:solidFill>
-                          <a:latin typeface="Century Gothic"/>
+                          <a:latin typeface="Arial"/>
                         </a:rPr>
                         <a:t>Main result</a:t>
                       </a:r>
@@ -21286,7 +21094,7 @@
                           <a:solidFill>
                             <a:srgbClr val="000000"/>
                           </a:solidFill>
-                          <a:latin typeface="Century Gothic"/>
+                          <a:latin typeface="Arial"/>
                         </a:rPr>
                         <a:t>13.2 ml/kg (95% CI -15.2 to 41.6), p = 0.42</a:t>
                       </a:r>
@@ -21309,7 +21117,7 @@
                           <a:solidFill>
                             <a:srgbClr val="000000"/>
                           </a:solidFill>
-                          <a:latin typeface="Century Gothic"/>
+                          <a:latin typeface="Arial"/>
                         </a:rPr>
                         <a:t>Day 2: HR 2.13 (1.48 to 3.06)</a:t>
                       </a:r>
@@ -21334,7 +21142,7 @@
                           <a:solidFill>
                             <a:srgbClr val="000000"/>
                           </a:solidFill>
-                          <a:latin typeface="Century Gothic"/>
+                          <a:latin typeface="Arial"/>
                         </a:rPr>
                         <a:t>Missed limitation</a:t>
                       </a:r>
@@ -21357,7 +21165,7 @@
                           <a:solidFill>
                             <a:srgbClr val="000000"/>
                           </a:solidFill>
-                          <a:latin typeface="Century Gothic"/>
+                          <a:latin typeface="Arial"/>
                         </a:rPr>
                         <a:t>Blocks of 2 with unblinded clinicians</a:t>
                       </a:r>
@@ -21380,7 +21188,7 @@
                           <a:solidFill>
                             <a:srgbClr val="000000"/>
                           </a:solidFill>
-                          <a:latin typeface="Century Gothic"/>
+                          <a:latin typeface="Arial"/>
                         </a:rPr>
                         <a:t>Survivor bias (ICU stay of 3+ days)</a:t>
                       </a:r>
@@ -21405,7 +21213,7 @@
                           <a:solidFill>
                             <a:srgbClr val="000000"/>
                           </a:solidFill>
-                          <a:latin typeface="Century Gothic"/>
+                          <a:latin typeface="Arial"/>
                         </a:rPr>
                         <a:t>Wording problem</a:t>
                       </a:r>
@@ -21428,7 +21236,7 @@
                           <a:solidFill>
                             <a:srgbClr val="000000"/>
                           </a:solidFill>
-                          <a:latin typeface="Century Gothic"/>
+                          <a:latin typeface="Arial"/>
                         </a:rPr>
                         <a:t>'Non-significant trend' (p = 0.42)</a:t>
                       </a:r>
@@ -21451,7 +21259,7 @@
                           <a:solidFill>
                             <a:srgbClr val="000000"/>
                           </a:solidFill>
-                          <a:latin typeface="Century Gothic"/>
+                          <a:latin typeface="Arial"/>
                         </a:rPr>
                         <a:t>'Impact', 'did not impact', 'show'</a:t>
                       </a:r>
@@ -21476,7 +21284,7 @@
                           <a:solidFill>
                             <a:srgbClr val="000000"/>
                           </a:solidFill>
-                          <a:latin typeface="Century Gothic"/>
+                          <a:latin typeface="Arial"/>
                         </a:rPr>
                         <a:t>May claim</a:t>
                       </a:r>
@@ -21499,7 +21307,7 @@
                           <a:solidFill>
                             <a:srgbClr val="000000"/>
                           </a:solidFill>
-                          <a:latin typeface="Century Gothic"/>
+                          <a:latin typeface="Arial"/>
                         </a:rPr>
                         <a:t>Did not reduce day-5 balance (small pilot)</a:t>
                       </a:r>
@@ -21522,7 +21330,7 @@
                           <a:solidFill>
                             <a:srgbClr val="000000"/>
                           </a:solidFill>
-                          <a:latin typeface="Century Gothic"/>
+                          <a:latin typeface="Arial"/>
                         </a:rPr>
                         <a:t>Positive balance associated with death</a:t>
                       </a:r>
@@ -21570,8 +21378,8 @@
                 <a:solidFill>
                   <a:srgbClr val="595959"/>
                 </a:solidFill>
-                <a:latin typeface="Century Gothic"/>
-                <a:cs typeface="Century Gothic"/>
+                <a:latin typeface="Arial"/>
+                <a:cs typeface="Arial"/>
               </a:rPr>
               <a:t>Pages and details: Resources/appraisal_instructor_guide.md</a:t>
             </a:r>
@@ -21608,7 +21416,7 @@
                     <a:lumMod val="50000"/>
                   </a:schemeClr>
                 </a:solidFill>
-                <a:latin typeface="Verdana"/>
+                <a:latin typeface="Arial"/>
               </a:rPr>
               <a:t>Neudata | #ClearDataClearImpact</a:t>
             </a:r>
@@ -21738,8 +21546,8 @@
                 <a:solidFill>
                   <a:srgbClr val="0D7377"/>
                 </a:solidFill>
-                <a:latin typeface="Century Gothic"/>
-                <a:cs typeface="Century Gothic"/>
+                <a:latin typeface="Arial"/>
+                <a:cs typeface="Arial"/>
               </a:rPr>
               <a:t>Plenary: what can each design claim?</a:t>
             </a:r>
@@ -21809,8 +21617,8 @@
                 <a:solidFill>
                   <a:srgbClr val="FFFFFF"/>
                 </a:solidFill>
-                <a:latin typeface="Century Gothic"/>
-                <a:cs typeface="Century Gothic"/>
+                <a:latin typeface="Arial"/>
+                <a:cs typeface="Arial"/>
               </a:rPr>
               <a:t>DISCUSSION   |   6 min</a:t>
             </a:r>
@@ -21847,25 +21655,19 @@
               <a:spcBef>
                 <a:spcPts val="450"/>
               </a:spcBef>
-              <a:buNone/>
-            </a:pPr>
-            <a:r>
-              <a:rPr lang="en-US" sz="1650" b="1" dirty="0">
-                <a:solidFill>
-                  <a:srgbClr val="1F5C7A"/>
-                </a:solidFill>
-                <a:latin typeface="Century Gothic"/>
-                <a:cs typeface="Century Gothic"/>
-              </a:rPr>
-              <a:t>1.  </a:t>
-            </a:r>
+              <a:buClr>
+                <a:srgbClr val="1F5C7A"/>
+              </a:buClr>
+              <a:buFont typeface="Arial"/>
+              <a:buChar char="•"/>
+            </a:pPr>
             <a:r>
               <a:rPr lang="en-US" sz="1650" dirty="0">
                 <a:solidFill>
                   <a:srgbClr val="000000"/>
                 </a:solidFill>
-                <a:latin typeface="Century Gothic"/>
-                <a:cs typeface="Century Gothic"/>
+                <a:latin typeface="Arial"/>
+                <a:cs typeface="Arial"/>
               </a:rPr>
               <a:t>Groups 1 and 4 report Q1-Q4 (1 min each)</a:t>
             </a:r>
@@ -21878,25 +21680,19 @@
               <a:spcBef>
                 <a:spcPts val="450"/>
               </a:spcBef>
-              <a:buNone/>
-            </a:pPr>
-            <a:r>
-              <a:rPr lang="en-US" sz="1650" b="1" dirty="0">
-                <a:solidFill>
-                  <a:srgbClr val="1F5C7A"/>
-                </a:solidFill>
-                <a:latin typeface="Century Gothic"/>
-                <a:cs typeface="Century Gothic"/>
-              </a:rPr>
-              <a:t>2.  </a:t>
-            </a:r>
+              <a:buClr>
+                <a:srgbClr val="1F5C7A"/>
+              </a:buClr>
+              <a:buFont typeface="Arial"/>
+              <a:buChar char="•"/>
+            </a:pPr>
             <a:r>
               <a:rPr lang="en-US" sz="1650" dirty="0">
                 <a:solidFill>
                   <a:srgbClr val="000000"/>
                 </a:solidFill>
-                <a:latin typeface="Century Gothic"/>
-                <a:cs typeface="Century Gothic"/>
+                <a:latin typeface="Arial"/>
+                <a:cs typeface="Arial"/>
               </a:rPr>
               <a:t>Groups 2 and 5 report Q5-Q8 (1 min each)</a:t>
             </a:r>
@@ -21909,25 +21705,19 @@
               <a:spcBef>
                 <a:spcPts val="450"/>
               </a:spcBef>
-              <a:buNone/>
-            </a:pPr>
-            <a:r>
-              <a:rPr lang="en-US" sz="1650" b="1" dirty="0">
-                <a:solidFill>
-                  <a:srgbClr val="1F5C7A"/>
-                </a:solidFill>
-                <a:latin typeface="Century Gothic"/>
-                <a:cs typeface="Century Gothic"/>
-              </a:rPr>
-              <a:t>3.  </a:t>
-            </a:r>
+              <a:buClr>
+                <a:srgbClr val="1F5C7A"/>
+              </a:buClr>
+              <a:buFont typeface="Arial"/>
+              <a:buChar char="•"/>
+            </a:pPr>
             <a:r>
               <a:rPr lang="en-US" sz="1650" dirty="0">
                 <a:solidFill>
                   <a:srgbClr val="000000"/>
                 </a:solidFill>
-                <a:latin typeface="Century Gothic"/>
-                <a:cs typeface="Century Gothic"/>
+                <a:latin typeface="Arial"/>
+                <a:cs typeface="Arial"/>
               </a:rPr>
               <a:t>Group 3 reports Q9-Q10 for Paper 1</a:t>
             </a:r>
@@ -21940,25 +21730,19 @@
               <a:spcBef>
                 <a:spcPts val="450"/>
               </a:spcBef>
-              <a:buNone/>
-            </a:pPr>
-            <a:r>
-              <a:rPr lang="en-US" sz="1650" b="1" dirty="0">
-                <a:solidFill>
-                  <a:srgbClr val="1F5C7A"/>
-                </a:solidFill>
-                <a:latin typeface="Century Gothic"/>
-                <a:cs typeface="Century Gothic"/>
-              </a:rPr>
-              <a:t>4.  </a:t>
-            </a:r>
+              <a:buClr>
+                <a:srgbClr val="1F5C7A"/>
+              </a:buClr>
+              <a:buFont typeface="Arial"/>
+              <a:buChar char="•"/>
+            </a:pPr>
             <a:r>
               <a:rPr lang="en-US" sz="1650" dirty="0">
                 <a:solidFill>
                   <a:srgbClr val="000000"/>
                 </a:solidFill>
-                <a:latin typeface="Century Gothic"/>
-                <a:cs typeface="Century Gothic"/>
+                <a:latin typeface="Arial"/>
+                <a:cs typeface="Arial"/>
               </a:rPr>
               <a:t>Compare Q4, Q5 and Q8 across the two papers</a:t>
             </a:r>
@@ -21971,25 +21755,19 @@
               <a:spcBef>
                 <a:spcPts val="450"/>
               </a:spcBef>
-              <a:buNone/>
-            </a:pPr>
-            <a:r>
-              <a:rPr lang="en-US" sz="1650" b="1" dirty="0">
-                <a:solidFill>
-                  <a:srgbClr val="1F5C7A"/>
-                </a:solidFill>
-                <a:latin typeface="Century Gothic"/>
-                <a:cs typeface="Century Gothic"/>
-              </a:rPr>
-              <a:t>5.  </a:t>
-            </a:r>
+              <a:buClr>
+                <a:srgbClr val="1F5C7A"/>
+              </a:buClr>
+              <a:buFont typeface="Arial"/>
+              <a:buChar char="•"/>
+            </a:pPr>
             <a:r>
               <a:rPr lang="en-US" sz="1650" dirty="0">
                 <a:solidFill>
                   <a:srgbClr val="000000"/>
                 </a:solidFill>
-                <a:latin typeface="Century Gothic"/>
-                <a:cs typeface="Century Gothic"/>
+                <a:latin typeface="Arial"/>
+                <a:cs typeface="Arial"/>
               </a:rPr>
               <a:t>Vote on Q10: would either paper change practice in our unit?</a:t>
             </a:r>
@@ -22033,8 +21811,8 @@
                 <a:solidFill>
                   <a:srgbClr val="1F5C7A"/>
                 </a:solidFill>
-                <a:latin typeface="Century Gothic"/>
-                <a:cs typeface="Century Gothic"/>
+                <a:latin typeface="Arial"/>
+                <a:cs typeface="Arial"/>
               </a:rPr>
               <a:t>Land these messages</a:t>
             </a:r>
@@ -22055,8 +21833,8 @@
                 <a:solidFill>
                   <a:srgbClr val="000000"/>
                 </a:solidFill>
-                <a:latin typeface="Century Gothic"/>
-                <a:cs typeface="Century Gothic"/>
+                <a:latin typeface="Arial"/>
+                <a:cs typeface="Arial"/>
               </a:rPr>
               <a:t>Design sets the verb: caused vs associated</a:t>
             </a:r>
@@ -22077,8 +21855,8 @@
                 <a:solidFill>
                   <a:srgbClr val="000000"/>
                 </a:solidFill>
-                <a:latin typeface="Century Gothic"/>
-                <a:cs typeface="Century Gothic"/>
+                <a:latin typeface="Arial"/>
+                <a:cs typeface="Arial"/>
               </a:rPr>
               <a:t>A wide CI means 'we don't know yet'</a:t>
             </a:r>
@@ -22099,8 +21877,8 @@
                 <a:solidFill>
                   <a:srgbClr val="000000"/>
                 </a:solidFill>
-                <a:latin typeface="Century Gothic"/>
-                <a:cs typeface="Century Gothic"/>
+                <a:latin typeface="Arial"/>
+                <a:cs typeface="Arial"/>
               </a:rPr>
               <a:t>Published is not the same as correct</a:t>
             </a:r>
@@ -22121,8 +21899,8 @@
                 <a:solidFill>
                   <a:srgbClr val="000000"/>
                 </a:solidFill>
-                <a:latin typeface="Century Gothic"/>
-                <a:cs typeface="Century Gothic"/>
+                <a:latin typeface="Arial"/>
+                <a:cs typeface="Arial"/>
               </a:rPr>
               <a:t>Name the reporting guideline: CONSORT, STROBE</a:t>
             </a:r>
@@ -22168,8 +21946,8 @@
                 <a:solidFill>
                   <a:srgbClr val="1F5C7A"/>
                 </a:solidFill>
-                <a:latin typeface="Century Gothic"/>
-                <a:cs typeface="Century Gothic"/>
+                <a:latin typeface="Arial"/>
+                <a:cs typeface="Arial"/>
               </a:rPr>
               <a:t>OUTPUT   </a:t>
             </a:r>
@@ -22178,8 +21956,8 @@
                 <a:solidFill>
                   <a:srgbClr val="000000"/>
                 </a:solidFill>
-                <a:latin typeface="Century Gothic"/>
-                <a:cs typeface="Century Gothic"/>
+                <a:latin typeface="Arial"/>
+                <a:cs typeface="Arial"/>
               </a:rPr>
               <a:t>Each group states what its paper may and may not claim</a:t>
             </a:r>
@@ -22216,7 +21994,7 @@
                     <a:lumMod val="50000"/>
                   </a:schemeClr>
                 </a:solidFill>
-                <a:latin typeface="Verdana"/>
+                <a:latin typeface="Arial"/>
               </a:rPr>
               <a:t>Neudata | #ClearDataClearImpact</a:t>
             </a:r>
@@ -22346,8 +22124,8 @@
                 <a:solidFill>
                   <a:srgbClr val="0D7377"/>
                 </a:solidFill>
-                <a:latin typeface="Century Gothic"/>
-                <a:cs typeface="Century Gothic"/>
+                <a:latin typeface="Arial"/>
+                <a:cs typeface="Arial"/>
               </a:rPr>
               <a:t>Key words of Session 8</a:t>
             </a:r>
@@ -22414,7 +22192,7 @@
                           <a:solidFill>
                             <a:srgbClr val="FFFFFF"/>
                           </a:solidFill>
-                          <a:latin typeface="Century Gothic"/>
+                          <a:latin typeface="Arial"/>
                         </a:rPr>
                         <a:t>Term</a:t>
                       </a:r>
@@ -22437,7 +22215,7 @@
                           <a:solidFill>
                             <a:srgbClr val="FFFFFF"/>
                           </a:solidFill>
-                          <a:latin typeface="Century Gothic"/>
+                          <a:latin typeface="Arial"/>
                         </a:rPr>
                         <a:t>In plain words</a:t>
                       </a:r>
@@ -22462,7 +22240,7 @@
                           <a:solidFill>
                             <a:srgbClr val="000000"/>
                           </a:solidFill>
-                          <a:latin typeface="Century Gothic"/>
+                          <a:latin typeface="Arial"/>
                         </a:rPr>
                         <a:t>Introduction funnel</a:t>
                       </a:r>
@@ -22485,7 +22263,7 @@
                           <a:solidFill>
                             <a:srgbClr val="000000"/>
                           </a:solidFill>
-                          <a:latin typeface="Century Gothic"/>
+                          <a:latin typeface="Arial"/>
                         </a:rPr>
                         <a:t>Known → not known → aim, in three paragraphs</a:t>
                       </a:r>
@@ -22510,7 +22288,7 @@
                           <a:solidFill>
                             <a:srgbClr val="000000"/>
                           </a:solidFill>
-                          <a:latin typeface="Century Gothic"/>
+                          <a:latin typeface="Arial"/>
                         </a:rPr>
                         <a:t>Six moves</a:t>
                       </a:r>
@@ -22533,7 +22311,7 @@
                           <a:solidFill>
                             <a:srgbClr val="000000"/>
                           </a:solidFill>
-                          <a:latin typeface="Century Gothic"/>
+                          <a:latin typeface="Arial"/>
                         </a:rPr>
                         <a:t>Answer, compare, explain, limitations, implications, conclusion</a:t>
                       </a:r>
@@ -22558,7 +22336,7 @@
                           <a:solidFill>
                             <a:srgbClr val="000000"/>
                           </a:solidFill>
-                          <a:latin typeface="Century Gothic"/>
+                          <a:latin typeface="Arial"/>
                         </a:rPr>
                         <a:t>Calibrated language</a:t>
                       </a:r>
@@ -22581,7 +22359,7 @@
                           <a:solidFill>
                             <a:srgbClr val="000000"/>
                           </a:solidFill>
-                          <a:latin typeface="Century Gothic"/>
+                          <a:latin typeface="Arial"/>
                         </a:rPr>
                         <a:t>Verbs as strong as the design allows ('associated', not 'caused')</a:t>
                       </a:r>
@@ -22606,7 +22384,7 @@
                           <a:solidFill>
                             <a:srgbClr val="000000"/>
                           </a:solidFill>
-                          <a:latin typeface="Century Gothic"/>
+                          <a:latin typeface="Arial"/>
                         </a:rPr>
                         <a:t>Predatory journal</a:t>
                       </a:r>
@@ -22629,7 +22407,7 @@
                           <a:solidFill>
                             <a:srgbClr val="000000"/>
                           </a:solidFill>
-                          <a:latin typeface="Century Gothic"/>
+                          <a:latin typeface="Arial"/>
                         </a:rPr>
                         <a:t>Takes fees without real peer review or indexing</a:t>
                       </a:r>
@@ -22654,7 +22432,7 @@
                           <a:solidFill>
                             <a:srgbClr val="000000"/>
                           </a:solidFill>
-                          <a:latin typeface="Century Gothic"/>
+                          <a:latin typeface="Arial"/>
                         </a:rPr>
                         <a:t>Point-by-point response</a:t>
                       </a:r>
@@ -22677,7 +22455,7 @@
                           <a:solidFill>
                             <a:srgbClr val="000000"/>
                           </a:solidFill>
-                          <a:latin typeface="Century Gothic"/>
+                          <a:latin typeface="Arial"/>
                         </a:rPr>
                         <a:t>A table answering every reviewer comment with the change made</a:t>
                       </a:r>
@@ -22702,7 +22480,7 @@
                           <a:solidFill>
                             <a:srgbClr val="000000"/>
                           </a:solidFill>
-                          <a:latin typeface="Century Gothic"/>
+                          <a:latin typeface="Arial"/>
                         </a:rPr>
                         <a:t>Preprint</a:t>
                       </a:r>
@@ -22725,7 +22503,7 @@
                           <a:solidFill>
                             <a:srgbClr val="000000"/>
                           </a:solidFill>
-                          <a:latin typeface="Century Gothic"/>
+                          <a:latin typeface="Arial"/>
                         </a:rPr>
                         <a:t>Public manuscript posted before peer review</a:t>
                       </a:r>
@@ -22773,8 +22551,8 @@
                 <a:solidFill>
                   <a:srgbClr val="595959"/>
                 </a:solidFill>
-                <a:latin typeface="Century Gothic"/>
-                <a:cs typeface="Century Gothic"/>
+                <a:latin typeface="Arial"/>
+                <a:cs typeface="Arial"/>
               </a:rPr>
               <a:t>Full glossary (EN-VN): Course/References/</a:t>
             </a:r>
@@ -22811,7 +22589,7 @@
                     <a:lumMod val="50000"/>
                   </a:schemeClr>
                 </a:solidFill>
-                <a:latin typeface="Verdana"/>
+                <a:latin typeface="Arial"/>
               </a:rPr>
               <a:t>Neudata | #ClearDataClearImpact</a:t>
             </a:r>
@@ -22941,8 +22719,8 @@
                 <a:solidFill>
                   <a:srgbClr val="0D7377"/>
                 </a:solidFill>
-                <a:latin typeface="Century Gothic"/>
-                <a:cs typeface="Century Gothic"/>
+                <a:latin typeface="Arial"/>
+                <a:cs typeface="Arial"/>
               </a:rPr>
               <a:t>From question to publication: what you can now do</a:t>
             </a:r>
@@ -23012,8 +22790,8 @@
                 <a:solidFill>
                   <a:srgbClr val="FFFFFF"/>
                 </a:solidFill>
-                <a:latin typeface="Century Gothic"/>
-                <a:cs typeface="Century Gothic"/>
+                <a:latin typeface="Arial"/>
+                <a:cs typeface="Arial"/>
               </a:rPr>
               <a:t>Protect</a:t>
             </a:r>
@@ -23061,8 +22839,8 @@
                 <a:solidFill>
                   <a:srgbClr val="000000"/>
                 </a:solidFill>
-                <a:latin typeface="Century Gothic"/>
-                <a:cs typeface="Century Gothic"/>
+                <a:latin typeface="Arial"/>
+                <a:cs typeface="Arial"/>
               </a:rPr>
               <a:t>Ethics, consent, registration</a:t>
             </a:r>
@@ -23082,8 +22860,8 @@
                 <a:solidFill>
                   <a:srgbClr val="000000"/>
                 </a:solidFill>
-                <a:latin typeface="Century Gothic"/>
-                <a:cs typeface="Century Gothic"/>
+                <a:latin typeface="Arial"/>
+                <a:cs typeface="Arial"/>
               </a:rPr>
               <a:t>Honest data and authorship</a:t>
             </a:r>
@@ -23125,8 +22903,8 @@
                 <a:solidFill>
                   <a:srgbClr val="FFFFFF"/>
                 </a:solidFill>
-                <a:latin typeface="Century Gothic"/>
-                <a:cs typeface="Century Gothic"/>
+                <a:latin typeface="Arial"/>
+                <a:cs typeface="Arial"/>
               </a:rPr>
               <a:t>Write</a:t>
             </a:r>
@@ -23174,8 +22952,8 @@
                 <a:solidFill>
                   <a:srgbClr val="000000"/>
                 </a:solidFill>
-                <a:latin typeface="Century Gothic"/>
-                <a:cs typeface="Century Gothic"/>
+                <a:latin typeface="Arial"/>
+                <a:cs typeface="Arial"/>
               </a:rPr>
               <a:t>IMRaD in the right order</a:t>
             </a:r>
@@ -23195,8 +22973,8 @@
                 <a:solidFill>
                   <a:srgbClr val="000000"/>
                 </a:solidFill>
-                <a:latin typeface="Century Gothic"/>
-                <a:cs typeface="Century Gothic"/>
+                <a:latin typeface="Arial"/>
+                <a:cs typeface="Arial"/>
               </a:rPr>
               <a:t>Numbers with CIs</a:t>
             </a:r>
@@ -23216,8 +22994,8 @@
                 <a:solidFill>
                   <a:srgbClr val="000000"/>
                 </a:solidFill>
-                <a:latin typeface="Century Gothic"/>
-                <a:cs typeface="Century Gothic"/>
+                <a:latin typeface="Arial"/>
+                <a:cs typeface="Arial"/>
               </a:rPr>
               <a:t>Verbs that match the design</a:t>
             </a:r>
@@ -23259,8 +23037,8 @@
                 <a:solidFill>
                   <a:srgbClr val="FFFFFF"/>
                 </a:solidFill>
-                <a:latin typeface="Century Gothic"/>
-                <a:cs typeface="Century Gothic"/>
+                <a:latin typeface="Arial"/>
+                <a:cs typeface="Arial"/>
               </a:rPr>
               <a:t>Publish</a:t>
             </a:r>
@@ -23308,8 +23086,8 @@
                 <a:solidFill>
                   <a:srgbClr val="000000"/>
                 </a:solidFill>
-                <a:latin typeface="Century Gothic"/>
-                <a:cs typeface="Century Gothic"/>
+                <a:latin typeface="Arial"/>
+                <a:cs typeface="Arial"/>
               </a:rPr>
               <a:t>Reporting checklist</a:t>
             </a:r>
@@ -23329,8 +23107,8 @@
                 <a:solidFill>
                   <a:srgbClr val="000000"/>
                 </a:solidFill>
-                <a:latin typeface="Century Gothic"/>
-                <a:cs typeface="Century Gothic"/>
+                <a:latin typeface="Arial"/>
+                <a:cs typeface="Arial"/>
               </a:rPr>
               <a:t>Trusted journal</a:t>
             </a:r>
@@ -23350,8 +23128,8 @@
                 <a:solidFill>
                   <a:srgbClr val="000000"/>
                 </a:solidFill>
-                <a:latin typeface="Century Gothic"/>
-                <a:cs typeface="Century Gothic"/>
+                <a:latin typeface="Arial"/>
+                <a:cs typeface="Arial"/>
               </a:rPr>
               <a:t>Polite, complete responses</a:t>
             </a:r>
@@ -23393,8 +23171,8 @@
                 <a:solidFill>
                   <a:srgbClr val="FFFFFF"/>
                 </a:solidFill>
-                <a:latin typeface="Century Gothic"/>
-                <a:cs typeface="Century Gothic"/>
+                <a:latin typeface="Arial"/>
+                <a:cs typeface="Arial"/>
               </a:rPr>
               <a:t>Review</a:t>
             </a:r>
@@ -23442,8 +23220,8 @@
                 <a:solidFill>
                   <a:srgbClr val="000000"/>
                 </a:solidFill>
-                <a:latin typeface="Century Gothic"/>
-                <a:cs typeface="Century Gothic"/>
+                <a:latin typeface="Arial"/>
+                <a:cs typeface="Arial"/>
               </a:rPr>
               <a:t>10 questions</a:t>
             </a:r>
@@ -23463,8 +23241,8 @@
                 <a:solidFill>
                   <a:srgbClr val="000000"/>
                 </a:solidFill>
-                <a:latin typeface="Century Gothic"/>
-                <a:cs typeface="Century Gothic"/>
+                <a:latin typeface="Arial"/>
+                <a:cs typeface="Arial"/>
               </a:rPr>
               <a:t>What each design may claim</a:t>
             </a:r>
@@ -23508,8 +23286,8 @@
                 <a:solidFill>
                   <a:srgbClr val="FFFFFF"/>
                 </a:solidFill>
-                <a:latin typeface="Century Gothic"/>
-                <a:cs typeface="Century Gothic"/>
+                <a:latin typeface="Arial"/>
+                <a:cs typeface="Arial"/>
               </a:rPr>
               <a:t>KEY MESSAGE   </a:t>
             </a:r>
@@ -23518,8 +23296,8 @@
                 <a:solidFill>
                   <a:srgbClr val="FFFFFF"/>
                 </a:solidFill>
-                <a:latin typeface="Century Gothic"/>
-                <a:cs typeface="Century Gothic"/>
+                <a:latin typeface="Arial"/>
+                <a:cs typeface="Arial"/>
               </a:rPr>
               <a:t>Next: present your proposal and swap manuscripts for peer review.</a:t>
             </a:r>
@@ -23556,7 +23334,7 @@
                     <a:lumMod val="50000"/>
                   </a:schemeClr>
                 </a:solidFill>
-                <a:latin typeface="Verdana"/>
+                <a:latin typeface="Arial"/>
               </a:rPr>
               <a:t>Neudata | #ClearDataClearImpact</a:t>
             </a:r>
@@ -23686,8 +23464,8 @@
                 <a:solidFill>
                   <a:srgbClr val="0D7377"/>
                 </a:solidFill>
-                <a:latin typeface="Century Gothic"/>
-                <a:cs typeface="Century Gothic"/>
+                <a:latin typeface="Arial"/>
+                <a:cs typeface="Arial"/>
               </a:rPr>
               <a:t>Group presentations  |  45 minutes</a:t>
             </a:r>
@@ -23756,8 +23534,8 @@
                 <a:solidFill>
                   <a:srgbClr val="0D7377"/>
                 </a:solidFill>
-                <a:latin typeface="Century Gothic"/>
-                <a:cs typeface="Century Gothic"/>
+                <a:latin typeface="Arial"/>
+                <a:cs typeface="Arial"/>
               </a:rPr>
               <a:t>Your proposals and publication plans</a:t>
             </a:r>
@@ -23774,8 +23552,8 @@
                 <a:solidFill>
                   <a:srgbClr val="595959"/>
                 </a:solidFill>
-                <a:latin typeface="Century Gothic"/>
-                <a:cs typeface="Century Gothic"/>
+                <a:latin typeface="Arial"/>
+                <a:cs typeface="Arial"/>
               </a:rPr>
               <a:t>6 minutes to present, 2 minutes of feedback: be kind, be specific</a:t>
             </a:r>
@@ -23812,7 +23590,7 @@
                     <a:lumMod val="50000"/>
                   </a:schemeClr>
                 </a:solidFill>
-                <a:latin typeface="Verdana"/>
+                <a:latin typeface="Arial"/>
               </a:rPr>
               <a:t>Neudata | #ClearDataClearImpact</a:t>
             </a:r>
@@ -23942,8 +23720,8 @@
                 <a:solidFill>
                   <a:srgbClr val="0D7377"/>
                 </a:solidFill>
-                <a:latin typeface="Century Gothic"/>
-                <a:cs typeface="Century Gothic"/>
+                <a:latin typeface="Arial"/>
+                <a:cs typeface="Arial"/>
               </a:rPr>
               <a:t>Introduction: a funnel in three paragraphs</a:t>
             </a:r>
@@ -24039,8 +23817,8 @@
                 <a:solidFill>
                   <a:srgbClr val="FFFFFF"/>
                 </a:solidFill>
-                <a:latin typeface="Century Gothic"/>
-                <a:cs typeface="Century Gothic"/>
+                <a:latin typeface="Arial"/>
+                <a:cs typeface="Arial"/>
               </a:rPr>
               <a:t>KEY MESSAGE   </a:t>
             </a:r>
@@ -24049,8 +23827,8 @@
                 <a:solidFill>
                   <a:srgbClr val="FFFFFF"/>
                 </a:solidFill>
-                <a:latin typeface="Century Gothic"/>
-                <a:cs typeface="Century Gothic"/>
+                <a:latin typeface="Arial"/>
+                <a:cs typeface="Arial"/>
               </a:rPr>
               <a:t>Known, unknown, aim. The aim matches the primary outcome.</a:t>
             </a:r>
@@ -24087,7 +23865,7 @@
                     <a:lumMod val="50000"/>
                   </a:schemeClr>
                 </a:solidFill>
-                <a:latin typeface="Verdana"/>
+                <a:latin typeface="Arial"/>
               </a:rPr>
               <a:t>Neudata | #ClearDataClearImpact</a:t>
             </a:r>
@@ -24217,8 +23995,8 @@
                 <a:solidFill>
                   <a:srgbClr val="0D7377"/>
                 </a:solidFill>
-                <a:latin typeface="Century Gothic"/>
-                <a:cs typeface="Century Gothic"/>
+                <a:latin typeface="Arial"/>
+                <a:cs typeface="Arial"/>
               </a:rPr>
               <a:t>How presentations are scored</a:t>
             </a:r>
@@ -24286,7 +24064,7 @@
                           <a:solidFill>
                             <a:srgbClr val="FFFFFF"/>
                           </a:solidFill>
-                          <a:latin typeface="Century Gothic"/>
+                          <a:latin typeface="Arial"/>
                         </a:rPr>
                         <a:t>Criterion</a:t>
                       </a:r>
@@ -24309,7 +24087,7 @@
                           <a:solidFill>
                             <a:srgbClr val="FFFFFF"/>
                           </a:solidFill>
-                          <a:latin typeface="Century Gothic"/>
+                          <a:latin typeface="Arial"/>
                         </a:rPr>
                         <a:t>What we look for</a:t>
                       </a:r>
@@ -24332,7 +24110,7 @@
                           <a:solidFill>
                             <a:srgbClr val="FFFFFF"/>
                           </a:solidFill>
-                          <a:latin typeface="Century Gothic"/>
+                          <a:latin typeface="Arial"/>
                         </a:rPr>
                         <a:t>Points</a:t>
                       </a:r>
@@ -24357,7 +24135,7 @@
                           <a:solidFill>
                             <a:srgbClr val="000000"/>
                           </a:solidFill>
-                          <a:latin typeface="Century Gothic"/>
+                          <a:latin typeface="Arial"/>
                         </a:rPr>
                         <a:t>12  Structure &amp; content</a:t>
                       </a:r>
@@ -24380,9 +24158,9 @@
                           <a:solidFill>
                             <a:srgbClr val="000000"/>
                           </a:solidFill>
-                          <a:latin typeface="Century Gothic"/>
+                          <a:latin typeface="Arial"/>
                         </a:rPr>
-                        <a:t>6 slides; key decisions incl. journal + guideline visible</a:t>
+                        <a:t>All 6 slides; question, design, outcome, sample size, ethics, journal + guideline visible</a:t>
                       </a:r>
                     </a:p>
                   </a:txBody>
@@ -24403,7 +24181,7 @@
                           <a:solidFill>
                             <a:srgbClr val="000000"/>
                           </a:solidFill>
-                          <a:latin typeface="Century Gothic"/>
+                          <a:latin typeface="Arial"/>
                         </a:rPr>
                         <a:t>0-6</a:t>
                       </a:r>
@@ -24428,7 +24206,7 @@
                           <a:solidFill>
                             <a:srgbClr val="000000"/>
                           </a:solidFill>
-                          <a:latin typeface="Century Gothic"/>
+                          <a:latin typeface="Arial"/>
                         </a:rPr>
                         <a:t>13  Clarity</a:t>
                       </a:r>
@@ -24451,7 +24229,7 @@
                           <a:solidFill>
                             <a:srgbClr val="000000"/>
                           </a:solidFill>
-                          <a:latin typeface="Century Gothic"/>
+                          <a:latin typeface="Arial"/>
                         </a:rPr>
                         <a:t>Every profession understands; one message per slide</a:t>
                       </a:r>
@@ -24474,7 +24252,7 @@
                           <a:solidFill>
                             <a:srgbClr val="000000"/>
                           </a:solidFill>
-                          <a:latin typeface="Century Gothic"/>
+                          <a:latin typeface="Arial"/>
                         </a:rPr>
                         <a:t>0-6</a:t>
                       </a:r>
@@ -24499,7 +24277,7 @@
                           <a:solidFill>
                             <a:srgbClr val="000000"/>
                           </a:solidFill>
-                          <a:latin typeface="Century Gothic"/>
+                          <a:latin typeface="Arial"/>
                         </a:rPr>
                         <a:t>14  Visual design</a:t>
                       </a:r>
@@ -24522,7 +24300,7 @@
                           <a:solidFill>
                             <a:srgbClr val="000000"/>
                           </a:solidFill>
-                          <a:latin typeface="Century Gothic"/>
+                          <a:latin typeface="Arial"/>
                         </a:rPr>
                         <a:t>Readable from the back; pictures, not text</a:t>
                       </a:r>
@@ -24545,7 +24323,7 @@
                           <a:solidFill>
                             <a:srgbClr val="000000"/>
                           </a:solidFill>
-                          <a:latin typeface="Century Gothic"/>
+                          <a:latin typeface="Arial"/>
                         </a:rPr>
                         <a:t>0-6</a:t>
                       </a:r>
@@ -24570,7 +24348,7 @@
                           <a:solidFill>
                             <a:srgbClr val="000000"/>
                           </a:solidFill>
-                          <a:latin typeface="Century Gothic"/>
+                          <a:latin typeface="Arial"/>
                         </a:rPr>
                         <a:t>15  Timekeeping</a:t>
                       </a:r>
@@ -24593,7 +24371,7 @@
                           <a:solidFill>
                             <a:srgbClr val="000000"/>
                           </a:solidFill>
-                          <a:latin typeface="Century Gothic"/>
+                          <a:latin typeface="Arial"/>
                         </a:rPr>
                         <a:t>Finished between 5:00 and 6:00</a:t>
                       </a:r>
@@ -24616,7 +24394,7 @@
                           <a:solidFill>
                             <a:srgbClr val="000000"/>
                           </a:solidFill>
-                          <a:latin typeface="Century Gothic"/>
+                          <a:latin typeface="Arial"/>
                         </a:rPr>
                         <a:t>0-6</a:t>
                       </a:r>
@@ -24641,7 +24419,7 @@
                           <a:solidFill>
                             <a:srgbClr val="000000"/>
                           </a:solidFill>
-                          <a:latin typeface="Century Gothic"/>
+                          <a:latin typeface="Arial"/>
                         </a:rPr>
                         <a:t>16  Questions &amp; teamwork</a:t>
                       </a:r>
@@ -24664,7 +24442,7 @@
                           <a:solidFill>
                             <a:srgbClr val="000000"/>
                           </a:solidFill>
-                          <a:latin typeface="Century Gothic"/>
+                          <a:latin typeface="Arial"/>
                         </a:rPr>
                         <a:t>Honest answers; several members speak</a:t>
                       </a:r>
@@ -24687,7 +24465,7 @@
                           <a:solidFill>
                             <a:srgbClr val="000000"/>
                           </a:solidFill>
-                          <a:latin typeface="Century Gothic"/>
+                          <a:latin typeface="Arial"/>
                         </a:rPr>
                         <a:t>0-6</a:t>
                       </a:r>
@@ -24735,8 +24513,8 @@
                 <a:solidFill>
                   <a:srgbClr val="595959"/>
                 </a:solidFill>
-                <a:latin typeface="Century Gothic"/>
-                <a:cs typeface="Century Gothic"/>
+                <a:latin typeface="Arial"/>
+                <a:cs typeface="Arial"/>
               </a:rPr>
               <a:t>6 excellent, 4 good, 2 needs work, 0 missing = presentation /30.  Written proposal + publication plan /70 marked after the course.</a:t>
             </a:r>
@@ -24773,7 +24551,7 @@
                     <a:lumMod val="50000"/>
                   </a:schemeClr>
                 </a:solidFill>
-                <a:latin typeface="Verdana"/>
+                <a:latin typeface="Arial"/>
               </a:rPr>
               <a:t>Neudata | #ClearDataClearImpact</a:t>
             </a:r>
@@ -24903,8 +24681,8 @@
                 <a:solidFill>
                   <a:srgbClr val="0D7377"/>
                 </a:solidFill>
-                <a:latin typeface="Century Gothic"/>
-                <a:cs typeface="Century Gothic"/>
+                <a:latin typeface="Arial"/>
+                <a:cs typeface="Arial"/>
               </a:rPr>
               <a:t>Running order and timekeeping</a:t>
             </a:r>
@@ -25000,8 +24778,8 @@
                 <a:solidFill>
                   <a:srgbClr val="FFFFFF"/>
                 </a:solidFill>
-                <a:latin typeface="Century Gothic"/>
-                <a:cs typeface="Century Gothic"/>
+                <a:latin typeface="Arial"/>
+                <a:cs typeface="Arial"/>
               </a:rPr>
               <a:t>KEY MESSAGE   </a:t>
             </a:r>
@@ -25010,8 +24788,8 @@
                 <a:solidFill>
                   <a:srgbClr val="FFFFFF"/>
                 </a:solidFill>
-                <a:latin typeface="Century Gothic"/>
-                <a:cs typeface="Century Gothic"/>
+                <a:latin typeface="Arial"/>
+                <a:cs typeface="Arial"/>
               </a:rPr>
               <a:t>When the red card goes up, finish your sentence and stop.</a:t>
             </a:r>
@@ -25048,7 +24826,7 @@
                     <a:lumMod val="50000"/>
                   </a:schemeClr>
                 </a:solidFill>
-                <a:latin typeface="Verdana"/>
+                <a:latin typeface="Arial"/>
               </a:rPr>
               <a:t>Neudata | #ClearDataClearImpact</a:t>
             </a:r>
@@ -25178,8 +24956,8 @@
                 <a:solidFill>
                   <a:srgbClr val="0D7377"/>
                 </a:solidFill>
-                <a:latin typeface="Century Gothic"/>
-                <a:cs typeface="Century Gothic"/>
+                <a:latin typeface="Arial"/>
+                <a:cs typeface="Arial"/>
               </a:rPr>
               <a:t>Group proposal presentations</a:t>
             </a:r>
@@ -25249,8 +25027,8 @@
                 <a:solidFill>
                   <a:srgbClr val="FFFFFF"/>
                 </a:solidFill>
-                <a:latin typeface="Century Gothic"/>
-                <a:cs typeface="Century Gothic"/>
+                <a:latin typeface="Arial"/>
+                <a:cs typeface="Arial"/>
               </a:rPr>
               <a:t>GROUP PRESENTATIONS   |   45 min</a:t>
             </a:r>
@@ -25287,25 +25065,19 @@
               <a:spcBef>
                 <a:spcPts val="450"/>
               </a:spcBef>
-              <a:buNone/>
-            </a:pPr>
-            <a:r>
-              <a:rPr lang="en-US" sz="1650" b="1" dirty="0">
-                <a:solidFill>
-                  <a:srgbClr val="0070C0"/>
-                </a:solidFill>
-                <a:latin typeface="Century Gothic"/>
-                <a:cs typeface="Century Gothic"/>
-              </a:rPr>
-              <a:t>1.  </a:t>
-            </a:r>
+              <a:buClr>
+                <a:srgbClr val="0070C0"/>
+              </a:buClr>
+              <a:buFont typeface="Arial"/>
+              <a:buChar char="•"/>
+            </a:pPr>
             <a:r>
               <a:rPr lang="en-US" sz="1650" dirty="0">
                 <a:solidFill>
                   <a:srgbClr val="000000"/>
                 </a:solidFill>
-                <a:latin typeface="Century Gothic"/>
-                <a:cs typeface="Century Gothic"/>
+                <a:latin typeface="Arial"/>
+                <a:cs typeface="Arial"/>
               </a:rPr>
               <a:t>6 minutes, 6 slides: question, design, data and analysis, ethics and feasibility, publication plan (title, journal, guideline, abstract)</a:t>
             </a:r>
@@ -25318,25 +25090,19 @@
               <a:spcBef>
                 <a:spcPts val="450"/>
               </a:spcBef>
-              <a:buNone/>
-            </a:pPr>
-            <a:r>
-              <a:rPr lang="en-US" sz="1650" b="1" dirty="0">
-                <a:solidFill>
-                  <a:srgbClr val="0070C0"/>
-                </a:solidFill>
-                <a:latin typeface="Century Gothic"/>
-                <a:cs typeface="Century Gothic"/>
-              </a:rPr>
-              <a:t>2.  </a:t>
-            </a:r>
+              <a:buClr>
+                <a:srgbClr val="0070C0"/>
+              </a:buClr>
+              <a:buFont typeface="Arial"/>
+              <a:buChar char="•"/>
+            </a:pPr>
             <a:r>
               <a:rPr lang="en-US" sz="1650" dirty="0">
                 <a:solidFill>
                   <a:srgbClr val="000000"/>
                 </a:solidFill>
-                <a:latin typeface="Century Gothic"/>
-                <a:cs typeface="Century Gothic"/>
+                <a:latin typeface="Arial"/>
+                <a:cs typeface="Arial"/>
               </a:rPr>
               <a:t>Timekeeper: green at 4:00, yellow at 5:00, red at 6:00</a:t>
             </a:r>
@@ -25349,25 +25115,19 @@
               <a:spcBef>
                 <a:spcPts val="450"/>
               </a:spcBef>
-              <a:buNone/>
-            </a:pPr>
-            <a:r>
-              <a:rPr lang="en-US" sz="1650" b="1" dirty="0">
-                <a:solidFill>
-                  <a:srgbClr val="0070C0"/>
-                </a:solidFill>
-                <a:latin typeface="Century Gothic"/>
-                <a:cs typeface="Century Gothic"/>
-              </a:rPr>
-              <a:t>3.  </a:t>
-            </a:r>
+              <a:buClr>
+                <a:srgbClr val="0070C0"/>
+              </a:buClr>
+              <a:buFont typeface="Arial"/>
+              <a:buChar char="•"/>
+            </a:pPr>
             <a:r>
               <a:rPr lang="en-US" sz="1650" dirty="0">
                 <a:solidFill>
                   <a:srgbClr val="000000"/>
                 </a:solidFill>
-                <a:latin typeface="Century Gothic"/>
-                <a:cs typeface="Century Gothic"/>
+                <a:latin typeface="Arial"/>
+                <a:cs typeface="Arial"/>
               </a:rPr>
               <a:t>Feedback 2 min: peer group (two stars and a wish), then instructor</a:t>
             </a:r>
@@ -25380,25 +25140,19 @@
               <a:spcBef>
                 <a:spcPts val="450"/>
               </a:spcBef>
-              <a:buNone/>
-            </a:pPr>
-            <a:r>
-              <a:rPr lang="en-US" sz="1650" b="1" dirty="0">
-                <a:solidFill>
-                  <a:srgbClr val="0070C0"/>
-                </a:solidFill>
-                <a:latin typeface="Century Gothic"/>
-                <a:cs typeface="Century Gothic"/>
-              </a:rPr>
-              <a:t>4.  </a:t>
-            </a:r>
+              <a:buClr>
+                <a:srgbClr val="0070C0"/>
+              </a:buClr>
+              <a:buFont typeface="Arial"/>
+              <a:buChar char="•"/>
+            </a:pPr>
             <a:r>
               <a:rPr lang="en-US" sz="1650" dirty="0">
                 <a:solidFill>
                   <a:srgbClr val="000000"/>
                 </a:solidFill>
-                <a:latin typeface="Century Gothic"/>
-                <a:cs typeface="Century Gothic"/>
+                <a:latin typeface="Arial"/>
+                <a:cs typeface="Arial"/>
               </a:rPr>
               <a:t>Peer group and instructors fill the feedback form</a:t>
             </a:r>
@@ -25411,25 +25165,19 @@
               <a:spcBef>
                 <a:spcPts val="450"/>
               </a:spcBef>
-              <a:buNone/>
-            </a:pPr>
-            <a:r>
-              <a:rPr lang="en-US" sz="1650" b="1" dirty="0">
-                <a:solidFill>
-                  <a:srgbClr val="0070C0"/>
-                </a:solidFill>
-                <a:latin typeface="Century Gothic"/>
-                <a:cs typeface="Century Gothic"/>
-              </a:rPr>
-              <a:t>5.  </a:t>
-            </a:r>
+              <a:buClr>
+                <a:srgbClr val="0070C0"/>
+              </a:buClr>
+              <a:buFont typeface="Arial"/>
+              <a:buChar char="•"/>
+            </a:pPr>
             <a:r>
               <a:rPr lang="en-US" sz="1650" dirty="0">
                 <a:solidFill>
                   <a:srgbClr val="000000"/>
                 </a:solidFill>
-                <a:latin typeface="Century Gothic"/>
-                <a:cs typeface="Century Gothic"/>
+                <a:latin typeface="Arial"/>
+                <a:cs typeface="Arial"/>
               </a:rPr>
               <a:t>Next group sets up during the feedback</a:t>
             </a:r>
@@ -25473,8 +25221,8 @@
                 <a:solidFill>
                   <a:srgbClr val="0070C0"/>
                 </a:solidFill>
-                <a:latin typeface="Century Gothic"/>
-                <a:cs typeface="Century Gothic"/>
+                <a:latin typeface="Arial"/>
+                <a:cs typeface="Arial"/>
               </a:rPr>
               <a:t>Running order</a:t>
             </a:r>
@@ -25495,8 +25243,8 @@
                 <a:solidFill>
                   <a:srgbClr val="000000"/>
                 </a:solidFill>
-                <a:latin typeface="Century Gothic"/>
-                <a:cs typeface="Century Gothic"/>
+                <a:latin typeface="Arial"/>
+                <a:cs typeface="Arial"/>
               </a:rPr>
               <a:t>2:00  Group 1</a:t>
             </a:r>
@@ -25517,8 +25265,8 @@
                 <a:solidFill>
                   <a:srgbClr val="000000"/>
                 </a:solidFill>
-                <a:latin typeface="Century Gothic"/>
-                <a:cs typeface="Century Gothic"/>
+                <a:latin typeface="Arial"/>
+                <a:cs typeface="Arial"/>
               </a:rPr>
               <a:t>2:08  Group 2</a:t>
             </a:r>
@@ -25539,8 +25287,8 @@
                 <a:solidFill>
                   <a:srgbClr val="000000"/>
                 </a:solidFill>
-                <a:latin typeface="Century Gothic"/>
-                <a:cs typeface="Century Gothic"/>
+                <a:latin typeface="Arial"/>
+                <a:cs typeface="Arial"/>
               </a:rPr>
               <a:t>2:16  Group 3</a:t>
             </a:r>
@@ -25561,8 +25309,8 @@
                 <a:solidFill>
                   <a:srgbClr val="000000"/>
                 </a:solidFill>
-                <a:latin typeface="Century Gothic"/>
-                <a:cs typeface="Century Gothic"/>
+                <a:latin typeface="Arial"/>
+                <a:cs typeface="Arial"/>
               </a:rPr>
               <a:t>2:24  Group 4</a:t>
             </a:r>
@@ -25583,8 +25331,8 @@
                 <a:solidFill>
                   <a:srgbClr val="000000"/>
                 </a:solidFill>
-                <a:latin typeface="Century Gothic"/>
-                <a:cs typeface="Century Gothic"/>
+                <a:latin typeface="Arial"/>
+                <a:cs typeface="Arial"/>
               </a:rPr>
               <a:t>2:32  Group 5</a:t>
             </a:r>
@@ -25605,8 +25353,8 @@
                 <a:solidFill>
                   <a:srgbClr val="000000"/>
                 </a:solidFill>
-                <a:latin typeface="Century Gothic"/>
-                <a:cs typeface="Century Gothic"/>
+                <a:latin typeface="Arial"/>
+                <a:cs typeface="Arial"/>
               </a:rPr>
               <a:t>2:40  Manuscript summary</a:t>
             </a:r>
@@ -25652,8 +25400,8 @@
                 <a:solidFill>
                   <a:srgbClr val="0070C0"/>
                 </a:solidFill>
-                <a:latin typeface="Century Gothic"/>
-                <a:cs typeface="Century Gothic"/>
+                <a:latin typeface="Arial"/>
+                <a:cs typeface="Arial"/>
               </a:rPr>
               <a:t>OUTPUT   </a:t>
             </a:r>
@@ -25662,8 +25410,8 @@
                 <a:solidFill>
                   <a:srgbClr val="000000"/>
                 </a:solidFill>
-                <a:latin typeface="Century Gothic"/>
-                <a:cs typeface="Century Gothic"/>
+                <a:latin typeface="Arial"/>
+                <a:cs typeface="Arial"/>
               </a:rPr>
               <a:t>Five proposals and publication plans presented; feedback forms to the trainers</a:t>
             </a:r>
@@ -25700,7 +25448,7 @@
                     <a:lumMod val="50000"/>
                   </a:schemeClr>
                 </a:solidFill>
-                <a:latin typeface="Verdana"/>
+                <a:latin typeface="Arial"/>
               </a:rPr>
               <a:t>Neudata | #ClearDataClearImpact</a:t>
             </a:r>
@@ -25830,8 +25578,8 @@
                 <a:solidFill>
                   <a:srgbClr val="0D7377"/>
                 </a:solidFill>
-                <a:latin typeface="Century Gothic"/>
-                <a:cs typeface="Century Gothic"/>
+                <a:latin typeface="Arial"/>
+                <a:cs typeface="Arial"/>
               </a:rPr>
               <a:t>Extra slides  |  Session 8</a:t>
             </a:r>
@@ -25900,8 +25648,8 @@
                 <a:solidFill>
                   <a:srgbClr val="0D7377"/>
                 </a:solidFill>
-                <a:latin typeface="Century Gothic"/>
-                <a:cs typeface="Century Gothic"/>
+                <a:latin typeface="Arial"/>
+                <a:cs typeface="Arial"/>
               </a:rPr>
               <a:t>Extra slides: Session 8</a:t>
             </a:r>
@@ -25918,8 +25666,8 @@
                 <a:solidFill>
                   <a:srgbClr val="595959"/>
                 </a:solidFill>
-                <a:latin typeface="Century Gothic"/>
-                <a:cs typeface="Century Gothic"/>
+                <a:latin typeface="Arial"/>
+                <a:cs typeface="Arial"/>
               </a:rPr>
               <a:t>Use only if time allows, or for self-study</a:t>
             </a:r>
@@ -25956,7 +25704,7 @@
                     <a:lumMod val="50000"/>
                   </a:schemeClr>
                 </a:solidFill>
-                <a:latin typeface="Verdana"/>
+                <a:latin typeface="Arial"/>
               </a:rPr>
               <a:t>Neudata | #ClearDataClearImpact</a:t>
             </a:r>
@@ -26086,8 +25834,8 @@
                 <a:solidFill>
                   <a:srgbClr val="0D7377"/>
                 </a:solidFill>
-                <a:latin typeface="Century Gothic"/>
-                <a:cs typeface="Century Gothic"/>
+                <a:latin typeface="Arial"/>
+                <a:cs typeface="Arial"/>
               </a:rPr>
               <a:t>Write it right: fix the spin, then draft your title</a:t>
             </a:r>
@@ -26157,8 +25905,8 @@
                 <a:solidFill>
                   <a:srgbClr val="FFFFFF"/>
                 </a:solidFill>
-                <a:latin typeface="Century Gothic"/>
-                <a:cs typeface="Century Gothic"/>
+                <a:latin typeface="Arial"/>
+                <a:cs typeface="Arial"/>
               </a:rPr>
               <a:t>INDIVIDUAL TASK   |   6 min</a:t>
             </a:r>
@@ -26195,25 +25943,19 @@
               <a:spcBef>
                 <a:spcPts val="450"/>
               </a:spcBef>
-              <a:buNone/>
-            </a:pPr>
-            <a:r>
-              <a:rPr lang="en-US" sz="1650" b="1" dirty="0">
-                <a:solidFill>
-                  <a:srgbClr val="0B376C"/>
-                </a:solidFill>
-                <a:latin typeface="Century Gothic"/>
-                <a:cs typeface="Century Gothic"/>
-              </a:rPr>
-              <a:t>1.  </a:t>
-            </a:r>
+              <a:buClr>
+                <a:srgbClr val="0B376C"/>
+              </a:buClr>
+              <a:buFont typeface="Arial"/>
+              <a:buChar char="•"/>
+            </a:pPr>
             <a:r>
               <a:rPr lang="en-US" sz="1650" dirty="0">
                 <a:solidFill>
                   <a:srgbClr val="000000"/>
                 </a:solidFill>
-                <a:latin typeface="Century Gothic"/>
-                <a:cs typeface="Century Gothic"/>
+                <a:latin typeface="Arial"/>
+                <a:cs typeface="Arial"/>
               </a:rPr>
               <a:t>Alone (2 min): rewrite Paper 1's 'non-significant trend' sentence honestly</a:t>
             </a:r>
@@ -26226,25 +25968,19 @@
               <a:spcBef>
                 <a:spcPts val="450"/>
               </a:spcBef>
-              <a:buNone/>
-            </a:pPr>
-            <a:r>
-              <a:rPr lang="en-US" sz="1650" b="1" dirty="0">
-                <a:solidFill>
-                  <a:srgbClr val="0B376C"/>
-                </a:solidFill>
-                <a:latin typeface="Century Gothic"/>
-                <a:cs typeface="Century Gothic"/>
-              </a:rPr>
-              <a:t>2.  </a:t>
-            </a:r>
+              <a:buClr>
+                <a:srgbClr val="0B376C"/>
+              </a:buClr>
+              <a:buFont typeface="Arial"/>
+              <a:buChar char="•"/>
+            </a:pPr>
             <a:r>
               <a:rPr lang="en-US" sz="1650" dirty="0">
                 <a:solidFill>
                   <a:srgbClr val="000000"/>
                 </a:solidFill>
-                <a:latin typeface="Century Gothic"/>
-                <a:cs typeface="Century Gothic"/>
+                <a:latin typeface="Arial"/>
+                <a:cs typeface="Arial"/>
               </a:rPr>
               <a:t>Alone: rewrite Paper 2's title with calibrated wording</a:t>
             </a:r>
@@ -26257,25 +25993,19 @@
               <a:spcBef>
                 <a:spcPts val="450"/>
               </a:spcBef>
-              <a:buNone/>
-            </a:pPr>
-            <a:r>
-              <a:rPr lang="en-US" sz="1650" b="1" dirty="0">
-                <a:solidFill>
-                  <a:srgbClr val="0B376C"/>
-                </a:solidFill>
-                <a:latin typeface="Century Gothic"/>
-                <a:cs typeface="Century Gothic"/>
-              </a:rPr>
-              <a:t>3.  </a:t>
-            </a:r>
+              <a:buClr>
+                <a:srgbClr val="0B376C"/>
+              </a:buClr>
+              <a:buFont typeface="Arial"/>
+              <a:buChar char="•"/>
+            </a:pPr>
             <a:r>
               <a:rPr lang="en-US" sz="1650" dirty="0">
                 <a:solidFill>
                   <a:srgbClr val="000000"/>
                 </a:solidFill>
-                <a:latin typeface="Century Gothic"/>
-                <a:cs typeface="Century Gothic"/>
+                <a:latin typeface="Arial"/>
+                <a:cs typeface="Arial"/>
               </a:rPr>
               <a:t>Group (4 min): draft your working title from your PICO</a:t>
             </a:r>
@@ -26288,25 +26018,19 @@
               <a:spcBef>
                 <a:spcPts val="450"/>
               </a:spcBef>
-              <a:buNone/>
-            </a:pPr>
-            <a:r>
-              <a:rPr lang="en-US" sz="1650" b="1" dirty="0">
-                <a:solidFill>
-                  <a:srgbClr val="0B376C"/>
-                </a:solidFill>
-                <a:latin typeface="Century Gothic"/>
-                <a:cs typeface="Century Gothic"/>
-              </a:rPr>
-              <a:t>4.  </a:t>
-            </a:r>
+              <a:buClr>
+                <a:srgbClr val="0B376C"/>
+              </a:buClr>
+              <a:buFont typeface="Arial"/>
+              <a:buChar char="•"/>
+            </a:pPr>
             <a:r>
               <a:rPr lang="en-US" sz="1650" dirty="0">
                 <a:solidFill>
                   <a:srgbClr val="000000"/>
                 </a:solidFill>
-                <a:latin typeface="Century Gothic"/>
-                <a:cs typeface="Century Gothic"/>
+                <a:latin typeface="Arial"/>
+                <a:cs typeface="Arial"/>
               </a:rPr>
               <a:t>Group: one line each for Background, Methods, expected Results, Conclusion</a:t>
             </a:r>
@@ -26350,8 +26074,8 @@
                 <a:solidFill>
                   <a:srgbClr val="0B376C"/>
                 </a:solidFill>
-                <a:latin typeface="Century Gothic"/>
-                <a:cs typeface="Century Gothic"/>
+                <a:latin typeface="Arial"/>
+                <a:cs typeface="Arial"/>
               </a:rPr>
               <a:t>Publication plan (Part 4)</a:t>
             </a:r>
@@ -26372,8 +26096,8 @@
                 <a:solidFill>
                   <a:srgbClr val="000000"/>
                 </a:solidFill>
-                <a:latin typeface="Century Gothic"/>
-                <a:cs typeface="Century Gothic"/>
+                <a:latin typeface="Arial"/>
+                <a:cs typeface="Arial"/>
               </a:rPr>
               <a:t>Working title</a:t>
             </a:r>
@@ -26394,8 +26118,8 @@
                 <a:solidFill>
                   <a:srgbClr val="000000"/>
                 </a:solidFill>
-                <a:latin typeface="Century Gothic"/>
-                <a:cs typeface="Century Gothic"/>
+                <a:latin typeface="Arial"/>
+                <a:cs typeface="Arial"/>
               </a:rPr>
               <a:t>Abstract skeleton</a:t>
             </a:r>
@@ -26416,8 +26140,8 @@
                 <a:solidFill>
                   <a:srgbClr val="000000"/>
                 </a:solidFill>
-                <a:latin typeface="Century Gothic"/>
-                <a:cs typeface="Century Gothic"/>
+                <a:latin typeface="Arial"/>
+                <a:cs typeface="Arial"/>
               </a:rPr>
               <a:t>Authors + CRediT roles</a:t>
             </a:r>
@@ -26438,8 +26162,8 @@
                 <a:solidFill>
                   <a:srgbClr val="000000"/>
                 </a:solidFill>
-                <a:latin typeface="Century Gothic"/>
-                <a:cs typeface="Century Gothic"/>
+                <a:latin typeface="Arial"/>
+                <a:cs typeface="Arial"/>
               </a:rPr>
               <a:t>Target journal + guideline (8.2)</a:t>
             </a:r>
@@ -26485,8 +26209,8 @@
                 <a:solidFill>
                   <a:srgbClr val="0B376C"/>
                 </a:solidFill>
-                <a:latin typeface="Century Gothic"/>
-                <a:cs typeface="Century Gothic"/>
+                <a:latin typeface="Arial"/>
+                <a:cs typeface="Arial"/>
               </a:rPr>
               <a:t>OUTPUT   </a:t>
             </a:r>
@@ -26495,8 +26219,8 @@
                 <a:solidFill>
                   <a:srgbClr val="000000"/>
                 </a:solidFill>
-                <a:latin typeface="Century Gothic"/>
-                <a:cs typeface="Century Gothic"/>
+                <a:latin typeface="Arial"/>
+                <a:cs typeface="Arial"/>
               </a:rPr>
               <a:t>Working title + abstract skeleton to show in your presentation</a:t>
             </a:r>
@@ -26533,7 +26257,7 @@
                     <a:lumMod val="50000"/>
                   </a:schemeClr>
                 </a:solidFill>
-                <a:latin typeface="Verdana"/>
+                <a:latin typeface="Arial"/>
               </a:rPr>
               <a:t>Neudata | #ClearDataClearImpact</a:t>
             </a:r>
@@ -26663,8 +26387,8 @@
                 <a:solidFill>
                   <a:srgbClr val="0D7377"/>
                 </a:solidFill>
-                <a:latin typeface="Century Gothic"/>
-                <a:cs typeface="Century Gothic"/>
+                <a:latin typeface="Arial"/>
+                <a:cs typeface="Arial"/>
               </a:rPr>
               <a:t>Rejected? Resubmit smarter</a:t>
             </a:r>
@@ -26730,8 +26454,8 @@
                 <a:solidFill>
                   <a:srgbClr val="595959"/>
                 </a:solidFill>
-                <a:latin typeface="Century Gothic"/>
-                <a:cs typeface="Century Gothic"/>
+                <a:latin typeface="Arial"/>
+                <a:cs typeface="Arial"/>
               </a:rPr>
               <a:t>Rejection is normal: most papers are rejected at least once.</a:t>
             </a:r>
@@ -26773,8 +26497,8 @@
                 <a:solidFill>
                   <a:srgbClr val="FFFFFF"/>
                 </a:solidFill>
-                <a:latin typeface="Century Gothic"/>
-                <a:cs typeface="Century Gothic"/>
+                <a:latin typeface="Arial"/>
+                <a:cs typeface="Arial"/>
               </a:rPr>
               <a:t>Desk rejection</a:t>
             </a:r>
@@ -26822,8 +26546,8 @@
                 <a:solidFill>
                   <a:srgbClr val="000000"/>
                 </a:solidFill>
-                <a:latin typeface="Century Gothic"/>
-                <a:cs typeface="Century Gothic"/>
+                <a:latin typeface="Arial"/>
+                <a:cs typeface="Arial"/>
               </a:rPr>
               <a:t>Out of scope or poorly reported</a:t>
             </a:r>
@@ -26843,8 +26567,8 @@
                 <a:solidFill>
                   <a:srgbClr val="000000"/>
                 </a:solidFill>
-                <a:latin typeface="Century Gothic"/>
-                <a:cs typeface="Century Gothic"/>
+                <a:latin typeface="Arial"/>
+                <a:cs typeface="Arial"/>
               </a:rPr>
               <a:t>Often within days</a:t>
             </a:r>
@@ -26864,8 +26588,8 @@
                 <a:solidFill>
                   <a:srgbClr val="000000"/>
                 </a:solidFill>
-                <a:latin typeface="Century Gothic"/>
-                <a:cs typeface="Century Gothic"/>
+                <a:latin typeface="Arial"/>
+                <a:cs typeface="Arial"/>
               </a:rPr>
               <a:t>Re-target the journal</a:t>
             </a:r>
@@ -26907,8 +26631,8 @@
                 <a:solidFill>
                   <a:srgbClr val="FFFFFF"/>
                 </a:solidFill>
-                <a:latin typeface="Century Gothic"/>
-                <a:cs typeface="Century Gothic"/>
+                <a:latin typeface="Arial"/>
+                <a:cs typeface="Arial"/>
               </a:rPr>
               <a:t>After review</a:t>
             </a:r>
@@ -26956,8 +26680,8 @@
                 <a:solidFill>
                   <a:srgbClr val="000000"/>
                 </a:solidFill>
-                <a:latin typeface="Century Gothic"/>
-                <a:cs typeface="Century Gothic"/>
+                <a:latin typeface="Arial"/>
+                <a:cs typeface="Arial"/>
               </a:rPr>
               <a:t>Read the reviews, wait a day</a:t>
             </a:r>
@@ -26977,8 +26701,8 @@
                 <a:solidFill>
                   <a:srgbClr val="000000"/>
                 </a:solidFill>
-                <a:latin typeface="Century Gothic"/>
-                <a:cs typeface="Century Gothic"/>
+                <a:latin typeface="Arial"/>
+                <a:cs typeface="Arial"/>
               </a:rPr>
               <a:t>Fix what they found</a:t>
             </a:r>
@@ -26998,8 +26722,8 @@
                 <a:solidFill>
                   <a:srgbClr val="000000"/>
                 </a:solidFill>
-                <a:latin typeface="Century Gothic"/>
-                <a:cs typeface="Century Gothic"/>
+                <a:latin typeface="Arial"/>
+                <a:cs typeface="Arial"/>
               </a:rPr>
               <a:t>Never resubmit unchanged</a:t>
             </a:r>
@@ -27041,8 +26765,8 @@
                 <a:solidFill>
                   <a:srgbClr val="FFFFFF"/>
                 </a:solidFill>
-                <a:latin typeface="Century Gothic"/>
-                <a:cs typeface="Century Gothic"/>
+                <a:latin typeface="Arial"/>
+                <a:cs typeface="Arial"/>
               </a:rPr>
               <a:t>Next journal</a:t>
             </a:r>
@@ -27090,8 +26814,8 @@
                 <a:solidFill>
                   <a:srgbClr val="000000"/>
                 </a:solidFill>
-                <a:latin typeface="Century Gothic"/>
-                <a:cs typeface="Century Gothic"/>
+                <a:latin typeface="Arial"/>
+                <a:cs typeface="Arial"/>
               </a:rPr>
               <a:t>Reformat to its Guide</a:t>
             </a:r>
@@ -27111,8 +26835,8 @@
                 <a:solidFill>
                   <a:srgbClr val="000000"/>
                 </a:solidFill>
-                <a:latin typeface="Century Gothic"/>
-                <a:cs typeface="Century Gothic"/>
+                <a:latin typeface="Arial"/>
+                <a:cs typeface="Arial"/>
               </a:rPr>
               <a:t>Use transfer offers if given</a:t>
             </a:r>
@@ -27132,8 +26856,8 @@
                 <a:solidFill>
                   <a:srgbClr val="000000"/>
                 </a:solidFill>
-                <a:latin typeface="Century Gothic"/>
-                <a:cs typeface="Century Gothic"/>
+                <a:latin typeface="Arial"/>
+                <a:cs typeface="Arial"/>
               </a:rPr>
               <a:t>Appeal only for a clear error</a:t>
             </a:r>
@@ -27177,8 +26901,8 @@
                 <a:solidFill>
                   <a:srgbClr val="FFFFFF"/>
                 </a:solidFill>
-                <a:latin typeface="Century Gothic"/>
-                <a:cs typeface="Century Gothic"/>
+                <a:latin typeface="Arial"/>
+                <a:cs typeface="Arial"/>
               </a:rPr>
               <a:t>KEY MESSAGE   </a:t>
             </a:r>
@@ -27187,8 +26911,8 @@
                 <a:solidFill>
                   <a:srgbClr val="FFFFFF"/>
                 </a:solidFill>
-                <a:latin typeface="Century Gothic"/>
-                <a:cs typeface="Century Gothic"/>
+                <a:latin typeface="Arial"/>
+                <a:cs typeface="Arial"/>
               </a:rPr>
               <a:t>The next reviewer may be the same person. Fix the problems first.</a:t>
             </a:r>
@@ -27225,7 +26949,7 @@
                     <a:lumMod val="50000"/>
                   </a:schemeClr>
                 </a:solidFill>
-                <a:latin typeface="Verdana"/>
+                <a:latin typeface="Arial"/>
               </a:rPr>
               <a:t>Neudata | #ClearDataClearImpact</a:t>
             </a:r>
@@ -27355,8 +27079,8 @@
                 <a:solidFill>
                   <a:srgbClr val="0D7377"/>
                 </a:solidFill>
-                <a:latin typeface="Century Gothic"/>
-                <a:cs typeface="Century Gothic"/>
+                <a:latin typeface="Arial"/>
+                <a:cs typeface="Arial"/>
               </a:rPr>
               <a:t>Conference abstracts and posters</a:t>
             </a:r>
@@ -27452,8 +27176,8 @@
                 <a:solidFill>
                   <a:srgbClr val="FFFFFF"/>
                 </a:solidFill>
-                <a:latin typeface="Century Gothic"/>
-                <a:cs typeface="Century Gothic"/>
+                <a:latin typeface="Arial"/>
+                <a:cs typeface="Arial"/>
               </a:rPr>
               <a:t>KEY MESSAGE   </a:t>
             </a:r>
@@ -27462,8 +27186,8 @@
                 <a:solidFill>
                   <a:srgbClr val="FFFFFF"/>
                 </a:solidFill>
-                <a:latin typeface="Century Gothic"/>
-                <a:cs typeface="Century Gothic"/>
+                <a:latin typeface="Arial"/>
+                <a:cs typeface="Arial"/>
               </a:rPr>
               <a:t>A poster is a billboard: one message, one figure, readable from 2 metres.</a:t>
             </a:r>
@@ -27500,7 +27224,7 @@
                     <a:lumMod val="50000"/>
                   </a:schemeClr>
                 </a:solidFill>
-                <a:latin typeface="Verdana"/>
+                <a:latin typeface="Arial"/>
               </a:rPr>
               <a:t>Neudata | #ClearDataClearImpact</a:t>
             </a:r>
@@ -27630,8 +27354,8 @@
                 <a:solidFill>
                   <a:srgbClr val="0D7377"/>
                 </a:solidFill>
-                <a:latin typeface="Century Gothic"/>
-                <a:cs typeface="Century Gothic"/>
+                <a:latin typeface="Arial"/>
+                <a:cs typeface="Arial"/>
               </a:rPr>
               <a:t>Closing: what you built and what happens next</a:t>
             </a:r>
@@ -27698,8 +27422,8 @@
                 <a:solidFill>
                   <a:srgbClr val="0070C0"/>
                 </a:solidFill>
-                <a:latin typeface="Century Gothic"/>
-                <a:cs typeface="Century Gothic"/>
+                <a:latin typeface="Arial"/>
+                <a:cs typeface="Arial"/>
               </a:rPr>
               <a:t>Plan</a:t>
             </a:r>
@@ -27723,8 +27447,8 @@
                 <a:solidFill>
                   <a:srgbClr val="000000"/>
                 </a:solidFill>
-                <a:latin typeface="Century Gothic"/>
-                <a:cs typeface="Century Gothic"/>
+                <a:latin typeface="Arial"/>
+                <a:cs typeface="Arial"/>
               </a:rPr>
               <a:t>Post-course quiz (same 24 questions)</a:t>
             </a:r>
@@ -27742,8 +27466,8 @@
                 <a:solidFill>
                   <a:srgbClr val="000000"/>
                 </a:solidFill>
-                <a:latin typeface="Century Gothic"/>
-                <a:cs typeface="Century Gothic"/>
+                <a:latin typeface="Arial"/>
+                <a:cs typeface="Arial"/>
               </a:rPr>
               <a:t>What you built in eight sessions</a:t>
             </a:r>
@@ -27761,8 +27485,8 @@
                 <a:solidFill>
                   <a:srgbClr val="000000"/>
                 </a:solidFill>
-                <a:latin typeface="Century Gothic"/>
-                <a:cs typeface="Century Gothic"/>
+                <a:latin typeface="Arial"/>
+                <a:cs typeface="Arial"/>
               </a:rPr>
               <a:t>Course evaluation</a:t>
             </a:r>
@@ -27780,8 +27504,8 @@
                 <a:solidFill>
                   <a:srgbClr val="000000"/>
                 </a:solidFill>
-                <a:latin typeface="Century Gothic"/>
-                <a:cs typeface="Century Gothic"/>
+                <a:latin typeface="Arial"/>
+                <a:cs typeface="Arial"/>
               </a:rPr>
               <a:t>After the course: peer review of the manuscripts</a:t>
             </a:r>
@@ -27799,8 +27523,8 @@
                 <a:solidFill>
                   <a:srgbClr val="000000"/>
                 </a:solidFill>
-                <a:latin typeface="Century Gothic"/>
-                <a:cs typeface="Century Gothic"/>
+                <a:latin typeface="Arial"/>
+                <a:cs typeface="Arial"/>
               </a:rPr>
               <a:t>Next steps</a:t>
             </a:r>
@@ -27837,7 +27561,7 @@
                     <a:lumMod val="50000"/>
                   </a:schemeClr>
                 </a:solidFill>
-                <a:latin typeface="Verdana"/>
+                <a:latin typeface="Arial"/>
               </a:rPr>
               <a:t>Neudata | #ClearDataClearImpact</a:t>
             </a:r>
@@ -27967,8 +27691,8 @@
                 <a:solidFill>
                   <a:srgbClr val="0D7377"/>
                 </a:solidFill>
-                <a:latin typeface="Century Gothic"/>
-                <a:cs typeface="Century Gothic"/>
+                <a:latin typeface="Arial"/>
+                <a:cs typeface="Arial"/>
               </a:rPr>
               <a:t>Post-course quiz</a:t>
             </a:r>
@@ -28038,8 +27762,8 @@
                 <a:solidFill>
                   <a:srgbClr val="FFFFFF"/>
                 </a:solidFill>
-                <a:latin typeface="Century Gothic"/>
-                <a:cs typeface="Century Gothic"/>
+                <a:latin typeface="Arial"/>
+                <a:cs typeface="Arial"/>
               </a:rPr>
               <a:t>QUICK QUIZ   |   8 min</a:t>
             </a:r>
@@ -28076,25 +27800,19 @@
               <a:spcBef>
                 <a:spcPts val="450"/>
               </a:spcBef>
-              <a:buNone/>
-            </a:pPr>
-            <a:r>
-              <a:rPr lang="en-US" sz="1650" b="1" dirty="0">
-                <a:solidFill>
-                  <a:srgbClr val="6C3483"/>
-                </a:solidFill>
-                <a:latin typeface="Century Gothic"/>
-                <a:cs typeface="Century Gothic"/>
-              </a:rPr>
-              <a:t>1.  </a:t>
-            </a:r>
+              <a:buClr>
+                <a:srgbClr val="6C3483"/>
+              </a:buClr>
+              <a:buFont typeface="Arial"/>
+              <a:buChar char="•"/>
+            </a:pPr>
             <a:r>
               <a:rPr lang="en-US" sz="1650" dirty="0">
                 <a:solidFill>
                   <a:srgbClr val="000000"/>
                 </a:solidFill>
-                <a:latin typeface="Century Gothic"/>
-                <a:cs typeface="Century Gothic"/>
+                <a:latin typeface="Arial"/>
+                <a:cs typeface="Arial"/>
               </a:rPr>
               <a:t>Same 24 questions as in Session 1 (online form recommended)</a:t>
             </a:r>
@@ -28107,25 +27825,19 @@
               <a:spcBef>
                 <a:spcPts val="450"/>
               </a:spcBef>
-              <a:buNone/>
-            </a:pPr>
-            <a:r>
-              <a:rPr lang="en-US" sz="1650" b="1" dirty="0">
-                <a:solidFill>
-                  <a:srgbClr val="6C3483"/>
-                </a:solidFill>
-                <a:latin typeface="Century Gothic"/>
-                <a:cs typeface="Century Gothic"/>
-              </a:rPr>
-              <a:t>2.  </a:t>
-            </a:r>
+              <a:buClr>
+                <a:srgbClr val="6C3483"/>
+              </a:buClr>
+              <a:buFont typeface="Arial"/>
+              <a:buChar char="•"/>
+            </a:pPr>
             <a:r>
               <a:rPr lang="en-US" sz="1650" dirty="0">
                 <a:solidFill>
                   <a:srgbClr val="000000"/>
                 </a:solidFill>
-                <a:latin typeface="Century Gothic"/>
-                <a:cs typeface="Century Gothic"/>
+                <a:latin typeface="Arial"/>
+                <a:cs typeface="Arial"/>
               </a:rPr>
               <a:t>Individual, no discussion</a:t>
             </a:r>
@@ -28138,25 +27850,19 @@
               <a:spcBef>
                 <a:spcPts val="450"/>
               </a:spcBef>
-              <a:buNone/>
-            </a:pPr>
-            <a:r>
-              <a:rPr lang="en-US" sz="1650" b="1" dirty="0">
-                <a:solidFill>
-                  <a:srgbClr val="6C3483"/>
-                </a:solidFill>
-                <a:latin typeface="Century Gothic"/>
-                <a:cs typeface="Century Gothic"/>
-              </a:rPr>
-              <a:t>3.  </a:t>
-            </a:r>
+              <a:buClr>
+                <a:srgbClr val="6C3483"/>
+              </a:buClr>
+              <a:buFont typeface="Arial"/>
+              <a:buChar char="•"/>
+            </a:pPr>
             <a:r>
               <a:rPr lang="en-US" sz="1650" dirty="0">
                 <a:solidFill>
                   <a:srgbClr val="000000"/>
                 </a:solidFill>
-                <a:latin typeface="Century Gothic"/>
-                <a:cs typeface="Century Gothic"/>
+                <a:latin typeface="Arial"/>
+                <a:cs typeface="Arial"/>
               </a:rPr>
               <a:t>Write the same participant number as in Session 1</a:t>
             </a:r>
@@ -28169,25 +27875,19 @@
               <a:spcBef>
                 <a:spcPts val="450"/>
               </a:spcBef>
-              <a:buNone/>
-            </a:pPr>
-            <a:r>
-              <a:rPr lang="en-US" sz="1650" b="1" dirty="0">
-                <a:solidFill>
-                  <a:srgbClr val="6C3483"/>
-                </a:solidFill>
-                <a:latin typeface="Century Gothic"/>
-                <a:cs typeface="Century Gothic"/>
-              </a:rPr>
-              <a:t>4.  </a:t>
-            </a:r>
+              <a:buClr>
+                <a:srgbClr val="6C3483"/>
+              </a:buClr>
+              <a:buFont typeface="Arial"/>
+              <a:buChar char="•"/>
+            </a:pPr>
             <a:r>
               <a:rPr lang="en-US" sz="1650" dirty="0">
                 <a:solidFill>
                   <a:srgbClr val="000000"/>
                 </a:solidFill>
-                <a:latin typeface="Century Gothic"/>
-                <a:cs typeface="Century Gothic"/>
+                <a:latin typeface="Arial"/>
+                <a:cs typeface="Arial"/>
               </a:rPr>
               <a:t>The answer key is shared after the course</a:t>
             </a:r>
@@ -28233,8 +27933,8 @@
                 <a:solidFill>
                   <a:srgbClr val="6C3483"/>
                 </a:solidFill>
-                <a:latin typeface="Century Gothic"/>
-                <a:cs typeface="Century Gothic"/>
+                <a:latin typeface="Arial"/>
+                <a:cs typeface="Arial"/>
               </a:rPr>
               <a:t>OUTPUT   </a:t>
             </a:r>
@@ -28243,8 +27943,8 @@
                 <a:solidFill>
                   <a:srgbClr val="000000"/>
                 </a:solidFill>
-                <a:latin typeface="Century Gothic"/>
-                <a:cs typeface="Century Gothic"/>
+                <a:latin typeface="Arial"/>
+                <a:cs typeface="Arial"/>
               </a:rPr>
               <a:t>Quiz handed in (participant number only)</a:t>
             </a:r>
@@ -28281,7 +27981,7 @@
                     <a:lumMod val="50000"/>
                   </a:schemeClr>
                 </a:solidFill>
-                <a:latin typeface="Verdana"/>
+                <a:latin typeface="Arial"/>
               </a:rPr>
               <a:t>Neudata | #ClearDataClearImpact</a:t>
             </a:r>
@@ -28411,8 +28111,8 @@
                 <a:solidFill>
                   <a:srgbClr val="0D7377"/>
                 </a:solidFill>
-                <a:latin typeface="Century Gothic"/>
-                <a:cs typeface="Century Gothic"/>
+                <a:latin typeface="Arial"/>
+                <a:cs typeface="Arial"/>
               </a:rPr>
               <a:t>What you built in eight sessions</a:t>
             </a:r>
@@ -28484,8 +28184,8 @@
                 <a:solidFill>
                   <a:srgbClr val="FFFFFF"/>
                 </a:solidFill>
-                <a:latin typeface="Century Gothic"/>
-                <a:cs typeface="Century Gothic"/>
+                <a:latin typeface="Arial"/>
+                <a:cs typeface="Arial"/>
               </a:rPr>
               <a:t>ASK &amp; FIND</a:t>
             </a:r>
@@ -28533,8 +28233,8 @@
                 <a:solidFill>
                   <a:srgbClr val="000000"/>
                 </a:solidFill>
-                <a:latin typeface="Century Gothic"/>
-                <a:cs typeface="Century Gothic"/>
+                <a:latin typeface="Arial"/>
+                <a:cs typeface="Arial"/>
               </a:rPr>
               <a:t>A PICO question</a:t>
             </a:r>
@@ -28554,8 +28254,8 @@
                 <a:solidFill>
                   <a:srgbClr val="000000"/>
                 </a:solidFill>
-                <a:latin typeface="Century Gothic"/>
-                <a:cs typeface="Century Gothic"/>
+                <a:latin typeface="Arial"/>
+                <a:cs typeface="Arial"/>
               </a:rPr>
               <a:t>5 key references</a:t>
             </a:r>
@@ -28575,8 +28275,8 @@
                 <a:solidFill>
                   <a:srgbClr val="000000"/>
                 </a:solidFill>
-                <a:latin typeface="Century Gothic"/>
-                <a:cs typeface="Century Gothic"/>
+                <a:latin typeface="Arial"/>
+                <a:cs typeface="Arial"/>
               </a:rPr>
               <a:t>A working title</a:t>
             </a:r>
@@ -28620,8 +28320,8 @@
                 <a:solidFill>
                   <a:srgbClr val="FFFFFF"/>
                 </a:solidFill>
-                <a:latin typeface="Century Gothic"/>
-                <a:cs typeface="Century Gothic"/>
+                <a:latin typeface="Arial"/>
+                <a:cs typeface="Arial"/>
               </a:rPr>
               <a:t>DESIGN</a:t>
             </a:r>
@@ -28669,8 +28369,8 @@
                 <a:solidFill>
                   <a:srgbClr val="000000"/>
                 </a:solidFill>
-                <a:latin typeface="Century Gothic"/>
-                <a:cs typeface="Century Gothic"/>
+                <a:latin typeface="Arial"/>
+                <a:cs typeface="Arial"/>
               </a:rPr>
               <a:t>A justified design</a:t>
             </a:r>
@@ -28690,8 +28390,8 @@
                 <a:solidFill>
                   <a:srgbClr val="000000"/>
                 </a:solidFill>
-                <a:latin typeface="Century Gothic"/>
-                <a:cs typeface="Century Gothic"/>
+                <a:latin typeface="Arial"/>
+                <a:cs typeface="Arial"/>
               </a:rPr>
               <a:t>Outcomes</a:t>
             </a:r>
@@ -28711,8 +28411,8 @@
                 <a:solidFill>
                   <a:srgbClr val="000000"/>
                 </a:solidFill>
-                <a:latin typeface="Century Gothic"/>
-                <a:cs typeface="Century Gothic"/>
+                <a:latin typeface="Arial"/>
+                <a:cs typeface="Arial"/>
               </a:rPr>
               <a:t>A bias plan</a:t>
             </a:r>
@@ -28756,8 +28456,8 @@
                 <a:solidFill>
                   <a:srgbClr val="FFFFFF"/>
                 </a:solidFill>
-                <a:latin typeface="Century Gothic"/>
-                <a:cs typeface="Century Gothic"/>
+                <a:latin typeface="Arial"/>
+                <a:cs typeface="Arial"/>
               </a:rPr>
               <a:t>ANALYSE</a:t>
             </a:r>
@@ -28805,8 +28505,8 @@
                 <a:solidFill>
                   <a:srgbClr val="000000"/>
                 </a:solidFill>
-                <a:latin typeface="Century Gothic"/>
-                <a:cs typeface="Century Gothic"/>
+                <a:latin typeface="Arial"/>
+                <a:cs typeface="Arial"/>
               </a:rPr>
               <a:t>A CRF and analysis plan</a:t>
             </a:r>
@@ -28826,8 +28526,8 @@
                 <a:solidFill>
                   <a:srgbClr val="000000"/>
                 </a:solidFill>
-                <a:latin typeface="Century Gothic"/>
-                <a:cs typeface="Century Gothic"/>
+                <a:latin typeface="Arial"/>
+                <a:cs typeface="Arial"/>
               </a:rPr>
               <a:t>A real dataset read and interpreted</a:t>
             </a:r>
@@ -28871,8 +28571,8 @@
                 <a:solidFill>
                   <a:srgbClr val="FFFFFF"/>
                 </a:solidFill>
-                <a:latin typeface="Century Gothic"/>
-                <a:cs typeface="Century Gothic"/>
+                <a:latin typeface="Arial"/>
+                <a:cs typeface="Arial"/>
               </a:rPr>
               <a:t>WRITE</a:t>
             </a:r>
@@ -28920,8 +28620,8 @@
                 <a:solidFill>
                   <a:srgbClr val="000000"/>
                 </a:solidFill>
-                <a:latin typeface="Century Gothic"/>
-                <a:cs typeface="Century Gothic"/>
+                <a:latin typeface="Arial"/>
+                <a:cs typeface="Arial"/>
               </a:rPr>
               <a:t>Methods, Results</a:t>
             </a:r>
@@ -28941,8 +28641,8 @@
                 <a:solidFill>
                   <a:srgbClr val="000000"/>
                 </a:solidFill>
-                <a:latin typeface="Century Gothic"/>
-                <a:cs typeface="Century Gothic"/>
+                <a:latin typeface="Arial"/>
+                <a:cs typeface="Arial"/>
               </a:rPr>
               <a:t>Introduction, Discussion, Abstract</a:t>
             </a:r>
@@ -28986,8 +28686,8 @@
                 <a:solidFill>
                   <a:srgbClr val="FFFFFF"/>
                 </a:solidFill>
-                <a:latin typeface="Century Gothic"/>
-                <a:cs typeface="Century Gothic"/>
+                <a:latin typeface="Arial"/>
+                <a:cs typeface="Arial"/>
               </a:rPr>
               <a:t>PUBLISH</a:t>
             </a:r>
@@ -29035,8 +28735,8 @@
                 <a:solidFill>
                   <a:srgbClr val="000000"/>
                 </a:solidFill>
-                <a:latin typeface="Century Gothic"/>
-                <a:cs typeface="Century Gothic"/>
+                <a:latin typeface="Arial"/>
+                <a:cs typeface="Arial"/>
               </a:rPr>
               <a:t>A presented proposal</a:t>
             </a:r>
@@ -29056,8 +28756,8 @@
                 <a:solidFill>
                   <a:srgbClr val="000000"/>
                 </a:solidFill>
-                <a:latin typeface="Century Gothic"/>
-                <a:cs typeface="Century Gothic"/>
+                <a:latin typeface="Arial"/>
+                <a:cs typeface="Arial"/>
               </a:rPr>
               <a:t>A draft manuscript</a:t>
             </a:r>
@@ -29101,8 +28801,8 @@
                 <a:solidFill>
                   <a:srgbClr val="FFFFFF"/>
                 </a:solidFill>
-                <a:latin typeface="Century Gothic"/>
-                <a:cs typeface="Century Gothic"/>
+                <a:latin typeface="Arial"/>
+                <a:cs typeface="Arial"/>
               </a:rPr>
               <a:t>KEY MESSAGE   </a:t>
             </a:r>
@@ -29111,8 +28811,8 @@
                 <a:solidFill>
                   <a:srgbClr val="FFFFFF"/>
                 </a:solidFill>
-                <a:latin typeface="Century Gothic"/>
-                <a:cs typeface="Century Gothic"/>
+                <a:latin typeface="Arial"/>
+                <a:cs typeface="Arial"/>
               </a:rPr>
               <a:t>Five proposals and five draft papers from this department.</a:t>
             </a:r>
@@ -29149,7 +28849,7 @@
                     <a:lumMod val="50000"/>
                   </a:schemeClr>
                 </a:solidFill>
-                <a:latin typeface="Verdana"/>
+                <a:latin typeface="Arial"/>
               </a:rPr>
               <a:t>Neudata | #ClearDataClearImpact</a:t>
             </a:r>
@@ -29279,8 +28979,8 @@
                 <a:solidFill>
                   <a:srgbClr val="0D7377"/>
                 </a:solidFill>
-                <a:latin typeface="Century Gothic"/>
-                <a:cs typeface="Century Gothic"/>
+                <a:latin typeface="Arial"/>
+                <a:cs typeface="Arial"/>
               </a:rPr>
               <a:t>Worked example: the Introduction funnel for FLUID-ICU (Q1)</a:t>
             </a:r>
@@ -29350,8 +29050,8 @@
                 <a:solidFill>
                   <a:srgbClr val="FFFFFF"/>
                 </a:solidFill>
-                <a:latin typeface="Century Gothic"/>
-                <a:cs typeface="Century Gothic"/>
+                <a:latin typeface="Arial"/>
+                <a:cs typeface="Arial"/>
               </a:rPr>
               <a:t>1  Known</a:t>
             </a:r>
@@ -29399,8 +29099,8 @@
                 <a:solidFill>
                   <a:srgbClr val="000000"/>
                 </a:solidFill>
-                <a:latin typeface="Century Gothic"/>
-                <a:cs typeface="Century Gothic"/>
+                <a:latin typeface="Arial"/>
+                <a:cs typeface="Arial"/>
               </a:rPr>
               <a:t>Fluids save lives early in sepsis</a:t>
             </a:r>
@@ -29420,8 +29120,8 @@
                 <a:solidFill>
                   <a:srgbClr val="000000"/>
                 </a:solidFill>
-                <a:latin typeface="Century Gothic"/>
-                <a:cs typeface="Century Gothic"/>
+                <a:latin typeface="Arial"/>
+                <a:cs typeface="Arial"/>
               </a:rPr>
               <a:t>Positive balance linked to death</a:t>
             </a:r>
@@ -29441,8 +29141,8 @@
                 <a:solidFill>
                   <a:srgbClr val="000000"/>
                 </a:solidFill>
-                <a:latin typeface="Century Gothic"/>
-                <a:cs typeface="Century Gothic"/>
+                <a:latin typeface="Arial"/>
+                <a:cs typeface="Arial"/>
               </a:rPr>
               <a:t>(Paper 2; large cohorts)</a:t>
             </a:r>
@@ -29484,8 +29184,8 @@
                 <a:solidFill>
                   <a:srgbClr val="FFFFFF"/>
                 </a:solidFill>
-                <a:latin typeface="Century Gothic"/>
-                <a:cs typeface="Century Gothic"/>
+                <a:latin typeface="Arial"/>
+                <a:cs typeface="Arial"/>
               </a:rPr>
               <a:t>2  Not known</a:t>
             </a:r>
@@ -29533,8 +29233,8 @@
                 <a:solidFill>
                   <a:srgbClr val="000000"/>
                 </a:solidFill>
-                <a:latin typeface="Century Gothic"/>
-                <a:cs typeface="Century Gothic"/>
+                <a:latin typeface="Arial"/>
+                <a:cs typeface="Arial"/>
               </a:rPr>
               <a:t>Whether the link persists after</a:t>
             </a:r>
@@ -29554,8 +29254,8 @@
                 <a:solidFill>
                   <a:srgbClr val="000000"/>
                 </a:solidFill>
-                <a:latin typeface="Century Gothic"/>
-                <a:cs typeface="Century Gothic"/>
+                <a:latin typeface="Arial"/>
+                <a:cs typeface="Arial"/>
               </a:rPr>
               <a:t>adjusting for severity</a:t>
             </a:r>
@@ -29575,8 +29275,8 @@
                 <a:solidFill>
                   <a:srgbClr val="000000"/>
                 </a:solidFill>
-                <a:latin typeface="Century Gothic"/>
-                <a:cs typeface="Century Gothic"/>
+                <a:latin typeface="Arial"/>
+                <a:cs typeface="Arial"/>
               </a:rPr>
               <a:t>Sicker patients get more fluid</a:t>
             </a:r>
@@ -29618,8 +29318,8 @@
                 <a:solidFill>
                   <a:srgbClr val="FFFFFF"/>
                 </a:solidFill>
-                <a:latin typeface="Century Gothic"/>
-                <a:cs typeface="Century Gothic"/>
+                <a:latin typeface="Arial"/>
+                <a:cs typeface="Arial"/>
               </a:rPr>
               <a:t>3  Aim</a:t>
             </a:r>
@@ -29667,8 +29367,8 @@
                 <a:solidFill>
                   <a:srgbClr val="000000"/>
                 </a:solidFill>
-                <a:latin typeface="Century Gothic"/>
-                <a:cs typeface="Century Gothic"/>
+                <a:latin typeface="Arial"/>
+                <a:cs typeface="Arial"/>
               </a:rPr>
               <a:t>We examined whether a positive</a:t>
             </a:r>
@@ -29688,8 +29388,8 @@
                 <a:solidFill>
                   <a:srgbClr val="000000"/>
                 </a:solidFill>
-                <a:latin typeface="Century Gothic"/>
-                <a:cs typeface="Century Gothic"/>
+                <a:latin typeface="Arial"/>
+                <a:cs typeface="Arial"/>
               </a:rPr>
               <a:t>balance by day 3 is associated</a:t>
             </a:r>
@@ -29709,8 +29409,8 @@
                 <a:solidFill>
                   <a:srgbClr val="000000"/>
                 </a:solidFill>
-                <a:latin typeface="Century Gothic"/>
-                <a:cs typeface="Century Gothic"/>
+                <a:latin typeface="Arial"/>
+                <a:cs typeface="Arial"/>
               </a:rPr>
               <a:t>with 28-day mortality, after adjustment</a:t>
             </a:r>
@@ -29754,8 +29454,8 @@
                 <a:solidFill>
                   <a:srgbClr val="FFFFFF"/>
                 </a:solidFill>
-                <a:latin typeface="Century Gothic"/>
-                <a:cs typeface="Century Gothic"/>
+                <a:latin typeface="Arial"/>
+                <a:cs typeface="Arial"/>
               </a:rPr>
               <a:t>KEY MESSAGE   </a:t>
             </a:r>
@@ -29764,8 +29464,8 @@
                 <a:solidFill>
                   <a:srgbClr val="FFFFFF"/>
                 </a:solidFill>
-                <a:latin typeface="Century Gothic"/>
-                <a:cs typeface="Century Gothic"/>
+                <a:latin typeface="Arial"/>
+                <a:cs typeface="Arial"/>
               </a:rPr>
               <a:t>Three paragraphs, about 350 words. The aim uses 'associated'.</a:t>
             </a:r>
@@ -29802,7 +29502,7 @@
                     <a:lumMod val="50000"/>
                   </a:schemeClr>
                 </a:solidFill>
-                <a:latin typeface="Verdana"/>
+                <a:latin typeface="Arial"/>
               </a:rPr>
               <a:t>Neudata | #ClearDataClearImpact</a:t>
             </a:r>
@@ -29932,8 +29632,8 @@
                 <a:solidFill>
                   <a:srgbClr val="0D7377"/>
                 </a:solidFill>
-                <a:latin typeface="Century Gothic"/>
-                <a:cs typeface="Century Gothic"/>
+                <a:latin typeface="Arial"/>
+                <a:cs typeface="Arial"/>
               </a:rPr>
               <a:t>Course evaluation</a:t>
             </a:r>
@@ -30003,8 +29703,8 @@
                 <a:solidFill>
                   <a:srgbClr val="FFFFFF"/>
                 </a:solidFill>
-                <a:latin typeface="Century Gothic"/>
-                <a:cs typeface="Century Gothic"/>
+                <a:latin typeface="Arial"/>
+                <a:cs typeface="Arial"/>
               </a:rPr>
               <a:t>INDIVIDUAL TASK   |   3 min</a:t>
             </a:r>
@@ -30041,25 +29741,19 @@
               <a:spcBef>
                 <a:spcPts val="450"/>
               </a:spcBef>
-              <a:buNone/>
-            </a:pPr>
-            <a:r>
-              <a:rPr lang="en-US" sz="1650" b="1" dirty="0">
-                <a:solidFill>
-                  <a:srgbClr val="0B376C"/>
-                </a:solidFill>
-                <a:latin typeface="Century Gothic"/>
-                <a:cs typeface="Century Gothic"/>
-              </a:rPr>
-              <a:t>1.  </a:t>
-            </a:r>
+              <a:buClr>
+                <a:srgbClr val="0B376C"/>
+              </a:buClr>
+              <a:buFont typeface="Arial"/>
+              <a:buChar char="•"/>
+            </a:pPr>
             <a:r>
               <a:rPr lang="en-US" sz="1650" dirty="0">
                 <a:solidFill>
                   <a:srgbClr val="000000"/>
                 </a:solidFill>
-                <a:latin typeface="Century Gothic"/>
-                <a:cs typeface="Century Gothic"/>
+                <a:latin typeface="Arial"/>
+                <a:cs typeface="Arial"/>
               </a:rPr>
               <a:t>Rate each session: content, pace, usefulness</a:t>
             </a:r>
@@ -30072,25 +29766,19 @@
               <a:spcBef>
                 <a:spcPts val="450"/>
               </a:spcBef>
-              <a:buNone/>
-            </a:pPr>
-            <a:r>
-              <a:rPr lang="en-US" sz="1650" b="1" dirty="0">
-                <a:solidFill>
-                  <a:srgbClr val="0B376C"/>
-                </a:solidFill>
-                <a:latin typeface="Century Gothic"/>
-                <a:cs typeface="Century Gothic"/>
-              </a:rPr>
-              <a:t>2.  </a:t>
-            </a:r>
+              <a:buClr>
+                <a:srgbClr val="0B376C"/>
+              </a:buClr>
+              <a:buFont typeface="Arial"/>
+              <a:buChar char="•"/>
+            </a:pPr>
             <a:r>
               <a:rPr lang="en-US" sz="1650" dirty="0">
                 <a:solidFill>
                   <a:srgbClr val="000000"/>
                 </a:solidFill>
-                <a:latin typeface="Century Gothic"/>
-                <a:cs typeface="Century Gothic"/>
+                <a:latin typeface="Arial"/>
+                <a:cs typeface="Arial"/>
               </a:rPr>
               <a:t>One thing to keep, one thing to change</a:t>
             </a:r>
@@ -30103,25 +29791,19 @@
               <a:spcBef>
                 <a:spcPts val="450"/>
               </a:spcBef>
-              <a:buNone/>
-            </a:pPr>
-            <a:r>
-              <a:rPr lang="en-US" sz="1650" b="1" dirty="0">
-                <a:solidFill>
-                  <a:srgbClr val="0B376C"/>
-                </a:solidFill>
-                <a:latin typeface="Century Gothic"/>
-                <a:cs typeface="Century Gothic"/>
-              </a:rPr>
-              <a:t>3.  </a:t>
-            </a:r>
+              <a:buClr>
+                <a:srgbClr val="0B376C"/>
+              </a:buClr>
+              <a:buFont typeface="Arial"/>
+              <a:buChar char="•"/>
+            </a:pPr>
             <a:r>
               <a:rPr lang="en-US" sz="1650" dirty="0">
                 <a:solidFill>
                   <a:srgbClr val="000000"/>
                 </a:solidFill>
-                <a:latin typeface="Century Gothic"/>
-                <a:cs typeface="Century Gothic"/>
+                <a:latin typeface="Arial"/>
+                <a:cs typeface="Arial"/>
               </a:rPr>
               <a:t>Interested in Level 2 (hands-on R)?</a:t>
             </a:r>
@@ -30167,8 +29849,8 @@
                 <a:solidFill>
                   <a:srgbClr val="0B376C"/>
                 </a:solidFill>
-                <a:latin typeface="Century Gothic"/>
-                <a:cs typeface="Century Gothic"/>
+                <a:latin typeface="Arial"/>
+                <a:cs typeface="Arial"/>
               </a:rPr>
               <a:t>OUTPUT   </a:t>
             </a:r>
@@ -30177,8 +29859,8 @@
                 <a:solidFill>
                   <a:srgbClr val="000000"/>
                 </a:solidFill>
-                <a:latin typeface="Century Gothic"/>
-                <a:cs typeface="Century Gothic"/>
+                <a:latin typeface="Arial"/>
+                <a:cs typeface="Arial"/>
               </a:rPr>
               <a:t>Evaluation form (anonymous)</a:t>
             </a:r>
@@ -30215,7 +29897,7 @@
                     <a:lumMod val="50000"/>
                   </a:schemeClr>
                 </a:solidFill>
-                <a:latin typeface="Verdana"/>
+                <a:latin typeface="Arial"/>
               </a:rPr>
               <a:t>Neudata | #ClearDataClearImpact</a:t>
             </a:r>
@@ -30345,8 +30027,8 @@
                 <a:solidFill>
                   <a:srgbClr val="0D7377"/>
                 </a:solidFill>
-                <a:latin typeface="Century Gothic"/>
-                <a:cs typeface="Century Gothic"/>
+                <a:latin typeface="Arial"/>
+                <a:cs typeface="Arial"/>
               </a:rPr>
               <a:t>After the course: peer review like real authors</a:t>
             </a:r>
@@ -30418,8 +30100,8 @@
                 <a:solidFill>
                   <a:srgbClr val="FFFFFF"/>
                 </a:solidFill>
-                <a:latin typeface="Century Gothic"/>
-                <a:cs typeface="Century Gothic"/>
+                <a:latin typeface="Arial"/>
+                <a:cs typeface="Arial"/>
               </a:rPr>
               <a:t>Week 1</a:t>
             </a:r>
@@ -30467,8 +30149,8 @@
                 <a:solidFill>
                   <a:srgbClr val="000000"/>
                 </a:solidFill>
-                <a:latin typeface="Century Gothic"/>
-                <a:cs typeface="Century Gothic"/>
+                <a:latin typeface="Arial"/>
+                <a:cs typeface="Arial"/>
               </a:rPr>
               <a:t>Polish your draft</a:t>
             </a:r>
@@ -30488,8 +30170,8 @@
                 <a:solidFill>
                   <a:srgbClr val="000000"/>
                 </a:solidFill>
-                <a:latin typeface="Century Gothic"/>
-                <a:cs typeface="Century Gothic"/>
+                <a:latin typeface="Arial"/>
+                <a:cs typeface="Arial"/>
               </a:rPr>
               <a:t>Submit it to the trainers</a:t>
             </a:r>
@@ -30533,8 +30215,8 @@
                 <a:solidFill>
                   <a:srgbClr val="FFFFFF"/>
                 </a:solidFill>
-                <a:latin typeface="Century Gothic"/>
-                <a:cs typeface="Century Gothic"/>
+                <a:latin typeface="Arial"/>
+                <a:cs typeface="Arial"/>
               </a:rPr>
               <a:t>Swap</a:t>
             </a:r>
@@ -30582,8 +30264,8 @@
                 <a:solidFill>
                   <a:srgbClr val="000000"/>
                 </a:solidFill>
-                <a:latin typeface="Century Gothic"/>
-                <a:cs typeface="Century Gothic"/>
+                <a:latin typeface="Arial"/>
+                <a:cs typeface="Arial"/>
               </a:rPr>
               <a:t>Review another group's paper</a:t>
             </a:r>
@@ -30603,8 +30285,8 @@
                 <a:solidFill>
                   <a:srgbClr val="000000"/>
                 </a:solidFill>
-                <a:latin typeface="Century Gothic"/>
-                <a:cs typeface="Century Gothic"/>
+                <a:latin typeface="Arial"/>
+                <a:cs typeface="Arial"/>
               </a:rPr>
               <a:t>10-question checklist + writing checks</a:t>
             </a:r>
@@ -30648,8 +30330,8 @@
                 <a:solidFill>
                   <a:srgbClr val="FFFFFF"/>
                 </a:solidFill>
-                <a:latin typeface="Century Gothic"/>
-                <a:cs typeface="Century Gothic"/>
+                <a:latin typeface="Arial"/>
+                <a:cs typeface="Arial"/>
               </a:rPr>
               <a:t>Respond</a:t>
             </a:r>
@@ -30697,8 +30379,8 @@
                 <a:solidFill>
                   <a:srgbClr val="000000"/>
                 </a:solidFill>
-                <a:latin typeface="Century Gothic"/>
-                <a:cs typeface="Century Gothic"/>
+                <a:latin typeface="Arial"/>
+                <a:cs typeface="Arial"/>
               </a:rPr>
               <a:t>Answer each comment</a:t>
             </a:r>
@@ -30718,8 +30400,8 @@
                 <a:solidFill>
                   <a:srgbClr val="000000"/>
                 </a:solidFill>
-                <a:latin typeface="Century Gothic"/>
-                <a:cs typeface="Century Gothic"/>
+                <a:latin typeface="Arial"/>
+                <a:cs typeface="Arial"/>
               </a:rPr>
               <a:t>Response-to-reviewers template</a:t>
             </a:r>
@@ -30763,8 +30445,8 @@
                 <a:solidFill>
                   <a:srgbClr val="FFFFFF"/>
                 </a:solidFill>
-                <a:latin typeface="Century Gothic"/>
-                <a:cs typeface="Century Gothic"/>
+                <a:latin typeface="Arial"/>
+                <a:cs typeface="Arial"/>
               </a:rPr>
               <a:t>Week 2</a:t>
             </a:r>
@@ -30812,8 +30494,8 @@
                 <a:solidFill>
                   <a:srgbClr val="000000"/>
                 </a:solidFill>
-                <a:latin typeface="Century Gothic"/>
-                <a:cs typeface="Century Gothic"/>
+                <a:latin typeface="Arial"/>
+                <a:cs typeface="Arial"/>
               </a:rPr>
               <a:t>Final draft + response letter</a:t>
             </a:r>
@@ -30833,8 +30515,8 @@
                 <a:solidFill>
                   <a:srgbClr val="000000"/>
                 </a:solidFill>
-                <a:latin typeface="Century Gothic"/>
-                <a:cs typeface="Century Gothic"/>
+                <a:latin typeface="Arial"/>
+                <a:cs typeface="Arial"/>
               </a:rPr>
               <a:t>Trainer feedback</a:t>
             </a:r>
@@ -30878,8 +30560,8 @@
                 <a:solidFill>
                   <a:srgbClr val="FFFFFF"/>
                 </a:solidFill>
-                <a:latin typeface="Century Gothic"/>
-                <a:cs typeface="Century Gothic"/>
+                <a:latin typeface="Arial"/>
+                <a:cs typeface="Arial"/>
               </a:rPr>
               <a:t>KEY MESSAGE   </a:t>
             </a:r>
@@ -30888,8 +30570,8 @@
                 <a:solidFill>
                   <a:srgbClr val="FFFFFF"/>
                 </a:solidFill>
-                <a:latin typeface="Century Gothic"/>
-                <a:cs typeface="Century Gothic"/>
+                <a:latin typeface="Arial"/>
+                <a:cs typeface="Arial"/>
               </a:rPr>
               <a:t>Due two weeks after Session 8 (see Assignment/peer_review_instructions).</a:t>
             </a:r>
@@ -30926,7 +30608,7 @@
                     <a:lumMod val="50000"/>
                   </a:schemeClr>
                 </a:solidFill>
-                <a:latin typeface="Verdana"/>
+                <a:latin typeface="Arial"/>
               </a:rPr>
               <a:t>Neudata | #ClearDataClearImpact</a:t>
             </a:r>
@@ -31056,8 +30738,8 @@
                 <a:solidFill>
                   <a:srgbClr val="0D7377"/>
                 </a:solidFill>
-                <a:latin typeface="Century Gothic"/>
-                <a:cs typeface="Century Gothic"/>
+                <a:latin typeface="Arial"/>
+                <a:cs typeface="Arial"/>
               </a:rPr>
               <a:t>What comes next</a:t>
             </a:r>
@@ -31127,8 +30809,8 @@
                 <a:solidFill>
                   <a:srgbClr val="FFFFFF"/>
                 </a:solidFill>
-                <a:latin typeface="Century Gothic"/>
-                <a:cs typeface="Century Gothic"/>
+                <a:latin typeface="Arial"/>
+                <a:cs typeface="Arial"/>
               </a:rPr>
               <a:t>Completion</a:t>
             </a:r>
@@ -31176,8 +30858,8 @@
                 <a:solidFill>
                   <a:srgbClr val="000000"/>
                 </a:solidFill>
-                <a:latin typeface="Century Gothic"/>
-                <a:cs typeface="Century Gothic"/>
+                <a:latin typeface="Arial"/>
+                <a:cs typeface="Arial"/>
               </a:rPr>
               <a:t>At least 6 of 8 sessions</a:t>
             </a:r>
@@ -31197,8 +30879,8 @@
                 <a:solidFill>
                   <a:srgbClr val="000000"/>
                 </a:solidFill>
-                <a:latin typeface="Century Gothic"/>
-                <a:cs typeface="Century Gothic"/>
+                <a:latin typeface="Arial"/>
+                <a:cs typeface="Arial"/>
               </a:rPr>
               <a:t>Proposal presented</a:t>
             </a:r>
@@ -31218,8 +30900,8 @@
                 <a:solidFill>
                   <a:srgbClr val="000000"/>
                 </a:solidFill>
-                <a:latin typeface="Century Gothic"/>
-                <a:cs typeface="Century Gothic"/>
+                <a:latin typeface="Arial"/>
+                <a:cs typeface="Arial"/>
               </a:rPr>
               <a:t>Manuscript draft submitted</a:t>
             </a:r>
@@ -31261,8 +30943,8 @@
                 <a:solidFill>
                   <a:srgbClr val="FFFFFF"/>
                 </a:solidFill>
-                <a:latin typeface="Century Gothic"/>
-                <a:cs typeface="Century Gothic"/>
+                <a:latin typeface="Arial"/>
+                <a:cs typeface="Arial"/>
               </a:rPr>
               <a:t>Your toolkit</a:t>
             </a:r>
@@ -31310,8 +30992,8 @@
                 <a:solidFill>
                   <a:srgbClr val="000000"/>
                 </a:solidFill>
-                <a:latin typeface="Century Gothic"/>
-                <a:cs typeface="Century Gothic"/>
+                <a:latin typeface="Arial"/>
+                <a:cs typeface="Arial"/>
               </a:rPr>
               <a:t>Slides, handouts, glossary</a:t>
             </a:r>
@@ -31331,8 +31013,8 @@
                 <a:solidFill>
                   <a:srgbClr val="000000"/>
                 </a:solidFill>
-                <a:latin typeface="Century Gothic"/>
-                <a:cs typeface="Century Gothic"/>
+                <a:latin typeface="Arial"/>
+                <a:cs typeface="Arial"/>
               </a:rPr>
               <a:t>Proposal, protocol, consent, CRF, SAP,</a:t>
             </a:r>
@@ -31352,8 +31034,8 @@
                 <a:solidFill>
                   <a:srgbClr val="000000"/>
                 </a:solidFill>
-                <a:latin typeface="Century Gothic"/>
-                <a:cs typeface="Century Gothic"/>
+                <a:latin typeface="Arial"/>
+                <a:cs typeface="Arial"/>
               </a:rPr>
               <a:t>manuscript and reviewer templates</a:t>
             </a:r>
@@ -31395,8 +31077,8 @@
                 <a:solidFill>
                   <a:srgbClr val="FFFFFF"/>
                 </a:solidFill>
-                <a:latin typeface="Century Gothic"/>
-                <a:cs typeface="Century Gothic"/>
+                <a:latin typeface="Arial"/>
+                <a:cs typeface="Arial"/>
               </a:rPr>
               <a:t>Keep going</a:t>
             </a:r>
@@ -31444,8 +31126,8 @@
                 <a:solidFill>
                   <a:srgbClr val="000000"/>
                 </a:solidFill>
-                <a:latin typeface="Century Gothic"/>
-                <a:cs typeface="Century Gothic"/>
+                <a:latin typeface="Arial"/>
+                <a:cs typeface="Arial"/>
               </a:rPr>
               <a:t>Take your proposal to ethics</a:t>
             </a:r>
@@ -31465,8 +31147,8 @@
                 <a:solidFill>
                   <a:srgbClr val="000000"/>
                 </a:solidFill>
-                <a:latin typeface="Century Gothic"/>
-                <a:cs typeface="Century Gothic"/>
+                <a:latin typeface="Arial"/>
+                <a:cs typeface="Arial"/>
               </a:rPr>
               <a:t>Level 2: hands-on analysis in R</a:t>
             </a:r>
@@ -31486,8 +31168,8 @@
                 <a:solidFill>
                   <a:srgbClr val="000000"/>
                 </a:solidFill>
-                <a:latin typeface="Century Gothic"/>
-                <a:cs typeface="Century Gothic"/>
+                <a:latin typeface="Arial"/>
+                <a:cs typeface="Arial"/>
               </a:rPr>
               <a:t>Level 3: advanced methods</a:t>
             </a:r>
@@ -31524,7 +31206,7 @@
                     <a:lumMod val="50000"/>
                   </a:schemeClr>
                 </a:solidFill>
-                <a:latin typeface="Verdana"/>
+                <a:latin typeface="Arial"/>
               </a:rPr>
               <a:t>Neudata | #ClearDataClearImpact</a:t>
             </a:r>
@@ -31657,8 +31339,8 @@
                 <a:solidFill>
                   <a:srgbClr val="0D7377"/>
                 </a:solidFill>
-                <a:latin typeface="Century Gothic"/>
-                <a:cs typeface="Century Gothic"/>
+                <a:latin typeface="Arial"/>
+                <a:cs typeface="Arial"/>
               </a:rPr>
               <a:t>Thank you!</a:t>
             </a:r>
@@ -31675,8 +31357,8 @@
                 <a:solidFill>
                   <a:srgbClr val="595959"/>
                 </a:solidFill>
-                <a:latin typeface="Century Gothic"/>
-                <a:cs typeface="Century Gothic"/>
+                <a:latin typeface="Arial"/>
+                <a:cs typeface="Arial"/>
               </a:rPr>
               <a:t>Good questions. Sound designs. Honest analysis. Clear writing.</a:t>
             </a:r>
@@ -31713,7 +31395,7 @@
                     <a:lumMod val="50000"/>
                   </a:schemeClr>
                 </a:solidFill>
-                <a:latin typeface="Verdana"/>
+                <a:latin typeface="Arial"/>
               </a:rPr>
               <a:t>Neudata | #ClearDataClearImpact</a:t>
             </a:r>
@@ -31867,8 +31549,8 @@
                 <a:solidFill>
                   <a:srgbClr val="4472C4"/>
                 </a:solidFill>
-                <a:latin typeface="Century Gothic"/>
-                <a:cs typeface="Century Gothic"/>
+                <a:latin typeface="Arial"/>
+                <a:cs typeface="Arial"/>
               </a:rPr>
               <a:t>Copyright © Neudata, 2026</a:t>
             </a:r>
@@ -32013,7 +31695,7 @@
                     <a:lumMod val="50000"/>
                   </a:schemeClr>
                 </a:solidFill>
-                <a:latin typeface="Verdana"/>
+                <a:latin typeface="Arial"/>
               </a:rPr>
               <a:t>Neudata | #ClearDataClearImpact</a:t>
             </a:r>
@@ -32119,8 +31801,8 @@
                 <a:solidFill>
                   <a:srgbClr val="0D7377"/>
                 </a:solidFill>
-                <a:latin typeface="Century Gothic"/>
-                <a:cs typeface="Century Gothic"/>
+                <a:latin typeface="Arial"/>
+                <a:cs typeface="Arial"/>
               </a:rPr>
               <a:t>Discussion: six moves</a:t>
             </a:r>
@@ -32216,8 +31898,8 @@
                 <a:solidFill>
                   <a:srgbClr val="FFFFFF"/>
                 </a:solidFill>
-                <a:latin typeface="Century Gothic"/>
-                <a:cs typeface="Century Gothic"/>
+                <a:latin typeface="Arial"/>
+                <a:cs typeface="Arial"/>
               </a:rPr>
               <a:t>KEY MESSAGE   </a:t>
             </a:r>
@@ -32226,8 +31908,8 @@
                 <a:solidFill>
                   <a:srgbClr val="FFFFFF"/>
                 </a:solidFill>
-                <a:latin typeface="Century Gothic"/>
-                <a:cs typeface="Century Gothic"/>
+                <a:latin typeface="Arial"/>
+                <a:cs typeface="Arial"/>
               </a:rPr>
               <a:t>Answer first; limitations with their direction; conclusion = abstract = title.</a:t>
             </a:r>
@@ -32264,7 +31946,7 @@
                     <a:lumMod val="50000"/>
                   </a:schemeClr>
                 </a:solidFill>
-                <a:latin typeface="Verdana"/>
+                <a:latin typeface="Arial"/>
               </a:rPr>
               <a:t>Neudata | #ClearDataClearImpact</a:t>
             </a:r>
@@ -32394,8 +32076,8 @@
                 <a:solidFill>
                   <a:srgbClr val="0D7377"/>
                 </a:solidFill>
-                <a:latin typeface="Century Gothic"/>
-                <a:cs typeface="Century Gothic"/>
+                <a:latin typeface="Arial"/>
+                <a:cs typeface="Arial"/>
               </a:rPr>
               <a:t>Worked example: the Discussion for FLUID-ICU question 1</a:t>
             </a:r>
@@ -32491,8 +32173,8 @@
                 <a:solidFill>
                   <a:srgbClr val="FFFFFF"/>
                 </a:solidFill>
-                <a:latin typeface="Century Gothic"/>
-                <a:cs typeface="Century Gothic"/>
+                <a:latin typeface="Arial"/>
+                <a:cs typeface="Arial"/>
               </a:rPr>
               <a:t>KEY MESSAGE   </a:t>
             </a:r>
@@ -32501,8 +32183,8 @@
                 <a:solidFill>
                   <a:srgbClr val="FFFFFF"/>
                 </a:solidFill>
-                <a:latin typeface="Century Gothic"/>
-                <a:cs typeface="Century Gothic"/>
+                <a:latin typeface="Arial"/>
+                <a:cs typeface="Arial"/>
               </a:rPr>
               <a:t>Answer with the number, explain the crude-adjusted gap, end with the same verb.</a:t>
             </a:r>
@@ -32539,7 +32221,7 @@
                     <a:lumMod val="50000"/>
                   </a:schemeClr>
                 </a:solidFill>
-                <a:latin typeface="Verdana"/>
+                <a:latin typeface="Arial"/>
               </a:rPr>
               <a:t>Neudata | #ClearDataClearImpact</a:t>
             </a:r>
@@ -32669,8 +32351,8 @@
                 <a:solidFill>
                   <a:srgbClr val="0D7377"/>
                 </a:solidFill>
-                <a:latin typeface="Century Gothic"/>
-                <a:cs typeface="Century Gothic"/>
+                <a:latin typeface="Arial"/>
+                <a:cs typeface="Arial"/>
               </a:rPr>
               <a:t>Why the odds ratio shrank: explain it in the Discussion</a:t>
             </a:r>
@@ -32736,8 +32418,8 @@
                 <a:solidFill>
                   <a:srgbClr val="0D7377"/>
                 </a:solidFill>
-                <a:latin typeface="Century Gothic"/>
-                <a:cs typeface="Century Gothic"/>
+                <a:latin typeface="Arial"/>
+                <a:cs typeface="Arial"/>
               </a:rPr>
               <a:t>FLUID-ICU Q1 (simulated)</a:t>
             </a:r>
@@ -32755,8 +32437,8 @@
                 <a:solidFill>
                   <a:srgbClr val="000000"/>
                 </a:solidFill>
-                <a:latin typeface="Century Gothic"/>
-                <a:cs typeface="Century Gothic"/>
+                <a:latin typeface="Arial"/>
+                <a:cs typeface="Arial"/>
               </a:rPr>
               <a:t>Crude OR 2.49 (1.70 to 3.70)</a:t>
             </a:r>
@@ -32774,8 +32456,8 @@
                 <a:solidFill>
                   <a:srgbClr val="000000"/>
                 </a:solidFill>
-                <a:latin typeface="Century Gothic"/>
-                <a:cs typeface="Century Gothic"/>
+                <a:latin typeface="Arial"/>
+                <a:cs typeface="Arial"/>
               </a:rPr>
               <a:t>Adjusted OR 1.62 (1.02 to 2.59)</a:t>
             </a:r>
@@ -32793,8 +32475,8 @@
                 <a:solidFill>
                   <a:srgbClr val="000000"/>
                 </a:solidFill>
-                <a:latin typeface="Century Gothic"/>
-                <a:cs typeface="Century Gothic"/>
+                <a:latin typeface="Arial"/>
+                <a:cs typeface="Arial"/>
               </a:rPr>
               <a:t>Imputed OR 1.70 (1.09 to 2.64)</a:t>
             </a:r>
@@ -32812,8 +32494,8 @@
                 <a:solidFill>
                   <a:srgbClr val="000000"/>
                 </a:solidFill>
-                <a:latin typeface="Century Gothic"/>
-                <a:cs typeface="Century Gothic"/>
+                <a:latin typeface="Arial"/>
+                <a:cs typeface="Arial"/>
               </a:rPr>
               <a:t>Gap = confounding by indication</a:t>
             </a:r>
@@ -32881,8 +32563,8 @@
                 <a:solidFill>
                   <a:srgbClr val="FFFFFF"/>
                 </a:solidFill>
-                <a:latin typeface="Century Gothic"/>
-                <a:cs typeface="Century Gothic"/>
+                <a:latin typeface="Arial"/>
+                <a:cs typeface="Arial"/>
               </a:rPr>
               <a:t>KEY MESSAGE   </a:t>
             </a:r>
@@ -32891,8 +32573,8 @@
                 <a:solidFill>
                   <a:srgbClr val="FFFFFF"/>
                 </a:solidFill>
-                <a:latin typeface="Century Gothic"/>
-                <a:cs typeface="Century Gothic"/>
+                <a:latin typeface="Arial"/>
+                <a:cs typeface="Arial"/>
               </a:rPr>
               <a:t>Report both; explain the gap; keep the verb at 'associated'.</a:t>
             </a:r>
@@ -32929,7 +32611,7 @@
                     <a:lumMod val="50000"/>
                   </a:schemeClr>
                 </a:solidFill>
-                <a:latin typeface="Verdana"/>
+                <a:latin typeface="Arial"/>
               </a:rPr>
               <a:t>Neudata | #ClearDataClearImpact</a:t>
             </a:r>
@@ -33059,8 +32741,8 @@
                 <a:solidFill>
                   <a:srgbClr val="0D7377"/>
                 </a:solidFill>
-                <a:latin typeface="Century Gothic"/>
-                <a:cs typeface="Century Gothic"/>
+                <a:latin typeface="Arial"/>
+                <a:cs typeface="Arial"/>
               </a:rPr>
               <a:t>Calibrated language: match the verb to the design</a:t>
             </a:r>
@@ -33156,8 +32838,8 @@
                 <a:solidFill>
                   <a:srgbClr val="FFFFFF"/>
                 </a:solidFill>
-                <a:latin typeface="Century Gothic"/>
-                <a:cs typeface="Century Gothic"/>
+                <a:latin typeface="Arial"/>
+                <a:cs typeface="Arial"/>
               </a:rPr>
               <a:t>KEY MESSAGE   </a:t>
             </a:r>
@@ -33166,8 +32848,8 @@
                 <a:solidFill>
                   <a:srgbClr val="FFFFFF"/>
                 </a:solidFill>
-                <a:latin typeface="Century Gothic"/>
-                <a:cs typeface="Century Gothic"/>
+                <a:latin typeface="Arial"/>
+                <a:cs typeface="Arial"/>
               </a:rPr>
               <a:t>Climb the ladder only as far as your design allows.</a:t>
             </a:r>
@@ -33204,7 +32886,7 @@
                     <a:lumMod val="50000"/>
                   </a:schemeClr>
                 </a:solidFill>
-                <a:latin typeface="Verdana"/>
+                <a:latin typeface="Arial"/>
               </a:rPr>
               <a:t>Neudata | #ClearDataClearImpact</a:t>
             </a:r>
@@ -33321,7 +33003,7 @@
     </a:clrScheme>
     <a:fontScheme name="Office">
       <a:majorFont>
-        <a:latin typeface="Calibri"/>
+        <a:latin typeface="Arial"/>
         <a:ea typeface=""/>
         <a:cs typeface=""/>
         <a:font script="Jpan" typeface="ＭＳ Ｐゴシック"/>
@@ -33356,7 +33038,7 @@
         <a:font script="Geor" typeface="Sylfaen"/>
       </a:majorFont>
       <a:minorFont>
-        <a:latin typeface="Calibri"/>
+        <a:latin typeface="Arial"/>
         <a:ea typeface=""/>
         <a:cs typeface=""/>
         <a:font script="Jpan" typeface="ＭＳ Ｐゴシック"/>
@@ -33641,7 +33323,7 @@
     </a:clrScheme>
     <a:fontScheme name="Office">
       <a:majorFont>
-        <a:latin typeface="Calibri Light" panose="020F0302020204030204"/>
+        <a:latin typeface="Arial" panose="020F0302020204030204"/>
         <a:ea typeface=""/>
         <a:cs typeface=""/>
         <a:font script="Jpan" typeface="游ゴシック Light"/>
@@ -33676,7 +33358,7 @@
         <a:font script="Geor" typeface="Sylfaen"/>
       </a:majorFont>
       <a:minorFont>
-        <a:latin typeface="Calibri" panose="020F0502020204030204"/>
+        <a:latin typeface="Arial" panose="020F0502020204030204"/>
         <a:ea typeface=""/>
         <a:cs typeface=""/>
         <a:font script="Jpan" typeface="游ゴシック"/>
@@ -33902,7 +33584,7 @@
     </a:clrScheme>
     <a:fontScheme name="Office">
       <a:majorFont>
-        <a:latin typeface="Calibri Light" panose="020F0302020204030204"/>
+        <a:latin typeface="Arial" panose="020F0302020204030204"/>
         <a:ea typeface=""/>
         <a:cs typeface=""/>
         <a:font script="Jpan" typeface="游ゴシック Light"/>
@@ -33937,7 +33619,7 @@
         <a:font script="Geor" typeface="Sylfaen"/>
       </a:majorFont>
       <a:minorFont>
-        <a:latin typeface="Calibri" panose="020F0502020204030204"/>
+        <a:latin typeface="Arial" panose="020F0502020204030204"/>
         <a:ea typeface=""/>
         <a:cs typeface=""/>
         <a:font script="Jpan" typeface="游ゴシック"/>

--- a/en/files/slides/Session_8_EN.pptx
+++ b/en/files/slides/Session_8_EN.pptx
@@ -4734,13 +4734,19 @@
           <a:p>
             <a:r>
               <a:rPr lang="en-US" sz="1400" b="0" dirty="0"/>
-              <a:t>Post-course quiz (22:15-22:23). The same online form as the pre-course quiz in Session 1.</a:t>
+              <a:t>Post-course quiz (22:15-22:23), the same Google Form as in Session 1. The full name matches the two attempts.</a:t>
             </a:r>
           </a:p>
           <a:p>
             <a:r>
               <a:rPr lang="en-US" sz="1400" b="0" dirty="0"/>
-              <a:t>Later: compute the mean pre/post change with the table in the pre/post quiz answer key (Course/Assessment) and report it to the department head in the course report.</a:t>
+              <a:t>The trainers see the results at once in the Responses tab and the linked results sheet. Participants see no score.</a:t>
+            </a:r>
+          </a:p>
+          <a:p>
+            <a:r>
+              <a:rPr lang="en-US" sz="1400" b="0" dirty="0"/>
+              <a:t>Later: report the mean pre/post change in the course report (answer key: Course/Assessment).</a:t>
             </a:r>
           </a:p>
         </p:txBody>
@@ -4821,13 +4827,13 @@
           <a:p>
             <a:r>
               <a:rPr lang="en-US" sz="1400" b="0" dirty="0"/>
-              <a:t>What you built (1 minute). Celebrate: each participant has a proposal they could take to the ethics committee and a draft paper written from the course dataset. CRF = case report form.</a:t>
+              <a:t>What you built (1 minute). Each participant has a proposal they could take to the ethics committee and a draft paper. CRF = case report form.</a:t>
             </a:r>
           </a:p>
           <a:p>
             <a:r>
               <a:rPr lang="en-US" sz="1400" b="0" dirty="0"/>
-              <a:t>Ask (call on two or three people, microphone on): what is your next step with your proposal? (Who to discuss it with, a target date for the ethics committee.)</a:t>
+              <a:t>Ask two or three people: what is your next step with your proposal?</a:t>
             </a:r>
           </a:p>
         </p:txBody>
@@ -4908,7 +4914,7 @@
           <a:p>
             <a:r>
               <a:rPr lang="en-US" sz="1400" b="0" dirty="0"/>
-              <a:t>Evaluation (2 minutes, finished at home if needed). Short anonymous online form (link in the chat). The pace question matters: we planned the course to be slow and online in the evening, so tell us whether it was right.</a:t>
+              <a:t>Evaluation (2 minutes). Short anonymous online form, link in the chat. The pace question matters most.</a:t>
             </a:r>
           </a:p>
         </p:txBody>
@@ -5100,19 +5106,13 @@
           <a:p>
             <a:r>
               <a:rPr lang="en-US" sz="1400" b="0" dirty="0"/>
-              <a:t>Peer review (2 minutes). This is individual homework. Drafts are due by 23:59 tonight. Within 2 days the course lead sends each participant one peer's draft to review (a simple list so that every draft is reviewed exactly once, where possible on a different question), by email or through the course folder. Reviews are due within 1 week. The revised draft and response letter within 2 weeks.</a:t>
+              <a:t>Peer review (2 minutes), individual homework. Each draft is reviewed exactly once, where possible by someone on a different question.</a:t>
             </a:r>
           </a:p>
           <a:p>
             <a:r>
               <a:rPr lang="en-US" sz="1400" b="0" dirty="0"/>
               <a:t>Reviews follow Course/Assignment/peer_review_instructions.md and the 10-question checklist from 8.3. Authors reply with Course/Templates/Response_to_Reviewers_Template.</a:t>
-            </a:r>
-          </a:p>
-          <a:p>
-            <a:r>
-              <a:rPr lang="en-US" sz="1400" b="0" dirty="0"/>
-              <a:t>This is the last step of the whole research process, exactly what happens after a real submission.</a:t>
             </a:r>
           </a:p>
         </p:txBody>
@@ -5199,19 +5199,13 @@
           <a:p>
             <a:r>
               <a:rPr lang="en-US" sz="1400" b="0" dirty="0"/>
-              <a:t>Level 2 (hands-on, for those who want to run analyses themselves): statistical modelling in R, one model family per session: linear, logistic, count (Poisson, negative binomial) and Cox models, with their assumptions and how to report them. Data cleaning, Table 1 and the basics of missing data are taught as far as the analysis needs them, and each participant does an individual analysis project. Prerequisite: this course plus the free Neudata course Clinical Data Analysis in R.</a:t>
+              <a:t>Level 2: statistical modelling in R (linear, logistic, count and Cox models) with an individual analysis project. Level 3: advanced methods on request. Details in Course_Levels/.</a:t>
             </a:r>
           </a:p>
           <a:p>
             <a:r>
               <a:rPr lang="en-US" sz="1400" b="0" dirty="0"/>
-              <a:t>Level 3 (on request, workshops and consultancy): reproducible projects with version control and Quarto, figures that meet journal requirements, missing-data and sensitivity analyses in depth, systematic review and meta-analysis, and other advanced methods (prediction, diagnostic accuracy, advanced survival, longitudinal and clustered data). See Course_Levels/.</a:t>
-            </a:r>
-          </a:p>
-          <a:p>
-            <a:r>
-              <a:rPr lang="en-US" sz="1400" b="0" dirty="0"/>
-              <a:t>Give the trainers' contact details for follow-up questions in the chat.</a:t>
+              <a:t>Post the trainers' contact details in the chat.</a:t>
             </a:r>
           </a:p>
         </p:txBody>
@@ -9424,12 +9418,12 @@
           </a:ln>
         </p:spPr>
         <p:txBody>
-          <a:bodyPr wrap="square" lIns="137160" tIns="91440" rIns="137160" bIns="91440" rtlCol="0" anchor="t">
+          <a:bodyPr wrap="square" lIns="137160" tIns="91440" rIns="137160" bIns="91440" rtlCol="0" anchor="ctr">
             <a:normAutofit/>
           </a:bodyPr>
           <a:lstStyle/>
           <a:p>
-            <a:pPr marL="0" indent="0" algn="l">
+            <a:pPr marL="0" indent="0" algn="ctr">
               <a:buNone/>
             </a:pPr>
             <a:r>
@@ -9444,15 +9438,14 @@
             </a:r>
           </a:p>
           <a:p>
-            <a:pPr marL="274320" indent="-274320" algn="l">
+            <a:pPr marL="0" indent="0" algn="ctr">
               <a:lnSpc>
                 <a:spcPct val="104000"/>
               </a:lnSpc>
               <a:spcBef>
                 <a:spcPts val="300"/>
               </a:spcBef>
-              <a:buFont typeface="Arial"/>
-              <a:buChar char="•"/>
+              <a:buNone/>
             </a:pPr>
             <a:r>
               <a:rPr lang="en-US" sz="1500" dirty="0">
@@ -9466,15 +9459,14 @@
             </a:r>
           </a:p>
           <a:p>
-            <a:pPr marL="274320" indent="-274320" algn="l">
+            <a:pPr marL="0" indent="0" algn="ctr">
               <a:lnSpc>
                 <a:spcPct val="104000"/>
               </a:lnSpc>
               <a:spcBef>
                 <a:spcPts val="300"/>
               </a:spcBef>
-              <a:buFont typeface="Arial"/>
-              <a:buChar char="•"/>
+              <a:buNone/>
             </a:pPr>
             <a:r>
               <a:rPr lang="en-US" sz="1500" dirty="0">
@@ -9488,15 +9480,14 @@
             </a:r>
           </a:p>
           <a:p>
-            <a:pPr marL="274320" indent="-274320" algn="l">
+            <a:pPr marL="0" indent="0" algn="ctr">
               <a:lnSpc>
                 <a:spcPct val="104000"/>
               </a:lnSpc>
               <a:spcBef>
                 <a:spcPts val="300"/>
               </a:spcBef>
-              <a:buFont typeface="Arial"/>
-              <a:buChar char="•"/>
+              <a:buNone/>
             </a:pPr>
             <a:r>
               <a:rPr lang="en-US" sz="1500" dirty="0">
@@ -9510,15 +9501,14 @@
             </a:r>
           </a:p>
           <a:p>
-            <a:pPr marL="274320" indent="-274320" algn="l">
+            <a:pPr marL="0" indent="0" algn="ctr">
               <a:lnSpc>
                 <a:spcPct val="104000"/>
               </a:lnSpc>
               <a:spcBef>
                 <a:spcPts val="300"/>
               </a:spcBef>
-              <a:buFont typeface="Arial"/>
-              <a:buChar char="•"/>
+              <a:buNone/>
             </a:pPr>
             <a:r>
               <a:rPr lang="en-US" sz="1500" dirty="0">
@@ -10817,12 +10807,12 @@
           </a:ln>
         </p:spPr>
         <p:txBody>
-          <a:bodyPr wrap="square" lIns="137160" tIns="91440" rIns="137160" bIns="91440" rtlCol="0" anchor="t">
+          <a:bodyPr wrap="square" lIns="137160" tIns="91440" rIns="137160" bIns="91440" rtlCol="0" anchor="ctr">
             <a:normAutofit/>
           </a:bodyPr>
           <a:lstStyle/>
           <a:p>
-            <a:pPr marL="0" indent="0" algn="l">
+            <a:pPr marL="0" indent="0" algn="ctr">
               <a:lnSpc>
                 <a:spcPct val="104000"/>
               </a:lnSpc>
@@ -10843,7 +10833,7 @@
             </a:r>
           </a:p>
           <a:p>
-            <a:pPr marL="0" indent="0" algn="l">
+            <a:pPr marL="0" indent="0" algn="ctr">
               <a:lnSpc>
                 <a:spcPct val="104000"/>
               </a:lnSpc>
@@ -10864,7 +10854,7 @@
             </a:r>
           </a:p>
           <a:p>
-            <a:pPr marL="0" indent="0" algn="l">
+            <a:pPr marL="0" indent="0" algn="ctr">
               <a:lnSpc>
                 <a:spcPct val="104000"/>
               </a:lnSpc>
@@ -10951,12 +10941,12 @@
           </a:ln>
         </p:spPr>
         <p:txBody>
-          <a:bodyPr wrap="square" lIns="137160" tIns="91440" rIns="137160" bIns="91440" rtlCol="0" anchor="t">
+          <a:bodyPr wrap="square" lIns="137160" tIns="91440" rIns="137160" bIns="91440" rtlCol="0" anchor="ctr">
             <a:normAutofit/>
           </a:bodyPr>
           <a:lstStyle/>
           <a:p>
-            <a:pPr marL="0" indent="0" algn="l">
+            <a:pPr marL="0" indent="0" algn="ctr">
               <a:lnSpc>
                 <a:spcPct val="104000"/>
               </a:lnSpc>
@@ -10977,7 +10967,7 @@
             </a:r>
           </a:p>
           <a:p>
-            <a:pPr marL="0" indent="0" algn="l">
+            <a:pPr marL="0" indent="0" algn="ctr">
               <a:lnSpc>
                 <a:spcPct val="104000"/>
               </a:lnSpc>
@@ -10998,7 +10988,7 @@
             </a:r>
           </a:p>
           <a:p>
-            <a:pPr marL="0" indent="0" algn="l">
+            <a:pPr marL="0" indent="0" algn="ctr">
               <a:lnSpc>
                 <a:spcPct val="104000"/>
               </a:lnSpc>
@@ -11336,12 +11326,12 @@
           </a:ln>
         </p:spPr>
         <p:txBody>
-          <a:bodyPr wrap="square" lIns="137160" tIns="91440" rIns="137160" bIns="91440" rtlCol="0" anchor="t">
+          <a:bodyPr wrap="square" lIns="137160" tIns="91440" rIns="137160" bIns="91440" rtlCol="0" anchor="ctr">
             <a:normAutofit/>
           </a:bodyPr>
           <a:lstStyle/>
           <a:p>
-            <a:pPr marL="0" indent="0" algn="l">
+            <a:pPr marL="0" indent="0" algn="ctr">
               <a:lnSpc>
                 <a:spcPct val="104000"/>
               </a:lnSpc>
@@ -11362,7 +11352,7 @@
             </a:r>
           </a:p>
           <a:p>
-            <a:pPr marL="0" indent="0" algn="l">
+            <a:pPr marL="0" indent="0" algn="ctr">
               <a:lnSpc>
                 <a:spcPct val="104000"/>
               </a:lnSpc>
@@ -11383,7 +11373,7 @@
             </a:r>
           </a:p>
           <a:p>
-            <a:pPr marL="0" indent="0" algn="l">
+            <a:pPr marL="0" indent="0" algn="ctr">
               <a:lnSpc>
                 <a:spcPct val="104000"/>
               </a:lnSpc>
@@ -11470,12 +11460,12 @@
           </a:ln>
         </p:spPr>
         <p:txBody>
-          <a:bodyPr wrap="square" lIns="137160" tIns="91440" rIns="137160" bIns="91440" rtlCol="0" anchor="t">
+          <a:bodyPr wrap="square" lIns="137160" tIns="91440" rIns="137160" bIns="91440" rtlCol="0" anchor="ctr">
             <a:normAutofit/>
           </a:bodyPr>
           <a:lstStyle/>
           <a:p>
-            <a:pPr marL="0" indent="0" algn="l">
+            <a:pPr marL="0" indent="0" algn="ctr">
               <a:lnSpc>
                 <a:spcPct val="104000"/>
               </a:lnSpc>
@@ -11496,7 +11486,7 @@
             </a:r>
           </a:p>
           <a:p>
-            <a:pPr marL="0" indent="0" algn="l">
+            <a:pPr marL="0" indent="0" algn="ctr">
               <a:lnSpc>
                 <a:spcPct val="104000"/>
               </a:lnSpc>
@@ -11517,7 +11507,7 @@
             </a:r>
           </a:p>
           <a:p>
-            <a:pPr marL="0" indent="0" algn="l">
+            <a:pPr marL="0" indent="0" algn="ctr">
               <a:lnSpc>
                 <a:spcPct val="104000"/>
               </a:lnSpc>
@@ -11604,12 +11594,12 @@
           </a:ln>
         </p:spPr>
         <p:txBody>
-          <a:bodyPr wrap="square" lIns="137160" tIns="91440" rIns="137160" bIns="91440" rtlCol="0" anchor="t">
+          <a:bodyPr wrap="square" lIns="137160" tIns="91440" rIns="137160" bIns="91440" rtlCol="0" anchor="ctr">
             <a:normAutofit/>
           </a:bodyPr>
           <a:lstStyle/>
           <a:p>
-            <a:pPr marL="0" indent="0" algn="l">
+            <a:pPr marL="0" indent="0" algn="ctr">
               <a:lnSpc>
                 <a:spcPct val="104000"/>
               </a:lnSpc>
@@ -11630,7 +11620,7 @@
             </a:r>
           </a:p>
           <a:p>
-            <a:pPr marL="0" indent="0" algn="l">
+            <a:pPr marL="0" indent="0" algn="ctr">
               <a:lnSpc>
                 <a:spcPct val="104000"/>
               </a:lnSpc>
@@ -11651,7 +11641,7 @@
             </a:r>
           </a:p>
           <a:p>
-            <a:pPr marL="0" indent="0" algn="l">
+            <a:pPr marL="0" indent="0" algn="ctr">
               <a:lnSpc>
                 <a:spcPct val="104000"/>
               </a:lnSpc>
@@ -12371,12 +12361,12 @@
           </a:ln>
         </p:spPr>
         <p:txBody>
-          <a:bodyPr wrap="square" lIns="137160" tIns="91440" rIns="137160" bIns="91440" rtlCol="0" anchor="t">
+          <a:bodyPr wrap="square" lIns="137160" tIns="91440" rIns="137160" bIns="91440" rtlCol="0" anchor="ctr">
             <a:normAutofit/>
           </a:bodyPr>
           <a:lstStyle/>
           <a:p>
-            <a:pPr marL="0" indent="0" algn="l">
+            <a:pPr marL="0" indent="0" algn="ctr">
               <a:buNone/>
             </a:pPr>
             <a:r>
@@ -12391,15 +12381,14 @@
             </a:r>
           </a:p>
           <a:p>
-            <a:pPr marL="274320" indent="-274320" algn="l">
+            <a:pPr marL="0" indent="0" algn="ctr">
               <a:lnSpc>
                 <a:spcPct val="104000"/>
               </a:lnSpc>
               <a:spcBef>
                 <a:spcPts val="300"/>
               </a:spcBef>
-              <a:buFont typeface="Arial"/>
-              <a:buChar char="•"/>
+              <a:buNone/>
             </a:pPr>
             <a:r>
               <a:rPr lang="en-US" sz="1500" dirty="0">
@@ -12413,15 +12402,14 @@
             </a:r>
           </a:p>
           <a:p>
-            <a:pPr marL="274320" indent="-274320" algn="l">
+            <a:pPr marL="0" indent="0" algn="ctr">
               <a:lnSpc>
                 <a:spcPct val="104000"/>
               </a:lnSpc>
               <a:spcBef>
                 <a:spcPts val="300"/>
               </a:spcBef>
-              <a:buFont typeface="Arial"/>
-              <a:buChar char="•"/>
+              <a:buNone/>
             </a:pPr>
             <a:r>
               <a:rPr lang="en-US" sz="1500" dirty="0">
@@ -12435,15 +12423,14 @@
             </a:r>
           </a:p>
           <a:p>
-            <a:pPr marL="274320" indent="-274320" algn="l">
+            <a:pPr marL="0" indent="0" algn="ctr">
               <a:lnSpc>
                 <a:spcPct val="104000"/>
               </a:lnSpc>
               <a:spcBef>
                 <a:spcPts val="300"/>
               </a:spcBef>
-              <a:buFont typeface="Arial"/>
-              <a:buChar char="•"/>
+              <a:buNone/>
             </a:pPr>
             <a:r>
               <a:rPr lang="en-US" sz="1500" dirty="0">
@@ -12902,12 +12889,12 @@
           </a:ln>
         </p:spPr>
         <p:txBody>
-          <a:bodyPr wrap="square" lIns="137160" tIns="91440" rIns="137160" bIns="91440" rtlCol="0" anchor="t">
+          <a:bodyPr wrap="square" lIns="137160" tIns="91440" rIns="137160" bIns="91440" rtlCol="0" anchor="ctr">
             <a:normAutofit/>
           </a:bodyPr>
           <a:lstStyle/>
           <a:p>
-            <a:pPr marL="0" indent="0" algn="l">
+            <a:pPr marL="0" indent="0" algn="ctr">
               <a:buNone/>
             </a:pPr>
             <a:r>
@@ -12922,15 +12909,14 @@
             </a:r>
           </a:p>
           <a:p>
-            <a:pPr marL="274320" indent="-274320" algn="l">
+            <a:pPr marL="0" indent="0" algn="ctr">
               <a:lnSpc>
                 <a:spcPct val="104000"/>
               </a:lnSpc>
               <a:spcBef>
                 <a:spcPts val="300"/>
               </a:spcBef>
-              <a:buFont typeface="Arial"/>
-              <a:buChar char="•"/>
+              <a:buNone/>
             </a:pPr>
             <a:r>
               <a:rPr lang="en-US" sz="1500" dirty="0">
@@ -12944,15 +12930,14 @@
             </a:r>
           </a:p>
           <a:p>
-            <a:pPr marL="274320" indent="-274320" algn="l">
+            <a:pPr marL="0" indent="0" algn="ctr">
               <a:lnSpc>
                 <a:spcPct val="104000"/>
               </a:lnSpc>
               <a:spcBef>
                 <a:spcPts val="300"/>
               </a:spcBef>
-              <a:buFont typeface="Arial"/>
-              <a:buChar char="•"/>
+              <a:buNone/>
             </a:pPr>
             <a:r>
               <a:rPr lang="en-US" sz="1500" dirty="0">
@@ -12966,15 +12951,14 @@
             </a:r>
           </a:p>
           <a:p>
-            <a:pPr marL="274320" indent="-274320" algn="l">
+            <a:pPr marL="0" indent="0" algn="ctr">
               <a:lnSpc>
                 <a:spcPct val="104000"/>
               </a:lnSpc>
               <a:spcBef>
                 <a:spcPts val="300"/>
               </a:spcBef>
-              <a:buFont typeface="Arial"/>
-              <a:buChar char="•"/>
+              <a:buNone/>
             </a:pPr>
             <a:r>
               <a:rPr lang="en-US" sz="1500" dirty="0">
@@ -12988,15 +12972,14 @@
             </a:r>
           </a:p>
           <a:p>
-            <a:pPr marL="274320" indent="-274320" algn="l">
+            <a:pPr marL="0" indent="0" algn="ctr">
               <a:lnSpc>
                 <a:spcPct val="104000"/>
               </a:lnSpc>
               <a:spcBef>
                 <a:spcPts val="300"/>
               </a:spcBef>
-              <a:buFont typeface="Arial"/>
-              <a:buChar char="•"/>
+              <a:buNone/>
             </a:pPr>
             <a:r>
               <a:rPr lang="en-US" sz="1500" dirty="0">
@@ -14464,12 +14447,12 @@
           </a:ln>
         </p:spPr>
         <p:txBody>
-          <a:bodyPr wrap="square" lIns="137160" tIns="91440" rIns="137160" bIns="91440" rtlCol="0" anchor="t">
+          <a:bodyPr wrap="square" lIns="137160" tIns="91440" rIns="137160" bIns="91440" rtlCol="0" anchor="ctr">
             <a:normAutofit/>
           </a:bodyPr>
           <a:lstStyle/>
           <a:p>
-            <a:pPr marL="0" indent="0" algn="l">
+            <a:pPr marL="0" indent="0" algn="ctr">
               <a:buNone/>
             </a:pPr>
             <a:r>
@@ -14484,15 +14467,14 @@
             </a:r>
           </a:p>
           <a:p>
-            <a:pPr marL="274320" indent="-274320" algn="l">
+            <a:pPr marL="0" indent="0" algn="ctr">
               <a:lnSpc>
                 <a:spcPct val="104000"/>
               </a:lnSpc>
               <a:spcBef>
                 <a:spcPts val="300"/>
               </a:spcBef>
-              <a:buFont typeface="Arial"/>
-              <a:buChar char="•"/>
+              <a:buNone/>
             </a:pPr>
             <a:r>
               <a:rPr lang="en-US" sz="1500" dirty="0">
@@ -14506,15 +14488,14 @@
             </a:r>
           </a:p>
           <a:p>
-            <a:pPr marL="274320" indent="-274320" algn="l">
+            <a:pPr marL="0" indent="0" algn="ctr">
               <a:lnSpc>
                 <a:spcPct val="104000"/>
               </a:lnSpc>
               <a:spcBef>
                 <a:spcPts val="300"/>
               </a:spcBef>
-              <a:buFont typeface="Arial"/>
-              <a:buChar char="•"/>
+              <a:buNone/>
             </a:pPr>
             <a:r>
               <a:rPr lang="en-US" sz="1500" dirty="0">
@@ -14528,15 +14509,14 @@
             </a:r>
           </a:p>
           <a:p>
-            <a:pPr marL="274320" indent="-274320" algn="l">
+            <a:pPr marL="0" indent="0" algn="ctr">
               <a:lnSpc>
                 <a:spcPct val="104000"/>
               </a:lnSpc>
               <a:spcBef>
                 <a:spcPts val="300"/>
               </a:spcBef>
-              <a:buFont typeface="Arial"/>
-              <a:buChar char="•"/>
+              <a:buNone/>
             </a:pPr>
             <a:r>
               <a:rPr lang="en-US" sz="1500" dirty="0">
@@ -14908,12 +14888,12 @@
           </a:ln>
         </p:spPr>
         <p:txBody>
-          <a:bodyPr wrap="square" lIns="137160" tIns="91440" rIns="137160" bIns="91440" rtlCol="0" anchor="t">
+          <a:bodyPr wrap="square" lIns="137160" tIns="91440" rIns="137160" bIns="91440" rtlCol="0" anchor="ctr">
             <a:normAutofit/>
           </a:bodyPr>
           <a:lstStyle/>
           <a:p>
-            <a:pPr marL="0" indent="0" algn="l">
+            <a:pPr marL="0" indent="0" algn="ctr">
               <a:lnSpc>
                 <a:spcPct val="104000"/>
               </a:lnSpc>
@@ -14934,7 +14914,7 @@
             </a:r>
           </a:p>
           <a:p>
-            <a:pPr marL="0" indent="0" algn="l">
+            <a:pPr marL="0" indent="0" algn="ctr">
               <a:lnSpc>
                 <a:spcPct val="104000"/>
               </a:lnSpc>
@@ -14955,7 +14935,7 @@
             </a:r>
           </a:p>
           <a:p>
-            <a:pPr marL="0" indent="0" algn="l">
+            <a:pPr marL="0" indent="0" algn="ctr">
               <a:lnSpc>
                 <a:spcPct val="104000"/>
               </a:lnSpc>
@@ -15042,12 +15022,12 @@
           </a:ln>
         </p:spPr>
         <p:txBody>
-          <a:bodyPr wrap="square" lIns="137160" tIns="91440" rIns="137160" bIns="91440" rtlCol="0" anchor="t">
+          <a:bodyPr wrap="square" lIns="137160" tIns="91440" rIns="137160" bIns="91440" rtlCol="0" anchor="ctr">
             <a:normAutofit/>
           </a:bodyPr>
           <a:lstStyle/>
           <a:p>
-            <a:pPr marL="0" indent="0" algn="l">
+            <a:pPr marL="0" indent="0" algn="ctr">
               <a:lnSpc>
                 <a:spcPct val="104000"/>
               </a:lnSpc>
@@ -15068,7 +15048,7 @@
             </a:r>
           </a:p>
           <a:p>
-            <a:pPr marL="0" indent="0" algn="l">
+            <a:pPr marL="0" indent="0" algn="ctr">
               <a:lnSpc>
                 <a:spcPct val="104000"/>
               </a:lnSpc>
@@ -15155,12 +15135,12 @@
           </a:ln>
         </p:spPr>
         <p:txBody>
-          <a:bodyPr wrap="square" lIns="137160" tIns="91440" rIns="137160" bIns="91440" rtlCol="0" anchor="t">
+          <a:bodyPr wrap="square" lIns="137160" tIns="91440" rIns="137160" bIns="91440" rtlCol="0" anchor="ctr">
             <a:normAutofit/>
           </a:bodyPr>
           <a:lstStyle/>
           <a:p>
-            <a:pPr marL="0" indent="0" algn="l">
+            <a:pPr marL="0" indent="0" algn="ctr">
               <a:lnSpc>
                 <a:spcPct val="104000"/>
               </a:lnSpc>
@@ -15181,7 +15161,7 @@
             </a:r>
           </a:p>
           <a:p>
-            <a:pPr marL="0" indent="0" algn="l">
+            <a:pPr marL="0" indent="0" algn="ctr">
               <a:lnSpc>
                 <a:spcPct val="104000"/>
               </a:lnSpc>
@@ -15202,7 +15182,7 @@
             </a:r>
           </a:p>
           <a:p>
-            <a:pPr marL="0" indent="0" algn="l">
+            <a:pPr marL="0" indent="0" algn="ctr">
               <a:lnSpc>
                 <a:spcPct val="104000"/>
               </a:lnSpc>
@@ -15289,12 +15269,12 @@
           </a:ln>
         </p:spPr>
         <p:txBody>
-          <a:bodyPr wrap="square" lIns="137160" tIns="91440" rIns="137160" bIns="91440" rtlCol="0" anchor="t">
+          <a:bodyPr wrap="square" lIns="137160" tIns="91440" rIns="137160" bIns="91440" rtlCol="0" anchor="ctr">
             <a:normAutofit/>
           </a:bodyPr>
           <a:lstStyle/>
           <a:p>
-            <a:pPr marL="0" indent="0" algn="l">
+            <a:pPr marL="0" indent="0" algn="ctr">
               <a:lnSpc>
                 <a:spcPct val="104000"/>
               </a:lnSpc>
@@ -15315,7 +15295,7 @@
             </a:r>
           </a:p>
           <a:p>
-            <a:pPr marL="0" indent="0" algn="l">
+            <a:pPr marL="0" indent="0" algn="ctr">
               <a:lnSpc>
                 <a:spcPct val="104000"/>
               </a:lnSpc>
@@ -15336,7 +15316,7 @@
             </a:r>
           </a:p>
           <a:p>
-            <a:pPr marL="0" indent="0" algn="l">
+            <a:pPr marL="0" indent="0" algn="ctr">
               <a:lnSpc>
                 <a:spcPct val="104000"/>
               </a:lnSpc>
@@ -16100,12 +16080,12 @@
           </a:ln>
         </p:spPr>
         <p:txBody>
-          <a:bodyPr wrap="square" lIns="137160" tIns="91440" rIns="137160" bIns="91440" rtlCol="0" anchor="t">
+          <a:bodyPr wrap="square" lIns="137160" tIns="91440" rIns="137160" bIns="91440" rtlCol="0" anchor="ctr">
             <a:normAutofit/>
           </a:bodyPr>
           <a:lstStyle/>
           <a:p>
-            <a:pPr marL="0" indent="0" algn="l">
+            <a:pPr marL="0" indent="0" algn="ctr">
               <a:buNone/>
             </a:pPr>
             <a:r>
@@ -16120,15 +16100,14 @@
             </a:r>
           </a:p>
           <a:p>
-            <a:pPr marL="274320" indent="-274320" algn="l">
+            <a:pPr marL="0" indent="0" algn="ctr">
               <a:lnSpc>
                 <a:spcPct val="104000"/>
               </a:lnSpc>
               <a:spcBef>
                 <a:spcPts val="300"/>
               </a:spcBef>
-              <a:buFont typeface="Arial"/>
-              <a:buChar char="•"/>
+              <a:buNone/>
             </a:pPr>
             <a:r>
               <a:rPr lang="en-US" sz="1500" dirty="0">
@@ -16142,15 +16121,14 @@
             </a:r>
           </a:p>
           <a:p>
-            <a:pPr marL="274320" indent="-274320" algn="l">
+            <a:pPr marL="0" indent="0" algn="ctr">
               <a:lnSpc>
                 <a:spcPct val="104000"/>
               </a:lnSpc>
               <a:spcBef>
                 <a:spcPts val="300"/>
               </a:spcBef>
-              <a:buFont typeface="Arial"/>
-              <a:buChar char="•"/>
+              <a:buNone/>
             </a:pPr>
             <a:r>
               <a:rPr lang="en-US" sz="1500" dirty="0">
@@ -16164,15 +16142,14 @@
             </a:r>
           </a:p>
           <a:p>
-            <a:pPr marL="274320" indent="-274320" algn="l">
+            <a:pPr marL="0" indent="0" algn="ctr">
               <a:lnSpc>
                 <a:spcPct val="104000"/>
               </a:lnSpc>
               <a:spcBef>
                 <a:spcPts val="300"/>
               </a:spcBef>
-              <a:buFont typeface="Arial"/>
-              <a:buChar char="•"/>
+              <a:buNone/>
             </a:pPr>
             <a:r>
               <a:rPr lang="en-US" sz="1500" dirty="0">
@@ -17266,12 +17243,12 @@
           </a:ln>
         </p:spPr>
         <p:txBody>
-          <a:bodyPr wrap="square" lIns="110000" tIns="91440" rIns="110000" bIns="91440" rtlCol="0" anchor="t">
+          <a:bodyPr wrap="square" lIns="110000" tIns="91440" rIns="110000" bIns="91440" rtlCol="0" anchor="ctr">
             <a:normAutofit/>
           </a:bodyPr>
           <a:lstStyle/>
           <a:p>
-            <a:pPr marL="0" indent="0" algn="l">
+            <a:pPr marL="0" indent="0" algn="ctr">
               <a:lnSpc>
                 <a:spcPct val="104000"/>
               </a:lnSpc>
@@ -17360,12 +17337,12 @@
           </a:ln>
         </p:spPr>
         <p:txBody>
-          <a:bodyPr wrap="square" lIns="110000" tIns="91440" rIns="110000" bIns="91440" rtlCol="0" anchor="t">
+          <a:bodyPr wrap="square" lIns="110000" tIns="91440" rIns="110000" bIns="91440" rtlCol="0" anchor="ctr">
             <a:normAutofit/>
           </a:bodyPr>
           <a:lstStyle/>
           <a:p>
-            <a:pPr marL="0" indent="0" algn="l">
+            <a:pPr marL="0" indent="0" algn="ctr">
               <a:lnSpc>
                 <a:spcPct val="104000"/>
               </a:lnSpc>
@@ -17386,7 +17363,7 @@
             </a:r>
           </a:p>
           <a:p>
-            <a:pPr marL="0" indent="0" algn="l">
+            <a:pPr marL="0" indent="0" algn="ctr">
               <a:lnSpc>
                 <a:spcPct val="104000"/>
               </a:lnSpc>
@@ -17475,12 +17452,12 @@
           </a:ln>
         </p:spPr>
         <p:txBody>
-          <a:bodyPr wrap="square" lIns="110000" tIns="91440" rIns="110000" bIns="91440" rtlCol="0" anchor="t">
+          <a:bodyPr wrap="square" lIns="110000" tIns="91440" rIns="110000" bIns="91440" rtlCol="0" anchor="ctr">
             <a:normAutofit/>
           </a:bodyPr>
           <a:lstStyle/>
           <a:p>
-            <a:pPr marL="0" indent="0" algn="l">
+            <a:pPr marL="0" indent="0" algn="ctr">
               <a:lnSpc>
                 <a:spcPct val="104000"/>
               </a:lnSpc>
@@ -17569,12 +17546,12 @@
           </a:ln>
         </p:spPr>
         <p:txBody>
-          <a:bodyPr wrap="square" lIns="110000" tIns="91440" rIns="110000" bIns="91440" rtlCol="0" anchor="t">
+          <a:bodyPr wrap="square" lIns="110000" tIns="91440" rIns="110000" bIns="91440" rtlCol="0" anchor="ctr">
             <a:normAutofit/>
           </a:bodyPr>
           <a:lstStyle/>
           <a:p>
-            <a:pPr marL="0" indent="0" algn="l">
+            <a:pPr marL="0" indent="0" algn="ctr">
               <a:lnSpc>
                 <a:spcPct val="104000"/>
               </a:lnSpc>
@@ -17663,12 +17640,12 @@
           </a:ln>
         </p:spPr>
         <p:txBody>
-          <a:bodyPr wrap="square" lIns="110000" tIns="91440" rIns="110000" bIns="91440" rtlCol="0" anchor="t">
+          <a:bodyPr wrap="square" lIns="110000" tIns="91440" rIns="110000" bIns="91440" rtlCol="0" anchor="ctr">
             <a:normAutofit/>
           </a:bodyPr>
           <a:lstStyle/>
           <a:p>
-            <a:pPr marL="0" indent="0" algn="l">
+            <a:pPr marL="0" indent="0" algn="ctr">
               <a:lnSpc>
                 <a:spcPct val="104000"/>
               </a:lnSpc>
@@ -17689,7 +17666,7 @@
             </a:r>
           </a:p>
           <a:p>
-            <a:pPr marL="0" indent="0" algn="l">
+            <a:pPr marL="0" indent="0" algn="ctr">
               <a:lnSpc>
                 <a:spcPct val="104000"/>
               </a:lnSpc>
@@ -17778,12 +17755,12 @@
           </a:ln>
         </p:spPr>
         <p:txBody>
-          <a:bodyPr wrap="square" lIns="110000" tIns="91440" rIns="110000" bIns="91440" rtlCol="0" anchor="t">
+          <a:bodyPr wrap="square" lIns="110000" tIns="91440" rIns="110000" bIns="91440" rtlCol="0" anchor="ctr">
             <a:normAutofit/>
           </a:bodyPr>
           <a:lstStyle/>
           <a:p>
-            <a:pPr marL="0" indent="0" algn="l">
+            <a:pPr marL="0" indent="0" algn="ctr">
               <a:lnSpc>
                 <a:spcPct val="104000"/>
               </a:lnSpc>
@@ -18160,12 +18137,12 @@
           </a:ln>
         </p:spPr>
         <p:txBody>
-          <a:bodyPr wrap="square" lIns="137160" tIns="91440" rIns="137160" bIns="91440" rtlCol="0" anchor="t">
+          <a:bodyPr wrap="square" lIns="137160" tIns="91440" rIns="137160" bIns="91440" rtlCol="0" anchor="ctr">
             <a:normAutofit/>
           </a:bodyPr>
           <a:lstStyle/>
           <a:p>
-            <a:pPr marL="0" indent="0" algn="l">
+            <a:pPr marL="0" indent="0" algn="ctr">
               <a:lnSpc>
                 <a:spcPct val="104000"/>
               </a:lnSpc>
@@ -18186,7 +18163,7 @@
             </a:r>
           </a:p>
           <a:p>
-            <a:pPr marL="0" indent="0" algn="l">
+            <a:pPr marL="0" indent="0" algn="ctr">
               <a:lnSpc>
                 <a:spcPct val="104000"/>
               </a:lnSpc>
@@ -18207,7 +18184,7 @@
             </a:r>
           </a:p>
           <a:p>
-            <a:pPr marL="0" indent="0" algn="l">
+            <a:pPr marL="0" indent="0" algn="ctr">
               <a:lnSpc>
                 <a:spcPct val="104000"/>
               </a:lnSpc>
@@ -18294,12 +18271,12 @@
           </a:ln>
         </p:spPr>
         <p:txBody>
-          <a:bodyPr wrap="square" lIns="137160" tIns="91440" rIns="137160" bIns="91440" rtlCol="0" anchor="t">
+          <a:bodyPr wrap="square" lIns="137160" tIns="91440" rIns="137160" bIns="91440" rtlCol="0" anchor="ctr">
             <a:normAutofit/>
           </a:bodyPr>
           <a:lstStyle/>
           <a:p>
-            <a:pPr marL="0" indent="0" algn="l">
+            <a:pPr marL="0" indent="0" algn="ctr">
               <a:lnSpc>
                 <a:spcPct val="104000"/>
               </a:lnSpc>
@@ -18320,7 +18297,7 @@
             </a:r>
           </a:p>
           <a:p>
-            <a:pPr marL="0" indent="0" algn="l">
+            <a:pPr marL="0" indent="0" algn="ctr">
               <a:lnSpc>
                 <a:spcPct val="104000"/>
               </a:lnSpc>
@@ -18341,7 +18318,7 @@
             </a:r>
           </a:p>
           <a:p>
-            <a:pPr marL="0" indent="0" algn="l">
+            <a:pPr marL="0" indent="0" algn="ctr">
               <a:lnSpc>
                 <a:spcPct val="104000"/>
               </a:lnSpc>
@@ -18428,12 +18405,12 @@
           </a:ln>
         </p:spPr>
         <p:txBody>
-          <a:bodyPr wrap="square" lIns="137160" tIns="91440" rIns="137160" bIns="91440" rtlCol="0" anchor="t">
+          <a:bodyPr wrap="square" lIns="137160" tIns="91440" rIns="137160" bIns="91440" rtlCol="0" anchor="ctr">
             <a:normAutofit/>
           </a:bodyPr>
           <a:lstStyle/>
           <a:p>
-            <a:pPr marL="0" indent="0" algn="l">
+            <a:pPr marL="0" indent="0" algn="ctr">
               <a:lnSpc>
                 <a:spcPct val="104000"/>
               </a:lnSpc>
@@ -18454,7 +18431,7 @@
             </a:r>
           </a:p>
           <a:p>
-            <a:pPr marL="0" indent="0" algn="l">
+            <a:pPr marL="0" indent="0" algn="ctr">
               <a:lnSpc>
                 <a:spcPct val="104000"/>
               </a:lnSpc>
@@ -18475,7 +18452,7 @@
             </a:r>
           </a:p>
           <a:p>
-            <a:pPr marL="0" indent="0" algn="l">
+            <a:pPr marL="0" indent="0" algn="ctr">
               <a:lnSpc>
                 <a:spcPct val="104000"/>
               </a:lnSpc>
@@ -18964,12 +18941,12 @@
           </a:ln>
         </p:spPr>
         <p:txBody>
-          <a:bodyPr wrap="square" lIns="137160" tIns="91440" rIns="137160" bIns="91440" rtlCol="0" anchor="t">
+          <a:bodyPr wrap="square" lIns="137160" tIns="91440" rIns="137160" bIns="91440" rtlCol="0" anchor="ctr">
             <a:normAutofit/>
           </a:bodyPr>
           <a:lstStyle/>
           <a:p>
-            <a:pPr marL="0" indent="0" algn="l">
+            <a:pPr marL="0" indent="0" algn="ctr">
               <a:buNone/>
             </a:pPr>
             <a:r>
@@ -18984,15 +18961,14 @@
             </a:r>
           </a:p>
           <a:p>
-            <a:pPr marL="274320" indent="-274320" algn="l">
+            <a:pPr marL="0" indent="0" algn="ctr">
               <a:lnSpc>
                 <a:spcPct val="104000"/>
               </a:lnSpc>
               <a:spcBef>
                 <a:spcPts val="300"/>
               </a:spcBef>
-              <a:buFont typeface="Arial"/>
-              <a:buChar char="•"/>
+              <a:buNone/>
             </a:pPr>
             <a:r>
               <a:rPr lang="en-US" sz="1500" dirty="0">
@@ -19006,15 +18982,14 @@
             </a:r>
           </a:p>
           <a:p>
-            <a:pPr marL="274320" indent="-274320" algn="l">
+            <a:pPr marL="0" indent="0" algn="ctr">
               <a:lnSpc>
                 <a:spcPct val="104000"/>
               </a:lnSpc>
               <a:spcBef>
                 <a:spcPts val="300"/>
               </a:spcBef>
-              <a:buFont typeface="Arial"/>
-              <a:buChar char="•"/>
+              <a:buNone/>
             </a:pPr>
             <a:r>
               <a:rPr lang="en-US" sz="1500" dirty="0">
@@ -19028,15 +19003,14 @@
             </a:r>
           </a:p>
           <a:p>
-            <a:pPr marL="274320" indent="-274320" algn="l">
+            <a:pPr marL="0" indent="0" algn="ctr">
               <a:lnSpc>
                 <a:spcPct val="104000"/>
               </a:lnSpc>
               <a:spcBef>
                 <a:spcPts val="300"/>
               </a:spcBef>
-              <a:buFont typeface="Arial"/>
-              <a:buChar char="•"/>
+              <a:buNone/>
             </a:pPr>
             <a:r>
               <a:rPr lang="en-US" sz="1500" dirty="0">
@@ -19050,15 +19024,14 @@
             </a:r>
           </a:p>
           <a:p>
-            <a:pPr marL="274320" indent="-274320" algn="l">
+            <a:pPr marL="0" indent="0" algn="ctr">
               <a:lnSpc>
                 <a:spcPct val="104000"/>
               </a:lnSpc>
               <a:spcBef>
                 <a:spcPts val="300"/>
               </a:spcBef>
-              <a:buFont typeface="Arial"/>
-              <a:buChar char="•"/>
+              <a:buNone/>
             </a:pPr>
             <a:r>
               <a:rPr lang="en-US" sz="1500" dirty="0">
@@ -19072,15 +19045,14 @@
             </a:r>
           </a:p>
           <a:p>
-            <a:pPr marL="274320" indent="-274320" algn="l">
+            <a:pPr marL="0" indent="0" algn="ctr">
               <a:lnSpc>
                 <a:spcPct val="104000"/>
               </a:lnSpc>
               <a:spcBef>
                 <a:spcPts val="300"/>
               </a:spcBef>
-              <a:buFont typeface="Arial"/>
-              <a:buChar char="•"/>
+              <a:buNone/>
             </a:pPr>
             <a:r>
               <a:rPr lang="en-US" sz="1500" dirty="0">
@@ -20121,12 +20093,12 @@
           </a:ln>
         </p:spPr>
         <p:txBody>
-          <a:bodyPr wrap="square" lIns="137160" tIns="91440" rIns="137160" bIns="91440" rtlCol="0" anchor="t">
+          <a:bodyPr wrap="square" lIns="137160" tIns="91440" rIns="137160" bIns="91440" rtlCol="0" anchor="ctr">
             <a:normAutofit/>
           </a:bodyPr>
           <a:lstStyle/>
           <a:p>
-            <a:pPr marL="0" indent="0" algn="l">
+            <a:pPr marL="0" indent="0" algn="ctr">
               <a:lnSpc>
                 <a:spcPct val="104000"/>
               </a:lnSpc>
@@ -20147,7 +20119,7 @@
             </a:r>
           </a:p>
           <a:p>
-            <a:pPr marL="0" indent="0" algn="l">
+            <a:pPr marL="0" indent="0" algn="ctr">
               <a:lnSpc>
                 <a:spcPct val="104000"/>
               </a:lnSpc>
@@ -20168,7 +20140,7 @@
             </a:r>
           </a:p>
           <a:p>
-            <a:pPr marL="0" indent="0" algn="l">
+            <a:pPr marL="0" indent="0" algn="ctr">
               <a:lnSpc>
                 <a:spcPct val="104000"/>
               </a:lnSpc>
@@ -20189,7 +20161,7 @@
             </a:r>
           </a:p>
           <a:p>
-            <a:pPr marL="0" indent="0" algn="l">
+            <a:pPr marL="0" indent="0" algn="ctr">
               <a:lnSpc>
                 <a:spcPct val="104000"/>
               </a:lnSpc>
@@ -20276,12 +20248,12 @@
           </a:ln>
         </p:spPr>
         <p:txBody>
-          <a:bodyPr wrap="square" lIns="137160" tIns="91440" rIns="137160" bIns="91440" rtlCol="0" anchor="t">
+          <a:bodyPr wrap="square" lIns="137160" tIns="91440" rIns="137160" bIns="91440" rtlCol="0" anchor="ctr">
             <a:normAutofit/>
           </a:bodyPr>
           <a:lstStyle/>
           <a:p>
-            <a:pPr marL="0" indent="0" algn="l">
+            <a:pPr marL="0" indent="0" algn="ctr">
               <a:lnSpc>
                 <a:spcPct val="104000"/>
               </a:lnSpc>
@@ -20302,7 +20274,7 @@
             </a:r>
           </a:p>
           <a:p>
-            <a:pPr marL="0" indent="0" algn="l">
+            <a:pPr marL="0" indent="0" algn="ctr">
               <a:lnSpc>
                 <a:spcPct val="104000"/>
               </a:lnSpc>
@@ -20323,7 +20295,7 @@
             </a:r>
           </a:p>
           <a:p>
-            <a:pPr marL="0" indent="0" algn="l">
+            <a:pPr marL="0" indent="0" algn="ctr">
               <a:lnSpc>
                 <a:spcPct val="104000"/>
               </a:lnSpc>
@@ -20344,7 +20316,7 @@
             </a:r>
           </a:p>
           <a:p>
-            <a:pPr marL="0" indent="0" algn="l">
+            <a:pPr marL="0" indent="0" algn="ctr">
               <a:lnSpc>
                 <a:spcPct val="104000"/>
               </a:lnSpc>
@@ -20938,12 +20910,12 @@
           </a:ln>
         </p:spPr>
         <p:txBody>
-          <a:bodyPr wrap="square" lIns="137160" tIns="91440" rIns="137160" bIns="91440" rtlCol="0" anchor="t">
+          <a:bodyPr wrap="square" lIns="137160" tIns="91440" rIns="137160" bIns="91440" rtlCol="0" anchor="ctr">
             <a:normAutofit/>
           </a:bodyPr>
           <a:lstStyle/>
           <a:p>
-            <a:pPr marL="0" indent="0" algn="l">
+            <a:pPr marL="0" indent="0" algn="ctr">
               <a:lnSpc>
                 <a:spcPct val="104000"/>
               </a:lnSpc>
@@ -21030,12 +21002,12 @@
           </a:ln>
         </p:spPr>
         <p:txBody>
-          <a:bodyPr wrap="square" lIns="137160" tIns="91440" rIns="137160" bIns="91440" rtlCol="0" anchor="t">
+          <a:bodyPr wrap="square" lIns="137160" tIns="91440" rIns="137160" bIns="91440" rtlCol="0" anchor="ctr">
             <a:normAutofit/>
           </a:bodyPr>
           <a:lstStyle/>
           <a:p>
-            <a:pPr marL="0" indent="0" algn="l">
+            <a:pPr marL="0" indent="0" algn="ctr">
               <a:lnSpc>
                 <a:spcPct val="104000"/>
               </a:lnSpc>
@@ -21122,12 +21094,12 @@
           </a:ln>
         </p:spPr>
         <p:txBody>
-          <a:bodyPr wrap="square" lIns="137160" tIns="91440" rIns="137160" bIns="91440" rtlCol="0" anchor="t">
+          <a:bodyPr wrap="square" lIns="137160" tIns="91440" rIns="137160" bIns="91440" rtlCol="0" anchor="ctr">
             <a:normAutofit/>
           </a:bodyPr>
           <a:lstStyle/>
           <a:p>
-            <a:pPr marL="0" indent="0" algn="l">
+            <a:pPr marL="0" indent="0" algn="ctr">
               <a:lnSpc>
                 <a:spcPct val="104000"/>
               </a:lnSpc>
@@ -21148,7 +21120,7 @@
             </a:r>
           </a:p>
           <a:p>
-            <a:pPr marL="0" indent="0" algn="l">
+            <a:pPr marL="0" indent="0" algn="ctr">
               <a:lnSpc>
                 <a:spcPct val="104000"/>
               </a:lnSpc>
@@ -21235,12 +21207,12 @@
           </a:ln>
         </p:spPr>
         <p:txBody>
-          <a:bodyPr wrap="square" lIns="137160" tIns="91440" rIns="137160" bIns="91440" rtlCol="0" anchor="t">
+          <a:bodyPr wrap="square" lIns="137160" tIns="91440" rIns="137160" bIns="91440" rtlCol="0" anchor="ctr">
             <a:normAutofit/>
           </a:bodyPr>
           <a:lstStyle/>
           <a:p>
-            <a:pPr marL="0" indent="0" algn="l">
+            <a:pPr marL="0" indent="0" algn="ctr">
               <a:lnSpc>
                 <a:spcPct val="104000"/>
               </a:lnSpc>
@@ -21261,7 +21233,7 @@
             </a:r>
           </a:p>
           <a:p>
-            <a:pPr marL="0" indent="0" algn="l">
+            <a:pPr marL="0" indent="0" algn="ctr">
               <a:lnSpc>
                 <a:spcPct val="104000"/>
               </a:lnSpc>
@@ -21348,12 +21320,12 @@
           </a:ln>
         </p:spPr>
         <p:txBody>
-          <a:bodyPr wrap="square" lIns="137160" tIns="91440" rIns="137160" bIns="91440" rtlCol="0" anchor="t">
+          <a:bodyPr wrap="square" lIns="137160" tIns="91440" rIns="137160" bIns="91440" rtlCol="0" anchor="ctr">
             <a:normAutofit/>
           </a:bodyPr>
           <a:lstStyle/>
           <a:p>
-            <a:pPr marL="0" indent="0" algn="l">
+            <a:pPr marL="0" indent="0" algn="ctr">
               <a:lnSpc>
                 <a:spcPct val="104000"/>
               </a:lnSpc>
@@ -21374,7 +21346,7 @@
             </a:r>
           </a:p>
           <a:p>
-            <a:pPr marL="0" indent="0" algn="l">
+            <a:pPr marL="0" indent="0" algn="ctr">
               <a:lnSpc>
                 <a:spcPct val="104000"/>
               </a:lnSpc>
@@ -21657,12 +21629,12 @@
           </a:ln>
         </p:spPr>
         <p:txBody>
-          <a:bodyPr wrap="square" lIns="137160" tIns="91440" rIns="137160" bIns="91440" rtlCol="0" anchor="t">
+          <a:bodyPr wrap="square" lIns="137160" tIns="91440" rIns="137160" bIns="91440" rtlCol="0" anchor="ctr">
             <a:normAutofit/>
           </a:bodyPr>
           <a:lstStyle/>
           <a:p>
-            <a:pPr marL="0" indent="0" algn="l">
+            <a:pPr marL="0" indent="0" algn="ctr">
               <a:lnSpc>
                 <a:spcPct val="104000"/>
               </a:lnSpc>
@@ -21749,12 +21721,12 @@
           </a:ln>
         </p:spPr>
         <p:txBody>
-          <a:bodyPr wrap="square" lIns="137160" tIns="91440" rIns="137160" bIns="91440" rtlCol="0" anchor="t">
+          <a:bodyPr wrap="square" lIns="137160" tIns="91440" rIns="137160" bIns="91440" rtlCol="0" anchor="ctr">
             <a:normAutofit/>
           </a:bodyPr>
           <a:lstStyle/>
           <a:p>
-            <a:pPr marL="0" indent="0" algn="l">
+            <a:pPr marL="0" indent="0" algn="ctr">
               <a:lnSpc>
                 <a:spcPct val="104000"/>
               </a:lnSpc>
@@ -21775,7 +21747,7 @@
             </a:r>
           </a:p>
           <a:p>
-            <a:pPr marL="0" indent="0" algn="l">
+            <a:pPr marL="0" indent="0" algn="ctr">
               <a:lnSpc>
                 <a:spcPct val="104000"/>
               </a:lnSpc>
@@ -21862,12 +21834,12 @@
           </a:ln>
         </p:spPr>
         <p:txBody>
-          <a:bodyPr wrap="square" lIns="137160" tIns="91440" rIns="137160" bIns="91440" rtlCol="0" anchor="t">
+          <a:bodyPr wrap="square" lIns="137160" tIns="91440" rIns="137160" bIns="91440" rtlCol="0" anchor="ctr">
             <a:normAutofit/>
           </a:bodyPr>
           <a:lstStyle/>
           <a:p>
-            <a:pPr marL="0" indent="0" algn="l">
+            <a:pPr marL="0" indent="0" algn="ctr">
               <a:lnSpc>
                 <a:spcPct val="104000"/>
               </a:lnSpc>
@@ -21954,12 +21926,12 @@
           </a:ln>
         </p:spPr>
         <p:txBody>
-          <a:bodyPr wrap="square" lIns="137160" tIns="91440" rIns="137160" bIns="91440" rtlCol="0" anchor="t">
+          <a:bodyPr wrap="square" lIns="137160" tIns="91440" rIns="137160" bIns="91440" rtlCol="0" anchor="ctr">
             <a:normAutofit/>
           </a:bodyPr>
           <a:lstStyle/>
           <a:p>
-            <a:pPr marL="0" indent="0" algn="l">
+            <a:pPr marL="0" indent="0" algn="ctr">
               <a:lnSpc>
                 <a:spcPct val="104000"/>
               </a:lnSpc>
@@ -21980,7 +21952,7 @@
             </a:r>
           </a:p>
           <a:p>
-            <a:pPr marL="0" indent="0" algn="l">
+            <a:pPr marL="0" indent="0" algn="ctr">
               <a:lnSpc>
                 <a:spcPct val="104000"/>
               </a:lnSpc>
@@ -22067,12 +22039,12 @@
           </a:ln>
         </p:spPr>
         <p:txBody>
-          <a:bodyPr wrap="square" lIns="137160" tIns="91440" rIns="137160" bIns="91440" rtlCol="0" anchor="t">
+          <a:bodyPr wrap="square" lIns="137160" tIns="91440" rIns="137160" bIns="91440" rtlCol="0" anchor="ctr">
             <a:normAutofit/>
           </a:bodyPr>
           <a:lstStyle/>
           <a:p>
-            <a:pPr marL="0" indent="0" algn="l">
+            <a:pPr marL="0" indent="0" algn="ctr">
               <a:lnSpc>
                 <a:spcPct val="104000"/>
               </a:lnSpc>
@@ -22093,7 +22065,7 @@
             </a:r>
           </a:p>
           <a:p>
-            <a:pPr marL="0" indent="0" algn="l">
+            <a:pPr marL="0" indent="0" algn="ctr">
               <a:lnSpc>
                 <a:spcPct val="104000"/>
               </a:lnSpc>
@@ -22527,12 +22499,12 @@
           </a:ln>
         </p:spPr>
         <p:txBody>
-          <a:bodyPr wrap="square" lIns="137160" tIns="91440" rIns="137160" bIns="91440" rtlCol="0" anchor="t">
+          <a:bodyPr wrap="square" lIns="137160" tIns="91440" rIns="137160" bIns="91440" rtlCol="0" anchor="ctr">
             <a:normAutofit/>
           </a:bodyPr>
           <a:lstStyle/>
           <a:p>
-            <a:pPr marL="0" indent="0" algn="l">
+            <a:pPr marL="0" indent="0" algn="ctr">
               <a:buNone/>
             </a:pPr>
             <a:r>
@@ -22547,15 +22519,14 @@
             </a:r>
           </a:p>
           <a:p>
-            <a:pPr marL="274320" indent="-274320" algn="l">
+            <a:pPr marL="0" indent="0" algn="ctr">
               <a:lnSpc>
                 <a:spcPct val="104000"/>
               </a:lnSpc>
               <a:spcBef>
                 <a:spcPts val="300"/>
               </a:spcBef>
-              <a:buFont typeface="Arial"/>
-              <a:buChar char="•"/>
+              <a:buNone/>
             </a:pPr>
             <a:r>
               <a:rPr lang="en-US" sz="1500" dirty="0">
@@ -22569,15 +22540,14 @@
             </a:r>
           </a:p>
           <a:p>
-            <a:pPr marL="274320" indent="-274320" algn="l">
+            <a:pPr marL="0" indent="0" algn="ctr">
               <a:lnSpc>
                 <a:spcPct val="104000"/>
               </a:lnSpc>
               <a:spcBef>
                 <a:spcPts val="300"/>
               </a:spcBef>
-              <a:buFont typeface="Arial"/>
-              <a:buChar char="•"/>
+              <a:buNone/>
             </a:pPr>
             <a:r>
               <a:rPr lang="en-US" sz="1500" dirty="0">
@@ -22591,15 +22561,14 @@
             </a:r>
           </a:p>
           <a:p>
-            <a:pPr marL="274320" indent="-274320" algn="l">
+            <a:pPr marL="0" indent="0" algn="ctr">
               <a:lnSpc>
                 <a:spcPct val="104000"/>
               </a:lnSpc>
               <a:spcBef>
                 <a:spcPts val="300"/>
               </a:spcBef>
-              <a:buFont typeface="Arial"/>
-              <a:buChar char="•"/>
+              <a:buNone/>
             </a:pPr>
             <a:r>
               <a:rPr lang="en-US" sz="1500" dirty="0">
@@ -22613,15 +22582,14 @@
             </a:r>
           </a:p>
           <a:p>
-            <a:pPr marL="274320" indent="-274320" algn="l">
+            <a:pPr marL="0" indent="0" algn="ctr">
               <a:lnSpc>
                 <a:spcPct val="104000"/>
               </a:lnSpc>
               <a:spcBef>
                 <a:spcPts val="300"/>
               </a:spcBef>
-              <a:buFont typeface="Arial"/>
-              <a:buChar char="•"/>
+              <a:buNone/>
             </a:pPr>
             <a:r>
               <a:rPr lang="en-US" sz="1500" dirty="0">
@@ -22954,12 +22922,12 @@
           </a:ln>
         </p:spPr>
         <p:txBody>
-          <a:bodyPr wrap="square" lIns="137160" tIns="91440" rIns="137160" bIns="91440" rtlCol="0" anchor="t">
+          <a:bodyPr wrap="square" lIns="137160" tIns="91440" rIns="137160" bIns="91440" rtlCol="0" anchor="ctr">
             <a:normAutofit/>
           </a:bodyPr>
           <a:lstStyle/>
           <a:p>
-            <a:pPr marL="0" indent="0" algn="l">
+            <a:pPr marL="0" indent="0" algn="ctr">
               <a:lnSpc>
                 <a:spcPct val="104000"/>
               </a:lnSpc>
@@ -22980,7 +22948,7 @@
             </a:r>
           </a:p>
           <a:p>
-            <a:pPr marL="0" indent="0" algn="l">
+            <a:pPr marL="0" indent="0" algn="ctr">
               <a:lnSpc>
                 <a:spcPct val="104000"/>
               </a:lnSpc>
@@ -23001,7 +22969,7 @@
             </a:r>
           </a:p>
           <a:p>
-            <a:pPr marL="0" indent="0" algn="l">
+            <a:pPr marL="0" indent="0" algn="ctr">
               <a:lnSpc>
                 <a:spcPct val="104000"/>
               </a:lnSpc>
@@ -23022,7 +22990,7 @@
             </a:r>
           </a:p>
           <a:p>
-            <a:pPr marL="0" indent="0" algn="l">
+            <a:pPr marL="0" indent="0" algn="ctr">
               <a:lnSpc>
                 <a:spcPct val="104000"/>
               </a:lnSpc>
@@ -23109,12 +23077,12 @@
           </a:ln>
         </p:spPr>
         <p:txBody>
-          <a:bodyPr wrap="square" lIns="137160" tIns="91440" rIns="137160" bIns="91440" rtlCol="0" anchor="t">
+          <a:bodyPr wrap="square" lIns="137160" tIns="91440" rIns="137160" bIns="91440" rtlCol="0" anchor="ctr">
             <a:normAutofit/>
           </a:bodyPr>
           <a:lstStyle/>
           <a:p>
-            <a:pPr marL="0" indent="0" algn="l">
+            <a:pPr marL="0" indent="0" algn="ctr">
               <a:lnSpc>
                 <a:spcPct val="104000"/>
               </a:lnSpc>
@@ -23135,7 +23103,7 @@
             </a:r>
           </a:p>
           <a:p>
-            <a:pPr marL="0" indent="0" algn="l">
+            <a:pPr marL="0" indent="0" algn="ctr">
               <a:lnSpc>
                 <a:spcPct val="104000"/>
               </a:lnSpc>
@@ -23156,7 +23124,7 @@
             </a:r>
           </a:p>
           <a:p>
-            <a:pPr marL="0" indent="0" algn="l">
+            <a:pPr marL="0" indent="0" algn="ctr">
               <a:lnSpc>
                 <a:spcPct val="104000"/>
               </a:lnSpc>
@@ -23177,7 +23145,7 @@
             </a:r>
           </a:p>
           <a:p>
-            <a:pPr marL="0" indent="0" algn="l">
+            <a:pPr marL="0" indent="0" algn="ctr">
               <a:lnSpc>
                 <a:spcPct val="104000"/>
               </a:lnSpc>
@@ -25404,12 +25372,12 @@
           </a:ln>
         </p:spPr>
         <p:txBody>
-          <a:bodyPr wrap="square" lIns="137160" tIns="91440" rIns="137160" bIns="91440" rtlCol="0" anchor="t">
+          <a:bodyPr wrap="square" lIns="137160" tIns="91440" rIns="137160" bIns="91440" rtlCol="0" anchor="ctr">
             <a:normAutofit/>
           </a:bodyPr>
           <a:lstStyle/>
           <a:p>
-            <a:pPr marL="0" indent="0" algn="l">
+            <a:pPr marL="0" indent="0" algn="ctr">
               <a:buNone/>
             </a:pPr>
             <a:r>
@@ -25424,15 +25392,14 @@
             </a:r>
           </a:p>
           <a:p>
-            <a:pPr marL="274320" indent="-274320" algn="l">
+            <a:pPr marL="0" indent="0" algn="ctr">
               <a:lnSpc>
                 <a:spcPct val="104000"/>
               </a:lnSpc>
               <a:spcBef>
                 <a:spcPts val="300"/>
               </a:spcBef>
-              <a:buFont typeface="Arial"/>
-              <a:buChar char="•"/>
+              <a:buNone/>
             </a:pPr>
             <a:r>
               <a:rPr lang="en-US" sz="1500" dirty="0">
@@ -25446,15 +25413,14 @@
             </a:r>
           </a:p>
           <a:p>
-            <a:pPr marL="274320" indent="-274320" algn="l">
+            <a:pPr marL="0" indent="0" algn="ctr">
               <a:lnSpc>
                 <a:spcPct val="104000"/>
               </a:lnSpc>
               <a:spcBef>
                 <a:spcPts val="300"/>
               </a:spcBef>
-              <a:buFont typeface="Arial"/>
-              <a:buChar char="•"/>
+              <a:buNone/>
             </a:pPr>
             <a:r>
               <a:rPr lang="en-US" sz="1500" dirty="0">
@@ -25468,15 +25434,14 @@
             </a:r>
           </a:p>
           <a:p>
-            <a:pPr marL="274320" indent="-274320" algn="l">
+            <a:pPr marL="0" indent="0" algn="ctr">
               <a:lnSpc>
                 <a:spcPct val="104000"/>
               </a:lnSpc>
               <a:spcBef>
                 <a:spcPts val="300"/>
               </a:spcBef>
-              <a:buFont typeface="Arial"/>
-              <a:buChar char="•"/>
+              <a:buNone/>
             </a:pPr>
             <a:r>
               <a:rPr lang="en-US" sz="1500" dirty="0">
@@ -25490,15 +25455,14 @@
             </a:r>
           </a:p>
           <a:p>
-            <a:pPr marL="274320" indent="-274320" algn="l">
+            <a:pPr marL="0" indent="0" algn="ctr">
               <a:lnSpc>
                 <a:spcPct val="104000"/>
               </a:lnSpc>
               <a:spcBef>
                 <a:spcPts val="300"/>
               </a:spcBef>
-              <a:buFont typeface="Arial"/>
-              <a:buChar char="•"/>
+              <a:buNone/>
             </a:pPr>
             <a:r>
               <a:rPr lang="en-US" sz="1500" dirty="0">
@@ -25512,15 +25476,14 @@
             </a:r>
           </a:p>
           <a:p>
-            <a:pPr marL="274320" indent="-274320" algn="l">
+            <a:pPr marL="0" indent="0" algn="ctr">
               <a:lnSpc>
                 <a:spcPct val="104000"/>
               </a:lnSpc>
               <a:spcBef>
                 <a:spcPts val="300"/>
               </a:spcBef>
-              <a:buFont typeface="Arial"/>
-              <a:buChar char="•"/>
+              <a:buNone/>
             </a:pPr>
             <a:r>
               <a:rPr lang="en-US" sz="1500" dirty="0">
@@ -25534,15 +25497,14 @@
             </a:r>
           </a:p>
           <a:p>
-            <a:pPr marL="274320" indent="-274320" algn="l">
+            <a:pPr marL="0" indent="0" algn="ctr">
               <a:lnSpc>
                 <a:spcPct val="104000"/>
               </a:lnSpc>
               <a:spcBef>
                 <a:spcPts val="300"/>
               </a:spcBef>
-              <a:buFont typeface="Arial"/>
-              <a:buChar char="•"/>
+              <a:buNone/>
             </a:pPr>
             <a:r>
               <a:rPr lang="en-US" sz="1500" dirty="0">
@@ -27141,12 +27103,12 @@
           </a:ln>
         </p:spPr>
         <p:txBody>
-          <a:bodyPr wrap="square" lIns="137160" tIns="91440" rIns="137160" bIns="91440" rtlCol="0" anchor="t">
+          <a:bodyPr wrap="square" lIns="137160" tIns="91440" rIns="137160" bIns="91440" rtlCol="0" anchor="ctr">
             <a:normAutofit/>
           </a:bodyPr>
           <a:lstStyle/>
           <a:p>
-            <a:pPr marL="0" indent="0" algn="l">
+            <a:pPr marL="0" indent="0" algn="ctr">
               <a:buNone/>
             </a:pPr>
             <a:r>
@@ -27161,15 +27123,14 @@
             </a:r>
           </a:p>
           <a:p>
-            <a:pPr marL="274320" indent="-274320" algn="l">
+            <a:pPr marL="0" indent="0" algn="ctr">
               <a:lnSpc>
                 <a:spcPct val="104000"/>
               </a:lnSpc>
               <a:spcBef>
                 <a:spcPts val="300"/>
               </a:spcBef>
-              <a:buFont typeface="Arial"/>
-              <a:buChar char="•"/>
+              <a:buNone/>
             </a:pPr>
             <a:r>
               <a:rPr lang="en-US" sz="1500" dirty="0">
@@ -27183,15 +27144,14 @@
             </a:r>
           </a:p>
           <a:p>
-            <a:pPr marL="274320" indent="-274320" algn="l">
+            <a:pPr marL="0" indent="0" algn="ctr">
               <a:lnSpc>
                 <a:spcPct val="104000"/>
               </a:lnSpc>
               <a:spcBef>
                 <a:spcPts val="300"/>
               </a:spcBef>
-              <a:buFont typeface="Arial"/>
-              <a:buChar char="•"/>
+              <a:buNone/>
             </a:pPr>
             <a:r>
               <a:rPr lang="en-US" sz="1500" dirty="0">
@@ -27205,15 +27165,14 @@
             </a:r>
           </a:p>
           <a:p>
-            <a:pPr marL="274320" indent="-274320" algn="l">
+            <a:pPr marL="0" indent="0" algn="ctr">
               <a:lnSpc>
                 <a:spcPct val="104000"/>
               </a:lnSpc>
               <a:spcBef>
                 <a:spcPts val="300"/>
               </a:spcBef>
-              <a:buFont typeface="Arial"/>
-              <a:buChar char="•"/>
+              <a:buNone/>
             </a:pPr>
             <a:r>
               <a:rPr lang="en-US" sz="1500" dirty="0">
@@ -27227,15 +27186,14 @@
             </a:r>
           </a:p>
           <a:p>
-            <a:pPr marL="274320" indent="-274320" algn="l">
+            <a:pPr marL="0" indent="0" algn="ctr">
               <a:lnSpc>
                 <a:spcPct val="104000"/>
               </a:lnSpc>
               <a:spcBef>
                 <a:spcPts val="300"/>
               </a:spcBef>
-              <a:buFont typeface="Arial"/>
-              <a:buChar char="•"/>
+              <a:buNone/>
             </a:pPr>
             <a:r>
               <a:rPr lang="en-US" sz="1500" dirty="0">
@@ -27568,12 +27526,12 @@
           </a:ln>
         </p:spPr>
         <p:txBody>
-          <a:bodyPr wrap="square" lIns="137160" tIns="91440" rIns="137160" bIns="91440" rtlCol="0" anchor="t">
+          <a:bodyPr wrap="square" lIns="137160" tIns="91440" rIns="137160" bIns="91440" rtlCol="0" anchor="ctr">
             <a:normAutofit/>
           </a:bodyPr>
           <a:lstStyle/>
           <a:p>
-            <a:pPr marL="0" indent="0" algn="l">
+            <a:pPr marL="0" indent="0" algn="ctr">
               <a:lnSpc>
                 <a:spcPct val="104000"/>
               </a:lnSpc>
@@ -27594,7 +27552,7 @@
             </a:r>
           </a:p>
           <a:p>
-            <a:pPr marL="0" indent="0" algn="l">
+            <a:pPr marL="0" indent="0" algn="ctr">
               <a:lnSpc>
                 <a:spcPct val="104000"/>
               </a:lnSpc>
@@ -27615,7 +27573,7 @@
             </a:r>
           </a:p>
           <a:p>
-            <a:pPr marL="0" indent="0" algn="l">
+            <a:pPr marL="0" indent="0" algn="ctr">
               <a:lnSpc>
                 <a:spcPct val="104000"/>
               </a:lnSpc>
@@ -27636,7 +27594,7 @@
             </a:r>
           </a:p>
           <a:p>
-            <a:pPr marL="0" indent="0" algn="l">
+            <a:pPr marL="0" indent="0" algn="ctr">
               <a:lnSpc>
                 <a:spcPct val="104000"/>
               </a:lnSpc>
@@ -27723,12 +27681,12 @@
           </a:ln>
         </p:spPr>
         <p:txBody>
-          <a:bodyPr wrap="square" lIns="137160" tIns="91440" rIns="137160" bIns="91440" rtlCol="0" anchor="t">
+          <a:bodyPr wrap="square" lIns="137160" tIns="91440" rIns="137160" bIns="91440" rtlCol="0" anchor="ctr">
             <a:normAutofit/>
           </a:bodyPr>
           <a:lstStyle/>
           <a:p>
-            <a:pPr marL="0" indent="0" algn="l">
+            <a:pPr marL="0" indent="0" algn="ctr">
               <a:lnSpc>
                 <a:spcPct val="104000"/>
               </a:lnSpc>
@@ -27749,7 +27707,7 @@
             </a:r>
           </a:p>
           <a:p>
-            <a:pPr marL="0" indent="0" algn="l">
+            <a:pPr marL="0" indent="0" algn="ctr">
               <a:lnSpc>
                 <a:spcPct val="104000"/>
               </a:lnSpc>
@@ -27770,7 +27728,7 @@
             </a:r>
           </a:p>
           <a:p>
-            <a:pPr marL="0" indent="0" algn="l">
+            <a:pPr marL="0" indent="0" algn="ctr">
               <a:lnSpc>
                 <a:spcPct val="104000"/>
               </a:lnSpc>
@@ -27791,7 +27749,7 @@
             </a:r>
           </a:p>
           <a:p>
-            <a:pPr marL="0" indent="0" algn="l">
+            <a:pPr marL="0" indent="0" algn="ctr">
               <a:lnSpc>
                 <a:spcPct val="104000"/>
               </a:lnSpc>
@@ -27878,12 +27836,12 @@
           </a:ln>
         </p:spPr>
         <p:txBody>
-          <a:bodyPr wrap="square" lIns="137160" tIns="91440" rIns="137160" bIns="91440" rtlCol="0" anchor="t">
+          <a:bodyPr wrap="square" lIns="137160" tIns="91440" rIns="137160" bIns="91440" rtlCol="0" anchor="ctr">
             <a:normAutofit/>
           </a:bodyPr>
           <a:lstStyle/>
           <a:p>
-            <a:pPr marL="0" indent="0" algn="l">
+            <a:pPr marL="0" indent="0" algn="ctr">
               <a:lnSpc>
                 <a:spcPct val="104000"/>
               </a:lnSpc>
@@ -27904,7 +27862,7 @@
             </a:r>
           </a:p>
           <a:p>
-            <a:pPr marL="0" indent="0" algn="l">
+            <a:pPr marL="0" indent="0" algn="ctr">
               <a:lnSpc>
                 <a:spcPct val="104000"/>
               </a:lnSpc>
@@ -27925,7 +27883,7 @@
             </a:r>
           </a:p>
           <a:p>
-            <a:pPr marL="0" indent="0" algn="l">
+            <a:pPr marL="0" indent="0" algn="ctr">
               <a:lnSpc>
                 <a:spcPct val="104000"/>
               </a:lnSpc>
@@ -28265,12 +28223,12 @@
           </a:ln>
         </p:spPr>
         <p:txBody>
-          <a:bodyPr wrap="square" lIns="110000" tIns="91440" rIns="110000" bIns="91440" rtlCol="0" anchor="t">
+          <a:bodyPr wrap="square" lIns="110000" tIns="91440" rIns="110000" bIns="91440" rtlCol="0" anchor="ctr">
             <a:normAutofit/>
           </a:bodyPr>
           <a:lstStyle/>
           <a:p>
-            <a:pPr marL="0" indent="0" algn="l">
+            <a:pPr marL="0" indent="0" algn="ctr">
               <a:lnSpc>
                 <a:spcPct val="104000"/>
               </a:lnSpc>
@@ -28359,12 +28317,12 @@
           </a:ln>
         </p:spPr>
         <p:txBody>
-          <a:bodyPr wrap="square" lIns="110000" tIns="91440" rIns="110000" bIns="91440" rtlCol="0" anchor="t">
+          <a:bodyPr wrap="square" lIns="110000" tIns="91440" rIns="110000" bIns="91440" rtlCol="0" anchor="ctr">
             <a:normAutofit/>
           </a:bodyPr>
           <a:lstStyle/>
           <a:p>
-            <a:pPr marL="0" indent="0" algn="l">
+            <a:pPr marL="0" indent="0" algn="ctr">
               <a:lnSpc>
                 <a:spcPct val="104000"/>
               </a:lnSpc>
@@ -28453,12 +28411,12 @@
           </a:ln>
         </p:spPr>
         <p:txBody>
-          <a:bodyPr wrap="square" lIns="110000" tIns="91440" rIns="110000" bIns="91440" rtlCol="0" anchor="t">
+          <a:bodyPr wrap="square" lIns="110000" tIns="91440" rIns="110000" bIns="91440" rtlCol="0" anchor="ctr">
             <a:normAutofit/>
           </a:bodyPr>
           <a:lstStyle/>
           <a:p>
-            <a:pPr marL="0" indent="0" algn="l">
+            <a:pPr marL="0" indent="0" algn="ctr">
               <a:lnSpc>
                 <a:spcPct val="104000"/>
               </a:lnSpc>
@@ -28547,12 +28505,12 @@
           </a:ln>
         </p:spPr>
         <p:txBody>
-          <a:bodyPr wrap="square" lIns="110000" tIns="91440" rIns="110000" bIns="91440" rtlCol="0" anchor="t">
+          <a:bodyPr wrap="square" lIns="110000" tIns="91440" rIns="110000" bIns="91440" rtlCol="0" anchor="ctr">
             <a:normAutofit/>
           </a:bodyPr>
           <a:lstStyle/>
           <a:p>
-            <a:pPr marL="0" indent="0" algn="l">
+            <a:pPr marL="0" indent="0" algn="ctr">
               <a:lnSpc>
                 <a:spcPct val="104000"/>
               </a:lnSpc>
@@ -28641,12 +28599,12 @@
           </a:ln>
         </p:spPr>
         <p:txBody>
-          <a:bodyPr wrap="square" lIns="110000" tIns="91440" rIns="110000" bIns="91440" rtlCol="0" anchor="t">
+          <a:bodyPr wrap="square" lIns="110000" tIns="91440" rIns="110000" bIns="91440" rtlCol="0" anchor="ctr">
             <a:normAutofit/>
           </a:bodyPr>
           <a:lstStyle/>
           <a:p>
-            <a:pPr marL="0" indent="0" algn="l">
+            <a:pPr marL="0" indent="0" algn="ctr">
               <a:lnSpc>
                 <a:spcPct val="104000"/>
               </a:lnSpc>
@@ -29023,12 +28981,12 @@
           </a:ln>
         </p:spPr>
         <p:txBody>
-          <a:bodyPr wrap="square" lIns="137160" tIns="91440" rIns="137160" bIns="91440" rtlCol="0" anchor="t">
+          <a:bodyPr wrap="square" lIns="137160" tIns="91440" rIns="137160" bIns="91440" rtlCol="0" anchor="ctr">
             <a:normAutofit/>
           </a:bodyPr>
           <a:lstStyle/>
           <a:p>
-            <a:pPr marL="0" indent="0" algn="l">
+            <a:pPr marL="0" indent="0" algn="ctr">
               <a:lnSpc>
                 <a:spcPct val="104000"/>
               </a:lnSpc>
@@ -29049,7 +29007,7 @@
             </a:r>
           </a:p>
           <a:p>
-            <a:pPr marL="0" indent="0" algn="l">
+            <a:pPr marL="0" indent="0" algn="ctr">
               <a:lnSpc>
                 <a:spcPct val="104000"/>
               </a:lnSpc>
@@ -29070,7 +29028,7 @@
             </a:r>
           </a:p>
           <a:p>
-            <a:pPr marL="0" indent="0" algn="l">
+            <a:pPr marL="0" indent="0" algn="ctr">
               <a:lnSpc>
                 <a:spcPct val="104000"/>
               </a:lnSpc>
@@ -29157,12 +29115,12 @@
           </a:ln>
         </p:spPr>
         <p:txBody>
-          <a:bodyPr wrap="square" lIns="137160" tIns="91440" rIns="137160" bIns="91440" rtlCol="0" anchor="t">
+          <a:bodyPr wrap="square" lIns="137160" tIns="91440" rIns="137160" bIns="91440" rtlCol="0" anchor="ctr">
             <a:normAutofit/>
           </a:bodyPr>
           <a:lstStyle/>
           <a:p>
-            <a:pPr marL="0" indent="0" algn="l">
+            <a:pPr marL="0" indent="0" algn="ctr">
               <a:lnSpc>
                 <a:spcPct val="104000"/>
               </a:lnSpc>
@@ -29183,7 +29141,7 @@
             </a:r>
           </a:p>
           <a:p>
-            <a:pPr marL="0" indent="0" algn="l">
+            <a:pPr marL="0" indent="0" algn="ctr">
               <a:lnSpc>
                 <a:spcPct val="104000"/>
               </a:lnSpc>
@@ -29204,7 +29162,7 @@
             </a:r>
           </a:p>
           <a:p>
-            <a:pPr marL="0" indent="0" algn="l">
+            <a:pPr marL="0" indent="0" algn="ctr">
               <a:lnSpc>
                 <a:spcPct val="104000"/>
               </a:lnSpc>
@@ -29291,12 +29249,12 @@
           </a:ln>
         </p:spPr>
         <p:txBody>
-          <a:bodyPr wrap="square" lIns="137160" tIns="91440" rIns="137160" bIns="91440" rtlCol="0" anchor="t">
+          <a:bodyPr wrap="square" lIns="137160" tIns="91440" rIns="137160" bIns="91440" rtlCol="0" anchor="ctr">
             <a:normAutofit/>
           </a:bodyPr>
           <a:lstStyle/>
           <a:p>
-            <a:pPr marL="0" indent="0" algn="l">
+            <a:pPr marL="0" indent="0" algn="ctr">
               <a:lnSpc>
                 <a:spcPct val="104000"/>
               </a:lnSpc>
@@ -29317,7 +29275,7 @@
             </a:r>
           </a:p>
           <a:p>
-            <a:pPr marL="0" indent="0" algn="l">
+            <a:pPr marL="0" indent="0" algn="ctr">
               <a:lnSpc>
                 <a:spcPct val="104000"/>
               </a:lnSpc>
@@ -29338,7 +29296,7 @@
             </a:r>
           </a:p>
           <a:p>
-            <a:pPr marL="0" indent="0" algn="l">
+            <a:pPr marL="0" indent="0" algn="ctr">
               <a:lnSpc>
                 <a:spcPct val="104000"/>
               </a:lnSpc>
@@ -29951,12 +29909,12 @@
           </a:ln>
         </p:spPr>
         <p:txBody>
-          <a:bodyPr wrap="square" lIns="137160" tIns="91440" rIns="137160" bIns="91440" rtlCol="0" anchor="t">
+          <a:bodyPr wrap="square" lIns="137160" tIns="91440" rIns="137160" bIns="91440" rtlCol="0" anchor="ctr">
             <a:normAutofit/>
           </a:bodyPr>
           <a:lstStyle/>
           <a:p>
-            <a:pPr marL="0" indent="0" algn="l">
+            <a:pPr marL="0" indent="0" algn="ctr">
               <a:lnSpc>
                 <a:spcPct val="104000"/>
               </a:lnSpc>
@@ -29977,7 +29935,7 @@
             </a:r>
           </a:p>
           <a:p>
-            <a:pPr marL="0" indent="0" algn="l">
+            <a:pPr marL="0" indent="0" algn="ctr">
               <a:lnSpc>
                 <a:spcPct val="104000"/>
               </a:lnSpc>
@@ -30064,12 +30022,12 @@
           </a:ln>
         </p:spPr>
         <p:txBody>
-          <a:bodyPr wrap="square" lIns="137160" tIns="91440" rIns="137160" bIns="91440" rtlCol="0" anchor="t">
+          <a:bodyPr wrap="square" lIns="137160" tIns="91440" rIns="137160" bIns="91440" rtlCol="0" anchor="ctr">
             <a:normAutofit/>
           </a:bodyPr>
           <a:lstStyle/>
           <a:p>
-            <a:pPr marL="0" indent="0" algn="l">
+            <a:pPr marL="0" indent="0" algn="ctr">
               <a:lnSpc>
                 <a:spcPct val="104000"/>
               </a:lnSpc>
@@ -30090,7 +30048,7 @@
             </a:r>
           </a:p>
           <a:p>
-            <a:pPr marL="0" indent="0" algn="l">
+            <a:pPr marL="0" indent="0" algn="ctr">
               <a:lnSpc>
                 <a:spcPct val="104000"/>
               </a:lnSpc>
@@ -30111,7 +30069,7 @@
             </a:r>
           </a:p>
           <a:p>
-            <a:pPr marL="0" indent="0" algn="l">
+            <a:pPr marL="0" indent="0" algn="ctr">
               <a:lnSpc>
                 <a:spcPct val="104000"/>
               </a:lnSpc>
@@ -30198,12 +30156,12 @@
           </a:ln>
         </p:spPr>
         <p:txBody>
-          <a:bodyPr wrap="square" lIns="137160" tIns="91440" rIns="137160" bIns="91440" rtlCol="0" anchor="t">
+          <a:bodyPr wrap="square" lIns="137160" tIns="91440" rIns="137160" bIns="91440" rtlCol="0" anchor="ctr">
             <a:normAutofit/>
           </a:bodyPr>
           <a:lstStyle/>
           <a:p>
-            <a:pPr marL="0" indent="0" algn="l">
+            <a:pPr marL="0" indent="0" algn="ctr">
               <a:lnSpc>
                 <a:spcPct val="104000"/>
               </a:lnSpc>
@@ -30224,7 +30182,7 @@
             </a:r>
           </a:p>
           <a:p>
-            <a:pPr marL="0" indent="0" algn="l">
+            <a:pPr marL="0" indent="0" algn="ctr">
               <a:lnSpc>
                 <a:spcPct val="104000"/>
               </a:lnSpc>
@@ -30245,7 +30203,7 @@
             </a:r>
           </a:p>
           <a:p>
-            <a:pPr marL="0" indent="0" algn="l">
+            <a:pPr marL="0" indent="0" algn="ctr">
               <a:lnSpc>
                 <a:spcPct val="104000"/>
               </a:lnSpc>
@@ -30332,12 +30290,12 @@
           </a:ln>
         </p:spPr>
         <p:txBody>
-          <a:bodyPr wrap="square" lIns="137160" tIns="91440" rIns="137160" bIns="91440" rtlCol="0" anchor="t">
+          <a:bodyPr wrap="square" lIns="137160" tIns="91440" rIns="137160" bIns="91440" rtlCol="0" anchor="ctr">
             <a:normAutofit/>
           </a:bodyPr>
           <a:lstStyle/>
           <a:p>
-            <a:pPr marL="0" indent="0" algn="l">
+            <a:pPr marL="0" indent="0" algn="ctr">
               <a:lnSpc>
                 <a:spcPct val="104000"/>
               </a:lnSpc>
@@ -30358,7 +30316,7 @@
             </a:r>
           </a:p>
           <a:p>
-            <a:pPr marL="0" indent="0" algn="l">
+            <a:pPr marL="0" indent="0" algn="ctr">
               <a:lnSpc>
                 <a:spcPct val="104000"/>
               </a:lnSpc>
@@ -31055,7 +31013,7 @@
                 <a:latin typeface="Arial"/>
                 <a:cs typeface="Arial"/>
               </a:rPr>
-              <a:t>The same 24 questions as in Session 1, in an online form (link in the chat)</a:t>
+              <a:t>Open the form: the link is in the chat</a:t>
             </a:r>
           </a:p>
           <a:p>
@@ -31080,7 +31038,7 @@
                 <a:latin typeface="Arial"/>
                 <a:cs typeface="Arial"/>
               </a:rPr>
-              <a:t>Individual, no discussion</a:t>
+              <a:t>Enter your full name, as in Session 1</a:t>
             </a:r>
           </a:p>
           <a:p>
@@ -31105,7 +31063,7 @@
                 <a:latin typeface="Arial"/>
                 <a:cs typeface="Arial"/>
               </a:rPr>
-              <a:t>Use the same participant code as in Session 1</a:t>
+              <a:t>The same 24 questions as in Session 1</a:t>
             </a:r>
           </a:p>
           <a:p>
@@ -31130,7 +31088,7 @@
                 <a:latin typeface="Arial"/>
                 <a:cs typeface="Arial"/>
               </a:rPr>
-              <a:t>The answer key is shared after the course</a:t>
+              <a:t>Work alone. The answers are shared after the course</a:t>
             </a:r>
           </a:p>
         </p:txBody>
@@ -31187,7 +31145,7 @@
                 <a:latin typeface="Arial"/>
                 <a:cs typeface="Arial"/>
               </a:rPr>
-              <a:t>Quiz submitted (participant code only)</a:t>
+              <a:t>Form submitted</a:t>
             </a:r>
           </a:p>
         </p:txBody>
@@ -31455,12 +31413,12 @@
           </a:ln>
         </p:spPr>
         <p:txBody>
-          <a:bodyPr wrap="square" lIns="110000" tIns="91440" rIns="110000" bIns="91440" rtlCol="0" anchor="t">
+          <a:bodyPr wrap="square" lIns="110000" tIns="91440" rIns="110000" bIns="91440" rtlCol="0" anchor="ctr">
             <a:normAutofit/>
           </a:bodyPr>
           <a:lstStyle/>
           <a:p>
-            <a:pPr marL="0" indent="0" algn="l">
+            <a:pPr marL="0" indent="0" algn="ctr">
               <a:lnSpc>
                 <a:spcPct val="104000"/>
               </a:lnSpc>
@@ -31481,7 +31439,7 @@
             </a:r>
           </a:p>
           <a:p>
-            <a:pPr marL="0" indent="0" algn="l">
+            <a:pPr marL="0" indent="0" algn="ctr">
               <a:lnSpc>
                 <a:spcPct val="104000"/>
               </a:lnSpc>
@@ -31502,7 +31460,7 @@
             </a:r>
           </a:p>
           <a:p>
-            <a:pPr marL="0" indent="0" algn="l">
+            <a:pPr marL="0" indent="0" algn="ctr">
               <a:lnSpc>
                 <a:spcPct val="104000"/>
               </a:lnSpc>
@@ -31591,12 +31549,12 @@
           </a:ln>
         </p:spPr>
         <p:txBody>
-          <a:bodyPr wrap="square" lIns="110000" tIns="91440" rIns="110000" bIns="91440" rtlCol="0" anchor="t">
+          <a:bodyPr wrap="square" lIns="110000" tIns="91440" rIns="110000" bIns="91440" rtlCol="0" anchor="ctr">
             <a:normAutofit/>
           </a:bodyPr>
           <a:lstStyle/>
           <a:p>
-            <a:pPr marL="0" indent="0" algn="l">
+            <a:pPr marL="0" indent="0" algn="ctr">
               <a:lnSpc>
                 <a:spcPct val="104000"/>
               </a:lnSpc>
@@ -31617,7 +31575,7 @@
             </a:r>
           </a:p>
           <a:p>
-            <a:pPr marL="0" indent="0" algn="l">
+            <a:pPr marL="0" indent="0" algn="ctr">
               <a:lnSpc>
                 <a:spcPct val="104000"/>
               </a:lnSpc>
@@ -31638,7 +31596,7 @@
             </a:r>
           </a:p>
           <a:p>
-            <a:pPr marL="0" indent="0" algn="l">
+            <a:pPr marL="0" indent="0" algn="ctr">
               <a:lnSpc>
                 <a:spcPct val="104000"/>
               </a:lnSpc>
@@ -31727,12 +31685,12 @@
           </a:ln>
         </p:spPr>
         <p:txBody>
-          <a:bodyPr wrap="square" lIns="110000" tIns="91440" rIns="110000" bIns="91440" rtlCol="0" anchor="t">
+          <a:bodyPr wrap="square" lIns="110000" tIns="91440" rIns="110000" bIns="91440" rtlCol="0" anchor="ctr">
             <a:normAutofit/>
           </a:bodyPr>
           <a:lstStyle/>
           <a:p>
-            <a:pPr marL="0" indent="0" algn="l">
+            <a:pPr marL="0" indent="0" algn="ctr">
               <a:lnSpc>
                 <a:spcPct val="104000"/>
               </a:lnSpc>
@@ -31753,7 +31711,7 @@
             </a:r>
           </a:p>
           <a:p>
-            <a:pPr marL="0" indent="0" algn="l">
+            <a:pPr marL="0" indent="0" algn="ctr">
               <a:lnSpc>
                 <a:spcPct val="104000"/>
               </a:lnSpc>
@@ -31842,12 +31800,12 @@
           </a:ln>
         </p:spPr>
         <p:txBody>
-          <a:bodyPr wrap="square" lIns="110000" tIns="91440" rIns="110000" bIns="91440" rtlCol="0" anchor="t">
+          <a:bodyPr wrap="square" lIns="110000" tIns="91440" rIns="110000" bIns="91440" rtlCol="0" anchor="ctr">
             <a:normAutofit/>
           </a:bodyPr>
           <a:lstStyle/>
           <a:p>
-            <a:pPr marL="0" indent="0" algn="l">
+            <a:pPr marL="0" indent="0" algn="ctr">
               <a:lnSpc>
                 <a:spcPct val="104000"/>
               </a:lnSpc>
@@ -31868,7 +31826,7 @@
             </a:r>
           </a:p>
           <a:p>
-            <a:pPr marL="0" indent="0" algn="l">
+            <a:pPr marL="0" indent="0" algn="ctr">
               <a:lnSpc>
                 <a:spcPct val="104000"/>
               </a:lnSpc>
@@ -31957,12 +31915,12 @@
           </a:ln>
         </p:spPr>
         <p:txBody>
-          <a:bodyPr wrap="square" lIns="110000" tIns="91440" rIns="110000" bIns="91440" rtlCol="0" anchor="t">
+          <a:bodyPr wrap="square" lIns="110000" tIns="91440" rIns="110000" bIns="91440" rtlCol="0" anchor="ctr">
             <a:normAutofit/>
           </a:bodyPr>
           <a:lstStyle/>
           <a:p>
-            <a:pPr marL="0" indent="0" algn="l">
+            <a:pPr marL="0" indent="0" algn="ctr">
               <a:lnSpc>
                 <a:spcPct val="104000"/>
               </a:lnSpc>
@@ -31983,7 +31941,7 @@
             </a:r>
           </a:p>
           <a:p>
-            <a:pPr marL="0" indent="0" algn="l">
+            <a:pPr marL="0" indent="0" algn="ctr">
               <a:lnSpc>
                 <a:spcPct val="104000"/>
               </a:lnSpc>
@@ -32716,12 +32674,12 @@
           </a:ln>
         </p:spPr>
         <p:txBody>
-          <a:bodyPr wrap="square" lIns="137160" tIns="91440" rIns="137160" bIns="91440" rtlCol="0" anchor="t">
+          <a:bodyPr wrap="square" lIns="137160" tIns="91440" rIns="137160" bIns="91440" rtlCol="0" anchor="ctr">
             <a:normAutofit/>
           </a:bodyPr>
           <a:lstStyle/>
           <a:p>
-            <a:pPr marL="0" indent="0" algn="l">
+            <a:pPr marL="0" indent="0" algn="ctr">
               <a:lnSpc>
                 <a:spcPct val="104000"/>
               </a:lnSpc>
@@ -32742,7 +32700,7 @@
             </a:r>
           </a:p>
           <a:p>
-            <a:pPr marL="0" indent="0" algn="l">
+            <a:pPr marL="0" indent="0" algn="ctr">
               <a:lnSpc>
                 <a:spcPct val="104000"/>
               </a:lnSpc>
@@ -32829,12 +32787,12 @@
           </a:ln>
         </p:spPr>
         <p:txBody>
-          <a:bodyPr wrap="square" lIns="137160" tIns="91440" rIns="137160" bIns="91440" rtlCol="0" anchor="t">
+          <a:bodyPr wrap="square" lIns="137160" tIns="91440" rIns="137160" bIns="91440" rtlCol="0" anchor="ctr">
             <a:normAutofit/>
           </a:bodyPr>
           <a:lstStyle/>
           <a:p>
-            <a:pPr marL="0" indent="0" algn="l">
+            <a:pPr marL="0" indent="0" algn="ctr">
               <a:lnSpc>
                 <a:spcPct val="104000"/>
               </a:lnSpc>
@@ -32855,7 +32813,7 @@
             </a:r>
           </a:p>
           <a:p>
-            <a:pPr marL="0" indent="0" algn="l">
+            <a:pPr marL="0" indent="0" algn="ctr">
               <a:lnSpc>
                 <a:spcPct val="104000"/>
               </a:lnSpc>
@@ -32942,12 +32900,12 @@
           </a:ln>
         </p:spPr>
         <p:txBody>
-          <a:bodyPr wrap="square" lIns="137160" tIns="91440" rIns="137160" bIns="91440" rtlCol="0" anchor="t">
+          <a:bodyPr wrap="square" lIns="137160" tIns="91440" rIns="137160" bIns="91440" rtlCol="0" anchor="ctr">
             <a:normAutofit/>
           </a:bodyPr>
           <a:lstStyle/>
           <a:p>
-            <a:pPr marL="0" indent="0" algn="l">
+            <a:pPr marL="0" indent="0" algn="ctr">
               <a:lnSpc>
                 <a:spcPct val="104000"/>
               </a:lnSpc>
@@ -33287,12 +33245,12 @@
           </a:ln>
         </p:spPr>
         <p:txBody>
-          <a:bodyPr wrap="square" lIns="110000" tIns="91440" rIns="110000" bIns="91440" rtlCol="0" anchor="t">
+          <a:bodyPr wrap="square" lIns="110000" tIns="91440" rIns="110000" bIns="91440" rtlCol="0" anchor="ctr">
             <a:normAutofit/>
           </a:bodyPr>
           <a:lstStyle/>
           <a:p>
-            <a:pPr marL="0" indent="0" algn="l">
+            <a:pPr marL="0" indent="0" algn="ctr">
               <a:lnSpc>
                 <a:spcPct val="104000"/>
               </a:lnSpc>
@@ -33313,7 +33271,7 @@
             </a:r>
           </a:p>
           <a:p>
-            <a:pPr marL="0" indent="0" algn="l">
+            <a:pPr marL="0" indent="0" algn="ctr">
               <a:lnSpc>
                 <a:spcPct val="104000"/>
               </a:lnSpc>
@@ -33402,12 +33360,12 @@
           </a:ln>
         </p:spPr>
         <p:txBody>
-          <a:bodyPr wrap="square" lIns="110000" tIns="91440" rIns="110000" bIns="91440" rtlCol="0" anchor="t">
+          <a:bodyPr wrap="square" lIns="110000" tIns="91440" rIns="110000" bIns="91440" rtlCol="0" anchor="ctr">
             <a:normAutofit/>
           </a:bodyPr>
           <a:lstStyle/>
           <a:p>
-            <a:pPr marL="0" indent="0" algn="l">
+            <a:pPr marL="0" indent="0" algn="ctr">
               <a:lnSpc>
                 <a:spcPct val="104000"/>
               </a:lnSpc>
@@ -33496,12 +33454,12 @@
           </a:ln>
         </p:spPr>
         <p:txBody>
-          <a:bodyPr wrap="square" lIns="110000" tIns="91440" rIns="110000" bIns="91440" rtlCol="0" anchor="t">
+          <a:bodyPr wrap="square" lIns="110000" tIns="91440" rIns="110000" bIns="91440" rtlCol="0" anchor="ctr">
             <a:normAutofit/>
           </a:bodyPr>
           <a:lstStyle/>
           <a:p>
-            <a:pPr marL="0" indent="0" algn="l">
+            <a:pPr marL="0" indent="0" algn="ctr">
               <a:lnSpc>
                 <a:spcPct val="104000"/>
               </a:lnSpc>
@@ -33522,7 +33480,7 @@
             </a:r>
           </a:p>
           <a:p>
-            <a:pPr marL="0" indent="0" algn="l">
+            <a:pPr marL="0" indent="0" algn="ctr">
               <a:lnSpc>
                 <a:spcPct val="104000"/>
               </a:lnSpc>
@@ -33611,12 +33569,12 @@
           </a:ln>
         </p:spPr>
         <p:txBody>
-          <a:bodyPr wrap="square" lIns="110000" tIns="91440" rIns="110000" bIns="91440" rtlCol="0" anchor="t">
+          <a:bodyPr wrap="square" lIns="110000" tIns="91440" rIns="110000" bIns="91440" rtlCol="0" anchor="ctr">
             <a:normAutofit/>
           </a:bodyPr>
           <a:lstStyle/>
           <a:p>
-            <a:pPr marL="0" indent="0" algn="l">
+            <a:pPr marL="0" indent="0" algn="ctr">
               <a:lnSpc>
                 <a:spcPct val="104000"/>
               </a:lnSpc>
@@ -33637,7 +33595,7 @@
             </a:r>
           </a:p>
           <a:p>
-            <a:pPr marL="0" indent="0" algn="l">
+            <a:pPr marL="0" indent="0" algn="ctr">
               <a:lnSpc>
                 <a:spcPct val="104000"/>
               </a:lnSpc>
@@ -33709,7 +33667,7 @@
                 <a:latin typeface="Arial"/>
                 <a:cs typeface="Arial"/>
               </a:rPr>
-              <a:t>Individual homework: everyone reviews one draft and receives one review (Course/Assignment/peer_review_instructions).</a:t>
+              <a:t>Individual homework: everyone reviews one draft and receives one review.</a:t>
             </a:r>
           </a:p>
         </p:txBody>
@@ -33918,7 +33876,7 @@
         </p:nvSpPr>
         <p:spPr>
           <a:xfrm>
-            <a:off x="457200" y="1865948"/>
+            <a:off x="457200" y="1958552"/>
             <a:ext cx="3625866" cy="640000"/>
           </a:xfrm>
           <a:prstGeom prst="rect">
@@ -33961,8 +33919,8 @@
         </p:nvSpPr>
         <p:spPr>
           <a:xfrm>
-            <a:off x="457200" y="2505948"/>
-            <a:ext cx="3625866" cy="2152154"/>
+            <a:off x="457200" y="2598552"/>
+            <a:ext cx="3625866" cy="1874342"/>
           </a:xfrm>
           <a:prstGeom prst="rect">
             <a:avLst/>
@@ -33975,12 +33933,12 @@
           </a:ln>
         </p:spPr>
         <p:txBody>
-          <a:bodyPr wrap="square" lIns="137160" tIns="91440" rIns="137160" bIns="91440" rtlCol="0" anchor="t">
+          <a:bodyPr wrap="square" lIns="137160" tIns="91440" rIns="137160" bIns="91440" rtlCol="0" anchor="ctr">
             <a:normAutofit/>
           </a:bodyPr>
           <a:lstStyle/>
           <a:p>
-            <a:pPr marL="0" indent="0" algn="l">
+            <a:pPr marL="0" indent="0" algn="ctr">
               <a:lnSpc>
                 <a:spcPct val="104000"/>
               </a:lnSpc>
@@ -34001,7 +33959,7 @@
             </a:r>
           </a:p>
           <a:p>
-            <a:pPr marL="0" indent="0" algn="l">
+            <a:pPr marL="0" indent="0" algn="ctr">
               <a:lnSpc>
                 <a:spcPct val="104000"/>
               </a:lnSpc>
@@ -34022,7 +33980,7 @@
             </a:r>
           </a:p>
           <a:p>
-            <a:pPr marL="0" indent="0" algn="l">
+            <a:pPr marL="0" indent="0" algn="ctr">
               <a:lnSpc>
                 <a:spcPct val="104000"/>
               </a:lnSpc>
@@ -34052,7 +34010,7 @@
         </p:nvSpPr>
         <p:spPr>
           <a:xfrm>
-            <a:off x="4283066" y="1865948"/>
+            <a:off x="4283066" y="1958552"/>
             <a:ext cx="3625866" cy="640000"/>
           </a:xfrm>
           <a:prstGeom prst="rect">
@@ -34095,8 +34053,8 @@
         </p:nvSpPr>
         <p:spPr>
           <a:xfrm>
-            <a:off x="4283066" y="2505948"/>
-            <a:ext cx="3625866" cy="2152154"/>
+            <a:off x="4283066" y="2598552"/>
+            <a:ext cx="3625866" cy="1874342"/>
           </a:xfrm>
           <a:prstGeom prst="rect">
             <a:avLst/>
@@ -34109,12 +34067,12 @@
           </a:ln>
         </p:spPr>
         <p:txBody>
-          <a:bodyPr wrap="square" lIns="137160" tIns="91440" rIns="137160" bIns="91440" rtlCol="0" anchor="t">
+          <a:bodyPr wrap="square" lIns="137160" tIns="91440" rIns="137160" bIns="91440" rtlCol="0" anchor="ctr">
             <a:normAutofit/>
           </a:bodyPr>
           <a:lstStyle/>
           <a:p>
-            <a:pPr marL="0" indent="0" algn="l">
+            <a:pPr marL="0" indent="0" algn="ctr">
               <a:lnSpc>
                 <a:spcPct val="104000"/>
               </a:lnSpc>
@@ -34135,7 +34093,7 @@
             </a:r>
           </a:p>
           <a:p>
-            <a:pPr marL="0" indent="0" algn="l">
+            <a:pPr marL="0" indent="0" algn="ctr">
               <a:lnSpc>
                 <a:spcPct val="104000"/>
               </a:lnSpc>
@@ -34152,11 +34110,82 @@
                 <a:latin typeface="Arial"/>
                 <a:cs typeface="Arial"/>
               </a:rPr>
-              <a:t>Templates: proposal, protocol, consent form, case report form (CRF), analysis plan</a:t>
-            </a:r>
-          </a:p>
-          <a:p>
-            <a:pPr marL="0" indent="0" algn="l">
+              <a:t>Templates for every step, from proposal to response to reviewers</a:t>
+            </a:r>
+          </a:p>
+        </p:txBody>
+      </p:sp>
+      <p:sp>
+        <p:nvSpPr>
+          <p:cNvPr id="74" name="CardHead"/>
+          <p:cNvSpPr/>
+          <p:nvPr/>
+        </p:nvSpPr>
+        <p:spPr>
+          <a:xfrm>
+            <a:off x="8108932" y="1958552"/>
+            <a:ext cx="3625866" cy="640000"/>
+          </a:xfrm>
+          <a:prstGeom prst="rect">
+            <a:avLst/>
+          </a:prstGeom>
+          <a:solidFill>
+            <a:srgbClr val="5FA39B"/>
+          </a:solidFill>
+          <a:ln>
+            <a:noFill/>
+          </a:ln>
+        </p:spPr>
+        <p:txBody>
+          <a:bodyPr wrap="square" lIns="91440" tIns="45720" rIns="91440" bIns="45720" rtlCol="0" anchor="ctr">
+            <a:normAutofit/>
+          </a:bodyPr>
+          <a:lstStyle/>
+          <a:p>
+            <a:pPr marL="0" indent="0" algn="ctr">
+              <a:buNone/>
+            </a:pPr>
+            <a:r>
+              <a:rPr lang="en-US" sz="1900" b="1" dirty="0">
+                <a:solidFill>
+                  <a:srgbClr val="FFFFFF"/>
+                </a:solidFill>
+                <a:latin typeface="Arial"/>
+                <a:cs typeface="Arial"/>
+              </a:rPr>
+              <a:t>Keep going</a:t>
+            </a:r>
+          </a:p>
+        </p:txBody>
+      </p:sp>
+      <p:sp>
+        <p:nvSpPr>
+          <p:cNvPr id="75" name="CardBody"/>
+          <p:cNvSpPr/>
+          <p:nvPr/>
+        </p:nvSpPr>
+        <p:spPr>
+          <a:xfrm>
+            <a:off x="8108932" y="2598552"/>
+            <a:ext cx="3625866" cy="1874342"/>
+          </a:xfrm>
+          <a:prstGeom prst="rect">
+            <a:avLst/>
+          </a:prstGeom>
+          <a:solidFill>
+            <a:srgbClr val="EAF2F5"/>
+          </a:solidFill>
+          <a:ln>
+            <a:noFill/>
+          </a:ln>
+        </p:spPr>
+        <p:txBody>
+          <a:bodyPr wrap="square" lIns="137160" tIns="91440" rIns="137160" bIns="91440" rtlCol="0" anchor="ctr">
+            <a:normAutofit/>
+          </a:bodyPr>
+          <a:lstStyle/>
+          <a:p>
+            <a:pPr marL="0" indent="0" algn="ctr">
               <a:lnSpc>
                 <a:spcPct val="104000"/>
               </a:lnSpc>
@@ -34173,82 +34202,11 @@
                 <a:latin typeface="Arial"/>
                 <a:cs typeface="Arial"/>
               </a:rPr>
-              <a:t>Templates: manuscript, response to reviewers</a:t>
-            </a:r>
-          </a:p>
-        </p:txBody>
-      </p:sp>
-      <p:sp>
-        <p:nvSpPr>
-          <p:cNvPr id="74" name="CardHead"/>
-          <p:cNvSpPr/>
-          <p:nvPr/>
-        </p:nvSpPr>
-        <p:spPr>
-          <a:xfrm>
-            <a:off x="8108932" y="1865948"/>
-            <a:ext cx="3625866" cy="640000"/>
-          </a:xfrm>
-          <a:prstGeom prst="rect">
-            <a:avLst/>
-          </a:prstGeom>
-          <a:solidFill>
-            <a:srgbClr val="5FA39B"/>
-          </a:solidFill>
-          <a:ln>
-            <a:noFill/>
-          </a:ln>
-        </p:spPr>
-        <p:txBody>
-          <a:bodyPr wrap="square" lIns="91440" tIns="45720" rIns="91440" bIns="45720" rtlCol="0" anchor="ctr">
-            <a:normAutofit/>
-          </a:bodyPr>
-          <a:lstStyle/>
+              <a:t>Take your proposal to the ethics committee</a:t>
+            </a:r>
+          </a:p>
           <a:p>
             <a:pPr marL="0" indent="0" algn="ctr">
-              <a:buNone/>
-            </a:pPr>
-            <a:r>
-              <a:rPr lang="en-US" sz="1900" b="1" dirty="0">
-                <a:solidFill>
-                  <a:srgbClr val="FFFFFF"/>
-                </a:solidFill>
-                <a:latin typeface="Arial"/>
-                <a:cs typeface="Arial"/>
-              </a:rPr>
-              <a:t>Keep going</a:t>
-            </a:r>
-          </a:p>
-        </p:txBody>
-      </p:sp>
-      <p:sp>
-        <p:nvSpPr>
-          <p:cNvPr id="75" name="CardBody"/>
-          <p:cNvSpPr/>
-          <p:nvPr/>
-        </p:nvSpPr>
-        <p:spPr>
-          <a:xfrm>
-            <a:off x="8108932" y="2505948"/>
-            <a:ext cx="3625866" cy="2152154"/>
-          </a:xfrm>
-          <a:prstGeom prst="rect">
-            <a:avLst/>
-          </a:prstGeom>
-          <a:solidFill>
-            <a:srgbClr val="EAF2F5"/>
-          </a:solidFill>
-          <a:ln>
-            <a:noFill/>
-          </a:ln>
-        </p:spPr>
-        <p:txBody>
-          <a:bodyPr wrap="square" lIns="137160" tIns="91440" rIns="137160" bIns="91440" rtlCol="0" anchor="t">
-            <a:normAutofit/>
-          </a:bodyPr>
-          <a:lstStyle/>
-          <a:p>
-            <a:pPr marL="0" indent="0" algn="l">
               <a:lnSpc>
                 <a:spcPct val="104000"/>
               </a:lnSpc>
@@ -34265,32 +34223,11 @@
                 <a:latin typeface="Arial"/>
                 <a:cs typeface="Arial"/>
               </a:rPr>
-              <a:t>Take your proposal to the ethics committee</a:t>
-            </a:r>
-          </a:p>
-          <a:p>
-            <a:pPr marL="0" indent="0" algn="l">
-              <a:lnSpc>
-                <a:spcPct val="104000"/>
-              </a:lnSpc>
-              <a:spcBef>
-                <a:spcPts val="400"/>
-              </a:spcBef>
-              <a:buNone/>
-            </a:pPr>
-            <a:r>
-              <a:rPr lang="en-US" sz="1750" dirty="0">
-                <a:solidFill>
-                  <a:srgbClr val="000000"/>
-                </a:solidFill>
-                <a:latin typeface="Arial"/>
-                <a:cs typeface="Arial"/>
-              </a:rPr>
               <a:t>Level 2: statistical modelling in R</a:t>
             </a:r>
           </a:p>
           <a:p>
-            <a:pPr marL="0" indent="0" algn="l">
+            <a:pPr marL="0" indent="0" algn="ctr">
               <a:lnSpc>
                 <a:spcPct val="104000"/>
               </a:lnSpc>
@@ -35040,12 +34977,12 @@
           </a:ln>
         </p:spPr>
         <p:txBody>
-          <a:bodyPr wrap="square" lIns="110000" tIns="91440" rIns="110000" bIns="91440" rtlCol="0" anchor="t">
+          <a:bodyPr wrap="square" lIns="110000" tIns="91440" rIns="110000" bIns="91440" rtlCol="0" anchor="ctr">
             <a:normAutofit/>
           </a:bodyPr>
           <a:lstStyle/>
           <a:p>
-            <a:pPr marL="0" indent="0" algn="l">
+            <a:pPr marL="0" indent="0" algn="ctr">
               <a:lnSpc>
                 <a:spcPct val="104000"/>
               </a:lnSpc>
@@ -35066,7 +35003,7 @@
             </a:r>
           </a:p>
           <a:p>
-            <a:pPr marL="0" indent="0" algn="l">
+            <a:pPr marL="0" indent="0" algn="ctr">
               <a:lnSpc>
                 <a:spcPct val="104000"/>
               </a:lnSpc>
@@ -35155,12 +35092,12 @@
           </a:ln>
         </p:spPr>
         <p:txBody>
-          <a:bodyPr wrap="square" lIns="110000" tIns="91440" rIns="110000" bIns="91440" rtlCol="0" anchor="t">
+          <a:bodyPr wrap="square" lIns="110000" tIns="91440" rIns="110000" bIns="91440" rtlCol="0" anchor="ctr">
             <a:normAutofit/>
           </a:bodyPr>
           <a:lstStyle/>
           <a:p>
-            <a:pPr marL="0" indent="0" algn="l">
+            <a:pPr marL="0" indent="0" algn="ctr">
               <a:lnSpc>
                 <a:spcPct val="104000"/>
               </a:lnSpc>
@@ -35181,7 +35118,7 @@
             </a:r>
           </a:p>
           <a:p>
-            <a:pPr marL="0" indent="0" algn="l">
+            <a:pPr marL="0" indent="0" algn="ctr">
               <a:lnSpc>
                 <a:spcPct val="104000"/>
               </a:lnSpc>
@@ -35270,12 +35207,12 @@
           </a:ln>
         </p:spPr>
         <p:txBody>
-          <a:bodyPr wrap="square" lIns="110000" tIns="91440" rIns="110000" bIns="91440" rtlCol="0" anchor="t">
+          <a:bodyPr wrap="square" lIns="110000" tIns="91440" rIns="110000" bIns="91440" rtlCol="0" anchor="ctr">
             <a:normAutofit/>
           </a:bodyPr>
           <a:lstStyle/>
           <a:p>
-            <a:pPr marL="0" indent="0" algn="l">
+            <a:pPr marL="0" indent="0" algn="ctr">
               <a:lnSpc>
                 <a:spcPct val="104000"/>
               </a:lnSpc>
@@ -35296,7 +35233,7 @@
             </a:r>
           </a:p>
           <a:p>
-            <a:pPr marL="0" indent="0" algn="l">
+            <a:pPr marL="0" indent="0" algn="ctr">
               <a:lnSpc>
                 <a:spcPct val="104000"/>
               </a:lnSpc>
@@ -35385,12 +35322,12 @@
           </a:ln>
         </p:spPr>
         <p:txBody>
-          <a:bodyPr wrap="square" lIns="110000" tIns="91440" rIns="110000" bIns="91440" rtlCol="0" anchor="t">
+          <a:bodyPr wrap="square" lIns="110000" tIns="91440" rIns="110000" bIns="91440" rtlCol="0" anchor="ctr">
             <a:normAutofit/>
           </a:bodyPr>
           <a:lstStyle/>
           <a:p>
-            <a:pPr marL="0" indent="0" algn="l">
+            <a:pPr marL="0" indent="0" algn="ctr">
               <a:lnSpc>
                 <a:spcPct val="104000"/>
               </a:lnSpc>
@@ -35411,7 +35348,7 @@
             </a:r>
           </a:p>
           <a:p>
-            <a:pPr marL="0" indent="0" algn="l">
+            <a:pPr marL="0" indent="0" algn="ctr">
               <a:lnSpc>
                 <a:spcPct val="104000"/>
               </a:lnSpc>
@@ -35500,12 +35437,12 @@
           </a:ln>
         </p:spPr>
         <p:txBody>
-          <a:bodyPr wrap="square" lIns="110000" tIns="91440" rIns="110000" bIns="91440" rtlCol="0" anchor="t">
+          <a:bodyPr wrap="square" lIns="110000" tIns="91440" rIns="110000" bIns="91440" rtlCol="0" anchor="ctr">
             <a:normAutofit/>
           </a:bodyPr>
           <a:lstStyle/>
           <a:p>
-            <a:pPr marL="0" indent="0" algn="l">
+            <a:pPr marL="0" indent="0" algn="ctr">
               <a:lnSpc>
                 <a:spcPct val="104000"/>
               </a:lnSpc>
@@ -35526,7 +35463,7 @@
             </a:r>
           </a:p>
           <a:p>
-            <a:pPr marL="0" indent="0" algn="l">
+            <a:pPr marL="0" indent="0" algn="ctr">
               <a:lnSpc>
                 <a:spcPct val="104000"/>
               </a:lnSpc>
@@ -35615,12 +35552,12 @@
           </a:ln>
         </p:spPr>
         <p:txBody>
-          <a:bodyPr wrap="square" lIns="110000" tIns="91440" rIns="110000" bIns="91440" rtlCol="0" anchor="t">
+          <a:bodyPr wrap="square" lIns="110000" tIns="91440" rIns="110000" bIns="91440" rtlCol="0" anchor="ctr">
             <a:normAutofit/>
           </a:bodyPr>
           <a:lstStyle/>
           <a:p>
-            <a:pPr marL="0" indent="0" algn="l">
+            <a:pPr marL="0" indent="0" algn="ctr">
               <a:lnSpc>
                 <a:spcPct val="104000"/>
               </a:lnSpc>

--- a/en/files/slides/Session_8_EN.pptx
+++ b/en/files/slides/Session_8_EN.pptx
@@ -26436,7 +26436,7 @@
                 <a:latin typeface="Arial"/>
                 <a:cs typeface="Arial"/>
               </a:rPr>
-              <a:t>Full glossary (English-Vietnamese): Course/References/glossary_EN_VN (PDF in the course folder)</a:t>
+              <a:t>Full glossary (English-Vietnamese): the PDF sent by email</a:t>
             </a:r>
           </a:p>
         </p:txBody>

--- a/en/files/slides/Session_8_EN.pptx
+++ b/en/files/slides/Session_8_EN.pptx
@@ -741,19 +741,19 @@
           <a:p>
             <a:r>
               <a:rPr lang="en-US" sz="1400" b="0" dirty="0"/>
-              <a:t>Session 8 (19:30). Online, 19:30-22:30, with a 15-minute break at 20:50. The last session. Today we finish writing the FLUID-ICU manuscript (Q1 together, then each participant's own question), follow a paper from submission to reviewers, practise reviewing as a whole class, and about five volunteers present their own proposals.</a:t>
+              <a:t>Session 8 (19:30-22:30, break 20:50-21:05). The last session.</a:t>
             </a:r>
           </a:p>
           <a:p>
             <a:r>
               <a:rPr lang="en-US" sz="1400" b="0" dirty="0"/>
-              <a:t/>
+              <a:t>Today: the optional parts and the title, improving the Results drafts, publishing, reviewing, and about five proposal presentations. The closing (22:15) has its own slides.</a:t>
             </a:r>
           </a:p>
           <a:p>
             <a:r>
               <a:rPr lang="en-US" sz="1400" b="0" dirty="0"/>
-              <a:t>Before the session: send the PDFs (Session 8 exercise sheet, Papers 1 and 2 original versions, the class Q1 draft from Session 7). Collect the presenters' slides and open them on your computer. Load the polls.</a:t>
+              <a:t>Before: email the exercise sheet, the original papers and the class Q1 Results from Session 7. Collect and open the presenters' slides.</a:t>
             </a:r>
           </a:p>
         </p:txBody>
@@ -834,25 +834,13 @@
           <a:p>
             <a:r>
               <a:rPr lang="en-US" sz="1400" b="0" dirty="0"/>
-              <a:t>Check (2 minutes). Numbers from key_results.md (simulated): Q1 adjusted OR 1.62. Q2 adjusted OR 1.27 per 10 ml/kg. Q1 adjusted Cox HR 1.46 (1.00 to 2.13). Q4 adjusted complete-case OR 1.39 per mmol/L.</a:t>
+              <a:t>Check (2 minutes). One poll per sentence: 'fine' or 'fix'. Call on one person for the fix.</a:t>
             </a:r>
           </a:p>
           <a:p>
             <a:r>
               <a:rPr lang="en-US" sz="1400" b="0" dirty="0"/>
-              <a:t>One poll per sentence: 'fine' or 'fix'. Call on one person to say the fix with the microphone on.</a:t>
-            </a:r>
-          </a:p>
-          <a:p>
-            <a:r>
-              <a:rPr lang="en-US" sz="1400" b="0" dirty="0"/>
-              <a:t>Sentence 3: no 'trend'. Give the estimate and say the CI reaches 1.</a:t>
-            </a:r>
-          </a:p>
-          <a:p>
-            <a:r>
-              <a:rPr lang="en-US" sz="1400" b="0" dirty="0"/>
-              <a:t>Sentence 4: 'predicts' is acceptable in a prediction sense. If the authors mean cause, 'associated with' is the honest verb.</a:t>
+              <a:t>Sentence 3: no 'trend', give the estimate and say the CI reaches 1. Sentence 4: 'predicts' is fine for prediction.</a:t>
             </a:r>
           </a:p>
         </p:txBody>
@@ -933,25 +921,19 @@
           <a:p>
             <a:r>
               <a:rPr lang="en-US" sz="1400" b="0" dirty="0"/>
-              <a:t>Teaching point: most clinical journals want a structured abstract (Background, Methods, Results, Conclusions) of about 250-300 words. Trials add the registration number. Many readers never go further, so it must stand alone.</a:t>
+              <a:t>Structured abstract, 250-300 words, must stand alone.</a:t>
             </a:r>
           </a:p>
           <a:p>
             <a:r>
               <a:rPr lang="en-US" sz="1400" b="0" dirty="0"/>
-              <a:t>Good practice: Paper 2's abstract gives the source population, setting and size (annotation #4) and every result as HR with 95% CI and exact P (annotation #5). Paper 1's conclusion reports a negative result plainly, with no spin (annotation #6), and the registration number is in the abstract (annotation #7).</a:t>
+              <a:t>Paper 2 gives every result as HR with CI. Paper 1 states its negative result plainly.</a:t>
             </a:r>
           </a:p>
           <a:p>
             <a:r>
               <a:rPr lang="en-US" sz="1400" b="0" dirty="0"/>
-              <a:t>Fix (Paper 1, annotation #4): medians are reported but the estimate is called a 'mean difference', and p = 0.0506 with a CI touching 0 is given to four decimals. The summary, the estimate and the test must match, and borderline p-values are not 'nearly significant'.</a:t>
-            </a:r>
-          </a:p>
-          <a:p>
-            <a:r>
-              <a:rPr lang="en-US" sz="1400" b="0" dirty="0"/>
-              <a:t>Write the abstract last, and check that each number appears identically in the abstract, text and tables.</a:t>
+              <a:t>Write it last and check every number matches the text and tables.</a:t>
             </a:r>
           </a:p>
         </p:txBody>
@@ -1032,37 +1014,19 @@
           <a:p>
             <a:r>
               <a:rPr lang="en-US" sz="1400" b="0" dirty="0"/>
-              <a:t>Worked example (simulated data, about 120 words shown, and a full abstract is up to 250).</a:t>
+              <a:t>Worked example (simulated). The title is required for everyone. The abstract is optional.</a:t>
             </a:r>
           </a:p>
           <a:p>
             <a:r>
               <a:rPr lang="en-US" sz="1400" b="0" dirty="0"/>
-              <a:t>Title: names the exposure, outcome, population and design. No 'impact'.</a:t>
+              <a:t>The Methods line must say the data are simulated. Conclusions: 'modestly associated', matching a CI of 1.02 to 2.59.</a:t>
             </a:r>
           </a:p>
           <a:p>
             <a:r>
               <a:rPr lang="en-US" sz="1400" b="0" dirty="0"/>
-              <a:t>Methods: must say the data are simulated (course rule).</a:t>
-            </a:r>
-          </a:p>
-          <a:p>
-            <a:r>
-              <a:rPr lang="en-US" sz="1400" b="0" dirty="0"/>
-              <a:t>Results: the crude and adjusted ORs, as in the Results. The participant numbers (618 analysed, 373 positive).</a:t>
-            </a:r>
-          </a:p>
-          <a:p>
-            <a:r>
-              <a:rPr lang="en-US" sz="1400" b="0" dirty="0"/>
-              <a:t>Conclusions: 'modestly associated', which matches an adjusted CI of 1.02 to 2.59.</a:t>
-            </a:r>
-          </a:p>
-          <a:p>
-            <a:r>
-              <a:rPr lang="en-US" sz="1400" b="0" dirty="0"/>
-              <a:t>Ask: which abstract sentence would change if the adjusted CI had been 0.95 to 2.40? Expected: Results and Conclusions, which would read 'no clear evidence of an association after adjustment'.</a:t>
+              <a:t>Ask: which sentences change if the CI had been 0.95 to 2.40? Expected: Results and Conclusions.</a:t>
             </a:r>
           </a:p>
         </p:txBody>
@@ -1143,31 +1107,25 @@
           <a:p>
             <a:r>
               <a:rPr lang="en-US" sz="1400" b="0" dirty="0"/>
-              <a:t>Teaching point: the title is the most-read sentence of the paper. Build it from the PICO: design, intervention or exposure vs comparator, population, outcome. Aim for about 10-16 words. State the design. Avoid value-laden words ('impact', 'optimized', 'novel', 'first').</a:t>
+              <a:t>Build the title from the PICO: design, exposure, population, outcome, 10-16 words. No 'impact', 'novel', 'first'.</a:t>
             </a:r>
           </a:p>
           <a:p>
             <a:r>
               <a:rPr lang="en-US" sz="1400" b="0" dirty="0"/>
-              <a:t>Paper 1 (annotation #1): the design is in the title (good), but it is over 25 words and uses value words. A shorter descriptive version is shown in green.</a:t>
+              <a:t>Paper 2's 'Impact' is causal wording for a cohort.</a:t>
             </a:r>
           </a:p>
           <a:p>
             <a:r>
               <a:rPr lang="en-US" sz="1400" b="0" dirty="0"/>
-              <a:t>Paper 2 (annotation #1): 'Impact' is causal wording for an observational cohort. Reviewers routinely ask for 'Association between ...'.</a:t>
+              <a:t>Keywords: 3-6 MeSH terms not already in the title.</a:t>
             </a:r>
           </a:p>
           <a:p>
             <a:r>
               <a:rPr lang="en-US" sz="1400" b="0" dirty="0"/>
-              <a:t>Keywords (Paper 1, annotation #9): its keywords repeat words already in the title. Choose 3-6 MeSH (Medical Subject Headings) terms that are NOT in the title, so the paper is found by more searches.</a:t>
-            </a:r>
-          </a:p>
-          <a:p>
-            <a:r>
-              <a:rPr lang="en-US" sz="1400" b="0" dirty="0"/>
-              <a:t>You will write your own title in the workshop that follows.</a:t>
+              <a:t>Everyone writes their own working title in the workshop that follows.</a:t>
             </a:r>
           </a:p>
         </p:txBody>
@@ -1248,25 +1206,19 @@
           <a:p>
             <a:r>
               <a:rPr lang="en-US" sz="1400" b="0" dirty="0"/>
-              <a:t>References: use a reference manager (Zotero, Mendeley, EndNote) and check every citation. In Paper 2 the covariate list cites reference 26 (the Sepsis-3 definitions paper), almost certainly the wrong number (annotation #22). Never cite a reference an AI tool suggested without reading it.</a:t>
+              <a:t>References: use a reference manager and check every citation. Never cite a reference an AI suggested without reading it.</a:t>
             </a:r>
           </a:p>
           <a:p>
             <a:r>
               <a:rPr lang="en-US" sz="1400" b="0" dirty="0"/>
-              <a:t>Reporting checklist: fill in CONSORT (trials) or STROBE (observational studies) while you write, with page numbers. Many journals require it at submission. Neither paper names its guideline (both annotated summaries flag this).</a:t>
+              <a:t>Checklist: fill it in while you write.</a:t>
             </a:r>
           </a:p>
           <a:p>
             <a:r>
               <a:rPr lang="en-US" sz="1400" b="0" dirty="0"/>
-              <a:t>Final read: check every number in the text against the tables (Paper 1's creatinine, #25), every figure call-out (Paper 1 refers to Fig. 1 where it means Fig. 2A, #28), and typography of numbers (an IQR whose upper limit is below the lower limit, #35).</a:t>
-            </a:r>
-          </a:p>
-          <a:p>
-            <a:r>
-              <a:rPr lang="en-US" sz="1400" b="0" dirty="0"/>
-              <a:t>Key message from the annotated summaries: almost all of Paper 1's errors would have been caught by a co-author reading the tables against the text.</a:t>
+              <a:t>Final read: every number in the text against the tables. Most errors in both papers needed only a careful co-author.</a:t>
             </a:r>
           </a:p>
         </p:txBody>
@@ -1347,25 +1299,19 @@
           <a:p>
             <a:r>
               <a:rPr lang="en-US" sz="1400" b="0" dirty="0"/>
-              <a:t>Manuscript workshop 2 (20:00-20:30). Course dataset.</a:t>
+              <a:t>Manuscript workshop 2 (20:00-20:30).</a:t>
             </a:r>
           </a:p>
           <a:p>
             <a:r>
               <a:rPr lang="en-US" sz="1400" b="0" dirty="0"/>
-              <a:t>Part 1 (20:00-20:22): you add the Introduction, Discussion, Abstract and Title to last Saturday's class draft for Q1, live on the shared screen.</a:t>
+              <a:t>Part 1: improve last week's class Q1 Results live, using the reviewer checklist. Part 2: each participant checks their own draft and writes the working title.</a:t>
             </a:r>
           </a:p>
           <a:p>
             <a:r>
               <a:rPr lang="en-US" sz="1400" b="0" dirty="0"/>
-              <a:t>Part 2 (20:22-20:30): each participant writes the aim sentence and title for their own question, then finishes the draft and submits it by 23:59 tonight (Course/Assignment/manuscript_brief.md).</a:t>
-            </a:r>
-          </a:p>
-          <a:p>
-            <a:r>
-              <a:rPr lang="en-US" sz="1400" b="0" dirty="0"/>
-              <a:t>Instructions: Course/Practicals/s8_exercises.md, Part B. Model paragraphs for Q1: Course/Solutions/s8_solutions.md.</a:t>
+              <a:t>Instructions: s8_exercises Part B. Model text: s8_solutions Part B.</a:t>
             </a:r>
           </a:p>
         </p:txBody>
@@ -1446,19 +1392,25 @@
           <a:p>
             <a:r>
               <a:rPr lang="en-US" sz="1400" b="0" dirty="0"/>
-              <a:t>Workshop Part 1 (20:00-20:22). Whole class. Open last week's class draft and type into it. Call each phase.</a:t>
+              <a:t>Workshop part 1 (20:00-20:22). Open last week's class draft and type into it. Call each phase.</a:t>
             </a:r>
           </a:p>
           <a:p>
             <a:r>
               <a:rPr lang="en-US" sz="1400" b="0" dirty="0"/>
-              <a:t>Prompts: 'Does our first Discussion sentence answer the question with the number?' 'Is there a limitation with its direction?' 'Does our conclusion use the same verb as our aim?' 'Is every number in the abstract identical to the Results?'</a:t>
+              <a:t>Prompts: 'Does every percentage have a denominator?' 'Can Table 1 be read without the text?' 'Is any sentence explaining rather than reporting?'</a:t>
             </a:r>
           </a:p>
           <a:p>
             <a:r>
               <a:rPr lang="en-US" sz="1400" b="0" dirty="0"/>
-              <a:t>Share the completed class draft as a PDF after the session. It is the model for everyone's own manuscript.</a:t>
+              <a:t>In the last 3 minutes, show where an Introduction and Discussion would sit and what they would say.</a:t>
+            </a:r>
+          </a:p>
+          <a:p>
+            <a:r>
+              <a:rPr lang="en-US" sz="1400" b="0" dirty="0"/>
+              <a:t>Send the improved draft as a PDF after the session.</a:t>
             </a:r>
           </a:p>
         </p:txBody>
@@ -1539,19 +1491,19 @@
           <a:p>
             <a:r>
               <a:rPr lang="en-US" sz="1400" b="0" dirty="0"/>
-              <a:t>Workshop Part 2 (20:22-20:30). Individual.</a:t>
+              <a:t>Workshop part 2 (20:22-20:30). Individual.</a:t>
             </a:r>
           </a:p>
           <a:p>
             <a:r>
               <a:rPr lang="en-US" sz="1400" b="0" dirty="0"/>
-              <a:t>Question-specific reminders (post them in the chat): Q2, AKI may also cause fluid accumulation (reverse causation). Q3, ventilator-free days count death as zero. Explain the measure. Q4, compare complete-case and imputed estimates and say what MAR (missing at random) means for the conclusion. Q5, survivors only: say who the result applies to.</a:t>
+              <a:t>Post in the chat: Q2, AKI may also cause fluid accumulation. Q3, ventilator-free days count death as zero. Q4, give both complete-case and imputed estimates. Q5, survivors only.</a:t>
             </a:r>
           </a:p>
           <a:p>
             <a:r>
               <a:rPr lang="en-US" sz="1400" b="0" dirty="0"/>
-              <a:t>Deadline: the complete draft by 23:59 on the day of Session 8 (Course/Assignment/manuscript_brief.md). It then goes to the individual peer review (closing slides).</a:t>
+              <a:t>Remind: the draft goes by email to the reviewer and the course lead (myluong1710@gmail.com) by 23:59.</a:t>
             </a:r>
           </a:p>
         </p:txBody>
@@ -1632,19 +1584,13 @@
           <a:p>
             <a:r>
               <a:rPr lang="en-US" sz="1400" b="0" dirty="0"/>
-              <a:t>Section 8.2 (20:30-20:50). Six slides, the 3-minute live demo at 20:36 and a 2-minute check at 20:48.</a:t>
+              <a:t>Section 8.2 (20:30-20:50). About 2 minutes per slide, a 3-minute demo and a 2-minute check.</a:t>
             </a:r>
           </a:p>
           <a:p>
             <a:r>
               <a:rPr lang="en-US" sz="1400" b="0" dirty="0"/>
-              <a:t>Pace: about 2 minutes per slide. Point to the slide, give one example, move on.</a:t>
-            </a:r>
-          </a:p>
-          <a:p>
-            <a:r>
-              <a:rPr lang="en-US" sz="1400" b="0" dirty="0"/>
-              <a:t>Link to the manuscripts: a FLUID-ICU paper would go through exactly this route: STROBE checklist, journal choice, submission package, peer review. Preprints, licences, what happens after acceptance and rejection are in the Extra slides.</a:t>
+              <a:t>Preprints, licences, acceptance and rejection are in the extra slides.</a:t>
             </a:r>
           </a:p>
         </p:txBody>
@@ -1725,37 +1671,19 @@
           <a:p>
             <a:r>
               <a:rPr lang="en-US" sz="1400" b="0" dirty="0"/>
-              <a:t>Teaching point: for each study design there is an internationally agreed reporting checklist. all of them are collected free at the EQUATOR Network (Enhancing the QUAlity and Transparency Of health Research).</a:t>
+              <a:t>One reporting guideline per design, all free on the EQUATOR Network. Many journals require the checklist with page numbers.</a:t>
             </a:r>
           </a:p>
           <a:p>
             <a:r>
               <a:rPr lang="en-US" sz="1400" b="0" dirty="0"/>
-              <a:t>CONSORT for randomised trials (updated as CONSORT 2025), STROBE for observational studies (cohort, case-control, cross-sectional), STARD for diagnostic accuracy, PRISMA for systematic reviews, SPIRIT for trial protocols (SPIRIT 2025), CARE for case reports.</a:t>
+              <a:t>Neither paper names its guideline.</a:t>
             </a:r>
           </a:p>
           <a:p>
             <a:r>
               <a:rPr lang="en-US" sz="1400" b="0" dirty="0"/>
-              <a:t>Running example: Paper 1 is an RCT (CONSORT). Paper 2 is a cohort (STROBE). Interesting finding from the annotated papers: neither paper names its guideline. Paper 1 does include the CONSORT flow diagram in the main text. Paper 2 keeps its flow chart in the supplement.</a:t>
-            </a:r>
-          </a:p>
-          <a:p>
-            <a:r>
-              <a:rPr lang="en-US" sz="1400" b="0" dirty="0"/>
-              <a:t>Many journals require the completed checklist at submission, with page numbers.</a:t>
-            </a:r>
-          </a:p>
-          <a:p>
-            <a:r>
-              <a:rPr lang="en-US" sz="1400" b="0" dirty="0"/>
-              <a:t>Misconception: 'reporting guidelines tell you how to do the study'. They tell you what to report, but reading them before you start is the best design checklist you will find.</a:t>
-            </a:r>
-          </a:p>
-          <a:p>
-            <a:r>
-              <a:rPr lang="en-US" sz="1400" b="0" dirty="0"/>
-              <a:t>Poll: which guideline fits your own proposal? Expected: most ICU proposals are cohort or cross-sectional (STROBE). A few are trials (CONSORT, and SPIRIT for the protocol).</a:t>
+              <a:t>Poll: which guideline fits your proposal? Expected: mostly STROBE.</a:t>
             </a:r>
           </a:p>
         </p:txBody>
@@ -1836,7 +1764,7 @@
           <a:p>
             <a:r>
               <a:rPr lang="en-US" sz="1400" b="0" dirty="0"/>
-              <a:t>Recap (19:30-19:35). Question 1 was last week's exit question: read two or three of the answers you received and correct any misunderstanding. Questions 2 and 3 are quick polls. Reveal the answers.</a:t>
+              <a:t>Recap (19:30-19:35). Question 1 was the exit question: read two or three answers. Questions 2 and 3 are quick polls.</a:t>
             </a:r>
           </a:p>
           <a:p>
@@ -1923,31 +1851,25 @@
           <a:p>
             <a:r>
               <a:rPr lang="en-US" sz="1400" b="0" dirty="0"/>
-              <a:t>Teaching point: choose the journal at the start, because its Guide for Authors sets word limits, structure, checklist and registration rules.</a:t>
+              <a:t>Choose the journal first: its Guide for Authors sets the rules.</a:t>
             </a:r>
           </a:p>
           <a:p>
             <a:r>
               <a:rPr lang="en-US" sz="1400" b="0" dirty="0"/>
-              <a:t>Fit: the people who need your answer (ICU nurses? intensivists?) decide the journal. Trust: indexed in MEDLINE/PubMed, the Directory of Open Access Journals (DOAJ), Scopus or Web of Science, with a clear peer-review and retraction policy.</a:t>
+              <a:t>Trust: indexed in MEDLINE, DOAJ, Scopus or Web of Science. Cost: the article fee and waivers.</a:t>
             </a:r>
           </a:p>
           <a:p>
             <a:r>
               <a:rPr lang="en-US" sz="1400" b="0" dirty="0"/>
-              <a:t>Cost: many open-access journals charge an article-processing charge (APC). Ask about waivers and institutional agreements. Licence: Paper 1 is CC BY-NC-ND (share, but no adaptation or commercial use), Paper 2 is CC BY (re-use with attribution). CC = Creative Commons.</a:t>
+              <a:t>Paper 1 took 7 weeks to acceptance, Paper 2 7 months.</a:t>
             </a:r>
           </a:p>
           <a:p>
             <a:r>
               <a:rPr lang="en-US" sz="1400" b="0" dirty="0"/>
-              <a:t>Speed: Paper 1 went from submission to acceptance in about 7 weeks (10 Sept to 31 Oct 2024). Paper 2 took about 7 months (15 Jan to 24 Aug 2023). Speed varies. It is not a sign of quality by itself.</a:t>
-            </a:r>
-          </a:p>
-          <a:p>
-            <a:r>
-              <a:rPr lang="en-US" sz="1400" b="0" dirty="0"/>
-              <a:t>Ask (call on two or three people, microphone on): name one journal your unit reads regularly. That is often a sensible first target.</a:t>
+              <a:t>Ask: name one journal your unit reads.</a:t>
             </a:r>
           </a:p>
         </p:txBody>
@@ -2028,31 +1950,19 @@
           <a:p>
             <a:r>
               <a:rPr lang="en-US" sz="1400" b="0" dirty="0"/>
-              <a:t>Teaching point: predatory journals take publication fees without providing real peer review, editing or indexing. Your work disappears into a journal nobody trusts, and you cannot submit it elsewhere.</a:t>
+              <a:t>Predatory journals take fees without real peer review or indexing.</a:t>
             </a:r>
           </a:p>
           <a:p>
             <a:r>
               <a:rPr lang="en-US" sz="1400" b="0" dirty="0"/>
-              <a:t>Walk the five red flags on this (invented) e-mail: flattering mass e-mail from a free address. A vague, huge scope and a name that imitates a real journal. Impossibly fast review, fake or unknown 'impact' metrics. Fees hidden until after acceptance. Other flags: editorial board members who cannot be verified, no physical address, many spelling errors.</a:t>
+              <a:t>Walk the five red flags on the invented e-mail. Checks: Think.Check.Submit, DOAJ, the NLM Catalog, the hospital librarian.</a:t>
             </a:r>
           </a:p>
           <a:p>
             <a:r>
               <a:rPr lang="en-US" sz="1400" b="0" dirty="0"/>
-              <a:t>Checks: Think.Check.Submit (a free checklist), DOAJ for open-access journals, the NLM Catalog (US National Library of Medicine) to see if a journal is really indexed in MEDLINE. Also ask the hospital librarian.</a:t>
-            </a:r>
-          </a:p>
-          <a:p>
-            <a:r>
-              <a:rPr lang="en-US" sz="1400" b="0" dirty="0"/>
-              <a:t>Poll: did you receive an e-mail like this in the last month? Usually most say yes: every clinician who has published once receives them.</a:t>
-            </a:r>
-          </a:p>
-          <a:p>
-            <a:r>
-              <a:rPr lang="en-US" sz="1400" b="0" dirty="0"/>
-              <a:t>The Session 8 exercise sheet (Part C) has a short 'spot the predatory journal' exercise for homework.</a:t>
+              <a:t>Poll: did you get an e-mail like this last month?</a:t>
             </a:r>
           </a:p>
         </p:txBody>
@@ -2133,19 +2043,13 @@
           <a:p>
             <a:r>
               <a:rPr lang="en-US" sz="1400" b="0" dirty="0"/>
-              <a:t>Demo (20:36-20:39), on the shared screen. Full script with offline fallback: Course/Demos/s8_demo.md.</a:t>
+              <a:t>Demo (20:36-20:39). Script and offline fallback: s8_demo.md.</a:t>
             </a:r>
           </a:p>
           <a:p>
             <a:r>
               <a:rPr lang="en-US" sz="1400" b="0" dirty="0"/>
-              <a:t>Keep it to 3 minutes: EQUATOR home page, search box, CONSORT 2025 page, checklist and flow diagram, then STROBE. Then a DOAJ search for a journal title, and the NLM Catalog with the filter 'currently indexed in MEDLINE'. End on the Think.Check.Submit checklist. Paste the four web addresses in the chat.</a:t>
-            </a:r>
-          </a:p>
-          <a:p>
-            <a:r>
-              <a:rPr lang="en-US" sz="1400" b="0" dirty="0"/>
-              <a:t>If your internet fails, use the screenshots described in the demo script.</a:t>
+              <a:t>EQUATOR: CONSORT, then STROBE. DOAJ, then the NLM Catalog ('currently indexed in MEDLINE'). End on Think.Check.Submit. Paste the four addresses in the chat.</a:t>
             </a:r>
           </a:p>
         </p:txBody>
@@ -2226,25 +2130,25 @@
           <a:p>
             <a:r>
               <a:rPr lang="en-US" sz="1400" b="0" dirty="0"/>
-              <a:t>Teaching point: journals check the package before any scientific review. Missing items send the manuscript straight back.</a:t>
+              <a:t>Journals check the package before any scientific review. Missing items send the paper back.</a:t>
             </a:r>
           </a:p>
           <a:p>
             <a:r>
               <a:rPr lang="en-US" sz="1400" b="0" dirty="0"/>
-              <a:t>Cover letter: one page covering why this journal, what is new, that the work is not under consideration elsewhere, and any preprint. Title page: all authors, affiliations, ORCID iDs (a free, permanent researcher identifier that every participant can register at orcid.org), corresponding author, word count. Manuscript in the journal's format (blinded if the journal uses double-blind review). Declarations: ethics approval number, consent, competing interests, funding, data availability, author contributions (CRediT) and AI use. Suggested reviewers: experts without conflicts. The editor decides whether to use them.</a:t>
+              <a:t>ORCID iD: free, register at orcid.org.</a:t>
             </a:r>
           </a:p>
           <a:p>
             <a:r>
               <a:rPr lang="en-US" sz="1400" b="0" dirty="0"/>
-              <a:t>Running example: Paper 1 has a complete declarations block, exactly what the submission system asks for, item by item (annotation #48). Templates: Course/Templates/Cover_Letter_Template.</a:t>
+              <a:t>Paper 1 has a complete declarations block. Template: Cover_Letter_Template.</a:t>
             </a:r>
           </a:p>
           <a:p>
             <a:r>
               <a:rPr lang="en-US" sz="1400" b="0" dirty="0"/>
-              <a:t>Ask: who already has an ORCID iD? Encourage everyone to register this week.</a:t>
+              <a:t>Ask: who already has an ORCID iD?</a:t>
             </a:r>
           </a:p>
         </p:txBody>
@@ -2325,25 +2229,19 @@
           <a:p>
             <a:r>
               <a:rPr lang="en-US" sz="1400" b="0" dirty="0"/>
-              <a:t>Walk the six steps. Submit (with cover letter, reporting checklist and declarations). The editor screens, and many papers are rejected here without review ('desk rejection') because they do not fit or are poorly reported. Two or three peer reviewers comment. The editor decides: accept, minor revision, major revision or reject. You revise and answer every comment point by point. Accepted, then proofs (read them carefully!) and publication.</a:t>
+              <a:t>Submit, editor screen (desk rejection is common), 2 or 3 reviewers, decision, revision, acceptance.</a:t>
             </a:r>
           </a:p>
           <a:p>
             <a:r>
               <a:rPr lang="en-US" sz="1400" b="0" dirty="0"/>
-              <a:t>Running example: our annotators judged Paper 1 'minor revision' and Paper 2 'major revision'. Both were published, and both still contain errors a careful reviewer would have caught. Paper 1 took about 7 weeks from submission to acceptance. Paper 2 about 7 months.</a:t>
+              <a:t>One journal at a time. After rejection, improve the paper and submit elsewhere.</a:t>
             </a:r>
           </a:p>
           <a:p>
             <a:r>
               <a:rPr lang="en-US" sz="1400" b="0" dirty="0"/>
-              <a:t>Rule: submit to one journal at a time. After rejection, improve the paper using the reviews, then submit elsewhere.</a:t>
-            </a:r>
-          </a:p>
-          <a:p>
-            <a:r>
-              <a:rPr lang="en-US" sz="1400" b="0" dirty="0"/>
-              <a:t>Ask: a reviewer is wrong about something. What do you do? Expected: thank them, explain politely with evidence, and clarify the text so the next reader is not confused.</a:t>
+              <a:t>Ask: a reviewer is wrong. What do you do? Expected: thank, explain with evidence, clarify the text.</a:t>
             </a:r>
           </a:p>
         </p:txBody>
@@ -2424,31 +2322,25 @@
           <a:p>
             <a:r>
               <a:rPr lang="en-US" sz="1400" b="0" dirty="0"/>
-              <a:t>Teaching point: the response letter is a table: every reviewer comment, your response, and exactly where the manuscript changed (page and line). Number the comments (R1.1, R1.2, R2.1 ...).</a:t>
+              <a:t>The response letter is a table: comment, response, and where the paper changed.</a:t>
             </a:r>
           </a:p>
           <a:p>
             <a:r>
               <a:rPr lang="en-US" sz="1400" b="0" dirty="0"/>
-              <a:t>Tone: thank the reviewers, agree where you can, never ignore a point, never argue emotionally. When you disagree (a rebuttal), explain politely with evidence and, where possible, still clarify the text so the next reader is not confused.</a:t>
+              <a:t>The three rows: accept, clarify, and a polite rebuttal for data never collected.</a:t>
             </a:r>
           </a:p>
           <a:p>
             <a:r>
               <a:rPr lang="en-US" sz="1400" b="0" dirty="0"/>
-              <a:t>The three rows are what the annotators say a reviewer would have asked Paper 1: remove the 'non-significant trend' (accept). Justify blocks of 2 (clarify and add a limitation). A request for an outcome that was never collected (polite rebuttal: you cannot add data that do not exist, but you can name it as a limitation).</a:t>
+              <a:t>Common mistakes: 'done' with no detail, changes without a location.</a:t>
             </a:r>
           </a:p>
           <a:p>
             <a:r>
               <a:rPr lang="en-US" sz="1400" b="0" dirty="0"/>
-              <a:t>Common mistakes: changing the manuscript without saying where. Answering 'done' with no detail. accepting a request that makes the paper wrong just to please the reviewer.</a:t>
-            </a:r>
-          </a:p>
-          <a:p>
-            <a:r>
-              <a:rPr lang="en-US" sz="1400" b="0" dirty="0"/>
-              <a:t>Template: Course/Templates/Response_to_Reviewers_Template. Participants use this format when they answer their peer reviewer after the course.</a:t>
+              <a:t>Participants use Response_to_Reviewers_Template after their peer review.</a:t>
             </a:r>
           </a:p>
         </p:txBody>
@@ -2529,19 +2421,13 @@
           <a:p>
             <a:r>
               <a:rPr lang="en-US" sz="1400" b="0" dirty="0"/>
-              <a:t>Check (20:48-20:50). One true/false poll per statement. Reveal.</a:t>
+              <a:t>Check (20:48-20:50). One true/false poll each.</a:t>
             </a:r>
           </a:p>
           <a:p>
             <a:r>
               <a:rPr lang="en-US" sz="1400" b="0" dirty="0"/>
-              <a:t>Statement 1 is 'often true' rather than always. Real journals also invite papers, but a flattering mass e-mail from an unknown journal deserves the five-flag check.</a:t>
-            </a:r>
-          </a:p>
-          <a:p>
-            <a:r>
-              <a:rPr lang="en-US" sz="1400" b="0" dirty="0"/>
-              <a:t>Statement 3: a preprint is a manuscript posted publicly (e.g. on medRxiv) before peer review (Extra slides).</a:t>
+              <a:t>Statement 1 is 'often true'. Statement 3: a preprint is posted before peer review.</a:t>
             </a:r>
           </a:p>
         </p:txBody>
@@ -2622,25 +2508,13 @@
           <a:p>
             <a:r>
               <a:rPr lang="en-US" sz="1400" b="0" dirty="0"/>
-              <a:t>The slide is only a picture on purpose. Before the break, say: we are back at 21:05 for 8.3, be the reviewer (25 min), then the proposal presentations (45 min) and the closing (15 min). During the break, open Paper 1 and Paper 2 (original PDFs) and the Session 8 exercise sheet, Part D (the answer grid). Presenters: check that your slides reached the instructor.</a:t>
+              <a:t>Break (20:50-21:05). Say: we restart at 21:05 with 8.3, then presentations and closing. Open Paper 1, Paper 2 and Part D of the exercise sheet.</a:t>
             </a:r>
           </a:p>
           <a:p>
             <a:r>
               <a:rPr lang="en-US" sz="1400" b="0" dirty="0"/>
-              <a:t>Break (20:50-21:05).</a:t>
-            </a:r>
-          </a:p>
-          <a:p>
-            <a:r>
-              <a:rPr lang="en-US" sz="1400" b="0" dirty="0"/>
-              <a:t>Open the presenters' slides on your computer and check you can share each one. Confirm the running order by chat with the volunteers.</a:t>
-            </a:r>
-          </a:p>
-          <a:p>
-            <a:r>
-              <a:rPr lang="en-US" sz="1400" b="0" dirty="0"/>
-              <a:t>Prepare your screen for 8.3: Paper 1 and Paper 2 (original, unannotated PDFs) in two tabs.</a:t>
+              <a:t>Check you can share each presenter's slides.</a:t>
             </a:r>
           </a:p>
         </p:txBody>
@@ -2721,25 +2595,19 @@
           <a:p>
             <a:r>
               <a:rPr lang="en-US" sz="1400" b="0" dirty="0"/>
-              <a:t>Section 8.3 (21:05-21:30). Full instructor guide: Course/Resources/appraisal_instructor_guide.md (model answers, prompts, key messages).</a:t>
+              <a:t>Section 8.3 (21:05-21:30). Guide with model answers: appraisal_instructor_guide.md.</a:t>
             </a:r>
           </a:p>
           <a:p>
             <a:r>
               <a:rPr lang="en-US" sz="1400" b="0" dirty="0"/>
-              <a:t>Structure: 3 minutes set-up (two papers, the 10 questions), 15 minutes whole-class appraisal with polls, 7 minutes on what each design may claim.</a:t>
+              <a:t>3 minutes set-up, 15 minutes appraisal with polls, 7 minutes on what each design may claim.</a:t>
             </a:r>
           </a:p>
           <a:p>
             <a:r>
               <a:rPr lang="en-US" sz="1400" b="0" dirty="0"/>
-              <a:t>Why now: after the course each participant reviews one peer's FLUID-ICU draft with the same 10 questions. This is the rehearsal.</a:t>
-            </a:r>
-          </a:p>
-          <a:p>
-            <a:r>
-              <a:rPr lang="en-US" sz="1400" b="0" dirty="0"/>
-              <a:t>Reassure: 'Can't tell' is a perfectly good answer if the paper does not say.</a:t>
+              <a:t>The reviewing skills return in the peer review of the Results sections, which uses the Results checklist in Peer_Review_Instructions.</a:t>
             </a:r>
           </a:p>
         </p:txBody>
@@ -2820,19 +2688,13 @@
           <a:p>
             <a:r>
               <a:rPr lang="en-US" sz="1400" b="0" dirty="0"/>
-              <a:t>Explain the set-up in one minute. Both papers address our running question (fluids in septic shock) with different designs. The whole class appraises both, with the same 10 questions (next two slides).</a:t>
+              <a:t>Set-up (1 minute): same clinical question, two designs, the same 10 questions.</a:t>
             </a:r>
           </a:p>
           <a:p>
             <a:r>
               <a:rPr lang="en-US" sz="1400" b="0" dirty="0"/>
-              <a:t>Each participant keeps their own copy of the answer grid (Session 8 exercise sheet, Part D) and fills it in as we go: Yes / No / Can't tell, plus the page.</a:t>
-            </a:r>
-          </a:p>
-          <a:p>
-            <a:r>
-              <a:rPr lang="en-US" sz="1400" b="0" dirty="0"/>
-              <a:t>Link to Session 4: the 10 questions are a simplified version of the formal risk-of-bias tools: RoB 2 for Paper 1, Newcastle-Ottawa (or the newer ROBINS-E) for Paper 2. We do not run the formal tools today.</a:t>
+              <a:t>Each participant fills in their own answer grid (Part D): Yes, No or Can't tell, plus the page.</a:t>
             </a:r>
           </a:p>
         </p:txBody>
@@ -2913,19 +2775,13 @@
           <a:p>
             <a:r>
               <a:rPr lang="en-US" sz="1400" b="0" dirty="0"/>
-              <a:t>Section 8.1 (19:35-20:00). Ten slides with three worked examples from FLUID-ICU Q1 and a 2-minute check.</a:t>
+              <a:t>Section 8.1 (19:35-20:00). About 2 minutes per slide.</a:t>
             </a:r>
           </a:p>
           <a:p>
             <a:r>
               <a:rPr lang="en-US" sz="1400" b="0" dirty="0"/>
-              <a:t>Order follows the writing order from last Saturday: Introduction, Discussion, then the Abstract and the Title last.</a:t>
-            </a:r>
-          </a:p>
-          <a:p>
-            <a:r>
-              <a:rPr lang="en-US" sz="1400" b="0" dirty="0"/>
-              <a:t>Pace: about 2 minutes per slide. Slow down on the worked Discussion example.</a:t>
+              <a:t>The Introduction, Discussion and Abstract are optional for the manuscript. The title is required. Slow down on the Discussion example.</a:t>
             </a:r>
           </a:p>
         </p:txBody>
@@ -3006,19 +2862,13 @@
           <a:p>
             <a:r>
               <a:rPr lang="en-US" sz="1400" b="0" dirty="0"/>
-              <a:t>The checklist, part 1. Read each question aloud once. Do not explain the answers.</a:t>
+              <a:t>Read each question once. Do not give answers.</a:t>
             </a:r>
           </a:p>
           <a:p>
             <a:r>
               <a:rPr lang="en-US" sz="1400" b="0" dirty="0"/>
-              <a:t>Q1-Q2 are about the question and the design (Sessions 1-4). Q3 is about who was studied, external validity: would your patients be in this study? Q4 is about whether the groups were comparable at baseline (look at Table 1). Q5 is about blinding.</a:t>
-            </a:r>
-          </a:p>
-          <a:p>
-            <a:r>
-              <a:rPr lang="en-US" sz="1400" b="0" dirty="0"/>
-              <a:t>Answers are Yes / No / Can't tell, plus the page.</a:t>
+              <a:t>Q3 is external validity: would your patients be in this study? Q4: look at Table 1.</a:t>
             </a:r>
           </a:p>
         </p:txBody>
@@ -3099,25 +2949,7 @@
           <a:p>
             <a:r>
               <a:rPr lang="en-US" sz="1400" b="0" dirty="0"/>
-              <a:t>The checklist, part 2. Q6 and Q7 use what we learnt in Session 6: one primary outcome, an effect size with its 95% confidence interval.</a:t>
-            </a:r>
-          </a:p>
-          <a:p>
-            <a:r>
-              <a:rPr lang="en-US" sz="1400" b="0" dirty="0"/>
-              <a:t>Q8 is the heart of today's exercise: are the words in the title, abstract and discussion as strong as the design allows? 'Caused' or 'impact' needs randomisation. Observational studies say 'associated'. And p = 0.42 is never a 'trend'.</a:t>
-            </a:r>
-          </a:p>
-          <a:p>
-            <a:r>
-              <a:rPr lang="en-US" sz="1400" b="0" dirty="0"/>
-              <a:t>Q9: the authors' own limitations section, plus one they missed. Each paper has a clear one (see the instructor guide).</a:t>
-            </a:r>
-          </a:p>
-          <a:p>
-            <a:r>
-              <a:rPr lang="en-US" sz="1400" b="0" dirty="0"/>
-              <a:t>Q10: clinical judgement. There is no single right answer, but a reason is needed.</a:t>
+              <a:t>Q6 and Q7 use Session 6. Q8 is the heart of today: are the words as strong as the design allows? Q9: one limitation the authors missed. Q10: a reason is needed.</a:t>
             </a:r>
           </a:p>
         </p:txBody>
@@ -3198,19 +3030,19 @@
           <a:p>
             <a:r>
               <a:rPr lang="en-US" sz="1400" b="0" dirty="0"/>
-              <a:t>Whole-class appraisal (21:08-21:23). About 1.5 minutes per question. Read the question, show the page, run the poll, then call on one person to give the evidence with the microphone on. Type the class answer into the grid on the shared screen.</a:t>
+              <a:t>Appraisal (21:08-21:23), about 1.5 minutes per question: read, show the page, poll, one person gives the evidence.</a:t>
             </a:r>
           </a:p>
           <a:p>
             <a:r>
               <a:rPr lang="en-US" sz="1400" b="0" dirty="0"/>
-              <a:t>The most useful prompts (more in the instructor guide): Paper 1: 'Who was not blinded, and who decided how much fluid the patients got?' (clinicians were unblinded and they prescribe the fluids that make up the outcome). 'Find p = 0.42 in the Discussion. What word did the authors use?' (page 10, 'non-significant trend'). Paper 2: 'Who decided which patients got more fluid?' (the doctors, and sicker patients receive more fluid: confounding by indication). 'Patients had to stay at least 3 days in the ICU. Who is missing?' (early deaths and early discharges: survivor bias).</a:t>
+              <a:t>Key prompts: Paper 1, who was not blinded and who prescribed the fluid? Paper 2, who is missing when patients must stay 3 days?</a:t>
             </a:r>
           </a:p>
           <a:p>
             <a:r>
               <a:rPr lang="en-US" sz="1400" b="0" dirty="0"/>
-              <a:t>The remaining questions (1-3, 6 and 10) are homework on the answer grid: good practice for the peer review after the course.</a:t>
+              <a:t>Questions 1-3, 6 and 10 are homework.</a:t>
             </a:r>
           </a:p>
         </p:txBody>
@@ -3291,25 +3123,25 @@
           <a:p>
             <a:r>
               <a:rPr lang="en-US" sz="1400" b="0" dirty="0"/>
-              <a:t>Plenary (21:23-21:30), with the next table.</a:t>
+              <a:t>Plenary (21:23-21:30).</a:t>
             </a:r>
           </a:p>
           <a:p>
             <a:r>
               <a:rPr lang="en-US" sz="1400" b="0" dirty="0"/>
-              <a:t>Paper 1: chance decided who got the restrictive strategy, so known and unknown factors are balanced on average, so a randomised trial may make a causal claim. Its claim is negative: the strategy did not reduce day-5 fluid balance (difference 13.2 ml/kg, 95% CI -15.2 to 41.6, p = 0.42). But with 48 patients the CI is wide: this is 'no evidence of an effect', not 'evidence of no effect', and certainly not a 'trend'.</a:t>
+              <a:t>Paper 1: randomised, may say 'did not reduce', but 48 patients: no evidence of an effect, not evidence of none, and no 'trend'.</a:t>
             </a:r>
           </a:p>
           <a:p>
             <a:r>
               <a:rPr lang="en-US" sz="1400" b="0" dirty="0"/>
-              <a:t>Paper 2: doctors decided how much fluid each patient got. Propensity matching balances only the factors that were measured. Sicker patients receive more fluid (confounding by indication, Session 4) and some severity is never fully measured. So the paper may say a positive balance on day 2 'is associated with' higher 28-day mortality (HR, hazard ratio, 2.13, 95% CI 1.48 to 3.06), not that it 'impacts' or 'shows' anything causal, although its title says 'Impact'.</a:t>
+              <a:t>Paper 2: doctors decided the fluid, so 'is associated with', not 'impact'.</a:t>
             </a:r>
           </a:p>
           <a:p>
             <a:r>
               <a:rPr lang="en-US" sz="1400" b="0" dirty="0"/>
-              <a:t>Poll: if you had to change ICU practice tomorrow, which paper is stronger evidence for causation, and which tells you more about real-world risk? Expected: the RCT for causation (but it is a small pilot). The cohort for a large, real-world association that needs a trial to confirm.</a:t>
+              <a:t>Poll: which paper is stronger for causation, which for real-world risk?</a:t>
             </a:r>
           </a:p>
         </p:txBody>
@@ -3390,31 +3222,19 @@
           <a:p>
             <a:r>
               <a:rPr lang="en-US" sz="1400" b="0" dirty="0"/>
-              <a:t>Reveal this table at the end of the plenary as the summary, after the class has given its own answers, not before.</a:t>
+              <a:t>Reveal this table only after the class has answered.</a:t>
             </a:r>
           </a:p>
           <a:p>
             <a:r>
               <a:rPr lang="en-US" sz="1400" b="0" dirty="0"/>
-              <a:t>Row by row: how the groups were made comparable. Who knew the allocation. The main effect with its CI. The limitation the authors missed (Paper 1: permuted blocks of 2 make the next allocation predictable when clinicians are unblinded, page 3. Paper 2: requiring at least 3 ICU days excludes patients who died or left early (survivor bias), page 2). The wording problem (Paper 1 page 10. Paper 2 title and page 4). And the claim each design supports.</a:t>
+              <a:t>Four messages: design sets the verb, a wide CI means 'we don't know yet', published is not the same as correct, name the reporting guideline.</a:t>
             </a:r>
           </a:p>
           <a:p>
             <a:r>
               <a:rPr lang="en-US" sz="1400" b="0" dirty="0"/>
-              <a:t>Both papers are good, published papers in Q1 journals, and both have fixable flaws. That is the normal state of the literature, which is why appraisal is a clinical skill.</a:t>
-            </a:r>
-          </a:p>
-          <a:p>
-            <a:r>
-              <a:rPr lang="en-US" sz="1400" b="0" dirty="0"/>
-              <a:t>Land the four messages: design sets the verb. A wide CI means 'we don't know yet'. Published is not the same as correct. Name the reporting guideline.</a:t>
-            </a:r>
-          </a:p>
-          <a:p>
-            <a:r>
-              <a:rPr lang="en-US" sz="1400" b="0" dirty="0"/>
-              <a:t>Transition: 'Now it is time to hear some of your own proposals.'</a:t>
+              <a:t>Transition: 'Now some of your own proposals.'</a:t>
             </a:r>
           </a:p>
         </p:txBody>
@@ -3495,25 +3315,19 @@
           <a:p>
             <a:r>
               <a:rPr lang="en-US" sz="1400" b="0" dirty="0"/>
-              <a:t>Presentations (21:30-22:15). About five volunteers present their own proposal (volunteers told the course lead by the Wednesday before Session 8): 5 x (6 minutes + 2 minutes feedback) = 40 minutes, then a 5-minute closing round in which you sum up the common strengths and problems seen in the submitted proposals and remind everyone of the deadlines. Show this slide and the scoring slide in the first minute.</a:t>
+              <a:t>Presentations (21:30-22:15): about five volunteers, 6 minutes plus 2 minutes feedback, then a 5-minute closing round.</a:t>
             </a:r>
           </a:p>
           <a:p>
             <a:r>
               <a:rPr lang="en-US" sz="1400" b="0" dirty="0"/>
-              <a:t>Everyone, presenting or not, submits slides and the written proposal before 19:30 today (Course/Assignment/proposal_brief.md).</a:t>
+              <a:t>Everyone submits slides and the written proposal by email to the course lead (myluong1710@gmail.com) before 19:30 today.</a:t>
             </a:r>
           </a:p>
           <a:p>
             <a:r>
               <a:rPr lang="en-US" sz="1400" b="0" dirty="0"/>
-              <a:t>The co-instructor keeps time and posts '2 min' at 4:00, '1 min' at 5:00 and 'Time' at 6:00 in the chat. The chair stops the talk at 6:30.</a:t>
-            </a:r>
-          </a:p>
-          <a:p>
-            <a:r>
-              <a:rPr lang="en-US" sz="1400" b="0" dirty="0"/>
-              <a:t>Remind the class: the reviewing skills we just used now apply to our own proposals, but feedback is given the way you would like to receive it.</a:t>
+              <a:t>The co-instructor posts '2 min', '1 min' and 'Time' in the chat. Stop the talk at 6:30.</a:t>
             </a:r>
           </a:p>
         </p:txBody>
@@ -3594,25 +3408,19 @@
           <a:p>
             <a:r>
               <a:rPr lang="en-US" sz="1400" b="0" dirty="0"/>
-              <a:t>Scoring: the written proposal (criteria 1-11 of Course/Assignment/proposal_rubric.md, out of 70) is scored for every participant, after the course. Criteria 12-16 (6/4/2/0 points each, out of 30) score the presentation, and only for those who present. Non-presenters: the written subtotal is scaled to 100 (rule at the top of the rubric). Presenting never lowers anyone's score.</a:t>
+              <a:t>The written proposal is scored for everyone after the course. Criteria 12-16 score the presentation, for presenters only. Presenting never lowers a score.</a:t>
             </a:r>
           </a:p>
           <a:p>
             <a:r>
               <a:rPr lang="en-US" sz="1400" b="0" dirty="0"/>
-              <a:t>Who scores the presentations: the instructors. Two or three people give feedback with the microphone on (two stars and a wish).</a:t>
+              <a:t>Feedback in 2 minutes: two people give two stars and a wish, then the instructor, then the presenter says thank you.</a:t>
             </a:r>
           </a:p>
           <a:p>
             <a:r>
               <a:rPr lang="en-US" sz="1400" b="0" dirty="0"/>
-              <a:t>Feedback in 2 minutes (Course/Assignment/presentation_guide.md): call on two people to give two stars and a wish with the microphone on (45 seconds). instructor 1 minute (one strength, the most important improvement, one question). Presenter 15 seconds ('thank you', no defending). Fill in the feedback form at the end of the rubric and email it with the saved chat after the session.</a:t>
-            </a:r>
-          </a:p>
-          <a:p>
-            <a:r>
-              <a:rPr lang="en-US" sz="1400" b="0" dirty="0"/>
-              <a:t>The score is feedback to help each participant polish the proposal for the ethics committee.</a:t>
+              <a:t/>
             </a:r>
           </a:p>
         </p:txBody>
@@ -3693,31 +3501,19 @@
           <a:p>
             <a:r>
               <a:rPr lang="en-US" sz="1400" b="0" dirty="0"/>
-              <a:t>Presentations (21:30-22:15). Share each presenter's slides from your computer, or let the presenter share their screen. Keep this slide up between presenters.</a:t>
+              <a:t>Share each presenter's slides. Keep this slide up between talks.</a:t>
             </a:r>
           </a:p>
           <a:p>
             <a:r>
               <a:rPr lang="en-US" sz="1400" b="0" dirty="0"/>
-              <a:t>Instructor feedback: start with a genuine strength. Give the most important improvement for the written proposal or publication plan (usually design, outcome definition, feasibility or the choice of journal and guideline). One question if time allows.</a:t>
+              <a:t>Feedback: a genuine strength, the most important improvement, one question if time allows. Check slide 6: journal, guideline, a calibrated title, author roles.</a:t>
             </a:r>
           </a:p>
           <a:p>
             <a:r>
               <a:rPr lang="en-US" sz="1400" b="0" dirty="0"/>
-              <a:t>Check slide 6 of each presenter: target journal and correct guideline (STROBE for a cohort, CONSORT for a trial), working title in calibrated words, author roles, one line of the abstract skeleton.</a:t>
-            </a:r>
-          </a:p>
-          <a:p>
-            <a:r>
-              <a:rPr lang="en-US" sz="1400" b="0" dirty="0"/>
-              <a:t>Typical issues to watch for: outcome not measurable in routine data. A causal claim planned from an observational design (link back to the appraisal!). No plan for consent in sedated patients. unrealistic recruitment.</a:t>
-            </a:r>
-          </a:p>
-          <a:p>
-            <a:r>
-              <a:rPr lang="en-US" sz="1400" b="0" dirty="0"/>
-              <a:t>If the session runs late, shorten the closing round, never the last presentations.</a:t>
+              <a:t>If late, shorten the closing round, never the last talks. At 22:15 move to the closing.</a:t>
             </a:r>
           </a:p>
         </p:txBody>
@@ -3798,7 +3594,7 @@
           <a:p>
             <a:r>
               <a:rPr lang="en-US" sz="1400" b="0" dirty="0"/>
-              <a:t>Extra: the slides after this divider are optional. Use them if time allows or point participants to them for self-study.</a:t>
+              <a:t>Extra slides: optional, for a fast class or self-study.</a:t>
             </a:r>
           </a:p>
         </p:txBody>
@@ -3879,7 +3675,7 @@
           <a:p>
             <a:r>
               <a:rPr lang="en-US" sz="1400" b="0" dirty="0"/>
-              <a:t>Extra: the key words of Session 8, for self-study. They also appear in the post-course quiz.</a:t>
+              <a:t>Extra: the key words of Session 8, for self-study and the post-course quiz.</a:t>
             </a:r>
           </a:p>
         </p:txBody>
@@ -3960,31 +3756,19 @@
           <a:p>
             <a:r>
               <a:rPr lang="en-US" sz="1400" b="0" dirty="0"/>
-              <a:t>Teaching point: the introduction is a funnel, not a literature review. Paragraph 1: what is known (burden, mechanism, current practice). Paragraph 2: what is not known: the gap, ideally with conflicting evidence cited on both sides. Paragraph 3: 'We therefore aimed to ...', one aim sentence that matches the primary outcome in the Methods.</a:t>
+              <a:t>The Introduction is a funnel: known, not known, aim. The aim matches the primary outcome.</a:t>
             </a:r>
           </a:p>
           <a:p>
             <a:r>
               <a:rPr lang="en-US" sz="1400" b="0" dirty="0"/>
-              <a:t>Paper 1 (Boulet 2024, the trial) is the model (annotations #10-#12): known (positive fluid balance is linked to death, hidden fluids are a large share of intake), unknown (earlier trials targeted resuscitation fluids only), aim (primary objective = fluid balance after 5 days), all in under 500 words (pages 2-3).</a:t>
+              <a:t>Paper 1 does this in under 500 words. Paper 2 cites both sides of a conflict in paragraph 2.</a:t>
             </a:r>
           </a:p>
           <a:p>
             <a:r>
               <a:rPr lang="en-US" sz="1400" b="0" dirty="0"/>
-              <a:t>Paper 2 (Hyun 2023, the cohort) defines the gap in paragraph 2 by citing both sides of a conflict (annotation #9). Copy that. But its introduction runs to about 550 words and the aim repeats the causal word 'impact' (#3, #10).</a:t>
-            </a:r>
-          </a:p>
-          <a:p>
-            <a:r>
-              <a:rPr lang="en-US" sz="1400" b="0" dirty="0"/>
-              <a:t>Link to Sessions 1-2: the problem statement and PICO of your proposal already give you this funnel.</a:t>
-            </a:r>
-          </a:p>
-          <a:p>
-            <a:r>
-              <a:rPr lang="en-US" sz="1400" b="0" dirty="0"/>
-              <a:t>Ask (call on two or three people, microphone on): in one sentence, what is not known about the question you chose? That sentence is your paragraph 2.</a:t>
+              <a:t>Ask: in one sentence, what is not known about your question? That is paragraph 2.</a:t>
             </a:r>
           </a:p>
         </p:txBody>
@@ -4065,25 +3849,19 @@
           <a:p>
             <a:r>
               <a:rPr lang="en-US" sz="1400" b="0" dirty="0"/>
-              <a:t>Extra: optional 6-minute writing drill on the two papers (use it as homework). Worksheet: Course/Practicals/s8_exercises.md, Part A.</a:t>
+              <a:t>Extra writing drill (homework). Worksheet: s8_exercises Part A.</a:t>
             </a:r>
           </a:p>
           <a:p>
             <a:r>
               <a:rPr lang="en-US" sz="1400" b="0" dirty="0"/>
-              <a:t>Spin sentence (Paper 1, page 10): 'considering the non-significant trend in fluid balance reduction in the optimized group, our approach ... remains worth exploring in a larger randomized controlled trial'. Model rewrite: 'The point estimate favoured the restrictive strategy, but the 95% CI was wide (-15.2 to 41.6 ml/kg) and included no effect. A larger trial would be needed to detect a smaller difference.'</a:t>
+              <a:t>Model rewrite of Paper 1's 'trend': 'The point estimate favoured the restrictive strategy, but the 95% CI was wide (-15.2 to 41.6 ml/kg) and included no effect.'</a:t>
             </a:r>
           </a:p>
           <a:p>
             <a:r>
               <a:rPr lang="en-US" sz="1400" b="0" dirty="0"/>
-              <a:t>Title (Paper 2): 'Positive cumulative fluid balance during the first three ICU days and 28-day mortality in sepsis: a propensity score-matched cohort study'. Use 'association', not 'impact'.</a:t>
-            </a:r>
-          </a:p>
-          <a:p>
-            <a:r>
-              <a:rPr lang="en-US" sz="1400" b="0" dirty="0"/>
-              <a:t>Own title: check 10-16 words, design stated, no value words. Abstract skeleton: Results are Expected results, so write the format, e.g. '28-day mortality, RR (95% CI)'.</a:t>
+              <a:t>Paper 2's title: 'association', not 'impact'.</a:t>
             </a:r>
           </a:p>
         </p:txBody>
@@ -4164,19 +3942,7 @@
           <a:p>
             <a:r>
               <a:rPr lang="en-US" sz="1400" b="0" dirty="0"/>
-              <a:t>Extra. Preprints: a manuscript posted on a public server (for health research, medRxiv is the best known) before or during peer review. Benefits: speed, a public timestamp, early feedback. Risks: it has not been peer-reviewed, and the media or colleagues may treat it as established. Most journals accept submissions that were preprinted. Check the journal's policy first.</a:t>
-            </a:r>
-          </a:p>
-          <a:p>
-            <a:r>
-              <a:rPr lang="en-US" sz="1400" b="0" dirty="0"/>
-              <a:t>Open access: gold OA means the journal makes the article free and usually charges an article-processing charge (APC). Both our papers are gold OA. Green OA means you deposit the accepted manuscript in a repository, often after an embargo.</a:t>
-            </a:r>
-          </a:p>
-          <a:p>
-            <a:r>
-              <a:rPr lang="en-US" sz="1400" b="0" dirty="0"/>
-              <a:t>Licences (CC = Creative Commons): Paper 2 is CC BY (anyone may re-use and adapt with credit). Paper 1 is CC BY-NC-ND (share, but no adaptation or commercial use). This also matters when you want to re-use a figure in teaching.</a:t>
+              <a:t>Extra. A preprint is posted before peer review: say so. Gold open access usually has a fee, green means a repository copy. Paper 2 is CC BY, Paper 1 CC BY-NC-ND.</a:t>
             </a:r>
           </a:p>
         </p:txBody>
@@ -4257,25 +4023,7 @@
           <a:p>
             <a:r>
               <a:rPr lang="en-US" sz="1400" b="0" dirty="0"/>
-              <a:t>Extra. Teaching point: after acceptance the publisher sends proofs, often with a short deadline (days). Read them slowly: every number, every name and affiliation, every table and figure. This is the last chance.</a:t>
-            </a:r>
-          </a:p>
-          <a:p>
-            <a:r>
-              <a:rPr lang="en-US" sz="1400" b="0" dirty="0"/>
-              <a:t>Running example: Paper 1 prints the whole 'Study protocol' paragraph twice: in the Methods (page 4) and again after the Conclusions (page 11). It is a duplication that should have been caught at proof stage (annotation #45). Paper 2's affiliations have inconsistent capitalisation (#42).</a:t>
-            </a:r>
-          </a:p>
-          <a:p>
-            <a:r>
-              <a:rPr lang="en-US" sz="1400" b="0" dirty="0"/>
-              <a:t>Sharing: post the article as its licence and the journal's policy allow (Paper 2 is CC BY and allows re-use. Paper 1 is CC BY-NC-ND and allows no adaptation): institutional repository, a plain-language summary for patients and colleagues, a short talk in your department.</a:t>
-            </a:r>
-          </a:p>
-          <a:p>
-            <a:r>
-              <a:rPr lang="en-US" sz="1400" b="0" dirty="0"/>
-              <a:t>Corrections: if you find an error after publication, contact the journal. A correction is honest, a retraction is for serious errors or misconduct.</a:t>
+              <a:t>Extra. Read proofs as carefully as the data: Paper 1 prints its protocol paragraph twice. Share as the licence allows. Correct errors openly.</a:t>
             </a:r>
           </a:p>
         </p:txBody>
@@ -4356,31 +4104,7 @@
           <a:p>
             <a:r>
               <a:rPr lang="en-US" sz="1400" b="0" dirty="0"/>
-              <a:t>Extra: Teaching point: rejection is part of publishing, not a verdict on you. Many good papers are rejected once or twice before acceptance.</a:t>
-            </a:r>
-          </a:p>
-          <a:p>
-            <a:r>
-              <a:rPr lang="en-US" sz="1400" b="0" dirty="0"/>
-              <a:t>Desk rejection: the editor declines without review, usually because the topic does not fit the journal or the reporting is poor. Re-target: choose a journal whose readers need your result.</a:t>
-            </a:r>
-          </a:p>
-          <a:p>
-            <a:r>
-              <a:rPr lang="en-US" sz="1400" b="0" dirty="0"/>
-              <a:t>After peer review: read the reviews, wait a day before reacting, then fix what they found. The same reviewers are often invited by the next journal in the same field. An unchanged manuscript annoys them.</a:t>
-            </a:r>
-          </a:p>
-          <a:p>
-            <a:r>
-              <a:rPr lang="en-US" sz="1400" b="0" dirty="0"/>
-              <a:t>Next journal: reformat to the new Guide for Authors. Some publishers offer to transfer the manuscript and reviews to a sister journal, which can save months. Appeal only if there is a clear factual error in the decision.</a:t>
-            </a:r>
-          </a:p>
-          <a:p>
-            <a:r>
-              <a:rPr lang="en-US" sz="1400" b="0" dirty="0"/>
-              <a:t>Never submit to two journals at once (duplicate submission is misconduct).</a:t>
+              <a:t>Extra. Rejection is normal. Desk rejection: re-target. After review: fix what the reviewers found before resubmitting. Never submit to two journals at once.</a:t>
             </a:r>
           </a:p>
         </p:txBody>
@@ -4461,25 +4185,7 @@
           <a:p>
             <a:r>
               <a:rPr lang="en-US" sz="1400" b="0" dirty="0"/>
-              <a:t>Extra: Teaching point: a conference abstract is often the first output of a study. It follows the same IMRaD logic as the paper's abstract, usually 250-300 words, with real numbers and confidence intervals. An abstract that says 'results will be presented' is usually rejected. Follow the conference template and deadline.</a:t>
-            </a:r>
-          </a:p>
-          <a:p>
-            <a:r>
-              <a:rPr lang="en-US" sz="1400" b="0" dirty="0"/>
-              <a:t>Poster: a billboard, not a paper on a wall. A short title that states the finding, a few words of background and methods (a flow chart), one big figure, a take-home message in one sentence, and a QR code linking to more detail. It should be readable from 2 metres.</a:t>
-            </a:r>
-          </a:p>
-          <a:p>
-            <a:r>
-              <a:rPr lang="en-US" sz="1400" b="0" dirty="0"/>
-              <a:t>Presenting an abstract does not normally prevent publication of the full paper, but check the journal's policy. Do write the full paper: many abstracts never become publications.</a:t>
-            </a:r>
-          </a:p>
-          <a:p>
-            <a:r>
-              <a:rPr lang="en-US" sz="1400" b="0" dirty="0"/>
-              <a:t>A conference abstract template is in Course/Templates/Conference_Abstract_Template.</a:t>
+              <a:t>Extra. A conference abstract has real numbers and CIs, never 'results will be presented'. A poster is a billboard: one message, one figure, readable from 2 metres. Template: Conference_Abstract_Template.</a:t>
             </a:r>
           </a:p>
         </p:txBody>
@@ -4560,7 +4266,7 @@
           <a:p>
             <a:r>
               <a:rPr lang="en-US" sz="1400" b="0" dirty="0"/>
-              <a:t>Extra: a one-slide summary of Sessions 7-8 for self-study. The closing slides cover what the whole course built.</a:t>
+              <a:t>Extra: one-slide summary of Sessions 7-8 for self-study.</a:t>
             </a:r>
           </a:p>
         </p:txBody>
@@ -4641,13 +4347,7 @@
           <a:p>
             <a:r>
               <a:rPr lang="en-US" sz="1400" b="0" dirty="0"/>
-              <a:t>Closing (22:15-22:30), the last 15 minutes of Session 8. Keep it brisk and positive.</a:t>
-            </a:r>
-          </a:p>
-          <a:p>
-            <a:r>
-              <a:rPr lang="en-US" sz="1400" b="0" dirty="0"/>
-              <a:t>Thank the volunteers who presented, and everyone who submitted slides, before starting the quiz.</a:t>
+              <a:t>Closing 22:15-22:30. Keep it brisk. Thank the presenters and everyone who submitted.</a:t>
             </a:r>
           </a:p>
           <a:p>
@@ -4734,19 +4434,13 @@
           <a:p>
             <a:r>
               <a:rPr lang="en-US" sz="1400" b="0" dirty="0"/>
-              <a:t>Post-course quiz (22:15-22:23), the same Google Form as in Session 1. The full name matches the two attempts.</a:t>
+              <a:t>Same Google Form as Session 1. The full name matches the two attempts. Participants see no score.</a:t>
             </a:r>
           </a:p>
           <a:p>
             <a:r>
               <a:rPr lang="en-US" sz="1400" b="0" dirty="0"/>
-              <a:t>The trainers see the results at once in the Responses tab and the linked results sheet. Participants see no score.</a:t>
-            </a:r>
-          </a:p>
-          <a:p>
-            <a:r>
-              <a:rPr lang="en-US" sz="1400" b="0" dirty="0"/>
-              <a:t>Later: report the mean pre/post change in the course report (answer key: Course/Assessment).</a:t>
+              <a:t>Timing: 8 minutes.</a:t>
             </a:r>
           </a:p>
         </p:txBody>
@@ -4827,13 +4521,13 @@
           <a:p>
             <a:r>
               <a:rPr lang="en-US" sz="1400" b="0" dirty="0"/>
-              <a:t>What you built (1 minute). Each participant has a proposal they could take to the ethics committee and a draft paper. CRF = case report form.</a:t>
+              <a:t>Ask two or three people: what is your next step with your proposal?</a:t>
             </a:r>
           </a:p>
           <a:p>
             <a:r>
               <a:rPr lang="en-US" sz="1400" b="0" dirty="0"/>
-              <a:t>Ask two or three people: what is your next step with your proposal?</a:t>
+              <a:t>Timing: 1 minute.</a:t>
             </a:r>
           </a:p>
         </p:txBody>
@@ -4914,7 +4608,13 @@
           <a:p>
             <a:r>
               <a:rPr lang="en-US" sz="1400" b="0" dirty="0"/>
-              <a:t>Evaluation (2 minutes). Short anonymous online form, link in the chat. The pace question matters most.</a:t>
+              <a:t>Anonymous form, link in the chat. The pace question matters most.</a:t>
+            </a:r>
+          </a:p>
+          <a:p>
+            <a:r>
+              <a:rPr lang="en-US" sz="1400" b="0" dirty="0"/>
+              <a:t>Timing: 2 minutes.</a:t>
             </a:r>
           </a:p>
         </p:txBody>
@@ -4995,37 +4695,25 @@
           <a:p>
             <a:r>
               <a:rPr lang="en-US" sz="1400" b="1" dirty="0"/>
-              <a:t>Worked example. Model opening sentences (adapt, do not copy):</a:t>
+              <a:t>Worked example for Q1. Model sentences (adapt, do not copy):</a:t>
             </a:r>
           </a:p>
           <a:p>
             <a:r>
               <a:rPr lang="en-US" sz="1400" b="0" dirty="0"/>
-              <a:t>P1: 'Intravenous fluids are a cornerstone of early sepsis care, but a positive cumulative fluid balance has been associated with higher mortality in several observational studies [refs].'</a:t>
+              <a:t>P2: 'Because sicker patients receive more fluid, it remains uncertain whether this association persists after adjustment for severity.'</a:t>
             </a:r>
           </a:p>
           <a:p>
             <a:r>
               <a:rPr lang="en-US" sz="1400" b="0" dirty="0"/>
-              <a:t>P2: 'Because sicker patients receive more fluid, it remains uncertain whether this association persists after adjustment for illness severity [refs].'</a:t>
+              <a:t>P3: 'We therefore examined whether a positive fluid balance by day 3 was associated with 28-day mortality.'</a:t>
             </a:r>
           </a:p>
           <a:p>
             <a:r>
               <a:rPr lang="en-US" sz="1400" b="0" dirty="0"/>
-              <a:t>P3: 'We therefore examined whether a positive cumulative fluid balance by ICU day 3 was associated with 28-day mortality in adults with sepsis, before and after adjustment for severity.'</a:t>
-            </a:r>
-          </a:p>
-          <a:p>
-            <a:r>
-              <a:rPr lang="en-US" sz="1400" b="0" dirty="0"/>
-              <a:t>References: participants use the references found in Sessions 1-2 plus Papers 1 and 2.</a:t>
-            </a:r>
-          </a:p>
-          <a:p>
-            <a:r>
-              <a:rPr lang="en-US" sz="1400" b="0" dirty="0"/>
-              <a:t>Point out: the confounding by indication from Session 4 is the gap. That is why the study is worth doing.</a:t>
+              <a:t>The gap is the confounding by indication from Session 4.</a:t>
             </a:r>
           </a:p>
         </p:txBody>
@@ -5106,13 +4794,25 @@
           <a:p>
             <a:r>
               <a:rPr lang="en-US" sz="1400" b="0" dirty="0"/>
-              <a:t>Peer review (2 minutes), individual homework. Each draft is reviewed exactly once, where possible by someone on a different question.</a:t>
+              <a:t>Each draft is reviewed once. Reviewers were assigned at random and announced in Session 7.</a:t>
             </a:r>
           </a:p>
           <a:p>
             <a:r>
               <a:rPr lang="en-US" sz="1400" b="0" dirty="0"/>
-              <a:t>Reviews follow Course/Assignment/peer_review_instructions.md and the 10-question checklist from 8.3. Authors reply with Course/Templates/Response_to_Reviewers_Template.</a:t>
+              <a:t>Submissions go by email to myluong1710@gmail.com. Review report due 2 weeks after Session 8. Revised Results section and response to reviewers due 4 weeks after the review.</a:t>
+            </a:r>
+          </a:p>
+          <a:p>
+            <a:r>
+              <a:rPr lang="en-US" sz="1400" b="0" dirty="0"/>
+              <a:t>Files: Peer_Review_Instructions and Response_to_Reviewers_Template.</a:t>
+            </a:r>
+          </a:p>
+          <a:p>
+            <a:r>
+              <a:rPr lang="en-US" sz="1400" b="0" dirty="0"/>
+              <a:t>Timing: 2 minutes.</a:t>
             </a:r>
           </a:p>
         </p:txBody>
@@ -5199,13 +4899,13 @@
           <a:p>
             <a:r>
               <a:rPr lang="en-US" sz="1400" b="0" dirty="0"/>
-              <a:t>Level 2: statistical modelling in R (linear, logistic, count and Cox models) with an individual analysis project. Level 3: advanced methods on request. Details in Course_Levels/.</a:t>
+              <a:t>Post the trainers' contact details in the chat.</a:t>
             </a:r>
           </a:p>
           <a:p>
             <a:r>
               <a:rPr lang="en-US" sz="1400" b="0" dirty="0"/>
-              <a:t>Post the trainers' contact details in the chat.</a:t>
+              <a:t>Timing: 2 minutes.</a:t>
             </a:r>
           </a:p>
         </p:txBody>
@@ -5286,7 +4986,7 @@
           <a:p>
             <a:r>
               <a:rPr lang="en-US" sz="1400" b="0" dirty="0"/>
-              <a:t>Thank the department leadership, the organisers and the participants. If everyone agrees, take a screenshot of the class with cameras on.</a:t>
+              <a:t>Thank the leadership, organisers and participants. If everyone agrees, take a screenshot with cameras on.</a:t>
             </a:r>
           </a:p>
         </p:txBody>
@@ -5367,7 +5067,7 @@
           <a:p>
             <a:r>
               <a:rPr lang="en-US" sz="1400" b="0" dirty="0"/>
-              <a:t>Copyright slide. Leave it on screen while participants leave the meeting.</a:t>
+              <a:t>Leave on screen while people leave the meeting.</a:t>
             </a:r>
           </a:p>
         </p:txBody>
@@ -5448,25 +5148,19 @@
           <a:p>
             <a:r>
               <a:rPr lang="en-US" sz="1400" b="0" dirty="0"/>
-              <a:t>Teaching point: a good discussion makes six moves, in this order: answer the question, compare with other studies and explain why results differ. Explain the mechanism briefly, state the limitations specifically, with their likely direction and a fix. Give implications for practice and research, labelled as such. Conclude with the same message as the abstract and title.</a:t>
+              <a:t>Six moves in order: answer, compare, explain, limitations with their direction, implications, conclusion.</a:t>
             </a:r>
           </a:p>
           <a:p>
             <a:r>
               <a:rPr lang="en-US" sz="1400" b="0" dirty="0"/>
-              <a:t>Paper 1 does most of this well: the first sentence answers the primary question (annotation #36). The comparison with the CLASSIC and POINCARE-2 trials explains why results differ (#37). Limitations are specific, with mechanism and a fix (#38, #39). The conclusion matches the abstract (#44). Weak point: 'would probably be advantageous' is speculation without data (#46).</a:t>
+              <a:t>Paper 1 answers in its first sentence. Paper 2 misses survivor bias in its limitations.</a:t>
             </a:r>
           </a:p>
           <a:p>
             <a:r>
               <a:rPr lang="en-US" sz="1400" b="0" dirty="0"/>
-              <a:t>Paper 2: one-paragraph mechanism using the four-phase fluid model (#34). Comparison closes the loop with the conflicting studies from the introduction (#35). But its limitations miss survivor bias, residual lactate imbalance and confounding by indication (#36).</a:t>
-            </a:r>
-          </a:p>
-          <a:p>
-            <a:r>
-              <a:rPr lang="en-US" sz="1400" b="0" dirty="0"/>
-              <a:t>Poll: which move do first-time writers usually skip? Expected: the limitations' direction, saying whether a bias makes the effect look bigger or smaller.</a:t>
+              <a:t>Poll: which move do first-time writers skip? Expected: the direction of each limitation.</a:t>
             </a:r>
           </a:p>
         </p:txBody>
@@ -5547,19 +5241,19 @@
           <a:p>
             <a:r>
               <a:rPr lang="en-US" sz="1400" b="0" dirty="0"/>
-              <a:t>Worked example (six moves, one sentence each, numbers from key_results.md, simulated data). OR = odds ratio. HR = hazard ratio. CI = confidence interval.</a:t>
+              <a:t>Six moves, one sentence each, numbers from results pack Q1 (simulated).</a:t>
             </a:r>
           </a:p>
           <a:p>
             <a:r>
               <a:rPr lang="en-US" sz="1400" b="0" dirty="0"/>
-              <a:t>1 Answer: adjusted OR 1.62 (95% CI 1.02 to 2.59). 2 Compare: Paper 2 found day-2 HR 2.13 (1.48 to 3.06). 3 Explain: the crude OR 2.49 fell to 1.62 after adjustment (confounding by indication). 4 Limitations: residual confounding, reverse causation (patients who are dying accumulate fluid), patients dying before day 3. The adjusted Cox HR 1.46 had a CI reaching 1.00. 5 Implications: no basis to restrict fluid. A trial like Paper 1 is needed. 6 Conclusion: 'associated with'.</a:t>
+              <a:t>The heart-failure interaction (OR 4.39 vs 1.29) is a hypothesis, not a finding.</a:t>
             </a:r>
           </a:p>
           <a:p>
             <a:r>
               <a:rPr lang="en-US" sz="1400" b="0" dirty="0"/>
-              <a:t>Optional point for those who chose Q1: the association looked stronger in heart failure (adjusted OR 4.39 vs 1.29, p for interaction 0.031, only 90 patients). This is a hypothesis, not a finding.</a:t>
+              <a:t>The conclusion uses the same verb as the aim and the title: 'associated with'.</a:t>
             </a:r>
           </a:p>
         </p:txBody>
@@ -5640,25 +5334,19 @@
           <a:p>
             <a:r>
               <a:rPr lang="en-US" sz="1400" b="0" dirty="0"/>
-              <a:t>The figure shows the three estimates from results pack Q1 (Table 6): crude (n = 618), adjusted complete-case (n = 527) and adjusted after multiple imputation (n = 620).</a:t>
+              <a:t>Crude 2.49, adjusted 1.62, imputed 1.70. The drop is the Session 4 lesson made visible.</a:t>
             </a:r>
           </a:p>
           <a:p>
             <a:r>
               <a:rPr lang="en-US" sz="1400" b="0" dirty="0"/>
-              <a:t>Teaching point: the drop from 2.49 to 1.62 is the Session 4 lesson made visible: sicker patients received more fluid and died more. The imputed estimate is close to the complete-case one, so missing lactate did not change the conclusion.</a:t>
+              <a:t>The adjusted CI starts at 1.02: 'a modest association remained'.</a:t>
             </a:r>
           </a:p>
           <a:p>
             <a:r>
               <a:rPr lang="en-US" sz="1400" b="0" dirty="0"/>
-              <a:t>The adjusted CI starts at 1.02, just above 1. Calibrated sentence: 'a modest association remained'.</a:t>
-            </a:r>
-          </a:p>
-          <a:p>
-            <a:r>
-              <a:rPr lang="en-US" sz="1400" b="0" dirty="0"/>
-              <a:t>Ask: what would you write if the adjusted CI had crossed 1? Expected: 'no clear evidence of an association after adjustment', not 'no effect'.</a:t>
+              <a:t>Ask: what if the adjusted CI had crossed 1? Expected: 'no clear evidence of an association after adjustment', not 'no effect'.</a:t>
             </a:r>
           </a:p>
         </p:txBody>
@@ -5739,25 +5427,25 @@
           <a:p>
             <a:r>
               <a:rPr lang="en-US" sz="1400" b="0" dirty="0"/>
-              <a:t>Teaching point: the strength of a verb is a claim. Over-interpretation (conclusions that go beyond the data) is one of the commonest reasons for rejection.</a:t>
+              <a:t>The strength of a verb is a claim. Read the ladder from the bottom.</a:t>
             </a:r>
           </a:p>
           <a:p>
             <a:r>
               <a:rPr lang="en-US" sz="1400" b="0" dirty="0"/>
-              <a:t>Read the ladder from the bottom: descriptive studies 'observe'. Cohorts and case-control studies find that something 'is associated with' an outcome. Strong observational evidence plus causal reasoning may 'contribute to'. A randomised trial may say 'reduced' or 'did not reduce'. 'Causes' or 'proves' needs several consistent large trials.</a:t>
+              <a:t>Never: 'trend' for p = 0.42 (Paper 1), 'impact' in a cohort (Paper 2), 'first' or 'novel' unchecked.</a:t>
             </a:r>
           </a:p>
           <a:p>
             <a:r>
               <a:rPr lang="en-US" sz="1400" b="0" dirty="0"/>
-              <a:t>Never: 'non-significant trend' for p = 0.42 (Paper 1, page 10, annotation #41). 'No difference' when the study was too small (say 'no evidence of a difference', #29). 'First', 'ever', 'novel' without checking ('lowest fluid balance ever published', #40). 'Impact', 'did not impact', 'show' in an observational study (Paper 2, #1, #27, #28). 'The most reliable comparison' (#32). Ranking HRs from different cohorts as 'the highest risk' without a test (#37).</a:t>
+              <a:t>These words matter in the Results section too.</a:t>
             </a:r>
           </a:p>
           <a:p>
             <a:r>
               <a:rPr lang="en-US" sz="1400" b="0" dirty="0"/>
-              <a:t>Ask (call on two or three people, microphone on): rewrite 'positive fluid balance increases mortality' for Paper 2. Expected: 'a positive fluid balance on ICU day 2 was associated with higher 28-day mortality'.</a:t>
+              <a:t>Ask: rewrite 'positive fluid balance increases mortality' for Paper 2.</a:t>
             </a:r>
           </a:p>
         </p:txBody>
@@ -8838,7 +8526,7 @@
                 <a:latin typeface="Arial"/>
                 <a:cs typeface="Arial"/>
               </a:rPr>
-              <a:t>Session 8 · Publish: finish the paper, get it out, present</a:t>
+              <a:t>Session 8 · Publish: polish your Results, get it out, present</a:t>
             </a:r>
           </a:p>
         </p:txBody>
@@ -8950,7 +8638,7 @@
                 <a:latin typeface="Arial"/>
                 <a:cs typeface="Arial"/>
               </a:rPr>
-              <a:t>19:35  8.1  Writing the paper (II): Introduction, Discussion, Abstract, Title</a:t>
+              <a:t>19:35  8.1  Writing the paper (II): the optional parts and the title</a:t>
             </a:r>
           </a:p>
           <a:p>
@@ -8969,7 +8657,7 @@
                 <a:latin typeface="Arial"/>
                 <a:cs typeface="Arial"/>
               </a:rPr>
-              <a:t>20:00  Manuscript workshop 2: Q1 together, then your own</a:t>
+              <a:t>20:00  Manuscript workshop 2: improve your Results section</a:t>
             </a:r>
           </a:p>
           <a:p>
@@ -11951,7 +11639,7 @@
                 <a:latin typeface="Arial"/>
                 <a:cs typeface="Arial"/>
               </a:rPr>
-              <a:t>Complete the draft: together, then on your own</a:t>
+              <a:t>Improve your Results section: together, then on your own</a:t>
             </a:r>
           </a:p>
           <a:p>
@@ -11969,7 +11657,7 @@
                 <a:latin typeface="Arial"/>
                 <a:cs typeface="Arial"/>
               </a:rPr>
-              <a:t>22 minutes drafting Q1 live with the whole class, then 8 minutes on your own aim and title</a:t>
+              <a:t>22 minutes on the class Q1 draft, then 8 minutes on your own draft and title</a:t>
             </a:r>
           </a:p>
         </p:txBody>
@@ -12130,14 +11818,14 @@
               <a:buNone/>
             </a:pPr>
             <a:r>
-              <a:rPr lang="en-US" sz="2800" b="1" dirty="0">
+              <a:rPr lang="en-US" sz="2400" b="1" dirty="0">
                 <a:solidFill>
                   <a:srgbClr val="0D7377"/>
                 </a:solidFill>
                 <a:latin typeface="Arial"/>
                 <a:cs typeface="Arial"/>
               </a:rPr>
-              <a:t>Manuscript workshop 2, part 1: we complete Q1 together</a:t>
+              <a:t>Manuscript workshop 2, part 1: we improve the Q1 Results together</a:t>
             </a:r>
           </a:p>
         </p:txBody>
@@ -12257,7 +11945,7 @@
                 <a:latin typeface="Arial"/>
                 <a:cs typeface="Arial"/>
               </a:rPr>
-              <a:t>Introduction (6 min): three paragraphs. You suggest sentences aloud when called on</a:t>
+              <a:t>Number check (6 min): every number against results pack Q1</a:t>
             </a:r>
           </a:p>
           <a:p>
@@ -12282,7 +11970,7 @@
                 <a:latin typeface="Arial"/>
                 <a:cs typeface="Arial"/>
               </a:rPr>
-              <a:t>Discussion (9 min): six moves, one or two sentences each</a:t>
+              <a:t>Tables and figure (5 min): does each stand alone?</a:t>
             </a:r>
           </a:p>
           <a:p>
@@ -12307,7 +11995,7 @@
                 <a:latin typeface="Arial"/>
                 <a:cs typeface="Arial"/>
               </a:rPr>
-              <a:t>Abstract (5 min): numbers copied from the class Results</a:t>
+              <a:t>Words (5 min): no interpretation, no 'trend', no causal verbs</a:t>
             </a:r>
           </a:p>
           <a:p>
@@ -12332,7 +12020,32 @@
                 <a:latin typeface="Arial"/>
                 <a:cs typeface="Arial"/>
               </a:rPr>
-              <a:t>Title and verb check (2 min): every 'cause' or 'impact' becomes 'associated with'</a:t>
+              <a:t>Working title (3 min): design stated, 'associated'</a:t>
+            </a:r>
+          </a:p>
+          <a:p>
+            <a:pPr marL="380000" indent="-380000" algn="l">
+              <a:lnSpc>
+                <a:spcPct val="104000"/>
+              </a:lnSpc>
+              <a:spcBef>
+                <a:spcPts val="450"/>
+              </a:spcBef>
+              <a:buClr>
+                <a:srgbClr val="0D7377"/>
+              </a:buClr>
+              <a:buFont typeface="Arial"/>
+              <a:buChar char="•"/>
+            </a:pPr>
+            <a:r>
+              <a:rPr lang="en-US" sz="1650" dirty="0">
+                <a:solidFill>
+                  <a:srgbClr val="000000"/>
+                </a:solidFill>
+                <a:latin typeface="Arial"/>
+                <a:cs typeface="Arial"/>
+              </a:rPr>
+              <a:t>The optional parts (3 min): what each would add</a:t>
             </a:r>
           </a:p>
         </p:txBody>
@@ -12346,7 +12059,7 @@
         <p:spPr>
           <a:xfrm>
             <a:off x="7423760" y="1720000"/>
-            <a:ext cx="4311040" cy="1453655"/>
+            <a:ext cx="4311040" cy="1691780"/>
           </a:xfrm>
           <a:prstGeom prst="roundRect">
             <a:avLst>
@@ -12398,7 +12111,7 @@
                 <a:latin typeface="Arial"/>
                 <a:cs typeface="Arial"/>
               </a:rPr>
-              <a:t>Class Q1 draft from Session 7 (PDF)</a:t>
+              <a:t>Class Q1 Results from Session 7 (PDF)</a:t>
             </a:r>
           </a:p>
           <a:p>
@@ -12440,7 +12153,7 @@
                 <a:latin typeface="Arial"/>
                 <a:cs typeface="Arial"/>
               </a:rPr>
-              <a:t>The worked examples (slides)</a:t>
+              <a:t>The checklist in Peer_Review_Instructions</a:t>
             </a:r>
           </a:p>
         </p:txBody>
@@ -12497,7 +12210,7 @@
                 <a:latin typeface="Arial"/>
                 <a:cs typeface="Arial"/>
               </a:rPr>
-              <a:t>A complete class draft for Q1, shared as a PDF after the session</a:t>
+              <a:t>An improved class Q1 Results section, sent as a PDF after the session</a:t>
             </a:r>
           </a:p>
         </p:txBody>
@@ -12658,14 +12371,14 @@
               <a:buNone/>
             </a:pPr>
             <a:r>
-              <a:rPr lang="en-US" sz="2800" b="1" dirty="0">
+              <a:rPr lang="en-US" sz="2400" b="1" dirty="0">
                 <a:solidFill>
                   <a:srgbClr val="0D7377"/>
                 </a:solidFill>
                 <a:latin typeface="Arial"/>
                 <a:cs typeface="Arial"/>
               </a:rPr>
-              <a:t>Manuscript workshop 2, part 2: your own aim and title</a:t>
+              <a:t>Manuscript workshop 2, part 2: your own Results and title</a:t>
             </a:r>
           </a:p>
         </p:txBody>
@@ -12785,7 +12498,7 @@
                 <a:latin typeface="Arial"/>
                 <a:cs typeface="Arial"/>
               </a:rPr>
-              <a:t>Write the aim sentence for your question (Q1 to Q5)</a:t>
+              <a:t>Run the same checks on your own Results draft</a:t>
             </a:r>
           </a:p>
           <a:p>
@@ -12810,7 +12523,7 @@
                 <a:latin typeface="Arial"/>
                 <a:cs typeface="Arial"/>
               </a:rPr>
-              <a:t>Write your title: design stated, 10-16 words, 'associated'</a:t>
+              <a:t>Write your working title: design stated, 10-16 words, 'associated'</a:t>
             </a:r>
           </a:p>
           <a:p>
@@ -12860,7 +12573,7 @@
                 <a:latin typeface="Arial"/>
                 <a:cs typeface="Arial"/>
               </a:rPr>
-              <a:t>Tonight: add the Introduction, Discussion and Abstract. Submit by 23:59</a:t>
+              <a:t>Tonight: a final check, then email it by 23:59</a:t>
             </a:r>
           </a:p>
         </p:txBody>
@@ -12874,7 +12587,7 @@
         <p:spPr>
           <a:xfrm>
             <a:off x="7423760" y="1720000"/>
-            <a:ext cx="4311040" cy="1968005"/>
+            <a:ext cx="4311040" cy="2206130"/>
           </a:xfrm>
           <a:prstGeom prst="roundRect">
             <a:avLst>
@@ -12926,7 +12639,7 @@
                 <a:latin typeface="Arial"/>
                 <a:cs typeface="Arial"/>
               </a:rPr>
-              <a:t>Complete draft, about 2,000 words</a:t>
+              <a:t>Results section, working title, Table 1, main table or figure</a:t>
             </a:r>
           </a:p>
           <a:p>
@@ -12968,7 +12681,7 @@
                 <a:latin typeface="Arial"/>
                 <a:cs typeface="Arial"/>
               </a:rPr>
-              <a:t>Course folder or email to the course lead</a:t>
+              <a:t>Email it to your reviewer and the course lead</a:t>
             </a:r>
           </a:p>
           <a:p>
@@ -12989,7 +12702,7 @@
                 <a:latin typeface="Arial"/>
                 <a:cs typeface="Arial"/>
               </a:rPr>
-              <a:t>Then the peer review (closing slides)</a:t>
+              <a:t>Optional parts in the same file</a:t>
             </a:r>
           </a:p>
         </p:txBody>
@@ -13046,7 +12759,7 @@
                 <a:latin typeface="Arial"/>
                 <a:cs typeface="Arial"/>
               </a:rPr>
-              <a:t>Your aim sentence and working title. The complete draft submitted by 23:59 tonight</a:t>
+              <a:t>Your working title. Your Results section emailed by 23:59 tonight</a:t>
             </a:r>
           </a:p>
         </p:txBody>
@@ -20023,7 +19736,7 @@
                 <a:latin typeface="Arial"/>
                 <a:cs typeface="Arial"/>
               </a:rPr>
-              <a:t>Same clinical question (fluids in septic shock), two designs. Both PDFs: Course/Papers.</a:t>
+              <a:t>Same clinical question (fluids in septic shock), two designs. Both PDFs were sent by email.</a:t>
             </a:r>
           </a:p>
         </p:txBody>
@@ -20626,7 +20339,7 @@
                 <a:latin typeface="Arial"/>
                 <a:cs typeface="Arial"/>
               </a:rPr>
-              <a:t>Writing the paper (II)</a:t>
+              <a:t>Writing the paper (II): the optional parts</a:t>
             </a:r>
           </a:p>
           <a:p>
@@ -20644,7 +20357,7 @@
                 <a:latin typeface="Arial"/>
                 <a:cs typeface="Arial"/>
               </a:rPr>
-              <a:t>Introduction, Discussion, Abstract and Title, in that order</a:t>
+              <a:t>Introduction, Discussion, Abstract, and the title you need</a:t>
             </a:r>
           </a:p>
         </p:txBody>
@@ -23995,7 +23708,7 @@
                 <a:latin typeface="Arial"/>
                 <a:cs typeface="Arial"/>
               </a:rPr>
-              <a:t>RCT = randomised controlled trial. Pages and details: Course/Resources/appraisal_instructor_guide.md</a:t>
+              <a:t>RCT = randomised controlled trial. Pages and details: the trainers' appraisal guide</a:t>
             </a:r>
           </a:p>
         </p:txBody>
@@ -24955,7 +24668,7 @@
                 <a:latin typeface="Arial"/>
                 <a:cs typeface="Arial"/>
               </a:rPr>
-              <a:t>Written proposal (criteria 1-11, /70): everyone. Criteria 12-16 (/30): presenters only. Rubric: Course/Assignment/proposal_rubric.md</a:t>
+              <a:t>Written proposal (criteria 1-11, /70): everyone. Criteria 12-16 (/30): presenters only. Rubric: Proposal_Rubric (sent by email with the proposal brief)</a:t>
             </a:r>
           </a:p>
         </p:txBody>
@@ -30388,7 +30101,7 @@
                 <a:latin typeface="Arial"/>
                 <a:cs typeface="Arial"/>
               </a:rPr>
-              <a:t>Next: submit your proposal and your manuscript, then review one peer's draft.</a:t>
+              <a:t>Next: submit your proposal and your Results section, then review one peer's draft.</a:t>
             </a:r>
           </a:p>
         </p:txBody>
@@ -30706,7 +30419,7 @@
                 <a:latin typeface="Arial"/>
                 <a:cs typeface="Arial"/>
               </a:rPr>
-              <a:t>After the course: submit, then review one peer's manuscript</a:t>
+              <a:t>After the course: submit, then review one peer's Results section</a:t>
             </a:r>
           </a:p>
           <a:p>
@@ -31822,7 +31535,7 @@
                 <a:latin typeface="Arial"/>
                 <a:cs typeface="Arial"/>
               </a:rPr>
-              <a:t>Methods, Results</a:t>
+              <a:t>A Results section</a:t>
             </a:r>
           </a:p>
           <a:p>
@@ -31843,7 +31556,7 @@
                 <a:latin typeface="Arial"/>
                 <a:cs typeface="Arial"/>
               </a:rPr>
-              <a:t>Introduction, Discussion, Abstract</a:t>
+              <a:t>Optional: Methods, Introduction, Discussion, Abstract</a:t>
             </a:r>
           </a:p>
         </p:txBody>
@@ -31958,7 +31671,7 @@
                 <a:latin typeface="Arial"/>
                 <a:cs typeface="Arial"/>
               </a:rPr>
-              <a:t>Your own draft manuscript</a:t>
+              <a:t>Your own Results section</a:t>
             </a:r>
           </a:p>
         </p:txBody>
@@ -32013,7 +31726,7 @@
                 <a:latin typeface="Arial"/>
                 <a:cs typeface="Arial"/>
               </a:rPr>
-              <a:t>Each of you leaves with a research proposal and a draft paper.</a:t>
+              <a:t>Each of you leaves with a research proposal and a Results section ready to submit.</a:t>
             </a:r>
           </a:p>
         </p:txBody>
@@ -33218,7 +32931,7 @@
                 <a:latin typeface="Arial"/>
                 <a:cs typeface="Arial"/>
               </a:rPr>
-              <a:t>Tonight</a:t>
+              <a:t>Session 7</a:t>
             </a:r>
           </a:p>
         </p:txBody>
@@ -33267,9 +32980,82 @@
                 <a:latin typeface="Arial"/>
                 <a:cs typeface="Arial"/>
               </a:rPr>
-              <a:t>Submit your complete draft by 23:59</a:t>
-            </a:r>
-          </a:p>
+              <a:t>Your reviewer is assigned at random</a:t>
+            </a:r>
+          </a:p>
+        </p:txBody>
+      </p:sp>
+      <p:sp>
+        <p:nvSpPr>
+          <p:cNvPr id="82" name="Step"/>
+          <p:cNvSpPr/>
+          <p:nvPr/>
+        </p:nvSpPr>
+        <p:spPr>
+          <a:xfrm>
+            <a:off x="3261600" y="1220000"/>
+            <a:ext cx="2864400" cy="760000"/>
+          </a:xfrm>
+          <a:prstGeom prst="chevron">
+            <a:avLst>
+              <a:gd name="adj" fmla="val 28000"/>
+            </a:avLst>
+          </a:prstGeom>
+          <a:solidFill>
+            <a:srgbClr val="0B376C"/>
+          </a:solidFill>
+          <a:ln>
+            <a:noFill/>
+          </a:ln>
+        </p:spPr>
+        <p:txBody>
+          <a:bodyPr wrap="square" lIns="200000" tIns="45720" rIns="200000" bIns="45720" rtlCol="0" anchor="ctr">
+            <a:normAutofit/>
+          </a:bodyPr>
+          <a:lstStyle/>
+          <a:p>
+            <a:pPr marL="0" indent="0" algn="ctr">
+              <a:buNone/>
+            </a:pPr>
+            <a:r>
+              <a:rPr lang="en-US" sz="1600" b="1" dirty="0">
+                <a:solidFill>
+                  <a:srgbClr val="FFFFFF"/>
+                </a:solidFill>
+                <a:latin typeface="Arial"/>
+                <a:cs typeface="Arial"/>
+              </a:rPr>
+              <a:t>Tonight</a:t>
+            </a:r>
+          </a:p>
+        </p:txBody>
+      </p:sp>
+      <p:sp>
+        <p:nvSpPr>
+          <p:cNvPr id="83" name="StepText"/>
+          <p:cNvSpPr/>
+          <p:nvPr/>
+        </p:nvSpPr>
+        <p:spPr>
+          <a:xfrm>
+            <a:off x="3301600" y="2140000"/>
+            <a:ext cx="2724400" cy="1336180"/>
+          </a:xfrm>
+          <a:prstGeom prst="rect">
+            <a:avLst/>
+          </a:prstGeom>
+          <a:solidFill>
+            <a:srgbClr val="EAF2F5"/>
+          </a:solidFill>
+          <a:ln>
+            <a:noFill/>
+          </a:ln>
+        </p:spPr>
+        <p:txBody>
+          <a:bodyPr wrap="square" lIns="110000" tIns="91440" rIns="110000" bIns="91440" rtlCol="0" anchor="ctr">
+            <a:normAutofit/>
+          </a:bodyPr>
+          <a:lstStyle/>
           <a:p>
             <a:pPr marL="0" indent="0" algn="ctr">
               <a:lnSpc>
@@ -33288,82 +33074,9 @@
                 <a:latin typeface="Arial"/>
                 <a:cs typeface="Arial"/>
               </a:rPr>
-              <a:t>Course folder or email</a:t>
-            </a:r>
-          </a:p>
-        </p:txBody>
-      </p:sp>
-      <p:sp>
-        <p:nvSpPr>
-          <p:cNvPr id="82" name="Step"/>
-          <p:cNvSpPr/>
-          <p:nvPr/>
-        </p:nvSpPr>
-        <p:spPr>
-          <a:xfrm>
-            <a:off x="3261600" y="1220000"/>
-            <a:ext cx="2864400" cy="760000"/>
-          </a:xfrm>
-          <a:prstGeom prst="chevron">
-            <a:avLst>
-              <a:gd name="adj" fmla="val 28000"/>
-            </a:avLst>
-          </a:prstGeom>
-          <a:solidFill>
-            <a:srgbClr val="0B376C"/>
-          </a:solidFill>
-          <a:ln>
-            <a:noFill/>
-          </a:ln>
-        </p:spPr>
-        <p:txBody>
-          <a:bodyPr wrap="square" lIns="200000" tIns="45720" rIns="200000" bIns="45720" rtlCol="0" anchor="ctr">
-            <a:normAutofit/>
-          </a:bodyPr>
-          <a:lstStyle/>
-          <a:p>
-            <a:pPr marL="0" indent="0" algn="ctr">
-              <a:buNone/>
-            </a:pPr>
-            <a:r>
-              <a:rPr lang="en-US" sz="1600" b="1" dirty="0">
-                <a:solidFill>
-                  <a:srgbClr val="FFFFFF"/>
-                </a:solidFill>
-                <a:latin typeface="Arial"/>
-                <a:cs typeface="Arial"/>
-              </a:rPr>
-              <a:t>2 days</a:t>
-            </a:r>
-          </a:p>
-        </p:txBody>
-      </p:sp>
-      <p:sp>
-        <p:nvSpPr>
-          <p:cNvPr id="83" name="StepText"/>
-          <p:cNvSpPr/>
-          <p:nvPr/>
-        </p:nvSpPr>
-        <p:spPr>
-          <a:xfrm>
-            <a:off x="3301600" y="2140000"/>
-            <a:ext cx="2724400" cy="1336180"/>
-          </a:xfrm>
-          <a:prstGeom prst="rect">
-            <a:avLst/>
-          </a:prstGeom>
-          <a:solidFill>
-            <a:srgbClr val="EAF2F5"/>
-          </a:solidFill>
-          <a:ln>
-            <a:noFill/>
-          </a:ln>
-        </p:spPr>
-        <p:txBody>
-          <a:bodyPr wrap="square" lIns="110000" tIns="91440" rIns="110000" bIns="91440" rtlCol="0" anchor="ctr">
-            <a:normAutofit/>
-          </a:bodyPr>
-          <a:lstStyle/>
+              <a:t>Email your Results draft by 23:59</a:t>
+            </a:r>
+          </a:p>
           <a:p>
             <a:pPr marL="0" indent="0" algn="ctr">
               <a:lnSpc>
@@ -33382,7 +33095,7 @@
                 <a:latin typeface="Arial"/>
                 <a:cs typeface="Arial"/>
               </a:rPr>
-              <a:t>The course lead sends you one peer's draft to review</a:t>
+              <a:t>To your reviewer and the course lead</a:t>
             </a:r>
           </a:p>
         </p:txBody>
@@ -33427,7 +33140,7 @@
                 <a:latin typeface="Arial"/>
                 <a:cs typeface="Arial"/>
               </a:rPr>
-              <a:t>Week 1</a:t>
+              <a:t>2 weeks</a:t>
             </a:r>
           </a:p>
         </p:txBody>
@@ -33497,7 +33210,7 @@
                 <a:latin typeface="Arial"/>
                 <a:cs typeface="Arial"/>
               </a:rPr>
-              <a:t>Use the 10-question checklist</a:t>
+              <a:t>Use the Results checklist</a:t>
             </a:r>
           </a:p>
         </p:txBody>
@@ -33542,7 +33255,7 @@
                 <a:latin typeface="Arial"/>
                 <a:cs typeface="Arial"/>
               </a:rPr>
-              <a:t>Week 2</a:t>
+              <a:t>4 weeks later</a:t>
             </a:r>
           </a:p>
         </p:txBody>
@@ -33591,7 +33304,7 @@
                 <a:latin typeface="Arial"/>
                 <a:cs typeface="Arial"/>
               </a:rPr>
-              <a:t>Revised draft and response letter</a:t>
+              <a:t>Revised Results section</a:t>
             </a:r>
           </a:p>
           <a:p>
@@ -33612,7 +33325,7 @@
                 <a:latin typeface="Arial"/>
                 <a:cs typeface="Arial"/>
               </a:rPr>
-              <a:t>Use the response-to-reviewers template</a:t>
+              <a:t>Response to reviewers</a:t>
             </a:r>
           </a:p>
         </p:txBody>
@@ -33667,7 +33380,7 @@
                 <a:latin typeface="Arial"/>
                 <a:cs typeface="Arial"/>
               </a:rPr>
-              <a:t>Individual homework: everyone reviews one draft and receives one review.</a:t>
+              <a:t>Everyone reviews one Results draft and receives one review.</a:t>
             </a:r>
           </a:p>
         </p:txBody>
@@ -33997,7 +33710,7 @@
                 <a:latin typeface="Arial"/>
                 <a:cs typeface="Arial"/>
               </a:rPr>
-              <a:t>Manuscript submitted</a:t>
+              <a:t>Results section submitted</a:t>
             </a:r>
           </a:p>
         </p:txBody>

--- a/en/files/slides/Session_8_EN.pptx
+++ b/en/files/slides/Session_8_EN.pptx
@@ -1685,7 +1685,7 @@
           <a:p>
             <a:r>
               <a:rPr lang="en-US" sz="1400" b="0" dirty="0"/>
-              <a:t>Remind: the draft goes by email to the reviewer and the course lead (myluong1710@gmail.com) by 23:59 tomorrow, Sunday 20 December.</a:t>
+              <a:t>Remind: the draft goes by email to the reviewer and the instructor (myluong1710@gmail.com) by 23:59 tomorrow, Sunday 20 December.</a:t>
             </a:r>
           </a:p>
         </p:txBody>
@@ -3503,7 +3503,7 @@
           <a:p>
             <a:r>
               <a:rPr lang="en-US" sz="1400" b="0" dirty="0"/>
-              <a:t>Everyone submits slides and the written proposal by email to the course lead (myluong1710@gmail.com) before 19:30 today.</a:t>
+              <a:t>Everyone submits slides and the written proposal by email to the instructor (myluong1710@gmail.com) before 19:30 today.</a:t>
             </a:r>
           </a:p>
           <a:p>
@@ -13971,7 +13971,7 @@
                 <a:latin typeface="Arial"/>
                 <a:cs typeface="Arial"/>
               </a:rPr>
-              <a:t>Email it to your reviewer and the course lead</a:t>
+              <a:t>Email it to your reviewer and the instructor</a:t>
             </a:r>
           </a:p>
           <a:p>
@@ -34385,7 +34385,7 @@
                 <a:latin typeface="Arial"/>
                 <a:cs typeface="Arial"/>
               </a:rPr>
-              <a:t>To your reviewer and the course lead</a:t>
+              <a:t>To your reviewer and the instructor</a:t>
             </a:r>
           </a:p>
         </p:txBody>

--- a/en/files/slides/Session_8_EN.pptx
+++ b/en/files/slides/Session_8_EN.pptx
@@ -34879,7 +34879,7 @@
         </p:nvSpPr>
         <p:spPr>
           <a:xfrm>
-            <a:off x="457200" y="1958552"/>
+            <a:off x="457200" y="1849015"/>
             <a:ext cx="3625866" cy="640000"/>
           </a:xfrm>
           <a:prstGeom prst="rect">
@@ -34922,8 +34922,8 @@
         </p:nvSpPr>
         <p:spPr>
           <a:xfrm>
-            <a:off x="457200" y="2598552"/>
-            <a:ext cx="3625866" cy="1874342"/>
+            <a:off x="457200" y="2489015"/>
+            <a:ext cx="3625866" cy="2202954"/>
           </a:xfrm>
           <a:prstGeom prst="rect">
             <a:avLst/>
@@ -35003,77 +35003,6 @@
               <a:t>Results draft by 23:59, Sunday 20 December</a:t>
             </a:r>
           </a:p>
-        </p:txBody>
-      </p:sp>
-      <p:sp>
-        <p:nvSpPr>
-          <p:cNvPr id="72" name="CardHead"/>
-          <p:cNvSpPr/>
-          <p:nvPr/>
-        </p:nvSpPr>
-        <p:spPr>
-          <a:xfrm>
-            <a:off x="4283066" y="1958552"/>
-            <a:ext cx="3625866" cy="640000"/>
-          </a:xfrm>
-          <a:prstGeom prst="rect">
-            <a:avLst/>
-          </a:prstGeom>
-          <a:solidFill>
-            <a:srgbClr val="0B376C"/>
-          </a:solidFill>
-          <a:ln>
-            <a:noFill/>
-          </a:ln>
-        </p:spPr>
-        <p:txBody>
-          <a:bodyPr wrap="square" lIns="91440" tIns="45720" rIns="91440" bIns="45720" rtlCol="0" anchor="ctr">
-            <a:normAutofit/>
-          </a:bodyPr>
-          <a:lstStyle/>
-          <a:p>
-            <a:pPr marL="0" indent="0" algn="ctr">
-              <a:buNone/>
-            </a:pPr>
-            <a:r>
-              <a:rPr lang="en-US" sz="1900" b="1" dirty="0">
-                <a:solidFill>
-                  <a:srgbClr val="FFFFFF"/>
-                </a:solidFill>
-                <a:latin typeface="Arial"/>
-                <a:cs typeface="Arial"/>
-              </a:rPr>
-              <a:t>Your toolkit</a:t>
-            </a:r>
-          </a:p>
-        </p:txBody>
-      </p:sp>
-      <p:sp>
-        <p:nvSpPr>
-          <p:cNvPr id="73" name="CardBody"/>
-          <p:cNvSpPr/>
-          <p:nvPr/>
-        </p:nvSpPr>
-        <p:spPr>
-          <a:xfrm>
-            <a:off x="4283066" y="2598552"/>
-            <a:ext cx="3625866" cy="1874342"/>
-          </a:xfrm>
-          <a:prstGeom prst="rect">
-            <a:avLst/>
-          </a:prstGeom>
-          <a:solidFill>
-            <a:srgbClr val="EAF2F5"/>
-          </a:solidFill>
-          <a:ln>
-            <a:noFill/>
-          </a:ln>
-        </p:spPr>
-        <p:txBody>
-          <a:bodyPr wrap="square" lIns="137160" tIns="91440" rIns="137160" bIns="91440" rtlCol="0" anchor="ctr">
-            <a:normAutofit/>
-          </a:bodyPr>
-          <a:lstStyle/>
           <a:p>
             <a:pPr marL="0" indent="0" algn="ctr">
               <a:lnSpc>
@@ -35092,9 +35021,80 @@
                 <a:latin typeface="Arial"/>
                 <a:cs typeface="Arial"/>
               </a:rPr>
-              <a:t>Slides, handouts, glossary</a:t>
-            </a:r>
-          </a:p>
+              <a:t>Review by 30 December, revision by 9 January</a:t>
+            </a:r>
+          </a:p>
+        </p:txBody>
+      </p:sp>
+      <p:sp>
+        <p:nvSpPr>
+          <p:cNvPr id="72" name="CardHead"/>
+          <p:cNvSpPr/>
+          <p:nvPr/>
+        </p:nvSpPr>
+        <p:spPr>
+          <a:xfrm>
+            <a:off x="4283066" y="1849015"/>
+            <a:ext cx="3625866" cy="640000"/>
+          </a:xfrm>
+          <a:prstGeom prst="rect">
+            <a:avLst/>
+          </a:prstGeom>
+          <a:solidFill>
+            <a:srgbClr val="0B376C"/>
+          </a:solidFill>
+          <a:ln>
+            <a:noFill/>
+          </a:ln>
+        </p:spPr>
+        <p:txBody>
+          <a:bodyPr wrap="square" lIns="91440" tIns="45720" rIns="91440" bIns="45720" rtlCol="0" anchor="ctr">
+            <a:normAutofit/>
+          </a:bodyPr>
+          <a:lstStyle/>
+          <a:p>
+            <a:pPr marL="0" indent="0" algn="ctr">
+              <a:buNone/>
+            </a:pPr>
+            <a:r>
+              <a:rPr lang="en-US" sz="1900" b="1" dirty="0">
+                <a:solidFill>
+                  <a:srgbClr val="FFFFFF"/>
+                </a:solidFill>
+                <a:latin typeface="Arial"/>
+                <a:cs typeface="Arial"/>
+              </a:rPr>
+              <a:t>Your toolkit</a:t>
+            </a:r>
+          </a:p>
+        </p:txBody>
+      </p:sp>
+      <p:sp>
+        <p:nvSpPr>
+          <p:cNvPr id="73" name="CardBody"/>
+          <p:cNvSpPr/>
+          <p:nvPr/>
+        </p:nvSpPr>
+        <p:spPr>
+          <a:xfrm>
+            <a:off x="4283066" y="2489015"/>
+            <a:ext cx="3625866" cy="2202954"/>
+          </a:xfrm>
+          <a:prstGeom prst="rect">
+            <a:avLst/>
+          </a:prstGeom>
+          <a:solidFill>
+            <a:srgbClr val="EAF2F5"/>
+          </a:solidFill>
+          <a:ln>
+            <a:noFill/>
+          </a:ln>
+        </p:spPr>
+        <p:txBody>
+          <a:bodyPr wrap="square" lIns="137160" tIns="91440" rIns="137160" bIns="91440" rtlCol="0" anchor="ctr">
+            <a:normAutofit/>
+          </a:bodyPr>
+          <a:lstStyle/>
           <a:p>
             <a:pPr marL="0" indent="0" algn="ctr">
               <a:lnSpc>
@@ -35113,6 +35113,27 @@
                 <a:latin typeface="Arial"/>
                 <a:cs typeface="Arial"/>
               </a:rPr>
+              <a:t>Slides, handouts, glossary</a:t>
+            </a:r>
+          </a:p>
+          <a:p>
+            <a:pPr marL="0" indent="0" algn="ctr">
+              <a:lnSpc>
+                <a:spcPct val="104000"/>
+              </a:lnSpc>
+              <a:spcBef>
+                <a:spcPts val="400"/>
+              </a:spcBef>
+              <a:buNone/>
+            </a:pPr>
+            <a:r>
+              <a:rPr lang="en-US" sz="1750" dirty="0">
+                <a:solidFill>
+                  <a:srgbClr val="000000"/>
+                </a:solidFill>
+                <a:latin typeface="Arial"/>
+                <a:cs typeface="Arial"/>
+              </a:rPr>
               <a:t>Templates for every step, from proposal to response to reviewers</a:t>
             </a:r>
           </a:p>
@@ -35126,7 +35147,7 @@
         </p:nvSpPr>
         <p:spPr>
           <a:xfrm>
-            <a:off x="8108932" y="1958552"/>
+            <a:off x="8108932" y="1849015"/>
             <a:ext cx="3625866" cy="640000"/>
           </a:xfrm>
           <a:prstGeom prst="rect">
@@ -35169,8 +35190,8 @@
         </p:nvSpPr>
         <p:spPr>
           <a:xfrm>
-            <a:off x="8108932" y="2598552"/>
-            <a:ext cx="3625866" cy="1874342"/>
+            <a:off x="8108932" y="2489015"/>
+            <a:ext cx="3625866" cy="2202954"/>
           </a:xfrm>
           <a:prstGeom prst="rect">
             <a:avLst/>
